--- a/实验总结.pptx
+++ b/实验总结.pptx
@@ -1,19 +1,21 @@
 
 <file path=ppt/presentation.xml><?xml version="1.0" encoding="utf-8"?>
-<p:presentation xmlns:a="http://schemas.openxmlformats.org/drawingml/2006/main" xmlns:r="http://schemas.openxmlformats.org/officeDocument/2006/relationships" xmlns:p="http://schemas.openxmlformats.org/presentationml/2006/main" saveSubsetFonts="1" autoCompressPictures="0">
+<p:presentation xmlns:a="http://schemas.openxmlformats.org/drawingml/2006/main" xmlns:r="http://schemas.openxmlformats.org/officeDocument/2006/relationships" xmlns:p="http://schemas.openxmlformats.org/presentationml/2006/main" autoCompressPictures="0">
   <p:sldMasterIdLst>
     <p:sldMasterId id="2147483648" r:id="rId1"/>
   </p:sldMasterIdLst>
   <p:sldIdLst>
-    <p:sldId id="256" r:id="rId7"/>
-    <p:sldId id="257" r:id="rId8"/>
-    <p:sldId id="258" r:id="rId9"/>
-    <p:sldId id="259" r:id="rId10"/>
-    <p:sldId id="260" r:id="rId11"/>
-    <p:sldId id="261" r:id="rId12"/>
-    <p:sldId id="262" r:id="rId13"/>
+    <p:sldId id="256" r:id="rId3"/>
+    <p:sldId id="262" r:id="rId4"/>
+    <p:sldId id="257" r:id="rId5"/>
+    <p:sldId id="258" r:id="rId6"/>
+    <p:sldId id="265" r:id="rId7"/>
+    <p:sldId id="259" r:id="rId8"/>
+    <p:sldId id="260" r:id="rId9"/>
+    <p:sldId id="266" r:id="rId10"/>
+    <p:sldId id="261" r:id="rId11"/>
   </p:sldIdLst>
-  <p:sldSz cx="12191695" cy="6858000" type="screen4x3"/>
+  <p:sldSz cx="12191365" cy="6858000" type="screen4x3"/>
   <p:notesSz cx="6858000" cy="9144000"/>
   <p:defaultTextStyle>
     <a:defPPr>
@@ -110,6 +112,22 @@
       </a:defRPr>
     </a:lvl9pPr>
   </p:defaultTextStyle>
+  <p:extLst>
+    <p:ext uri="{EFAFB233-063F-42B5-8137-9DF3F51BA10A}">
+      <p15:sldGuideLst xmlns:p15="http://schemas.microsoft.com/office/powerpoint/2012/main">
+        <p15:guide id="1" orient="horz" pos="2160" userDrawn="1">
+          <p15:clr>
+            <a:srgbClr val="A4A3A4"/>
+          </p15:clr>
+        </p15:guide>
+        <p15:guide id="2" pos="2880" userDrawn="1">
+          <p15:clr>
+            <a:srgbClr val="A4A3A4"/>
+          </p15:clr>
+        </p15:guide>
+      </p15:sldGuideLst>
+    </p:ext>
+  </p:extLst>
 </p:presentation>
 </file>
 
@@ -294,7 +312,6 @@
           <a:p>
             <a:fld id="{5BCAD085-E8A6-8845-BD4E-CB4CCA059FC4}" type="datetimeFigureOut">
               <a:rPr lang="en-US" smtClean="0"/>
-              <a:t>1/27/13</a:t>
             </a:fld>
             <a:endParaRPr lang="en-US"/>
           </a:p>
@@ -336,18 +353,12 @@
           <a:p>
             <a:fld id="{C1FF6DA9-008F-8B48-92A6-B652298478BF}" type="slidenum">
               <a:rPr lang="en-US" smtClean="0"/>
-              <a:t>‹#›</a:t>
             </a:fld>
             <a:endParaRPr lang="en-US"/>
           </a:p>
         </p:txBody>
       </p:sp>
     </p:spTree>
-    <p:extLst>
-      <p:ext uri="{BB962C8B-B14F-4D97-AF65-F5344CB8AC3E}">
-        <p14:creationId xmlns:p14="http://schemas.microsoft.com/office/powerpoint/2010/main" val="3168075583"/>
-      </p:ext>
-    </p:extLst>
   </p:cSld>
   <p:clrMapOvr>
     <a:masterClrMapping/>
@@ -415,6 +426,7 @@
               <a:rPr lang="en-US" smtClean="0"/>
               <a:t>Click to edit Master text styles</a:t>
             </a:r>
+            <a:endParaRPr lang="en-US" smtClean="0"/>
           </a:p>
           <a:p>
             <a:pPr lvl="1"/>
@@ -422,6 +434,7 @@
               <a:rPr lang="en-US" smtClean="0"/>
               <a:t>Second level</a:t>
             </a:r>
+            <a:endParaRPr lang="en-US" smtClean="0"/>
           </a:p>
           <a:p>
             <a:pPr lvl="2"/>
@@ -429,6 +442,7 @@
               <a:rPr lang="en-US" smtClean="0"/>
               <a:t>Third level</a:t>
             </a:r>
+            <a:endParaRPr lang="en-US" smtClean="0"/>
           </a:p>
           <a:p>
             <a:pPr lvl="3"/>
@@ -436,6 +450,7 @@
               <a:rPr lang="en-US" smtClean="0"/>
               <a:t>Fourth level</a:t>
             </a:r>
+            <a:endParaRPr lang="en-US" smtClean="0"/>
           </a:p>
           <a:p>
             <a:pPr lvl="4"/>
@@ -464,7 +479,6 @@
           <a:p>
             <a:fld id="{5BCAD085-E8A6-8845-BD4E-CB4CCA059FC4}" type="datetimeFigureOut">
               <a:rPr lang="en-US" smtClean="0"/>
-              <a:t>1/27/13</a:t>
             </a:fld>
             <a:endParaRPr lang="en-US"/>
           </a:p>
@@ -506,18 +520,12 @@
           <a:p>
             <a:fld id="{C1FF6DA9-008F-8B48-92A6-B652298478BF}" type="slidenum">
               <a:rPr lang="en-US" smtClean="0"/>
-              <a:t>‹#›</a:t>
             </a:fld>
             <a:endParaRPr lang="en-US"/>
           </a:p>
         </p:txBody>
       </p:sp>
     </p:spTree>
-    <p:extLst>
-      <p:ext uri="{BB962C8B-B14F-4D97-AF65-F5344CB8AC3E}">
-        <p14:creationId xmlns:p14="http://schemas.microsoft.com/office/powerpoint/2010/main" val="2910927964"/>
-      </p:ext>
-    </p:extLst>
   </p:cSld>
   <p:clrMapOvr>
     <a:masterClrMapping/>
@@ -595,6 +603,7 @@
               <a:rPr lang="en-US" smtClean="0"/>
               <a:t>Click to edit Master text styles</a:t>
             </a:r>
+            <a:endParaRPr lang="en-US" smtClean="0"/>
           </a:p>
           <a:p>
             <a:pPr lvl="1"/>
@@ -602,6 +611,7 @@
               <a:rPr lang="en-US" smtClean="0"/>
               <a:t>Second level</a:t>
             </a:r>
+            <a:endParaRPr lang="en-US" smtClean="0"/>
           </a:p>
           <a:p>
             <a:pPr lvl="2"/>
@@ -609,6 +619,7 @@
               <a:rPr lang="en-US" smtClean="0"/>
               <a:t>Third level</a:t>
             </a:r>
+            <a:endParaRPr lang="en-US" smtClean="0"/>
           </a:p>
           <a:p>
             <a:pPr lvl="3"/>
@@ -616,6 +627,7 @@
               <a:rPr lang="en-US" smtClean="0"/>
               <a:t>Fourth level</a:t>
             </a:r>
+            <a:endParaRPr lang="en-US" smtClean="0"/>
           </a:p>
           <a:p>
             <a:pPr lvl="4"/>
@@ -644,7 +656,6 @@
           <a:p>
             <a:fld id="{5BCAD085-E8A6-8845-BD4E-CB4CCA059FC4}" type="datetimeFigureOut">
               <a:rPr lang="en-US" smtClean="0"/>
-              <a:t>1/27/13</a:t>
             </a:fld>
             <a:endParaRPr lang="en-US"/>
           </a:p>
@@ -686,18 +697,12 @@
           <a:p>
             <a:fld id="{C1FF6DA9-008F-8B48-92A6-B652298478BF}" type="slidenum">
               <a:rPr lang="en-US" smtClean="0"/>
-              <a:t>‹#›</a:t>
             </a:fld>
             <a:endParaRPr lang="en-US"/>
           </a:p>
         </p:txBody>
       </p:sp>
     </p:spTree>
-    <p:extLst>
-      <p:ext uri="{BB962C8B-B14F-4D97-AF65-F5344CB8AC3E}">
-        <p14:creationId xmlns:p14="http://schemas.microsoft.com/office/powerpoint/2010/main" val="3612223792"/>
-      </p:ext>
-    </p:extLst>
   </p:cSld>
   <p:clrMapOvr>
     <a:masterClrMapping/>
@@ -765,6 +770,7 @@
               <a:rPr lang="en-US" smtClean="0"/>
               <a:t>Click to edit Master text styles</a:t>
             </a:r>
+            <a:endParaRPr lang="en-US" smtClean="0"/>
           </a:p>
           <a:p>
             <a:pPr lvl="1"/>
@@ -772,6 +778,7 @@
               <a:rPr lang="en-US" smtClean="0"/>
               <a:t>Second level</a:t>
             </a:r>
+            <a:endParaRPr lang="en-US" smtClean="0"/>
           </a:p>
           <a:p>
             <a:pPr lvl="2"/>
@@ -779,6 +786,7 @@
               <a:rPr lang="en-US" smtClean="0"/>
               <a:t>Third level</a:t>
             </a:r>
+            <a:endParaRPr lang="en-US" smtClean="0"/>
           </a:p>
           <a:p>
             <a:pPr lvl="3"/>
@@ -786,6 +794,7 @@
               <a:rPr lang="en-US" smtClean="0"/>
               <a:t>Fourth level</a:t>
             </a:r>
+            <a:endParaRPr lang="en-US" smtClean="0"/>
           </a:p>
           <a:p>
             <a:pPr lvl="4"/>
@@ -814,7 +823,6 @@
           <a:p>
             <a:fld id="{5BCAD085-E8A6-8845-BD4E-CB4CCA059FC4}" type="datetimeFigureOut">
               <a:rPr lang="en-US" smtClean="0"/>
-              <a:t>1/27/13</a:t>
             </a:fld>
             <a:endParaRPr lang="en-US"/>
           </a:p>
@@ -856,18 +864,12 @@
           <a:p>
             <a:fld id="{C1FF6DA9-008F-8B48-92A6-B652298478BF}" type="slidenum">
               <a:rPr lang="en-US" smtClean="0"/>
-              <a:t>‹#›</a:t>
             </a:fld>
             <a:endParaRPr lang="en-US"/>
           </a:p>
         </p:txBody>
       </p:sp>
     </p:spTree>
-    <p:extLst>
-      <p:ext uri="{BB962C8B-B14F-4D97-AF65-F5344CB8AC3E}">
-        <p14:creationId xmlns:p14="http://schemas.microsoft.com/office/powerpoint/2010/main" val="2614314258"/>
-      </p:ext>
-    </p:extLst>
   </p:cSld>
   <p:clrMapOvr>
     <a:masterClrMapping/>
@@ -1040,6 +1042,7 @@
               <a:rPr lang="en-US" smtClean="0"/>
               <a:t>Click to edit Master text styles</a:t>
             </a:r>
+            <a:endParaRPr lang="en-US" smtClean="0"/>
           </a:p>
         </p:txBody>
       </p:sp>
@@ -1060,7 +1063,6 @@
           <a:p>
             <a:fld id="{5BCAD085-E8A6-8845-BD4E-CB4CCA059FC4}" type="datetimeFigureOut">
               <a:rPr lang="en-US" smtClean="0"/>
-              <a:t>1/27/13</a:t>
             </a:fld>
             <a:endParaRPr lang="en-US"/>
           </a:p>
@@ -1102,18 +1104,12 @@
           <a:p>
             <a:fld id="{C1FF6DA9-008F-8B48-92A6-B652298478BF}" type="slidenum">
               <a:rPr lang="en-US" smtClean="0"/>
-              <a:t>‹#›</a:t>
             </a:fld>
             <a:endParaRPr lang="en-US"/>
           </a:p>
         </p:txBody>
       </p:sp>
     </p:spTree>
-    <p:extLst>
-      <p:ext uri="{BB962C8B-B14F-4D97-AF65-F5344CB8AC3E}">
-        <p14:creationId xmlns:p14="http://schemas.microsoft.com/office/powerpoint/2010/main" val="960648375"/>
-      </p:ext>
-    </p:extLst>
   </p:cSld>
   <p:clrMapOvr>
     <a:masterClrMapping/>
@@ -1214,6 +1210,7 @@
               <a:rPr lang="en-US" smtClean="0"/>
               <a:t>Click to edit Master text styles</a:t>
             </a:r>
+            <a:endParaRPr lang="en-US" smtClean="0"/>
           </a:p>
           <a:p>
             <a:pPr lvl="1"/>
@@ -1221,6 +1218,7 @@
               <a:rPr lang="en-US" smtClean="0"/>
               <a:t>Second level</a:t>
             </a:r>
+            <a:endParaRPr lang="en-US" smtClean="0"/>
           </a:p>
           <a:p>
             <a:pPr lvl="2"/>
@@ -1228,6 +1226,7 @@
               <a:rPr lang="en-US" smtClean="0"/>
               <a:t>Third level</a:t>
             </a:r>
+            <a:endParaRPr lang="en-US" smtClean="0"/>
           </a:p>
           <a:p>
             <a:pPr lvl="3"/>
@@ -1235,6 +1234,7 @@
               <a:rPr lang="en-US" smtClean="0"/>
               <a:t>Fourth level</a:t>
             </a:r>
+            <a:endParaRPr lang="en-US" smtClean="0"/>
           </a:p>
           <a:p>
             <a:pPr lvl="4"/>
@@ -1299,6 +1299,7 @@
               <a:rPr lang="en-US" smtClean="0"/>
               <a:t>Click to edit Master text styles</a:t>
             </a:r>
+            <a:endParaRPr lang="en-US" smtClean="0"/>
           </a:p>
           <a:p>
             <a:pPr lvl="1"/>
@@ -1306,6 +1307,7 @@
               <a:rPr lang="en-US" smtClean="0"/>
               <a:t>Second level</a:t>
             </a:r>
+            <a:endParaRPr lang="en-US" smtClean="0"/>
           </a:p>
           <a:p>
             <a:pPr lvl="2"/>
@@ -1313,6 +1315,7 @@
               <a:rPr lang="en-US" smtClean="0"/>
               <a:t>Third level</a:t>
             </a:r>
+            <a:endParaRPr lang="en-US" smtClean="0"/>
           </a:p>
           <a:p>
             <a:pPr lvl="3"/>
@@ -1320,6 +1323,7 @@
               <a:rPr lang="en-US" smtClean="0"/>
               <a:t>Fourth level</a:t>
             </a:r>
+            <a:endParaRPr lang="en-US" smtClean="0"/>
           </a:p>
           <a:p>
             <a:pPr lvl="4"/>
@@ -1348,7 +1352,6 @@
           <a:p>
             <a:fld id="{5BCAD085-E8A6-8845-BD4E-CB4CCA059FC4}" type="datetimeFigureOut">
               <a:rPr lang="en-US" smtClean="0"/>
-              <a:t>1/27/13</a:t>
             </a:fld>
             <a:endParaRPr lang="en-US"/>
           </a:p>
@@ -1390,18 +1393,12 @@
           <a:p>
             <a:fld id="{C1FF6DA9-008F-8B48-92A6-B652298478BF}" type="slidenum">
               <a:rPr lang="en-US" smtClean="0"/>
-              <a:t>‹#›</a:t>
             </a:fld>
             <a:endParaRPr lang="en-US"/>
           </a:p>
         </p:txBody>
       </p:sp>
     </p:spTree>
-    <p:extLst>
-      <p:ext uri="{BB962C8B-B14F-4D97-AF65-F5344CB8AC3E}">
-        <p14:creationId xmlns:p14="http://schemas.microsoft.com/office/powerpoint/2010/main" val="2782244947"/>
-      </p:ext>
-    </p:extLst>
   </p:cSld>
   <p:clrMapOvr>
     <a:masterClrMapping/>
@@ -1515,6 +1512,7 @@
               <a:rPr lang="en-US" smtClean="0"/>
               <a:t>Click to edit Master text styles</a:t>
             </a:r>
+            <a:endParaRPr lang="en-US" smtClean="0"/>
           </a:p>
         </p:txBody>
       </p:sp>
@@ -1571,6 +1569,7 @@
               <a:rPr lang="en-US" smtClean="0"/>
               <a:t>Click to edit Master text styles</a:t>
             </a:r>
+            <a:endParaRPr lang="en-US" smtClean="0"/>
           </a:p>
           <a:p>
             <a:pPr lvl="1"/>
@@ -1578,6 +1577,7 @@
               <a:rPr lang="en-US" smtClean="0"/>
               <a:t>Second level</a:t>
             </a:r>
+            <a:endParaRPr lang="en-US" smtClean="0"/>
           </a:p>
           <a:p>
             <a:pPr lvl="2"/>
@@ -1585,6 +1585,7 @@
               <a:rPr lang="en-US" smtClean="0"/>
               <a:t>Third level</a:t>
             </a:r>
+            <a:endParaRPr lang="en-US" smtClean="0"/>
           </a:p>
           <a:p>
             <a:pPr lvl="3"/>
@@ -1592,6 +1593,7 @@
               <a:rPr lang="en-US" smtClean="0"/>
               <a:t>Fourth level</a:t>
             </a:r>
+            <a:endParaRPr lang="en-US" smtClean="0"/>
           </a:p>
           <a:p>
             <a:pPr lvl="4"/>
@@ -1665,6 +1667,7 @@
               <a:rPr lang="en-US" smtClean="0"/>
               <a:t>Click to edit Master text styles</a:t>
             </a:r>
+            <a:endParaRPr lang="en-US" smtClean="0"/>
           </a:p>
         </p:txBody>
       </p:sp>
@@ -1721,6 +1724,7 @@
               <a:rPr lang="en-US" smtClean="0"/>
               <a:t>Click to edit Master text styles</a:t>
             </a:r>
+            <a:endParaRPr lang="en-US" smtClean="0"/>
           </a:p>
           <a:p>
             <a:pPr lvl="1"/>
@@ -1728,6 +1732,7 @@
               <a:rPr lang="en-US" smtClean="0"/>
               <a:t>Second level</a:t>
             </a:r>
+            <a:endParaRPr lang="en-US" smtClean="0"/>
           </a:p>
           <a:p>
             <a:pPr lvl="2"/>
@@ -1735,6 +1740,7 @@
               <a:rPr lang="en-US" smtClean="0"/>
               <a:t>Third level</a:t>
             </a:r>
+            <a:endParaRPr lang="en-US" smtClean="0"/>
           </a:p>
           <a:p>
             <a:pPr lvl="3"/>
@@ -1742,6 +1748,7 @@
               <a:rPr lang="en-US" smtClean="0"/>
               <a:t>Fourth level</a:t>
             </a:r>
+            <a:endParaRPr lang="en-US" smtClean="0"/>
           </a:p>
           <a:p>
             <a:pPr lvl="4"/>
@@ -1770,7 +1777,6 @@
           <a:p>
             <a:fld id="{5BCAD085-E8A6-8845-BD4E-CB4CCA059FC4}" type="datetimeFigureOut">
               <a:rPr lang="en-US" smtClean="0"/>
-              <a:t>1/27/13</a:t>
             </a:fld>
             <a:endParaRPr lang="en-US"/>
           </a:p>
@@ -1812,18 +1818,12 @@
           <a:p>
             <a:fld id="{C1FF6DA9-008F-8B48-92A6-B652298478BF}" type="slidenum">
               <a:rPr lang="en-US" smtClean="0"/>
-              <a:t>‹#›</a:t>
             </a:fld>
             <a:endParaRPr lang="en-US"/>
           </a:p>
         </p:txBody>
       </p:sp>
     </p:spTree>
-    <p:extLst>
-      <p:ext uri="{BB962C8B-B14F-4D97-AF65-F5344CB8AC3E}">
-        <p14:creationId xmlns:p14="http://schemas.microsoft.com/office/powerpoint/2010/main" val="990158736"/>
-      </p:ext>
-    </p:extLst>
   </p:cSld>
   <p:clrMapOvr>
     <a:masterClrMapping/>
@@ -1888,7 +1888,6 @@
           <a:p>
             <a:fld id="{5BCAD085-E8A6-8845-BD4E-CB4CCA059FC4}" type="datetimeFigureOut">
               <a:rPr lang="en-US" smtClean="0"/>
-              <a:t>1/27/13</a:t>
             </a:fld>
             <a:endParaRPr lang="en-US"/>
           </a:p>
@@ -1930,18 +1929,12 @@
           <a:p>
             <a:fld id="{C1FF6DA9-008F-8B48-92A6-B652298478BF}" type="slidenum">
               <a:rPr lang="en-US" smtClean="0"/>
-              <a:t>‹#›</a:t>
             </a:fld>
             <a:endParaRPr lang="en-US"/>
           </a:p>
         </p:txBody>
       </p:sp>
     </p:spTree>
-    <p:extLst>
-      <p:ext uri="{BB962C8B-B14F-4D97-AF65-F5344CB8AC3E}">
-        <p14:creationId xmlns:p14="http://schemas.microsoft.com/office/powerpoint/2010/main" val="727027711"/>
-      </p:ext>
-    </p:extLst>
   </p:cSld>
   <p:clrMapOvr>
     <a:masterClrMapping/>
@@ -1983,7 +1976,6 @@
           <a:p>
             <a:fld id="{5BCAD085-E8A6-8845-BD4E-CB4CCA059FC4}" type="datetimeFigureOut">
               <a:rPr lang="en-US" smtClean="0"/>
-              <a:t>1/27/13</a:t>
             </a:fld>
             <a:endParaRPr lang="en-US"/>
           </a:p>
@@ -2025,18 +2017,12 @@
           <a:p>
             <a:fld id="{C1FF6DA9-008F-8B48-92A6-B652298478BF}" type="slidenum">
               <a:rPr lang="en-US" smtClean="0"/>
-              <a:t>‹#›</a:t>
             </a:fld>
             <a:endParaRPr lang="en-US"/>
           </a:p>
         </p:txBody>
       </p:sp>
     </p:spTree>
-    <p:extLst>
-      <p:ext uri="{BB962C8B-B14F-4D97-AF65-F5344CB8AC3E}">
-        <p14:creationId xmlns:p14="http://schemas.microsoft.com/office/powerpoint/2010/main" val="1212999818"/>
-      </p:ext>
-    </p:extLst>
   </p:cSld>
   <p:clrMapOvr>
     <a:masterClrMapping/>
@@ -2146,6 +2132,7 @@
               <a:rPr lang="en-US" smtClean="0"/>
               <a:t>Click to edit Master text styles</a:t>
             </a:r>
+            <a:endParaRPr lang="en-US" smtClean="0"/>
           </a:p>
           <a:p>
             <a:pPr lvl="1"/>
@@ -2153,6 +2140,7 @@
               <a:rPr lang="en-US" smtClean="0"/>
               <a:t>Second level</a:t>
             </a:r>
+            <a:endParaRPr lang="en-US" smtClean="0"/>
           </a:p>
           <a:p>
             <a:pPr lvl="2"/>
@@ -2160,6 +2148,7 @@
               <a:rPr lang="en-US" smtClean="0"/>
               <a:t>Third level</a:t>
             </a:r>
+            <a:endParaRPr lang="en-US" smtClean="0"/>
           </a:p>
           <a:p>
             <a:pPr lvl="3"/>
@@ -2167,6 +2156,7 @@
               <a:rPr lang="en-US" smtClean="0"/>
               <a:t>Fourth level</a:t>
             </a:r>
+            <a:endParaRPr lang="en-US" smtClean="0"/>
           </a:p>
           <a:p>
             <a:pPr lvl="4"/>
@@ -2240,6 +2230,7 @@
               <a:rPr lang="en-US" smtClean="0"/>
               <a:t>Click to edit Master text styles</a:t>
             </a:r>
+            <a:endParaRPr lang="en-US" smtClean="0"/>
           </a:p>
         </p:txBody>
       </p:sp>
@@ -2260,7 +2251,6 @@
           <a:p>
             <a:fld id="{5BCAD085-E8A6-8845-BD4E-CB4CCA059FC4}" type="datetimeFigureOut">
               <a:rPr lang="en-US" smtClean="0"/>
-              <a:t>1/27/13</a:t>
             </a:fld>
             <a:endParaRPr lang="en-US"/>
           </a:p>
@@ -2302,18 +2292,12 @@
           <a:p>
             <a:fld id="{C1FF6DA9-008F-8B48-92A6-B652298478BF}" type="slidenum">
               <a:rPr lang="en-US" smtClean="0"/>
-              <a:t>‹#›</a:t>
             </a:fld>
             <a:endParaRPr lang="en-US"/>
           </a:p>
         </p:txBody>
       </p:sp>
     </p:spTree>
-    <p:extLst>
-      <p:ext uri="{BB962C8B-B14F-4D97-AF65-F5344CB8AC3E}">
-        <p14:creationId xmlns:p14="http://schemas.microsoft.com/office/powerpoint/2010/main" val="1840726560"/>
-      </p:ext>
-    </p:extLst>
   </p:cSld>
   <p:clrMapOvr>
     <a:masterClrMapping/>
@@ -2493,6 +2477,7 @@
               <a:rPr lang="en-US" smtClean="0"/>
               <a:t>Click to edit Master text styles</a:t>
             </a:r>
+            <a:endParaRPr lang="en-US" smtClean="0"/>
           </a:p>
         </p:txBody>
       </p:sp>
@@ -2513,7 +2498,6 @@
           <a:p>
             <a:fld id="{5BCAD085-E8A6-8845-BD4E-CB4CCA059FC4}" type="datetimeFigureOut">
               <a:rPr lang="en-US" smtClean="0"/>
-              <a:t>1/27/13</a:t>
             </a:fld>
             <a:endParaRPr lang="en-US"/>
           </a:p>
@@ -2555,18 +2539,12 @@
           <a:p>
             <a:fld id="{C1FF6DA9-008F-8B48-92A6-B652298478BF}" type="slidenum">
               <a:rPr lang="en-US" smtClean="0"/>
-              <a:t>‹#›</a:t>
             </a:fld>
             <a:endParaRPr lang="en-US"/>
           </a:p>
         </p:txBody>
       </p:sp>
     </p:spTree>
-    <p:extLst>
-      <p:ext uri="{BB962C8B-B14F-4D97-AF65-F5344CB8AC3E}">
-        <p14:creationId xmlns:p14="http://schemas.microsoft.com/office/powerpoint/2010/main" val="3889236939"/>
-      </p:ext>
-    </p:extLst>
   </p:cSld>
   <p:clrMapOvr>
     <a:masterClrMapping/>
@@ -2659,6 +2637,7 @@
               <a:rPr lang="en-US" smtClean="0"/>
               <a:t>Click to edit Master text styles</a:t>
             </a:r>
+            <a:endParaRPr lang="en-US" smtClean="0"/>
           </a:p>
           <a:p>
             <a:pPr lvl="1"/>
@@ -2666,6 +2645,7 @@
               <a:rPr lang="en-US" smtClean="0"/>
               <a:t>Second level</a:t>
             </a:r>
+            <a:endParaRPr lang="en-US" smtClean="0"/>
           </a:p>
           <a:p>
             <a:pPr lvl="2"/>
@@ -2673,6 +2653,7 @@
               <a:rPr lang="en-US" smtClean="0"/>
               <a:t>Third level</a:t>
             </a:r>
+            <a:endParaRPr lang="en-US" smtClean="0"/>
           </a:p>
           <a:p>
             <a:pPr lvl="3"/>
@@ -2680,6 +2661,7 @@
               <a:rPr lang="en-US" smtClean="0"/>
               <a:t>Fourth level</a:t>
             </a:r>
+            <a:endParaRPr lang="en-US" smtClean="0"/>
           </a:p>
           <a:p>
             <a:pPr lvl="4"/>
@@ -2726,7 +2708,6 @@
           <a:p>
             <a:fld id="{5BCAD085-E8A6-8845-BD4E-CB4CCA059FC4}" type="datetimeFigureOut">
               <a:rPr lang="en-US" smtClean="0"/>
-              <a:t>1/27/13</a:t>
             </a:fld>
             <a:endParaRPr lang="en-US"/>
           </a:p>
@@ -2804,18 +2785,12 @@
           <a:p>
             <a:fld id="{C1FF6DA9-008F-8B48-92A6-B652298478BF}" type="slidenum">
               <a:rPr lang="en-US" smtClean="0"/>
-              <a:t>‹#›</a:t>
             </a:fld>
             <a:endParaRPr lang="en-US"/>
           </a:p>
         </p:txBody>
       </p:sp>
     </p:spTree>
-    <p:extLst>
-      <p:ext uri="{BB962C8B-B14F-4D97-AF65-F5344CB8AC3E}">
-        <p14:creationId xmlns:p14="http://schemas.microsoft.com/office/powerpoint/2010/main" val="2209977519"/>
-      </p:ext>
-    </p:extLst>
   </p:cSld>
   <p:clrMap bg1="lt1" tx1="dk1" bg2="lt2" tx2="dk2" accent1="accent1" accent2="accent2" accent3="accent3" accent4="accent4" accent5="accent5" accent6="accent6" hlink="hlink" folHlink="folHlink"/>
   <p:sldLayoutIdLst>
@@ -2853,7 +2828,7 @@
         <a:spcBef>
           <a:spcPct val="20000"/>
         </a:spcBef>
-        <a:buFont typeface="Arial"/>
+        <a:buFont typeface="Arial" panose="020B0604020202020204"/>
         <a:buChar char="•"/>
         <a:defRPr sz="3200" kern="1200">
           <a:solidFill>
@@ -2868,7 +2843,7 @@
         <a:spcBef>
           <a:spcPct val="20000"/>
         </a:spcBef>
-        <a:buFont typeface="Arial"/>
+        <a:buFont typeface="Arial" panose="020B0604020202020204"/>
         <a:buChar char="–"/>
         <a:defRPr sz="2800" kern="1200">
           <a:solidFill>
@@ -2883,7 +2858,7 @@
         <a:spcBef>
           <a:spcPct val="20000"/>
         </a:spcBef>
-        <a:buFont typeface="Arial"/>
+        <a:buFont typeface="Arial" panose="020B0604020202020204"/>
         <a:buChar char="•"/>
         <a:defRPr sz="2400" kern="1200">
           <a:solidFill>
@@ -2898,7 +2873,7 @@
         <a:spcBef>
           <a:spcPct val="20000"/>
         </a:spcBef>
-        <a:buFont typeface="Arial"/>
+        <a:buFont typeface="Arial" panose="020B0604020202020204"/>
         <a:buChar char="–"/>
         <a:defRPr sz="2000" kern="1200">
           <a:solidFill>
@@ -2913,7 +2888,7 @@
         <a:spcBef>
           <a:spcPct val="20000"/>
         </a:spcBef>
-        <a:buFont typeface="Arial"/>
+        <a:buFont typeface="Arial" panose="020B0604020202020204"/>
         <a:buChar char="»"/>
         <a:defRPr sz="2000" kern="1200">
           <a:solidFill>
@@ -2928,7 +2903,7 @@
         <a:spcBef>
           <a:spcPct val="20000"/>
         </a:spcBef>
-        <a:buFont typeface="Arial"/>
+        <a:buFont typeface="Arial" panose="020B0604020202020204"/>
         <a:buChar char="•"/>
         <a:defRPr sz="2000" kern="1200">
           <a:solidFill>
@@ -2943,7 +2918,7 @@
         <a:spcBef>
           <a:spcPct val="20000"/>
         </a:spcBef>
-        <a:buFont typeface="Arial"/>
+        <a:buFont typeface="Arial" panose="020B0604020202020204"/>
         <a:buChar char="•"/>
         <a:defRPr sz="2000" kern="1200">
           <a:solidFill>
@@ -2958,7 +2933,7 @@
         <a:spcBef>
           <a:spcPct val="20000"/>
         </a:spcBef>
-        <a:buFont typeface="Arial"/>
+        <a:buFont typeface="Arial" panose="020B0604020202020204"/>
         <a:buChar char="•"/>
         <a:defRPr sz="2000" kern="1200">
           <a:solidFill>
@@ -2973,7 +2948,7 @@
         <a:spcBef>
           <a:spcPct val="20000"/>
         </a:spcBef>
-        <a:buFont typeface="Arial"/>
+        <a:buFont typeface="Arial" panose="020B0604020202020204"/>
         <a:buChar char="•"/>
         <a:defRPr sz="2000" kern="1200">
           <a:solidFill>
@@ -3085,7 +3060,303 @@
 </file>
 
 <file path=ppt/slides/slide1.xml><?xml version="1.0" encoding="utf-8"?>
-<p:sld xmlns:a="http://schemas.openxmlformats.org/drawingml/2006/main" xmlns:p="http://schemas.openxmlformats.org/presentationml/2006/main" xmlns:r="http://schemas.openxmlformats.org/officeDocument/2006/relationships">
+<p:sld xmlns:a="http://schemas.openxmlformats.org/drawingml/2006/main" xmlns:r="http://schemas.openxmlformats.org/officeDocument/2006/relationships" xmlns:p="http://schemas.openxmlformats.org/presentationml/2006/main">
+  <p:cSld>
+    <p:bg>
+      <p:bgPr>
+        <a:solidFill>
+          <a:srgbClr val="F0F4F8"/>
+        </a:solidFill>
+        <a:effectLst/>
+      </p:bgPr>
+    </p:bg>
+    <p:spTree>
+      <p:nvGrpSpPr>
+        <p:cNvPr id="1" name=""/>
+        <p:cNvGrpSpPr/>
+        <p:nvPr/>
+      </p:nvGrpSpPr>
+      <p:grpSpPr/>
+      <p:sp>
+        <p:nvSpPr>
+          <p:cNvPr id="2" name="Rectangle 1"/>
+          <p:cNvSpPr/>
+          <p:nvPr/>
+        </p:nvSpPr>
+        <p:spPr>
+          <a:xfrm>
+            <a:off x="0" y="1591310"/>
+            <a:ext cx="12192000" cy="1630045"/>
+          </a:xfrm>
+          <a:prstGeom prst="rect">
+            <a:avLst/>
+          </a:prstGeom>
+          <a:solidFill>
+            <a:srgbClr val="1A478A"/>
+          </a:solidFill>
+          <a:ln>
+            <a:noFill/>
+          </a:ln>
+        </p:spPr>
+        <p:style>
+          <a:lnRef idx="1">
+            <a:schemeClr val="accent1"/>
+          </a:lnRef>
+          <a:fillRef idx="3">
+            <a:schemeClr val="accent1"/>
+          </a:fillRef>
+          <a:effectRef idx="2">
+            <a:schemeClr val="accent1"/>
+          </a:effectRef>
+          <a:fontRef idx="minor">
+            <a:schemeClr val="lt1"/>
+          </a:fontRef>
+        </p:style>
+        <p:txBody>
+          <a:bodyPr wrap="square" lIns="731520" tIns="137160" rtlCol="0" anchor="ctr"/>
+          <a:lstStyle/>
+          <a:p>
+            <a:pPr algn="ctr">
+              <a:defRPr sz="3600" b="1">
+                <a:solidFill>
+                  <a:srgbClr val="FFFFFF"/>
+                </a:solidFill>
+              </a:defRPr>
+            </a:pPr>
+            <a:r>
+              <a:rPr>
+                <a:latin typeface="微软雅黑" panose="020B0503020204020204" charset="-122"/>
+                <a:ea typeface="微软雅黑" panose="020B0503020204020204" charset="-122"/>
+                <a:cs typeface="微软雅黑" panose="020B0503020204020204" charset="-122"/>
+              </a:rPr>
+              <a:t>ISIC2018 皮肤病变分割</a:t>
+            </a:r>
+            <a:endParaRPr>
+              <a:latin typeface="微软雅黑" panose="020B0503020204020204" charset="-122"/>
+              <a:ea typeface="微软雅黑" panose="020B0503020204020204" charset="-122"/>
+              <a:cs typeface="微软雅黑" panose="020B0503020204020204" charset="-122"/>
+            </a:endParaRPr>
+          </a:p>
+        </p:txBody>
+      </p:sp>
+      <p:sp>
+        <p:nvSpPr>
+          <p:cNvPr id="3" name="Rectangle 2"/>
+          <p:cNvSpPr/>
+          <p:nvPr/>
+        </p:nvSpPr>
+        <p:spPr>
+          <a:xfrm>
+            <a:off x="-635" y="3567430"/>
+            <a:ext cx="12192000" cy="608965"/>
+          </a:xfrm>
+          <a:prstGeom prst="rect">
+            <a:avLst/>
+          </a:prstGeom>
+          <a:solidFill>
+            <a:srgbClr val="2E86AB"/>
+          </a:solidFill>
+          <a:ln>
+            <a:noFill/>
+          </a:ln>
+        </p:spPr>
+        <p:style>
+          <a:lnRef idx="1">
+            <a:schemeClr val="accent1"/>
+          </a:lnRef>
+          <a:fillRef idx="3">
+            <a:schemeClr val="accent1"/>
+          </a:fillRef>
+          <a:effectRef idx="2">
+            <a:schemeClr val="accent1"/>
+          </a:effectRef>
+          <a:fontRef idx="minor">
+            <a:schemeClr val="lt1"/>
+          </a:fontRef>
+        </p:style>
+        <p:txBody>
+          <a:bodyPr lIns="731520" rtlCol="0" anchor="ctr"/>
+          <a:lstStyle/>
+          <a:p>
+            <a:pPr algn="ctr">
+              <a:defRPr sz="1800">
+                <a:solidFill>
+                  <a:srgbClr val="FFFFFF"/>
+                </a:solidFill>
+              </a:defRPr>
+            </a:pPr>
+            <a:r>
+              <a:rPr>
+                <a:latin typeface="微软雅黑" panose="020B0503020204020204" charset="-122"/>
+                <a:ea typeface="微软雅黑" panose="020B0503020204020204" charset="-122"/>
+                <a:cs typeface="微软雅黑" panose="020B0503020204020204" charset="-122"/>
+              </a:rPr>
+              <a:t>基于 U-Net 的深度学习语义分割方法</a:t>
+            </a:r>
+            <a:endParaRPr>
+              <a:latin typeface="微软雅黑" panose="020B0503020204020204" charset="-122"/>
+              <a:ea typeface="微软雅黑" panose="020B0503020204020204" charset="-122"/>
+              <a:cs typeface="微软雅黑" panose="020B0503020204020204" charset="-122"/>
+            </a:endParaRPr>
+          </a:p>
+        </p:txBody>
+      </p:sp>
+      <p:sp>
+        <p:nvSpPr>
+          <p:cNvPr id="4" name="TextBox 3"/>
+          <p:cNvSpPr txBox="1"/>
+          <p:nvPr/>
+        </p:nvSpPr>
+        <p:spPr>
+          <a:xfrm>
+            <a:off x="3835400" y="4811395"/>
+            <a:ext cx="4519295" cy="1260475"/>
+          </a:xfrm>
+          <a:prstGeom prst="rect">
+            <a:avLst/>
+          </a:prstGeom>
+          <a:noFill/>
+        </p:spPr>
+        <p:txBody>
+          <a:bodyPr wrap="square">
+            <a:spAutoFit/>
+          </a:bodyPr>
+          <a:lstStyle/>
+          <a:p>
+            <a:pPr>
+              <a:spcAft>
+                <a:spcPts val="600"/>
+              </a:spcAft>
+              <a:defRPr sz="2200">
+                <a:solidFill>
+                  <a:srgbClr val="333333"/>
+                </a:solidFill>
+              </a:defRPr>
+            </a:pPr>
+            <a:r>
+              <a:rPr>
+                <a:latin typeface="微软雅黑" panose="020B0503020204020204" charset="-122"/>
+                <a:ea typeface="微软雅黑" panose="020B0503020204020204" charset="-122"/>
+                <a:cs typeface="微软雅黑" panose="020B0503020204020204" charset="-122"/>
+              </a:rPr>
+              <a:t>人工智能</a:t>
+            </a:r>
+            <a:r>
+              <a:rPr>
+                <a:latin typeface="微软雅黑" panose="020B0503020204020204" charset="-122"/>
+                <a:ea typeface="微软雅黑" panose="020B0503020204020204" charset="-122"/>
+                <a:cs typeface="微软雅黑" panose="020B0503020204020204" charset="-122"/>
+              </a:rPr>
+              <a:t>物联网导论 课程大作业</a:t>
+            </a:r>
+            <a:endParaRPr>
+              <a:latin typeface="微软雅黑" panose="020B0503020204020204" charset="-122"/>
+              <a:ea typeface="微软雅黑" panose="020B0503020204020204" charset="-122"/>
+              <a:cs typeface="微软雅黑" panose="020B0503020204020204" charset="-122"/>
+            </a:endParaRPr>
+          </a:p>
+          <a:p>
+            <a:pPr>
+              <a:spcAft>
+                <a:spcPts val="600"/>
+              </a:spcAft>
+              <a:defRPr sz="2200">
+                <a:solidFill>
+                  <a:srgbClr val="333333"/>
+                </a:solidFill>
+              </a:defRPr>
+            </a:pPr>
+            <a:endParaRPr>
+              <a:latin typeface="微软雅黑" panose="020B0503020204020204" charset="-122"/>
+              <a:ea typeface="微软雅黑" panose="020B0503020204020204" charset="-122"/>
+              <a:cs typeface="微软雅黑" panose="020B0503020204020204" charset="-122"/>
+            </a:endParaRPr>
+          </a:p>
+          <a:p>
+            <a:pPr>
+              <a:spcAft>
+                <a:spcPts val="600"/>
+              </a:spcAft>
+              <a:defRPr sz="2200">
+                <a:solidFill>
+                  <a:srgbClr val="333333"/>
+                </a:solidFill>
+              </a:defRPr>
+            </a:pPr>
+            <a:r>
+              <a:rPr>
+                <a:latin typeface="微软雅黑" panose="020B0503020204020204" charset="-122"/>
+                <a:ea typeface="微软雅黑" panose="020B0503020204020204" charset="-122"/>
+                <a:cs typeface="微软雅黑" panose="020B0503020204020204" charset="-122"/>
+              </a:rPr>
+              <a:t>小组成员：</a:t>
+            </a:r>
+            <a:r>
+              <a:rPr lang="zh-CN">
+                <a:latin typeface="微软雅黑" panose="020B0503020204020204" charset="-122"/>
+                <a:ea typeface="微软雅黑" panose="020B0503020204020204" charset="-122"/>
+                <a:cs typeface="微软雅黑" panose="020B0503020204020204" charset="-122"/>
+              </a:rPr>
+              <a:t>韩越</a:t>
+            </a:r>
+            <a:r>
+              <a:rPr>
+                <a:latin typeface="微软雅黑" panose="020B0503020204020204" charset="-122"/>
+                <a:ea typeface="微软雅黑" panose="020B0503020204020204" charset="-122"/>
+                <a:cs typeface="微软雅黑" panose="020B0503020204020204" charset="-122"/>
+              </a:rPr>
+              <a:t> </a:t>
+            </a:r>
+            <a:r>
+              <a:rPr lang="en-US">
+                <a:latin typeface="微软雅黑" panose="020B0503020204020204" charset="-122"/>
+                <a:ea typeface="微软雅黑" panose="020B0503020204020204" charset="-122"/>
+                <a:cs typeface="微软雅黑" panose="020B0503020204020204" charset="-122"/>
+              </a:rPr>
+              <a:t> </a:t>
+            </a:r>
+            <a:r>
+              <a:rPr>
+                <a:latin typeface="微软雅黑" panose="020B0503020204020204" charset="-122"/>
+                <a:ea typeface="微软雅黑" panose="020B0503020204020204" charset="-122"/>
+                <a:cs typeface="微软雅黑" panose="020B0503020204020204" charset="-122"/>
+              </a:rPr>
+              <a:t> </a:t>
+            </a:r>
+            <a:r>
+              <a:rPr lang="zh-CN">
+                <a:latin typeface="微软雅黑" panose="020B0503020204020204" charset="-122"/>
+                <a:ea typeface="微软雅黑" panose="020B0503020204020204" charset="-122"/>
+                <a:cs typeface="微软雅黑" panose="020B0503020204020204" charset="-122"/>
+              </a:rPr>
+              <a:t>田晔</a:t>
+            </a:r>
+            <a:r>
+              <a:rPr>
+                <a:latin typeface="微软雅黑" panose="020B0503020204020204" charset="-122"/>
+                <a:ea typeface="微软雅黑" panose="020B0503020204020204" charset="-122"/>
+                <a:cs typeface="微软雅黑" panose="020B0503020204020204" charset="-122"/>
+              </a:rPr>
+              <a:t> </a:t>
+            </a:r>
+            <a:endParaRPr>
+              <a:latin typeface="微软雅黑" panose="020B0503020204020204" charset="-122"/>
+              <a:ea typeface="微软雅黑" panose="020B0503020204020204" charset="-122"/>
+              <a:cs typeface="微软雅黑" panose="020B0503020204020204" charset="-122"/>
+            </a:endParaRPr>
+          </a:p>
+        </p:txBody>
+      </p:sp>
+    </p:spTree>
+  </p:cSld>
+  <p:clrMapOvr>
+    <a:masterClrMapping/>
+  </p:clrMapOvr>
+</p:sld>
+</file>
+
+<file path=ppt/slides/slide2.xml><?xml version="1.0" encoding="utf-8"?>
+<p:sld xmlns:a="http://schemas.openxmlformats.org/drawingml/2006/main" xmlns:r="http://schemas.openxmlformats.org/officeDocument/2006/relationships" xmlns:p="http://schemas.openxmlformats.org/presentationml/2006/main">
   <p:cSld>
     <p:bg>
       <p:bgPr>
@@ -3138,7 +3409,7 @@
           </a:fontRef>
         </p:style>
         <p:txBody>
-          <a:bodyPr rtlCol="0" anchor="ctr" wrap="square" lIns="731520" tIns="137160"/>
+          <a:bodyPr wrap="square" lIns="731520" tIns="137160" rtlCol="0" anchor="ctr"/>
           <a:lstStyle/>
           <a:p>
             <a:pPr algn="l">
@@ -3149,8 +3420,16 @@
               </a:defRPr>
             </a:pPr>
             <a:r>
-              <a:t>ISIC2018 皮肤病变分割</a:t>
-            </a:r>
+              <a:rPr>
+                <a:latin typeface="微软雅黑" panose="020B0503020204020204" charset="-122"/>
+                <a:ea typeface="微软雅黑" panose="020B0503020204020204" charset="-122"/>
+              </a:rPr>
+              <a:t>分工与参考</a:t>
+            </a:r>
+            <a:endParaRPr>
+              <a:latin typeface="微软雅黑" panose="020B0503020204020204" charset="-122"/>
+              <a:ea typeface="微软雅黑" panose="020B0503020204020204" charset="-122"/>
+            </a:endParaRPr>
           </a:p>
         </p:txBody>
       </p:sp>
@@ -3190,7 +3469,7 @@
           </a:fontRef>
         </p:style>
         <p:txBody>
-          <a:bodyPr rtlCol="0" anchor="ctr" lIns="731520"/>
+          <a:bodyPr lIns="731520" rtlCol="0" anchor="ctr"/>
           <a:lstStyle/>
           <a:p>
             <a:pPr algn="l">
@@ -3201,8 +3480,16 @@
               </a:defRPr>
             </a:pPr>
             <a:r>
-              <a:t>基于 U-Net 的深度学习语义分割方法</a:t>
-            </a:r>
+              <a:rPr>
+                <a:latin typeface="微软雅黑" panose="020B0503020204020204" charset="-122"/>
+                <a:ea typeface="微软雅黑" panose="020B0503020204020204" charset="-122"/>
+              </a:rPr>
+              <a:t>Team Contributions &amp; References</a:t>
+            </a:r>
+            <a:endParaRPr>
+              <a:latin typeface="微软雅黑" panose="020B0503020204020204" charset="-122"/>
+              <a:ea typeface="微软雅黑" panose="020B0503020204020204" charset="-122"/>
+            </a:endParaRPr>
           </a:p>
         </p:txBody>
       </p:sp>
@@ -3214,8 +3501,8 @@
         </p:nvSpPr>
         <p:spPr>
           <a:xfrm>
-            <a:off x="731520" y="2286000"/>
-            <a:ext cx="10058400" cy="2743200"/>
+            <a:off x="731520" y="1828800"/>
+            <a:ext cx="8502650" cy="4076700"/>
           </a:xfrm>
           <a:prstGeom prst="rect">
             <a:avLst/>
@@ -3232,69 +3519,296 @@
               <a:spcAft>
                 <a:spcPts val="600"/>
               </a:spcAft>
-              <a:defRPr sz="2200">
-                <a:solidFill>
-                  <a:srgbClr val="333333"/>
-                </a:solidFill>
-              </a:defRPr>
-            </a:pPr>
-            <a:r>
-              <a:t>人工智能物联网导论 课程大作业</a:t>
-            </a:r>
-          </a:p>
-          <a:p>
-            <a:pPr>
-              <a:spcAft>
-                <a:spcPts val="600"/>
-              </a:spcAft>
-              <a:defRPr sz="2200">
-                <a:solidFill>
-                  <a:srgbClr val="333333"/>
-                </a:solidFill>
-              </a:defRPr>
-            </a:pPr>
-          </a:p>
-          <a:p>
-            <a:pPr>
-              <a:spcAft>
-                <a:spcPts val="600"/>
-              </a:spcAft>
-              <a:defRPr sz="2200">
-                <a:solidFill>
-                  <a:srgbClr val="333333"/>
-                </a:solidFill>
-              </a:defRPr>
-            </a:pPr>
-            <a:r>
-              <a:t>小组成员：XXX  XXXXXXXX  |  XXX  XXXXXXXX  |  XXX  XXXXXXXX</a:t>
-            </a:r>
-          </a:p>
-          <a:p>
-            <a:pPr>
-              <a:spcAft>
-                <a:spcPts val="600"/>
-              </a:spcAft>
-              <a:defRPr sz="2200">
-                <a:solidFill>
-                  <a:srgbClr val="333333"/>
-                </a:solidFill>
-              </a:defRPr>
-            </a:pPr>
-          </a:p>
-          <a:p>
-            <a:pPr>
-              <a:spcAft>
-                <a:spcPts val="600"/>
-              </a:spcAft>
-              <a:defRPr sz="2200">
-                <a:solidFill>
-                  <a:srgbClr val="333333"/>
-                </a:solidFill>
-              </a:defRPr>
-            </a:pPr>
-            <a:r>
-              <a:t>2025-2026学年第二学期</a:t>
-            </a:r>
+              <a:defRPr sz="1700">
+                <a:solidFill>
+                  <a:srgbClr val="333333"/>
+                </a:solidFill>
+              </a:defRPr>
+            </a:pPr>
+            <a:r>
+              <a:rPr>
+                <a:latin typeface="微软雅黑" panose="020B0503020204020204" charset="-122"/>
+                <a:ea typeface="微软雅黑" panose="020B0503020204020204" charset="-122"/>
+                <a:cs typeface="微软雅黑" panose="020B0503020204020204" charset="-122"/>
+              </a:rPr>
+              <a:t>👥 小组成员分工</a:t>
+            </a:r>
+            <a:endParaRPr>
+              <a:latin typeface="微软雅黑" panose="020B0503020204020204" charset="-122"/>
+              <a:ea typeface="微软雅黑" panose="020B0503020204020204" charset="-122"/>
+              <a:cs typeface="微软雅黑" panose="020B0503020204020204" charset="-122"/>
+            </a:endParaRPr>
+          </a:p>
+          <a:p>
+            <a:pPr>
+              <a:spcAft>
+                <a:spcPts val="600"/>
+              </a:spcAft>
+              <a:defRPr sz="1700">
+                <a:solidFill>
+                  <a:srgbClr val="333333"/>
+                </a:solidFill>
+              </a:defRPr>
+            </a:pPr>
+            <a:endParaRPr>
+              <a:latin typeface="微软雅黑" panose="020B0503020204020204" charset="-122"/>
+              <a:ea typeface="微软雅黑" panose="020B0503020204020204" charset="-122"/>
+              <a:cs typeface="微软雅黑" panose="020B0503020204020204" charset="-122"/>
+            </a:endParaRPr>
+          </a:p>
+          <a:p>
+            <a:pPr>
+              <a:spcAft>
+                <a:spcPts val="600"/>
+              </a:spcAft>
+              <a:defRPr sz="1700">
+                <a:solidFill>
+                  <a:srgbClr val="333333"/>
+                </a:solidFill>
+              </a:defRPr>
+            </a:pPr>
+            <a:r>
+              <a:rPr lang="zh-CN">
+                <a:latin typeface="微软雅黑" panose="020B0503020204020204" charset="-122"/>
+                <a:ea typeface="微软雅黑" panose="020B0503020204020204" charset="-122"/>
+                <a:cs typeface="微软雅黑" panose="020B0503020204020204" charset="-122"/>
+              </a:rPr>
+              <a:t>韩越</a:t>
+            </a:r>
+            <a:endParaRPr>
+              <a:latin typeface="微软雅黑" panose="020B0503020204020204" charset="-122"/>
+              <a:ea typeface="微软雅黑" panose="020B0503020204020204" charset="-122"/>
+              <a:cs typeface="微软雅黑" panose="020B0503020204020204" charset="-122"/>
+            </a:endParaRPr>
+          </a:p>
+          <a:p>
+            <a:pPr>
+              <a:spcAft>
+                <a:spcPts val="600"/>
+              </a:spcAft>
+              <a:defRPr sz="1700">
+                <a:solidFill>
+                  <a:srgbClr val="333333"/>
+                </a:solidFill>
+              </a:defRPr>
+            </a:pPr>
+            <a:r>
+              <a:rPr>
+                <a:latin typeface="微软雅黑" panose="020B0503020204020204" charset="-122"/>
+                <a:ea typeface="微软雅黑" panose="020B0503020204020204" charset="-122"/>
+                <a:cs typeface="微软雅黑" panose="020B0503020204020204" charset="-122"/>
+              </a:rPr>
+              <a:t> </a:t>
+            </a:r>
+            <a:r>
+              <a:rPr lang="en-US">
+                <a:latin typeface="微软雅黑" panose="020B0503020204020204" charset="-122"/>
+                <a:ea typeface="微软雅黑" panose="020B0503020204020204" charset="-122"/>
+                <a:cs typeface="微软雅黑" panose="020B0503020204020204" charset="-122"/>
+              </a:rPr>
+              <a:t> </a:t>
+            </a:r>
+            <a:r>
+              <a:rPr>
+                <a:latin typeface="微软雅黑" panose="020B0503020204020204" charset="-122"/>
+                <a:ea typeface="微软雅黑" panose="020B0503020204020204" charset="-122"/>
+                <a:cs typeface="微软雅黑" panose="020B0503020204020204" charset="-122"/>
+              </a:rPr>
+              <a:t>• U-Net 模型架构设计与实现</a:t>
+            </a:r>
+            <a:endParaRPr>
+              <a:latin typeface="微软雅黑" panose="020B0503020204020204" charset="-122"/>
+              <a:ea typeface="微软雅黑" panose="020B0503020204020204" charset="-122"/>
+              <a:cs typeface="微软雅黑" panose="020B0503020204020204" charset="-122"/>
+            </a:endParaRPr>
+          </a:p>
+          <a:p>
+            <a:pPr>
+              <a:spcAft>
+                <a:spcPts val="600"/>
+              </a:spcAft>
+              <a:defRPr sz="1700">
+                <a:solidFill>
+                  <a:srgbClr val="333333"/>
+                </a:solidFill>
+              </a:defRPr>
+            </a:pPr>
+            <a:r>
+              <a:rPr>
+                <a:latin typeface="微软雅黑" panose="020B0503020204020204" charset="-122"/>
+                <a:ea typeface="微软雅黑" panose="020B0503020204020204" charset="-122"/>
+                <a:cs typeface="微软雅黑" panose="020B0503020204020204" charset="-122"/>
+              </a:rPr>
+              <a:t>  • 训练流程代码编写与 GPU 优化</a:t>
+            </a:r>
+            <a:endParaRPr>
+              <a:latin typeface="微软雅黑" panose="020B0503020204020204" charset="-122"/>
+              <a:ea typeface="微软雅黑" panose="020B0503020204020204" charset="-122"/>
+              <a:cs typeface="微软雅黑" panose="020B0503020204020204" charset="-122"/>
+            </a:endParaRPr>
+          </a:p>
+          <a:p>
+            <a:pPr indent="0">
+              <a:spcAft>
+                <a:spcPts val="600"/>
+              </a:spcAft>
+              <a:buFont typeface="Arial" panose="020B0604020202020204" pitchFamily="34" charset="0"/>
+              <a:buNone/>
+              <a:defRPr sz="1700">
+                <a:solidFill>
+                  <a:srgbClr val="333333"/>
+                </a:solidFill>
+              </a:defRPr>
+            </a:pPr>
+            <a:r>
+              <a:rPr>
+                <a:latin typeface="微软雅黑" panose="020B0503020204020204" charset="-122"/>
+                <a:ea typeface="微软雅黑" panose="020B0503020204020204" charset="-122"/>
+                <a:cs typeface="微软雅黑" panose="020B0503020204020204" charset="-122"/>
+                <a:sym typeface="+mn-ea"/>
+              </a:rPr>
+              <a:t>  • 实验报告撰写与结果分析</a:t>
+            </a:r>
+            <a:endParaRPr>
+              <a:latin typeface="微软雅黑" panose="020B0503020204020204" charset="-122"/>
+              <a:ea typeface="微软雅黑" panose="020B0503020204020204" charset="-122"/>
+              <a:cs typeface="微软雅黑" panose="020B0503020204020204" charset="-122"/>
+            </a:endParaRPr>
+          </a:p>
+          <a:p>
+            <a:pPr>
+              <a:spcAft>
+                <a:spcPts val="600"/>
+              </a:spcAft>
+              <a:defRPr sz="1700">
+                <a:solidFill>
+                  <a:srgbClr val="333333"/>
+                </a:solidFill>
+              </a:defRPr>
+            </a:pPr>
+            <a:endParaRPr>
+              <a:latin typeface="微软雅黑" panose="020B0503020204020204" charset="-122"/>
+              <a:ea typeface="微软雅黑" panose="020B0503020204020204" charset="-122"/>
+              <a:cs typeface="微软雅黑" panose="020B0503020204020204" charset="-122"/>
+            </a:endParaRPr>
+          </a:p>
+          <a:p>
+            <a:pPr>
+              <a:spcAft>
+                <a:spcPts val="600"/>
+              </a:spcAft>
+              <a:defRPr sz="1700">
+                <a:solidFill>
+                  <a:srgbClr val="333333"/>
+                </a:solidFill>
+              </a:defRPr>
+            </a:pPr>
+            <a:r>
+              <a:rPr lang="zh-CN">
+                <a:latin typeface="微软雅黑" panose="020B0503020204020204" charset="-122"/>
+                <a:ea typeface="微软雅黑" panose="020B0503020204020204" charset="-122"/>
+                <a:cs typeface="微软雅黑" panose="020B0503020204020204" charset="-122"/>
+              </a:rPr>
+              <a:t>田晔</a:t>
+            </a:r>
+            <a:endParaRPr>
+              <a:latin typeface="微软雅黑" panose="020B0503020204020204" charset="-122"/>
+              <a:ea typeface="微软雅黑" panose="020B0503020204020204" charset="-122"/>
+              <a:cs typeface="微软雅黑" panose="020B0503020204020204" charset="-122"/>
+            </a:endParaRPr>
+          </a:p>
+          <a:p>
+            <a:pPr>
+              <a:spcAft>
+                <a:spcPts val="600"/>
+              </a:spcAft>
+              <a:defRPr sz="1700">
+                <a:solidFill>
+                  <a:srgbClr val="333333"/>
+                </a:solidFill>
+              </a:defRPr>
+            </a:pPr>
+            <a:r>
+              <a:rPr>
+                <a:latin typeface="微软雅黑" panose="020B0503020204020204" charset="-122"/>
+                <a:ea typeface="微软雅黑" panose="020B0503020204020204" charset="-122"/>
+                <a:cs typeface="微软雅黑" panose="020B0503020204020204" charset="-122"/>
+              </a:rPr>
+              <a:t>  • 数据集预处理与数据增强方案</a:t>
+            </a:r>
+            <a:endParaRPr>
+              <a:latin typeface="微软雅黑" panose="020B0503020204020204" charset="-122"/>
+              <a:ea typeface="微软雅黑" panose="020B0503020204020204" charset="-122"/>
+              <a:cs typeface="微软雅黑" panose="020B0503020204020204" charset="-122"/>
+            </a:endParaRPr>
+          </a:p>
+          <a:p>
+            <a:pPr>
+              <a:spcAft>
+                <a:spcPts val="600"/>
+              </a:spcAft>
+              <a:defRPr sz="1700">
+                <a:solidFill>
+                  <a:srgbClr val="333333"/>
+                </a:solidFill>
+              </a:defRPr>
+            </a:pPr>
+            <a:r>
+              <a:rPr>
+                <a:latin typeface="微软雅黑" panose="020B0503020204020204" charset="-122"/>
+                <a:ea typeface="微软雅黑" panose="020B0503020204020204" charset="-122"/>
+                <a:cs typeface="微软雅黑" panose="020B0503020204020204" charset="-122"/>
+              </a:rPr>
+              <a:t>  • 超参数调优实验</a:t>
+            </a:r>
+            <a:endParaRPr>
+              <a:latin typeface="微软雅黑" panose="020B0503020204020204" charset="-122"/>
+              <a:ea typeface="微软雅黑" panose="020B0503020204020204" charset="-122"/>
+              <a:cs typeface="微软雅黑" panose="020B0503020204020204" charset="-122"/>
+            </a:endParaRPr>
+          </a:p>
+          <a:p>
+            <a:pPr>
+              <a:spcAft>
+                <a:spcPts val="600"/>
+              </a:spcAft>
+              <a:defRPr sz="1700">
+                <a:solidFill>
+                  <a:srgbClr val="333333"/>
+                </a:solidFill>
+              </a:defRPr>
+            </a:pPr>
+            <a:r>
+              <a:rPr>
+                <a:latin typeface="微软雅黑" panose="020B0503020204020204" charset="-122"/>
+                <a:ea typeface="微软雅黑" panose="020B0503020204020204" charset="-122"/>
+                <a:cs typeface="微软雅黑" panose="020B0503020204020204" charset="-122"/>
+                <a:sym typeface="+mn-ea"/>
+              </a:rPr>
+              <a:t>  • PPT 制作与可视化</a:t>
+            </a:r>
+            <a:endParaRPr>
+              <a:latin typeface="微软雅黑" panose="020B0503020204020204" charset="-122"/>
+              <a:ea typeface="微软雅黑" panose="020B0503020204020204" charset="-122"/>
+              <a:cs typeface="微软雅黑" panose="020B0503020204020204" charset="-122"/>
+            </a:endParaRPr>
+          </a:p>
+          <a:p>
+            <a:pPr>
+              <a:spcAft>
+                <a:spcPts val="600"/>
+              </a:spcAft>
+              <a:defRPr sz="1700">
+                <a:solidFill>
+                  <a:srgbClr val="333333"/>
+                </a:solidFill>
+              </a:defRPr>
+            </a:pPr>
+            <a:endParaRPr>
+              <a:latin typeface="微软雅黑" panose="020B0503020204020204" charset="-122"/>
+              <a:ea typeface="微软雅黑" panose="020B0503020204020204" charset="-122"/>
+              <a:cs typeface="微软雅黑" panose="020B0503020204020204" charset="-122"/>
+            </a:endParaRPr>
           </a:p>
         </p:txBody>
       </p:sp>
@@ -3306,8 +3820,8 @@
 </p:sld>
 </file>
 
-<file path=ppt/slides/slide2.xml><?xml version="1.0" encoding="utf-8"?>
-<p:sld xmlns:a="http://schemas.openxmlformats.org/drawingml/2006/main" xmlns:p="http://schemas.openxmlformats.org/presentationml/2006/main" xmlns:r="http://schemas.openxmlformats.org/officeDocument/2006/relationships">
+<file path=ppt/slides/slide3.xml><?xml version="1.0" encoding="utf-8"?>
+<p:sld xmlns:a="http://schemas.openxmlformats.org/drawingml/2006/main" xmlns:r="http://schemas.openxmlformats.org/officeDocument/2006/relationships" xmlns:p="http://schemas.openxmlformats.org/presentationml/2006/main">
   <p:cSld>
     <p:bg>
       <p:bgPr>
@@ -3360,7 +3874,7 @@
           </a:fontRef>
         </p:style>
         <p:txBody>
-          <a:bodyPr rtlCol="0" anchor="ctr" wrap="square" lIns="731520" tIns="137160"/>
+          <a:bodyPr wrap="square" lIns="731520" tIns="137160" rtlCol="0" anchor="ctr"/>
           <a:lstStyle/>
           <a:p>
             <a:pPr algn="l">
@@ -3371,8 +3885,16 @@
               </a:defRPr>
             </a:pPr>
             <a:r>
+              <a:rPr>
+                <a:latin typeface="微软雅黑" panose="020B0503020204020204" charset="-122"/>
+                <a:ea typeface="微软雅黑" panose="020B0503020204020204" charset="-122"/>
+              </a:rPr>
               <a:t>任务与数据集</a:t>
             </a:r>
+            <a:endParaRPr>
+              <a:latin typeface="微软雅黑" panose="020B0503020204020204" charset="-122"/>
+              <a:ea typeface="微软雅黑" panose="020B0503020204020204" charset="-122"/>
+            </a:endParaRPr>
           </a:p>
         </p:txBody>
       </p:sp>
@@ -3412,7 +3934,7 @@
           </a:fontRef>
         </p:style>
         <p:txBody>
-          <a:bodyPr rtlCol="0" anchor="ctr" lIns="731520"/>
+          <a:bodyPr lIns="731520" rtlCol="0" anchor="ctr"/>
           <a:lstStyle/>
           <a:p>
             <a:pPr algn="l">
@@ -3423,8 +3945,16 @@
               </a:defRPr>
             </a:pPr>
             <a:r>
+              <a:rPr>
+                <a:latin typeface="微软雅黑" panose="020B0503020204020204" charset="-122"/>
+                <a:ea typeface="微软雅黑" panose="020B0503020204020204" charset="-122"/>
+              </a:rPr>
               <a:t>Task Overview &amp; Dataset</a:t>
             </a:r>
+            <a:endParaRPr>
+              <a:latin typeface="微软雅黑" panose="020B0503020204020204" charset="-122"/>
+              <a:ea typeface="微软雅黑" panose="020B0503020204020204" charset="-122"/>
+            </a:endParaRPr>
           </a:p>
         </p:txBody>
       </p:sp>
@@ -3436,8 +3966,8 @@
         </p:nvSpPr>
         <p:spPr>
           <a:xfrm>
-            <a:off x="731520" y="1828800"/>
-            <a:ext cx="5029200" cy="4114800"/>
+            <a:off x="1031240" y="2219325"/>
+            <a:ext cx="5506085" cy="3928110"/>
           </a:xfrm>
           <a:prstGeom prst="rect">
             <a:avLst/>
@@ -3446,7 +3976,7 @@
         </p:spPr>
         <p:txBody>
           <a:bodyPr wrap="square">
-            <a:spAutoFit/>
+            <a:noAutofit/>
           </a:bodyPr>
           <a:lstStyle/>
           <a:p>
@@ -3461,8 +3991,18 @@
               </a:defRPr>
             </a:pPr>
             <a:r>
+              <a:rPr>
+                <a:latin typeface="微软雅黑" panose="020B0503020204020204" charset="-122"/>
+                <a:ea typeface="微软雅黑" panose="020B0503020204020204" charset="-122"/>
+                <a:cs typeface="微软雅黑" panose="020B0503020204020204" charset="-122"/>
+              </a:rPr>
               <a:t>🎯 任务目标</a:t>
             </a:r>
+            <a:endParaRPr>
+              <a:latin typeface="微软雅黑" panose="020B0503020204020204" charset="-122"/>
+              <a:ea typeface="微软雅黑" panose="020B0503020204020204" charset="-122"/>
+              <a:cs typeface="微软雅黑" panose="020B0503020204020204" charset="-122"/>
+            </a:endParaRPr>
           </a:p>
           <a:p>
             <a:pPr>
@@ -3476,8 +4016,18 @@
               </a:defRPr>
             </a:pPr>
             <a:r>
+              <a:rPr>
+                <a:latin typeface="微软雅黑" panose="020B0503020204020204" charset="-122"/>
+                <a:ea typeface="微软雅黑" panose="020B0503020204020204" charset="-122"/>
+                <a:cs typeface="微软雅黑" panose="020B0503020204020204" charset="-122"/>
+              </a:rPr>
               <a:t>• ISIC2018 Task 1: 皮肤病变边界分割</a:t>
             </a:r>
+            <a:endParaRPr>
+              <a:latin typeface="微软雅黑" panose="020B0503020204020204" charset="-122"/>
+              <a:ea typeface="微软雅黑" panose="020B0503020204020204" charset="-122"/>
+              <a:cs typeface="微软雅黑" panose="020B0503020204020204" charset="-122"/>
+            </a:endParaRPr>
           </a:p>
           <a:p>
             <a:pPr>
@@ -3491,8 +4041,18 @@
               </a:defRPr>
             </a:pPr>
             <a:r>
+              <a:rPr>
+                <a:latin typeface="微软雅黑" panose="020B0503020204020204" charset="-122"/>
+                <a:ea typeface="微软雅黑" panose="020B0503020204020204" charset="-122"/>
+                <a:cs typeface="微软雅黑" panose="020B0503020204020204" charset="-122"/>
+              </a:rPr>
               <a:t>• 对皮肤镜图像进行像素级病变区域分割</a:t>
             </a:r>
+            <a:endParaRPr>
+              <a:latin typeface="微软雅黑" panose="020B0503020204020204" charset="-122"/>
+              <a:ea typeface="微软雅黑" panose="020B0503020204020204" charset="-122"/>
+              <a:cs typeface="微软雅黑" panose="020B0503020204020204" charset="-122"/>
+            </a:endParaRPr>
           </a:p>
           <a:p>
             <a:pPr>
@@ -3506,8 +4066,18 @@
               </a:defRPr>
             </a:pPr>
             <a:r>
+              <a:rPr>
+                <a:latin typeface="微软雅黑" panose="020B0503020204020204" charset="-122"/>
+                <a:ea typeface="微软雅黑" panose="020B0503020204020204" charset="-122"/>
+                <a:cs typeface="微软雅黑" panose="020B0503020204020204" charset="-122"/>
+              </a:rPr>
               <a:t>• 辅助皮肤科医生快速定位和评估病变</a:t>
             </a:r>
+            <a:endParaRPr>
+              <a:latin typeface="微软雅黑" panose="020B0503020204020204" charset="-122"/>
+              <a:ea typeface="微软雅黑" panose="020B0503020204020204" charset="-122"/>
+              <a:cs typeface="微软雅黑" panose="020B0503020204020204" charset="-122"/>
+            </a:endParaRPr>
           </a:p>
           <a:p>
             <a:pPr>
@@ -3520,6 +4090,11 @@
                 </a:solidFill>
               </a:defRPr>
             </a:pPr>
+            <a:endParaRPr>
+              <a:latin typeface="微软雅黑" panose="020B0503020204020204" charset="-122"/>
+              <a:ea typeface="微软雅黑" panose="020B0503020204020204" charset="-122"/>
+              <a:cs typeface="微软雅黑" panose="020B0503020204020204" charset="-122"/>
+            </a:endParaRPr>
           </a:p>
           <a:p>
             <a:pPr>
@@ -3533,8 +4108,18 @@
               </a:defRPr>
             </a:pPr>
             <a:r>
+              <a:rPr>
+                <a:latin typeface="微软雅黑" panose="020B0503020204020204" charset="-122"/>
+                <a:ea typeface="微软雅黑" panose="020B0503020204020204" charset="-122"/>
+                <a:cs typeface="微软雅黑" panose="020B0503020204020204" charset="-122"/>
+              </a:rPr>
               <a:t>📊 数据集来源</a:t>
             </a:r>
+            <a:endParaRPr>
+              <a:latin typeface="微软雅黑" panose="020B0503020204020204" charset="-122"/>
+              <a:ea typeface="微软雅黑" panose="020B0503020204020204" charset="-122"/>
+              <a:cs typeface="微软雅黑" panose="020B0503020204020204" charset="-122"/>
+            </a:endParaRPr>
           </a:p>
           <a:p>
             <a:pPr>
@@ -3548,8 +4133,18 @@
               </a:defRPr>
             </a:pPr>
             <a:r>
+              <a:rPr>
+                <a:latin typeface="微软雅黑" panose="020B0503020204020204" charset="-122"/>
+                <a:ea typeface="微软雅黑" panose="020B0503020204020204" charset="-122"/>
+                <a:cs typeface="微软雅黑" panose="020B0503020204020204" charset="-122"/>
+              </a:rPr>
               <a:t>• International Skin Imaging Collaboration (ISIC)</a:t>
             </a:r>
+            <a:endParaRPr>
+              <a:latin typeface="微软雅黑" panose="020B0503020204020204" charset="-122"/>
+              <a:ea typeface="微软雅黑" panose="020B0503020204020204" charset="-122"/>
+              <a:cs typeface="微软雅黑" panose="020B0503020204020204" charset="-122"/>
+            </a:endParaRPr>
           </a:p>
           <a:p>
             <a:pPr>
@@ -3563,8 +4158,18 @@
               </a:defRPr>
             </a:pPr>
             <a:r>
+              <a:rPr>
+                <a:latin typeface="微软雅黑" panose="020B0503020204020204" charset="-122"/>
+                <a:ea typeface="微软雅黑" panose="020B0503020204020204" charset="-122"/>
+                <a:cs typeface="微软雅黑" panose="020B0503020204020204" charset="-122"/>
+              </a:rPr>
               <a:t>• 训练集: 2,594 张  |  验证集: 100 张  |  测试集: 1,000 张</a:t>
             </a:r>
+            <a:endParaRPr>
+              <a:latin typeface="微软雅黑" panose="020B0503020204020204" charset="-122"/>
+              <a:ea typeface="微软雅黑" panose="020B0503020204020204" charset="-122"/>
+              <a:cs typeface="微软雅黑" panose="020B0503020204020204" charset="-122"/>
+            </a:endParaRPr>
           </a:p>
           <a:p>
             <a:pPr>
@@ -3578,8 +4183,18 @@
               </a:defRPr>
             </a:pPr>
             <a:r>
+              <a:rPr>
+                <a:latin typeface="微软雅黑" panose="020B0503020204020204" charset="-122"/>
+                <a:ea typeface="微软雅黑" panose="020B0503020204020204" charset="-122"/>
+                <a:cs typeface="微软雅黑" panose="020B0503020204020204" charset="-122"/>
+              </a:rPr>
               <a:t>• 每张图像配有二值分割标签 (Ground Truth)</a:t>
             </a:r>
+            <a:endParaRPr>
+              <a:latin typeface="微软雅黑" panose="020B0503020204020204" charset="-122"/>
+              <a:ea typeface="微软雅黑" panose="020B0503020204020204" charset="-122"/>
+              <a:cs typeface="微软雅黑" panose="020B0503020204020204" charset="-122"/>
+            </a:endParaRPr>
           </a:p>
         </p:txBody>
       </p:sp>
@@ -3591,8 +4206,8 @@
         </p:nvSpPr>
         <p:spPr>
           <a:xfrm>
-            <a:off x="6400800" y="1828800"/>
-            <a:ext cx="5029200" cy="4114800"/>
+            <a:off x="6744335" y="1844040"/>
+            <a:ext cx="5029200" cy="3001010"/>
           </a:xfrm>
           <a:prstGeom prst="rect">
             <a:avLst/>
@@ -3601,7 +4216,7 @@
         </p:spPr>
         <p:txBody>
           <a:bodyPr wrap="square">
-            <a:spAutoFit/>
+            <a:noAutofit/>
           </a:bodyPr>
           <a:lstStyle/>
           <a:p>
@@ -3616,8 +4231,18 @@
               </a:defRPr>
             </a:pPr>
             <a:r>
+              <a:rPr>
+                <a:latin typeface="微软雅黑" panose="020B0503020204020204" charset="-122"/>
+                <a:ea typeface="微软雅黑" panose="020B0503020204020204" charset="-122"/>
+                <a:cs typeface="微软雅黑" panose="020B0503020204020204" charset="-122"/>
+              </a:rPr>
               <a:t>🔧 数据预处理</a:t>
             </a:r>
+            <a:endParaRPr>
+              <a:latin typeface="微软雅黑" panose="020B0503020204020204" charset="-122"/>
+              <a:ea typeface="微软雅黑" panose="020B0503020204020204" charset="-122"/>
+              <a:cs typeface="微软雅黑" panose="020B0503020204020204" charset="-122"/>
+            </a:endParaRPr>
           </a:p>
           <a:p>
             <a:pPr>
@@ -3631,8 +4256,18 @@
               </a:defRPr>
             </a:pPr>
             <a:r>
+              <a:rPr>
+                <a:latin typeface="微软雅黑" panose="020B0503020204020204" charset="-122"/>
+                <a:ea typeface="微软雅黑" panose="020B0503020204020204" charset="-122"/>
+                <a:cs typeface="微软雅黑" panose="020B0503020204020204" charset="-122"/>
+              </a:rPr>
               <a:t>• 图像统一缩放至 256×256</a:t>
             </a:r>
+            <a:endParaRPr>
+              <a:latin typeface="微软雅黑" panose="020B0503020204020204" charset="-122"/>
+              <a:ea typeface="微软雅黑" panose="020B0503020204020204" charset="-122"/>
+              <a:cs typeface="微软雅黑" panose="020B0503020204020204" charset="-122"/>
+            </a:endParaRPr>
           </a:p>
           <a:p>
             <a:pPr>
@@ -3646,8 +4281,18 @@
               </a:defRPr>
             </a:pPr>
             <a:r>
+              <a:rPr>
+                <a:latin typeface="微软雅黑" panose="020B0503020204020204" charset="-122"/>
+                <a:ea typeface="微软雅黑" panose="020B0503020204020204" charset="-122"/>
+                <a:cs typeface="微软雅黑" panose="020B0503020204020204" charset="-122"/>
+              </a:rPr>
               <a:t>• ImageNet 均值/标准差归一化</a:t>
             </a:r>
+            <a:endParaRPr>
+              <a:latin typeface="微软雅黑" panose="020B0503020204020204" charset="-122"/>
+              <a:ea typeface="微软雅黑" panose="020B0503020204020204" charset="-122"/>
+              <a:cs typeface="微软雅黑" panose="020B0503020204020204" charset="-122"/>
+            </a:endParaRPr>
           </a:p>
           <a:p>
             <a:pPr>
@@ -3660,6 +4305,11 @@
                 </a:solidFill>
               </a:defRPr>
             </a:pPr>
+            <a:endParaRPr>
+              <a:latin typeface="微软雅黑" panose="020B0503020204020204" charset="-122"/>
+              <a:ea typeface="微软雅黑" panose="020B0503020204020204" charset="-122"/>
+              <a:cs typeface="微软雅黑" panose="020B0503020204020204" charset="-122"/>
+            </a:endParaRPr>
           </a:p>
           <a:p>
             <a:pPr>
@@ -3673,8 +4323,18 @@
               </a:defRPr>
             </a:pPr>
             <a:r>
+              <a:rPr>
+                <a:latin typeface="微软雅黑" panose="020B0503020204020204" charset="-122"/>
+                <a:ea typeface="微软雅黑" panose="020B0503020204020204" charset="-122"/>
+                <a:cs typeface="微软雅黑" panose="020B0503020204020204" charset="-122"/>
+              </a:rPr>
               <a:t>📈 数据增强 (仅训练集)</a:t>
             </a:r>
+            <a:endParaRPr>
+              <a:latin typeface="微软雅黑" panose="020B0503020204020204" charset="-122"/>
+              <a:ea typeface="微软雅黑" panose="020B0503020204020204" charset="-122"/>
+              <a:cs typeface="微软雅黑" panose="020B0503020204020204" charset="-122"/>
+            </a:endParaRPr>
           </a:p>
           <a:p>
             <a:pPr>
@@ -3688,8 +4348,18 @@
               </a:defRPr>
             </a:pPr>
             <a:r>
+              <a:rPr>
+                <a:latin typeface="微软雅黑" panose="020B0503020204020204" charset="-122"/>
+                <a:ea typeface="微软雅黑" panose="020B0503020204020204" charset="-122"/>
+                <a:cs typeface="微软雅黑" panose="020B0503020204020204" charset="-122"/>
+              </a:rPr>
               <a:t>• 随机水平/垂直翻转</a:t>
             </a:r>
+            <a:endParaRPr>
+              <a:latin typeface="微软雅黑" panose="020B0503020204020204" charset="-122"/>
+              <a:ea typeface="微软雅黑" panose="020B0503020204020204" charset="-122"/>
+              <a:cs typeface="微软雅黑" panose="020B0503020204020204" charset="-122"/>
+            </a:endParaRPr>
           </a:p>
           <a:p>
             <a:pPr>
@@ -3703,8 +4373,18 @@
               </a:defRPr>
             </a:pPr>
             <a:r>
+              <a:rPr>
+                <a:latin typeface="微软雅黑" panose="020B0503020204020204" charset="-122"/>
+                <a:ea typeface="微软雅黑" panose="020B0503020204020204" charset="-122"/>
+                <a:cs typeface="微软雅黑" panose="020B0503020204020204" charset="-122"/>
+              </a:rPr>
               <a:t>• 随机旋转 (±20°)</a:t>
             </a:r>
+            <a:endParaRPr>
+              <a:latin typeface="微软雅黑" panose="020B0503020204020204" charset="-122"/>
+              <a:ea typeface="微软雅黑" panose="020B0503020204020204" charset="-122"/>
+              <a:cs typeface="微软雅黑" panose="020B0503020204020204" charset="-122"/>
+            </a:endParaRPr>
           </a:p>
           <a:p>
             <a:pPr>
@@ -3718,11 +4398,240 @@
               </a:defRPr>
             </a:pPr>
             <a:r>
+              <a:rPr>
+                <a:latin typeface="微软雅黑" panose="020B0503020204020204" charset="-122"/>
+                <a:ea typeface="微软雅黑" panose="020B0503020204020204" charset="-122"/>
+                <a:cs typeface="微软雅黑" panose="020B0503020204020204" charset="-122"/>
+              </a:rPr>
               <a:t>• 颜色抖动 (亮度/对比度 ±0.2)</a:t>
             </a:r>
+            <a:endParaRPr>
+              <a:latin typeface="微软雅黑" panose="020B0503020204020204" charset="-122"/>
+              <a:ea typeface="微软雅黑" panose="020B0503020204020204" charset="-122"/>
+              <a:cs typeface="微软雅黑" panose="020B0503020204020204" charset="-122"/>
+            </a:endParaRPr>
           </a:p>
         </p:txBody>
       </p:sp>
+      <p:graphicFrame>
+        <p:nvGraphicFramePr>
+          <p:cNvPr id="9" name="表格 8"/>
+          <p:cNvGraphicFramePr/>
+          <p:nvPr>
+            <p:custDataLst>
+              <p:tags r:id="rId1"/>
+            </p:custDataLst>
+          </p:nvPr>
+        </p:nvGraphicFramePr>
+        <p:xfrm>
+          <a:off x="6711950" y="4845050"/>
+          <a:ext cx="5061585" cy="1767840"/>
+        </p:xfrm>
+        <a:graphic>
+          <a:graphicData uri="http://schemas.openxmlformats.org/drawingml/2006/table">
+            <a:tbl>
+              <a:tblPr firstRow="1" bandRow="1">
+                <a:tableStyleId>{5C22544A-7EE6-4342-B048-85BDC9FD1C3A}</a:tableStyleId>
+              </a:tblPr>
+              <a:tblGrid>
+                <a:gridCol w="1687195"/>
+                <a:gridCol w="1687195"/>
+                <a:gridCol w="1687195"/>
+              </a:tblGrid>
+              <a:tr h="426720">
+                <a:tc>
+                  <a:txBody>
+                    <a:bodyPr/>
+                    <a:p>
+                      <a:pPr algn="ctr">
+                        <a:buNone/>
+                      </a:pPr>
+                      <a:r>
+                        <a:rPr lang="en-US" altLang="zh-CN" b="1"/>
+                        <a:t>mode</a:t>
+                      </a:r>
+                      <a:endParaRPr lang="en-US" altLang="zh-CN" b="1"/>
+                    </a:p>
+                  </a:txBody>
+                  <a:tcPr anchor="ctr" anchorCtr="0"/>
+                </a:tc>
+                <a:tc>
+                  <a:txBody>
+                    <a:bodyPr/>
+                    <a:p>
+                      <a:pPr algn="ctr">
+                        <a:buNone/>
+                      </a:pPr>
+                      <a:r>
+                        <a:rPr lang="zh-CN" altLang="en-US" b="1"/>
+                        <a:t>图像变换</a:t>
+                      </a:r>
+                      <a:endParaRPr lang="zh-CN" altLang="en-US" b="1"/>
+                    </a:p>
+                  </a:txBody>
+                  <a:tcPr anchor="ctr" anchorCtr="0"/>
+                </a:tc>
+                <a:tc>
+                  <a:txBody>
+                    <a:bodyPr/>
+                    <a:p>
+                      <a:pPr algn="ctr">
+                        <a:buNone/>
+                      </a:pPr>
+                      <a:r>
+                        <a:rPr lang="en-US" altLang="zh-CN" b="1"/>
+                        <a:t>mask </a:t>
+                      </a:r>
+                      <a:r>
+                        <a:rPr lang="zh-CN" altLang="en-US" b="1"/>
+                        <a:t>变换</a:t>
+                      </a:r>
+                      <a:endParaRPr lang="zh-CN" altLang="en-US" b="1"/>
+                    </a:p>
+                  </a:txBody>
+                  <a:tcPr anchor="ctr" anchorCtr="0"/>
+                </a:tc>
+              </a:tr>
+              <a:tr h="914400">
+                <a:tc>
+                  <a:txBody>
+                    <a:bodyPr/>
+                    <a:p>
+                      <a:pPr>
+                        <a:buNone/>
+                      </a:pPr>
+                      <a:r>
+                        <a:rPr lang="en-US" altLang="zh-CN" b="1"/>
+                        <a:t>train</a:t>
+                      </a:r>
+                      <a:endParaRPr lang="en-US" altLang="zh-CN" b="1"/>
+                    </a:p>
+                  </a:txBody>
+                  <a:tcPr anchor="ctr" anchorCtr="0"/>
+                </a:tc>
+                <a:tc>
+                  <a:txBody>
+                    <a:bodyPr/>
+                    <a:p>
+                      <a:pPr>
+                        <a:buNone/>
+                      </a:pPr>
+                      <a:r>
+                        <a:rPr lang="en-US" altLang="zh-CN" b="1"/>
+                        <a:t>Resize + </a:t>
+                      </a:r>
+                      <a:r>
+                        <a:rPr lang="zh-CN" altLang="en-US" b="1"/>
+                        <a:t>翻转</a:t>
+                      </a:r>
+                      <a:r>
+                        <a:rPr lang="en-US" altLang="zh-CN" b="1"/>
+                        <a:t> + </a:t>
+                      </a:r>
+                      <a:r>
+                        <a:rPr lang="zh-CN" altLang="en-US" b="1"/>
+                        <a:t>旋转</a:t>
+                      </a:r>
+                      <a:r>
+                        <a:rPr lang="en-US" altLang="zh-CN" b="1"/>
+                        <a:t> + </a:t>
+                      </a:r>
+                      <a:r>
+                        <a:rPr lang="zh-CN" altLang="en-US" b="1"/>
+                        <a:t>颜色抖动</a:t>
+                      </a:r>
+                      <a:r>
+                        <a:rPr lang="en-US" altLang="zh-CN" b="1"/>
+                        <a:t> + </a:t>
+                      </a:r>
+                      <a:r>
+                        <a:rPr lang="zh-CN" altLang="en-US" b="1"/>
+                        <a:t>归一化</a:t>
+                      </a:r>
+                      <a:endParaRPr lang="zh-CN" altLang="en-US" b="1"/>
+                    </a:p>
+                  </a:txBody>
+                  <a:tcPr anchor="ctr" anchorCtr="0"/>
+                </a:tc>
+                <a:tc>
+                  <a:txBody>
+                    <a:bodyPr/>
+                    <a:p>
+                      <a:pPr>
+                        <a:buNone/>
+                      </a:pPr>
+                      <a:r>
+                        <a:rPr lang="zh-CN" altLang="en-US" b="1"/>
+                        <a:t>同样的几何变换（不含颜色抖动）</a:t>
+                      </a:r>
+                      <a:endParaRPr lang="zh-CN" altLang="en-US" b="1"/>
+                    </a:p>
+                  </a:txBody>
+                  <a:tcPr anchor="ctr" anchorCtr="0"/>
+                </a:tc>
+              </a:tr>
+              <a:tr h="426720">
+                <a:tc>
+                  <a:txBody>
+                    <a:bodyPr/>
+                    <a:p>
+                      <a:pPr>
+                        <a:buNone/>
+                      </a:pPr>
+                      <a:r>
+                        <a:rPr lang="en-US" altLang="zh-CN" b="1"/>
+                        <a:t>val / test</a:t>
+                      </a:r>
+                      <a:endParaRPr lang="en-US" altLang="zh-CN" b="1"/>
+                    </a:p>
+                  </a:txBody>
+                  <a:tcPr anchor="ctr" anchorCtr="0"/>
+                </a:tc>
+                <a:tc>
+                  <a:txBody>
+                    <a:bodyPr/>
+                    <a:p>
+                      <a:pPr>
+                        <a:buNone/>
+                      </a:pPr>
+                      <a:r>
+                        <a:rPr lang="en-US" altLang="zh-CN" b="1"/>
+                        <a:t>Resize + </a:t>
+                      </a:r>
+                      <a:r>
+                        <a:rPr lang="zh-CN" altLang="en-US" b="1"/>
+                        <a:t>归一化</a:t>
+                      </a:r>
+                      <a:endParaRPr lang="zh-CN" altLang="en-US" b="1"/>
+                    </a:p>
+                  </a:txBody>
+                  <a:tcPr anchor="ctr" anchorCtr="0"/>
+                </a:tc>
+                <a:tc>
+                  <a:txBody>
+                    <a:bodyPr/>
+                    <a:p>
+                      <a:pPr>
+                        <a:buNone/>
+                      </a:pPr>
+                      <a:r>
+                        <a:rPr lang="zh-CN" altLang="en-US" b="1"/>
+                        <a:t>仅</a:t>
+                      </a:r>
+                      <a:r>
+                        <a:rPr lang="en-US" altLang="zh-CN" b="1"/>
+                        <a:t> Resize</a:t>
+                      </a:r>
+                      <a:endParaRPr lang="en-US" altLang="zh-CN" b="1"/>
+                    </a:p>
+                  </a:txBody>
+                  <a:tcPr anchor="ctr" anchorCtr="0"/>
+                </a:tc>
+              </a:tr>
+            </a:tbl>
+          </a:graphicData>
+        </a:graphic>
+      </p:graphicFrame>
     </p:spTree>
   </p:cSld>
   <p:clrMapOvr>
@@ -3731,8 +4640,8 @@
 </p:sld>
 </file>
 
-<file path=ppt/slides/slide3.xml><?xml version="1.0" encoding="utf-8"?>
-<p:sld xmlns:a="http://schemas.openxmlformats.org/drawingml/2006/main" xmlns:p="http://schemas.openxmlformats.org/presentationml/2006/main" xmlns:r="http://schemas.openxmlformats.org/officeDocument/2006/relationships">
+<file path=ppt/slides/slide4.xml><?xml version="1.0" encoding="utf-8"?>
+<p:sld xmlns:a="http://schemas.openxmlformats.org/drawingml/2006/main" xmlns:r="http://schemas.openxmlformats.org/officeDocument/2006/relationships" xmlns:p="http://schemas.openxmlformats.org/presentationml/2006/main">
   <p:cSld>
     <p:bg>
       <p:bgPr>
@@ -3785,7 +4694,7 @@
           </a:fontRef>
         </p:style>
         <p:txBody>
-          <a:bodyPr rtlCol="0" anchor="ctr" wrap="square" lIns="731520" tIns="137160"/>
+          <a:bodyPr wrap="square" lIns="731520" tIns="137160" rtlCol="0" anchor="ctr"/>
           <a:lstStyle/>
           <a:p>
             <a:pPr algn="l">
@@ -3796,8 +4705,16 @@
               </a:defRPr>
             </a:pPr>
             <a:r>
+              <a:rPr>
+                <a:latin typeface="微软雅黑" panose="020B0503020204020204" charset="-122"/>
+                <a:ea typeface="微软雅黑" panose="020B0503020204020204" charset="-122"/>
+              </a:rPr>
               <a:t>模型架构</a:t>
             </a:r>
+            <a:endParaRPr>
+              <a:latin typeface="微软雅黑" panose="020B0503020204020204" charset="-122"/>
+              <a:ea typeface="微软雅黑" panose="020B0503020204020204" charset="-122"/>
+            </a:endParaRPr>
           </a:p>
         </p:txBody>
       </p:sp>
@@ -3837,7 +4754,7 @@
           </a:fontRef>
         </p:style>
         <p:txBody>
-          <a:bodyPr rtlCol="0" anchor="ctr" lIns="731520"/>
+          <a:bodyPr lIns="731520" rtlCol="0" anchor="ctr"/>
           <a:lstStyle/>
           <a:p>
             <a:pPr algn="l">
@@ -3848,8 +4765,16 @@
               </a:defRPr>
             </a:pPr>
             <a:r>
+              <a:rPr>
+                <a:latin typeface="微软雅黑" panose="020B0503020204020204" charset="-122"/>
+                <a:ea typeface="微软雅黑" panose="020B0503020204020204" charset="-122"/>
+              </a:rPr>
               <a:t>U-Net Architecture</a:t>
             </a:r>
+            <a:endParaRPr>
+              <a:latin typeface="微软雅黑" panose="020B0503020204020204" charset="-122"/>
+              <a:ea typeface="微软雅黑" panose="020B0503020204020204" charset="-122"/>
+            </a:endParaRPr>
           </a:p>
         </p:txBody>
       </p:sp>
@@ -3861,8 +4786,8 @@
         </p:nvSpPr>
         <p:spPr>
           <a:xfrm>
-            <a:off x="731520" y="1828800"/>
-            <a:ext cx="5029200" cy="4572000"/>
+            <a:off x="283210" y="1828800"/>
+            <a:ext cx="6379210" cy="4215765"/>
           </a:xfrm>
           <a:prstGeom prst="rect">
             <a:avLst/>
@@ -3886,8 +4811,18 @@
               </a:defRPr>
             </a:pPr>
             <a:r>
+              <a:rPr>
+                <a:latin typeface="微软雅黑" panose="020B0503020204020204" charset="-122"/>
+                <a:ea typeface="微软雅黑" panose="020B0503020204020204" charset="-122"/>
+                <a:cs typeface="微软雅黑" panose="020B0503020204020204" charset="-122"/>
+              </a:rPr>
               <a:t>🏗️ U-Net 结构</a:t>
             </a:r>
+            <a:endParaRPr>
+              <a:latin typeface="微软雅黑" panose="020B0503020204020204" charset="-122"/>
+              <a:ea typeface="微软雅黑" panose="020B0503020204020204" charset="-122"/>
+              <a:cs typeface="微软雅黑" panose="020B0503020204020204" charset="-122"/>
+            </a:endParaRPr>
           </a:p>
           <a:p>
             <a:pPr>
@@ -3900,6 +4835,35 @@
                 </a:solidFill>
               </a:defRPr>
             </a:pPr>
+            <a:r>
+              <a:rPr lang="zh-CN" altLang="en-US">
+                <a:latin typeface="微软雅黑" panose="020B0503020204020204" charset="-122"/>
+                <a:ea typeface="微软雅黑" panose="020B0503020204020204" charset="-122"/>
+                <a:cs typeface="微软雅黑" panose="020B0503020204020204" charset="-122"/>
+              </a:rPr>
+              <a:t>经典</a:t>
+            </a:r>
+            <a:r>
+              <a:rPr lang="en-US" altLang="zh-CN">
+                <a:latin typeface="微软雅黑" panose="020B0503020204020204" charset="-122"/>
+                <a:ea typeface="微软雅黑" panose="020B0503020204020204" charset="-122"/>
+                <a:cs typeface="微软雅黑" panose="020B0503020204020204" charset="-122"/>
+              </a:rPr>
+              <a:t> U </a:t>
+            </a:r>
+            <a:r>
+              <a:rPr lang="zh-CN" altLang="en-US">
+                <a:latin typeface="微软雅黑" panose="020B0503020204020204" charset="-122"/>
+                <a:ea typeface="微软雅黑" panose="020B0503020204020204" charset="-122"/>
+                <a:cs typeface="微软雅黑" panose="020B0503020204020204" charset="-122"/>
+              </a:rPr>
+              <a:t>形结构，手写实现，不依赖预训练权重。</a:t>
+            </a:r>
+            <a:endParaRPr lang="zh-CN" altLang="en-US">
+              <a:latin typeface="微软雅黑" panose="020B0503020204020204" charset="-122"/>
+              <a:ea typeface="微软雅黑" panose="020B0503020204020204" charset="-122"/>
+              <a:cs typeface="微软雅黑" panose="020B0503020204020204" charset="-122"/>
+            </a:endParaRPr>
           </a:p>
           <a:p>
             <a:pPr>
@@ -3912,9 +4876,38 @@
                 </a:solidFill>
               </a:defRPr>
             </a:pPr>
-            <a:r>
+            <a:endParaRPr>
+              <a:latin typeface="微软雅黑" panose="020B0503020204020204" charset="-122"/>
+              <a:ea typeface="微软雅黑" panose="020B0503020204020204" charset="-122"/>
+              <a:cs typeface="微软雅黑" panose="020B0503020204020204" charset="-122"/>
+            </a:endParaRPr>
+          </a:p>
+          <a:p>
+            <a:pPr marL="285750" indent="-285750">
+              <a:spcAft>
+                <a:spcPts val="600"/>
+              </a:spcAft>
+              <a:buFont typeface="Arial" panose="020B0604020202020204" pitchFamily="34" charset="0"/>
+              <a:buChar char="•"/>
+              <a:defRPr sz="1600">
+                <a:solidFill>
+                  <a:srgbClr val="333333"/>
+                </a:solidFill>
+              </a:defRPr>
+            </a:pPr>
+            <a:r>
+              <a:rPr>
+                <a:latin typeface="微软雅黑" panose="020B0503020204020204" charset="-122"/>
+                <a:ea typeface="微软雅黑" panose="020B0503020204020204" charset="-122"/>
+                <a:cs typeface="微软雅黑" panose="020B0503020204020204" charset="-122"/>
+              </a:rPr>
               <a:t>编码器 (Encoder)</a:t>
             </a:r>
+            <a:endParaRPr>
+              <a:latin typeface="微软雅黑" panose="020B0503020204020204" charset="-122"/>
+              <a:ea typeface="微软雅黑" panose="020B0503020204020204" charset="-122"/>
+              <a:cs typeface="微软雅黑" panose="020B0503020204020204" charset="-122"/>
+            </a:endParaRPr>
           </a:p>
           <a:p>
             <a:pPr>
@@ -3928,8 +4921,18 @@
               </a:defRPr>
             </a:pPr>
             <a:r>
+              <a:rPr>
+                <a:latin typeface="微软雅黑" panose="020B0503020204020204" charset="-122"/>
+                <a:ea typeface="微软雅黑" panose="020B0503020204020204" charset="-122"/>
+                <a:cs typeface="微软雅黑" panose="020B0503020204020204" charset="-122"/>
+              </a:rPr>
               <a:t>  Conv(3→64) → Conv(64→128) → Conv(128→256) → Conv(512)</a:t>
             </a:r>
+            <a:endParaRPr>
+              <a:latin typeface="微软雅黑" panose="020B0503020204020204" charset="-122"/>
+              <a:ea typeface="微软雅黑" panose="020B0503020204020204" charset="-122"/>
+              <a:cs typeface="微软雅黑" panose="020B0503020204020204" charset="-122"/>
+            </a:endParaRPr>
           </a:p>
           <a:p>
             <a:pPr>
@@ -3943,8 +4946,18 @@
               </a:defRPr>
             </a:pPr>
             <a:r>
+              <a:rPr>
+                <a:latin typeface="微软雅黑" panose="020B0503020204020204" charset="-122"/>
+                <a:ea typeface="微软雅黑" panose="020B0503020204020204" charset="-122"/>
+                <a:cs typeface="微软雅黑" panose="020B0503020204020204" charset="-122"/>
+              </a:rPr>
               <a:t>  每层: DoubleConv (Conv-BN-ReLU)×2 + MaxPool</a:t>
             </a:r>
+            <a:endParaRPr>
+              <a:latin typeface="微软雅黑" panose="020B0503020204020204" charset="-122"/>
+              <a:ea typeface="微软雅黑" panose="020B0503020204020204" charset="-122"/>
+              <a:cs typeface="微软雅黑" panose="020B0503020204020204" charset="-122"/>
+            </a:endParaRPr>
           </a:p>
           <a:p>
             <a:pPr>
@@ -3957,12 +4970,19 @@
                 </a:solidFill>
               </a:defRPr>
             </a:pPr>
-          </a:p>
-          <a:p>
-            <a:pPr>
-              <a:spcAft>
-                <a:spcPts val="600"/>
-              </a:spcAft>
+            <a:endParaRPr>
+              <a:latin typeface="微软雅黑" panose="020B0503020204020204" charset="-122"/>
+              <a:ea typeface="微软雅黑" panose="020B0503020204020204" charset="-122"/>
+              <a:cs typeface="微软雅黑" panose="020B0503020204020204" charset="-122"/>
+            </a:endParaRPr>
+          </a:p>
+          <a:p>
+            <a:pPr marL="285750" indent="-285750">
+              <a:spcAft>
+                <a:spcPts val="600"/>
+              </a:spcAft>
+              <a:buFont typeface="Arial" panose="020B0604020202020204" pitchFamily="34" charset="0"/>
+              <a:buChar char="•"/>
               <a:defRPr sz="1600">
                 <a:solidFill>
                   <a:srgbClr val="333333"/>
@@ -3970,8 +4990,18 @@
               </a:defRPr>
             </a:pPr>
             <a:r>
+              <a:rPr>
+                <a:latin typeface="微软雅黑" panose="020B0503020204020204" charset="-122"/>
+                <a:ea typeface="微软雅黑" panose="020B0503020204020204" charset="-122"/>
+                <a:cs typeface="微软雅黑" panose="020B0503020204020204" charset="-122"/>
+              </a:rPr>
               <a:t>瓶颈层 (Bottleneck)</a:t>
             </a:r>
+            <a:endParaRPr>
+              <a:latin typeface="微软雅黑" panose="020B0503020204020204" charset="-122"/>
+              <a:ea typeface="微软雅黑" panose="020B0503020204020204" charset="-122"/>
+              <a:cs typeface="微软雅黑" panose="020B0503020204020204" charset="-122"/>
+            </a:endParaRPr>
           </a:p>
           <a:p>
             <a:pPr>
@@ -3985,8 +5015,18 @@
               </a:defRPr>
             </a:pPr>
             <a:r>
+              <a:rPr>
+                <a:latin typeface="微软雅黑" panose="020B0503020204020204" charset="-122"/>
+                <a:ea typeface="微软雅黑" panose="020B0503020204020204" charset="-122"/>
+                <a:cs typeface="微软雅黑" panose="020B0503020204020204" charset="-122"/>
+              </a:rPr>
               <a:t>  Conv(512→1024)</a:t>
             </a:r>
+            <a:endParaRPr>
+              <a:latin typeface="微软雅黑" panose="020B0503020204020204" charset="-122"/>
+              <a:ea typeface="微软雅黑" panose="020B0503020204020204" charset="-122"/>
+              <a:cs typeface="微软雅黑" panose="020B0503020204020204" charset="-122"/>
+            </a:endParaRPr>
           </a:p>
           <a:p>
             <a:pPr>
@@ -3999,12 +5039,19 @@
                 </a:solidFill>
               </a:defRPr>
             </a:pPr>
-          </a:p>
-          <a:p>
-            <a:pPr>
-              <a:spcAft>
-                <a:spcPts val="600"/>
-              </a:spcAft>
+            <a:endParaRPr>
+              <a:latin typeface="微软雅黑" panose="020B0503020204020204" charset="-122"/>
+              <a:ea typeface="微软雅黑" panose="020B0503020204020204" charset="-122"/>
+              <a:cs typeface="微软雅黑" panose="020B0503020204020204" charset="-122"/>
+            </a:endParaRPr>
+          </a:p>
+          <a:p>
+            <a:pPr marL="285750" indent="-285750">
+              <a:spcAft>
+                <a:spcPts val="600"/>
+              </a:spcAft>
+              <a:buFont typeface="Arial" panose="020B0604020202020204" pitchFamily="34" charset="0"/>
+              <a:buChar char="•"/>
               <a:defRPr sz="1600">
                 <a:solidFill>
                   <a:srgbClr val="333333"/>
@@ -4012,8 +5059,18 @@
               </a:defRPr>
             </a:pPr>
             <a:r>
+              <a:rPr>
+                <a:latin typeface="微软雅黑" panose="020B0503020204020204" charset="-122"/>
+                <a:ea typeface="微软雅黑" panose="020B0503020204020204" charset="-122"/>
+                <a:cs typeface="微软雅黑" panose="020B0503020204020204" charset="-122"/>
+              </a:rPr>
               <a:t>解码器 (Decoder)</a:t>
             </a:r>
+            <a:endParaRPr>
+              <a:latin typeface="微软雅黑" panose="020B0503020204020204" charset="-122"/>
+              <a:ea typeface="微软雅黑" panose="020B0503020204020204" charset="-122"/>
+              <a:cs typeface="微软雅黑" panose="020B0503020204020204" charset="-122"/>
+            </a:endParaRPr>
           </a:p>
           <a:p>
             <a:pPr>
@@ -4027,8 +5084,18 @@
               </a:defRPr>
             </a:pPr>
             <a:r>
+              <a:rPr>
+                <a:latin typeface="微软雅黑" panose="020B0503020204020204" charset="-122"/>
+                <a:ea typeface="微软雅黑" panose="020B0503020204020204" charset="-122"/>
+                <a:cs typeface="微软雅黑" panose="020B0503020204020204" charset="-122"/>
+              </a:rPr>
               <a:t>  ConvTranspose + Skip Connection + DoubleConv</a:t>
             </a:r>
+            <a:endParaRPr>
+              <a:latin typeface="微软雅黑" panose="020B0503020204020204" charset="-122"/>
+              <a:ea typeface="微软雅黑" panose="020B0503020204020204" charset="-122"/>
+              <a:cs typeface="微软雅黑" panose="020B0503020204020204" charset="-122"/>
+            </a:endParaRPr>
           </a:p>
           <a:p>
             <a:pPr>
@@ -4042,8 +5109,18 @@
               </a:defRPr>
             </a:pPr>
             <a:r>
+              <a:rPr>
+                <a:latin typeface="微软雅黑" panose="020B0503020204020204" charset="-122"/>
+                <a:ea typeface="微软雅黑" panose="020B0503020204020204" charset="-122"/>
+                <a:cs typeface="微软雅黑" panose="020B0503020204020204" charset="-122"/>
+              </a:rPr>
               <a:t>  (1024→512→256→128→64)</a:t>
             </a:r>
+            <a:endParaRPr>
+              <a:latin typeface="微软雅黑" panose="020B0503020204020204" charset="-122"/>
+              <a:ea typeface="微软雅黑" panose="020B0503020204020204" charset="-122"/>
+              <a:cs typeface="微软雅黑" panose="020B0503020204020204" charset="-122"/>
+            </a:endParaRPr>
           </a:p>
         </p:txBody>
       </p:sp>
@@ -4055,8 +5132,8 @@
         </p:nvSpPr>
         <p:spPr>
           <a:xfrm>
-            <a:off x="6400800" y="1828800"/>
-            <a:ext cx="5029200" cy="4572000"/>
+            <a:off x="7013575" y="2005965"/>
+            <a:ext cx="4374515" cy="3892550"/>
           </a:xfrm>
           <a:prstGeom prst="rect">
             <a:avLst/>
@@ -4080,8 +5157,18 @@
               </a:defRPr>
             </a:pPr>
             <a:r>
+              <a:rPr>
+                <a:latin typeface="微软雅黑" panose="020B0503020204020204" charset="-122"/>
+                <a:ea typeface="微软雅黑" panose="020B0503020204020204" charset="-122"/>
+                <a:cs typeface="微软雅黑" panose="020B0503020204020204" charset="-122"/>
+              </a:rPr>
               <a:t>📐 模型参数</a:t>
             </a:r>
+            <a:endParaRPr>
+              <a:latin typeface="微软雅黑" panose="020B0503020204020204" charset="-122"/>
+              <a:ea typeface="微软雅黑" panose="020B0503020204020204" charset="-122"/>
+              <a:cs typeface="微软雅黑" panose="020B0503020204020204" charset="-122"/>
+            </a:endParaRPr>
           </a:p>
           <a:p>
             <a:pPr>
@@ -4094,6 +5181,11 @@
                 </a:solidFill>
               </a:defRPr>
             </a:pPr>
+            <a:endParaRPr>
+              <a:latin typeface="微软雅黑" panose="020B0503020204020204" charset="-122"/>
+              <a:ea typeface="微软雅黑" panose="020B0503020204020204" charset="-122"/>
+              <a:cs typeface="微软雅黑" panose="020B0503020204020204" charset="-122"/>
+            </a:endParaRPr>
           </a:p>
           <a:p>
             <a:pPr>
@@ -4107,8 +5199,18 @@
               </a:defRPr>
             </a:pPr>
             <a:r>
+              <a:rPr>
+                <a:latin typeface="微软雅黑" panose="020B0503020204020204" charset="-122"/>
+                <a:ea typeface="微软雅黑" panose="020B0503020204020204" charset="-122"/>
+                <a:cs typeface="微软雅黑" panose="020B0503020204020204" charset="-122"/>
+              </a:rPr>
               <a:t>• 总参数量: 31,037,633 (~31M)</a:t>
             </a:r>
+            <a:endParaRPr>
+              <a:latin typeface="微软雅黑" panose="020B0503020204020204" charset="-122"/>
+              <a:ea typeface="微软雅黑" panose="020B0503020204020204" charset="-122"/>
+              <a:cs typeface="微软雅黑" panose="020B0503020204020204" charset="-122"/>
+            </a:endParaRPr>
           </a:p>
           <a:p>
             <a:pPr>
@@ -4122,8 +5224,18 @@
               </a:defRPr>
             </a:pPr>
             <a:r>
+              <a:rPr>
+                <a:latin typeface="微软雅黑" panose="020B0503020204020204" charset="-122"/>
+                <a:ea typeface="微软雅黑" panose="020B0503020204020204" charset="-122"/>
+                <a:cs typeface="微软雅黑" panose="020B0503020204020204" charset="-122"/>
+              </a:rPr>
               <a:t>• 输入: 3 × 256 × 256 (RGB图像)</a:t>
             </a:r>
+            <a:endParaRPr>
+              <a:latin typeface="微软雅黑" panose="020B0503020204020204" charset="-122"/>
+              <a:ea typeface="微软雅黑" panose="020B0503020204020204" charset="-122"/>
+              <a:cs typeface="微软雅黑" panose="020B0503020204020204" charset="-122"/>
+            </a:endParaRPr>
           </a:p>
           <a:p>
             <a:pPr>
@@ -4137,8 +5249,18 @@
               </a:defRPr>
             </a:pPr>
             <a:r>
+              <a:rPr>
+                <a:latin typeface="微软雅黑" panose="020B0503020204020204" charset="-122"/>
+                <a:ea typeface="微软雅黑" panose="020B0503020204020204" charset="-122"/>
+                <a:cs typeface="微软雅黑" panose="020B0503020204020204" charset="-122"/>
+              </a:rPr>
               <a:t>• 输出: 1 × 256 × 256 (分割概率图)</a:t>
             </a:r>
+            <a:endParaRPr>
+              <a:latin typeface="微软雅黑" panose="020B0503020204020204" charset="-122"/>
+              <a:ea typeface="微软雅黑" panose="020B0503020204020204" charset="-122"/>
+              <a:cs typeface="微软雅黑" panose="020B0503020204020204" charset="-122"/>
+            </a:endParaRPr>
           </a:p>
           <a:p>
             <a:pPr>
@@ -4151,6 +5273,11 @@
                 </a:solidFill>
               </a:defRPr>
             </a:pPr>
+            <a:endParaRPr>
+              <a:latin typeface="微软雅黑" panose="020B0503020204020204" charset="-122"/>
+              <a:ea typeface="微软雅黑" panose="020B0503020204020204" charset="-122"/>
+              <a:cs typeface="微软雅黑" panose="020B0503020204020204" charset="-122"/>
+            </a:endParaRPr>
           </a:p>
           <a:p>
             <a:pPr>
@@ -4163,9 +5290,36 @@
                 </a:solidFill>
               </a:defRPr>
             </a:pPr>
-            <a:r>
+            <a:endParaRPr>
+              <a:latin typeface="微软雅黑" panose="020B0503020204020204" charset="-122"/>
+              <a:ea typeface="微软雅黑" panose="020B0503020204020204" charset="-122"/>
+              <a:cs typeface="微软雅黑" panose="020B0503020204020204" charset="-122"/>
+            </a:endParaRPr>
+          </a:p>
+          <a:p>
+            <a:pPr>
+              <a:spcAft>
+                <a:spcPts val="600"/>
+              </a:spcAft>
+              <a:defRPr sz="1600">
+                <a:solidFill>
+                  <a:srgbClr val="333333"/>
+                </a:solidFill>
+              </a:defRPr>
+            </a:pPr>
+            <a:r>
+              <a:rPr>
+                <a:latin typeface="微软雅黑" panose="020B0503020204020204" charset="-122"/>
+                <a:ea typeface="微软雅黑" panose="020B0503020204020204" charset="-122"/>
+                <a:cs typeface="微软雅黑" panose="020B0503020204020204" charset="-122"/>
+              </a:rPr>
               <a:t>🔑 关键设计</a:t>
             </a:r>
+            <a:endParaRPr>
+              <a:latin typeface="微软雅黑" panose="020B0503020204020204" charset="-122"/>
+              <a:ea typeface="微软雅黑" panose="020B0503020204020204" charset="-122"/>
+              <a:cs typeface="微软雅黑" panose="020B0503020204020204" charset="-122"/>
+            </a:endParaRPr>
           </a:p>
           <a:p>
             <a:pPr>
@@ -4179,8 +5333,18 @@
               </a:defRPr>
             </a:pPr>
             <a:r>
+              <a:rPr>
+                <a:latin typeface="微软雅黑" panose="020B0503020204020204" charset="-122"/>
+                <a:ea typeface="微软雅黑" panose="020B0503020204020204" charset="-122"/>
+                <a:cs typeface="微软雅黑" panose="020B0503020204020204" charset="-122"/>
+              </a:rPr>
               <a:t>• 跳跃连接 (Skip Connections)</a:t>
             </a:r>
+            <a:endParaRPr>
+              <a:latin typeface="微软雅黑" panose="020B0503020204020204" charset="-122"/>
+              <a:ea typeface="微软雅黑" panose="020B0503020204020204" charset="-122"/>
+              <a:cs typeface="微软雅黑" panose="020B0503020204020204" charset="-122"/>
+            </a:endParaRPr>
           </a:p>
           <a:p>
             <a:pPr>
@@ -4194,8 +5358,18 @@
               </a:defRPr>
             </a:pPr>
             <a:r>
+              <a:rPr>
+                <a:latin typeface="微软雅黑" panose="020B0503020204020204" charset="-122"/>
+                <a:ea typeface="微软雅黑" panose="020B0503020204020204" charset="-122"/>
+                <a:cs typeface="微软雅黑" panose="020B0503020204020204" charset="-122"/>
+              </a:rPr>
               <a:t>  保留浅层细节信息，缓解下采样信息丢失</a:t>
             </a:r>
+            <a:endParaRPr>
+              <a:latin typeface="微软雅黑" panose="020B0503020204020204" charset="-122"/>
+              <a:ea typeface="微软雅黑" panose="020B0503020204020204" charset="-122"/>
+              <a:cs typeface="微软雅黑" panose="020B0503020204020204" charset="-122"/>
+            </a:endParaRPr>
           </a:p>
           <a:p>
             <a:pPr>
@@ -4209,8 +5383,18 @@
               </a:defRPr>
             </a:pPr>
             <a:r>
+              <a:rPr>
+                <a:latin typeface="微软雅黑" panose="020B0503020204020204" charset="-122"/>
+                <a:ea typeface="微软雅黑" panose="020B0503020204020204" charset="-122"/>
+                <a:cs typeface="微软雅黑" panose="020B0503020204020204" charset="-122"/>
+              </a:rPr>
               <a:t>• 对称编码器-解码器结构</a:t>
             </a:r>
+            <a:endParaRPr>
+              <a:latin typeface="微软雅黑" panose="020B0503020204020204" charset="-122"/>
+              <a:ea typeface="微软雅黑" panose="020B0503020204020204" charset="-122"/>
+              <a:cs typeface="微软雅黑" panose="020B0503020204020204" charset="-122"/>
+            </a:endParaRPr>
           </a:p>
           <a:p>
             <a:pPr>
@@ -4224,8 +5408,18 @@
               </a:defRPr>
             </a:pPr>
             <a:r>
+              <a:rPr>
+                <a:latin typeface="微软雅黑" panose="020B0503020204020204" charset="-122"/>
+                <a:ea typeface="微软雅黑" panose="020B0503020204020204" charset="-122"/>
+                <a:cs typeface="微软雅黑" panose="020B0503020204020204" charset="-122"/>
+              </a:rPr>
               <a:t>• 端到端训练，无需预训练权重</a:t>
             </a:r>
+            <a:endParaRPr>
+              <a:latin typeface="微软雅黑" panose="020B0503020204020204" charset="-122"/>
+              <a:ea typeface="微软雅黑" panose="020B0503020204020204" charset="-122"/>
+              <a:cs typeface="微软雅黑" panose="020B0503020204020204" charset="-122"/>
+            </a:endParaRPr>
           </a:p>
         </p:txBody>
       </p:sp>
@@ -4237,8 +5431,8 @@
 </p:sld>
 </file>
 
-<file path=ppt/slides/slide4.xml><?xml version="1.0" encoding="utf-8"?>
-<p:sld xmlns:a="http://schemas.openxmlformats.org/drawingml/2006/main" xmlns:p="http://schemas.openxmlformats.org/presentationml/2006/main" xmlns:r="http://schemas.openxmlformats.org/officeDocument/2006/relationships">
+<file path=ppt/slides/slide5.xml><?xml version="1.0" encoding="utf-8"?>
+<p:sld xmlns:a="http://schemas.openxmlformats.org/drawingml/2006/main" xmlns:r="http://schemas.openxmlformats.org/officeDocument/2006/relationships" xmlns:p="http://schemas.openxmlformats.org/presentationml/2006/main">
   <p:cSld>
     <p:bg>
       <p:bgPr>
@@ -4291,7 +5485,7 @@
           </a:fontRef>
         </p:style>
         <p:txBody>
-          <a:bodyPr rtlCol="0" anchor="ctr" wrap="square" lIns="731520" tIns="137160"/>
+          <a:bodyPr wrap="square" lIns="731520" tIns="137160" rtlCol="0" anchor="ctr"/>
           <a:lstStyle/>
           <a:p>
             <a:pPr algn="l">
@@ -4302,8 +5496,16 @@
               </a:defRPr>
             </a:pPr>
             <a:r>
-              <a:t>训练配置</a:t>
-            </a:r>
+              <a:rPr>
+                <a:latin typeface="微软雅黑" panose="020B0503020204020204" charset="-122"/>
+                <a:ea typeface="微软雅黑" panose="020B0503020204020204" charset="-122"/>
+              </a:rPr>
+              <a:t>模型架构</a:t>
+            </a:r>
+            <a:endParaRPr>
+              <a:latin typeface="微软雅黑" panose="020B0503020204020204" charset="-122"/>
+              <a:ea typeface="微软雅黑" panose="020B0503020204020204" charset="-122"/>
+            </a:endParaRPr>
           </a:p>
         </p:txBody>
       </p:sp>
@@ -4343,7 +5545,7 @@
           </a:fontRef>
         </p:style>
         <p:txBody>
-          <a:bodyPr rtlCol="0" anchor="ctr" lIns="731520"/>
+          <a:bodyPr lIns="731520" rtlCol="0" anchor="ctr"/>
           <a:lstStyle/>
           <a:p>
             <a:pPr algn="l">
@@ -4354,8 +5556,38 @@
               </a:defRPr>
             </a:pPr>
             <a:r>
-              <a:t>Training Configuration</a:t>
-            </a:r>
+              <a:rPr>
+                <a:latin typeface="微软雅黑" panose="020B0503020204020204" charset="-122"/>
+                <a:ea typeface="微软雅黑" panose="020B0503020204020204" charset="-122"/>
+              </a:rPr>
+              <a:t>U-Net Architecture</a:t>
+            </a:r>
+            <a:r>
+              <a:rPr lang="en-US">
+                <a:latin typeface="微软雅黑" panose="020B0503020204020204" charset="-122"/>
+                <a:ea typeface="微软雅黑" panose="020B0503020204020204" charset="-122"/>
+              </a:rPr>
+              <a:t>+</a:t>
+            </a:r>
+            <a:r>
+              <a:rPr lang="en-US" altLang="zh-CN">
+                <a:latin typeface="微软雅黑" panose="020B0503020204020204" charset="-122"/>
+                <a:ea typeface="微软雅黑" panose="020B0503020204020204" charset="-122"/>
+              </a:rPr>
+              <a:t>ResNet34 </a:t>
+            </a:r>
+            <a:r>
+              <a:rPr>
+                <a:latin typeface="微软雅黑" panose="020B0503020204020204" charset="-122"/>
+                <a:ea typeface="微软雅黑" panose="020B0503020204020204" charset="-122"/>
+                <a:sym typeface="+mn-ea"/>
+              </a:rPr>
+              <a:t>Architecture</a:t>
+            </a:r>
+            <a:endParaRPr lang="en-US" altLang="zh-CN">
+              <a:latin typeface="微软雅黑" panose="020B0503020204020204" charset="-122"/>
+              <a:ea typeface="微软雅黑" panose="020B0503020204020204" charset="-122"/>
+            </a:endParaRPr>
           </a:p>
         </p:txBody>
       </p:sp>
@@ -4367,8 +5599,8 @@
         </p:nvSpPr>
         <p:spPr>
           <a:xfrm>
-            <a:off x="731520" y="1828800"/>
-            <a:ext cx="5029200" cy="4572000"/>
+            <a:off x="283210" y="1828800"/>
+            <a:ext cx="6379210" cy="3491865"/>
           </a:xfrm>
           <a:prstGeom prst="rect">
             <a:avLst/>
@@ -4385,174 +5617,433 @@
               <a:spcAft>
                 <a:spcPts val="600"/>
               </a:spcAft>
-              <a:defRPr sz="1800">
-                <a:solidFill>
-                  <a:srgbClr val="333333"/>
-                </a:solidFill>
-              </a:defRPr>
-            </a:pPr>
-            <a:r>
-              <a:t>⚙️ 超参数设置</a:t>
-            </a:r>
-          </a:p>
-          <a:p>
-            <a:pPr>
-              <a:spcAft>
-                <a:spcPts val="600"/>
-              </a:spcAft>
-              <a:defRPr sz="1800">
-                <a:solidFill>
-                  <a:srgbClr val="333333"/>
-                </a:solidFill>
-              </a:defRPr>
-            </a:pPr>
-          </a:p>
-          <a:p>
-            <a:pPr>
-              <a:spcAft>
-                <a:spcPts val="600"/>
-              </a:spcAft>
-              <a:defRPr sz="1800">
-                <a:solidFill>
-                  <a:srgbClr val="333333"/>
-                </a:solidFill>
-              </a:defRPr>
-            </a:pPr>
-            <a:r>
-              <a:t>• 优化器: Adam (lr=1e-4, weight_decay=1e-4)</a:t>
-            </a:r>
-          </a:p>
-          <a:p>
-            <a:pPr>
-              <a:spcAft>
-                <a:spcPts val="600"/>
-              </a:spcAft>
-              <a:defRPr sz="1800">
-                <a:solidFill>
-                  <a:srgbClr val="333333"/>
-                </a:solidFill>
-              </a:defRPr>
-            </a:pPr>
-            <a:r>
-              <a:t>• 损失函数: Dice Loss + BCE Loss (组合)</a:t>
-            </a:r>
-          </a:p>
-          <a:p>
-            <a:pPr>
-              <a:spcAft>
-                <a:spcPts val="600"/>
-              </a:spcAft>
-              <a:defRPr sz="1800">
-                <a:solidFill>
-                  <a:srgbClr val="333333"/>
-                </a:solidFill>
-              </a:defRPr>
-            </a:pPr>
-            <a:r>
-              <a:t>• Batch Size: 8</a:t>
-            </a:r>
-          </a:p>
-          <a:p>
-            <a:pPr>
-              <a:spcAft>
-                <a:spcPts val="600"/>
-              </a:spcAft>
-              <a:defRPr sz="1800">
-                <a:solidFill>
-                  <a:srgbClr val="333333"/>
-                </a:solidFill>
-              </a:defRPr>
-            </a:pPr>
-            <a:r>
-              <a:t>• Epochs: 50</a:t>
-            </a:r>
-          </a:p>
-          <a:p>
-            <a:pPr>
-              <a:spcAft>
-                <a:spcPts val="600"/>
-              </a:spcAft>
-              <a:defRPr sz="1800">
-                <a:solidFill>
-                  <a:srgbClr val="333333"/>
-                </a:solidFill>
-              </a:defRPr>
-            </a:pPr>
-            <a:r>
-              <a:t>• 输入尺寸: 256×256</a:t>
-            </a:r>
-          </a:p>
-          <a:p>
-            <a:pPr>
-              <a:spcAft>
-                <a:spcPts val="600"/>
-              </a:spcAft>
-              <a:defRPr sz="1800">
-                <a:solidFill>
-                  <a:srgbClr val="333333"/>
-                </a:solidFill>
-              </a:defRPr>
-            </a:pPr>
-          </a:p>
-          <a:p>
-            <a:pPr>
-              <a:spcAft>
-                <a:spcPts val="600"/>
-              </a:spcAft>
-              <a:defRPr sz="1800">
-                <a:solidFill>
-                  <a:srgbClr val="333333"/>
-                </a:solidFill>
-              </a:defRPr>
-            </a:pPr>
-            <a:r>
-              <a:t>📉 学习率调度</a:t>
-            </a:r>
-          </a:p>
-          <a:p>
-            <a:pPr>
-              <a:spcAft>
-                <a:spcPts val="600"/>
-              </a:spcAft>
-              <a:defRPr sz="1800">
-                <a:solidFill>
-                  <a:srgbClr val="333333"/>
-                </a:solidFill>
-              </a:defRPr>
-            </a:pPr>
-            <a:r>
-              <a:t>• ReduceLROnPlateau</a:t>
-            </a:r>
-          </a:p>
-          <a:p>
-            <a:pPr>
-              <a:spcAft>
-                <a:spcPts val="600"/>
-              </a:spcAft>
-              <a:defRPr sz="1800">
-                <a:solidFill>
-                  <a:srgbClr val="333333"/>
-                </a:solidFill>
-              </a:defRPr>
-            </a:pPr>
-            <a:r>
-              <a:t>• patience=5, factor=0.5</a:t>
-            </a:r>
-          </a:p>
-          <a:p>
-            <a:pPr>
-              <a:spcAft>
-                <a:spcPts val="600"/>
-              </a:spcAft>
-              <a:defRPr sz="1800">
-                <a:solidFill>
-                  <a:srgbClr val="333333"/>
-                </a:solidFill>
-              </a:defRPr>
-            </a:pPr>
-            <a:r>
-              <a:t>• 初始 1e-4 → 最低 6e-6</a:t>
-            </a:r>
+              <a:defRPr sz="1600">
+                <a:solidFill>
+                  <a:srgbClr val="333333"/>
+                </a:solidFill>
+              </a:defRPr>
+            </a:pPr>
+            <a:r>
+              <a:rPr>
+                <a:latin typeface="微软雅黑" panose="020B0503020204020204" charset="-122"/>
+                <a:ea typeface="微软雅黑" panose="020B0503020204020204" charset="-122"/>
+                <a:cs typeface="微软雅黑" panose="020B0503020204020204" charset="-122"/>
+              </a:rPr>
+              <a:t>🏗️ </a:t>
+            </a:r>
+            <a:r>
+              <a:rPr lang="zh-CN" altLang="en-US">
+                <a:latin typeface="微软雅黑" panose="020B0503020204020204" charset="-122"/>
+                <a:ea typeface="微软雅黑" panose="020B0503020204020204" charset="-122"/>
+                <a:cs typeface="微软雅黑" panose="020B0503020204020204" charset="-122"/>
+              </a:rPr>
+              <a:t>在基础</a:t>
+            </a:r>
+            <a:r>
+              <a:rPr lang="en-US" altLang="zh-CN">
+                <a:latin typeface="微软雅黑" panose="020B0503020204020204" charset="-122"/>
+                <a:ea typeface="微软雅黑" panose="020B0503020204020204" charset="-122"/>
+                <a:cs typeface="微软雅黑" panose="020B0503020204020204" charset="-122"/>
+              </a:rPr>
+              <a:t> U-Net </a:t>
+            </a:r>
+            <a:r>
+              <a:rPr lang="zh-CN" altLang="en-US">
+                <a:latin typeface="微软雅黑" panose="020B0503020204020204" charset="-122"/>
+                <a:ea typeface="微软雅黑" panose="020B0503020204020204" charset="-122"/>
+                <a:cs typeface="微软雅黑" panose="020B0503020204020204" charset="-122"/>
+              </a:rPr>
+              <a:t>上的改进：</a:t>
+            </a:r>
+            <a:endParaRPr lang="zh-CN" altLang="en-US">
+              <a:latin typeface="微软雅黑" panose="020B0503020204020204" charset="-122"/>
+              <a:ea typeface="微软雅黑" panose="020B0503020204020204" charset="-122"/>
+              <a:cs typeface="微软雅黑" panose="020B0503020204020204" charset="-122"/>
+            </a:endParaRPr>
+          </a:p>
+          <a:p>
+            <a:pPr indent="457200">
+              <a:spcAft>
+                <a:spcPts val="600"/>
+              </a:spcAft>
+              <a:defRPr sz="1600">
+                <a:solidFill>
+                  <a:srgbClr val="333333"/>
+                </a:solidFill>
+              </a:defRPr>
+            </a:pPr>
+            <a:r>
+              <a:rPr lang="zh-CN" altLang="en-US">
+                <a:latin typeface="微软雅黑" panose="020B0503020204020204" charset="-122"/>
+                <a:ea typeface="微软雅黑" panose="020B0503020204020204" charset="-122"/>
+                <a:cs typeface="微软雅黑" panose="020B0503020204020204" charset="-122"/>
+              </a:rPr>
+              <a:t>编码器换成</a:t>
+            </a:r>
+            <a:r>
+              <a:rPr lang="en-US" altLang="zh-CN">
+                <a:latin typeface="微软雅黑" panose="020B0503020204020204" charset="-122"/>
+                <a:ea typeface="微软雅黑" panose="020B0503020204020204" charset="-122"/>
+                <a:cs typeface="微软雅黑" panose="020B0503020204020204" charset="-122"/>
+              </a:rPr>
+              <a:t> ImageNet </a:t>
+            </a:r>
+            <a:r>
+              <a:rPr lang="zh-CN" altLang="en-US">
+                <a:latin typeface="微软雅黑" panose="020B0503020204020204" charset="-122"/>
+                <a:ea typeface="微软雅黑" panose="020B0503020204020204" charset="-122"/>
+                <a:cs typeface="微软雅黑" panose="020B0503020204020204" charset="-122"/>
+              </a:rPr>
+              <a:t>预训练</a:t>
+            </a:r>
+            <a:r>
+              <a:rPr lang="en-US" altLang="zh-CN">
+                <a:latin typeface="微软雅黑" panose="020B0503020204020204" charset="-122"/>
+                <a:ea typeface="微软雅黑" panose="020B0503020204020204" charset="-122"/>
+                <a:cs typeface="微软雅黑" panose="020B0503020204020204" charset="-122"/>
+              </a:rPr>
+              <a:t> ResNet34</a:t>
+            </a:r>
+            <a:r>
+              <a:rPr lang="zh-CN" altLang="en-US">
+                <a:latin typeface="微软雅黑" panose="020B0503020204020204" charset="-122"/>
+                <a:ea typeface="微软雅黑" panose="020B0503020204020204" charset="-122"/>
+                <a:cs typeface="微软雅黑" panose="020B0503020204020204" charset="-122"/>
+              </a:rPr>
+              <a:t>，解码器仍是</a:t>
+            </a:r>
+            <a:r>
+              <a:rPr lang="en-US" altLang="zh-CN">
+                <a:latin typeface="微软雅黑" panose="020B0503020204020204" charset="-122"/>
+                <a:ea typeface="微软雅黑" panose="020B0503020204020204" charset="-122"/>
+                <a:cs typeface="微软雅黑" panose="020B0503020204020204" charset="-122"/>
+              </a:rPr>
+              <a:t> U-Net </a:t>
+            </a:r>
+            <a:r>
+              <a:rPr lang="zh-CN" altLang="en-US">
+                <a:latin typeface="微软雅黑" panose="020B0503020204020204" charset="-122"/>
+                <a:ea typeface="微软雅黑" panose="020B0503020204020204" charset="-122"/>
+                <a:cs typeface="微软雅黑" panose="020B0503020204020204" charset="-122"/>
+              </a:rPr>
+              <a:t>风格。</a:t>
+            </a:r>
+            <a:endParaRPr lang="zh-CN" altLang="en-US">
+              <a:latin typeface="微软雅黑" panose="020B0503020204020204" charset="-122"/>
+              <a:ea typeface="微软雅黑" panose="020B0503020204020204" charset="-122"/>
+              <a:cs typeface="微软雅黑" panose="020B0503020204020204" charset="-122"/>
+            </a:endParaRPr>
+          </a:p>
+          <a:p>
+            <a:pPr marL="285750" indent="-285750">
+              <a:spcAft>
+                <a:spcPts val="600"/>
+              </a:spcAft>
+              <a:buFont typeface="Arial" panose="020B0604020202020204" pitchFamily="34" charset="0"/>
+              <a:buChar char="•"/>
+              <a:defRPr sz="1600">
+                <a:solidFill>
+                  <a:srgbClr val="333333"/>
+                </a:solidFill>
+              </a:defRPr>
+            </a:pPr>
+            <a:r>
+              <a:rPr>
+                <a:latin typeface="微软雅黑" panose="020B0503020204020204" charset="-122"/>
+                <a:ea typeface="微软雅黑" panose="020B0503020204020204" charset="-122"/>
+                <a:cs typeface="微软雅黑" panose="020B0503020204020204" charset="-122"/>
+              </a:rPr>
+              <a:t>编码器 (Encoder)</a:t>
+            </a:r>
+            <a:endParaRPr>
+              <a:latin typeface="微软雅黑" panose="020B0503020204020204" charset="-122"/>
+              <a:ea typeface="微软雅黑" panose="020B0503020204020204" charset="-122"/>
+              <a:cs typeface="微软雅黑" panose="020B0503020204020204" charset="-122"/>
+            </a:endParaRPr>
+          </a:p>
+          <a:p>
+            <a:pPr>
+              <a:spcAft>
+                <a:spcPts val="600"/>
+              </a:spcAft>
+              <a:defRPr sz="1600">
+                <a:solidFill>
+                  <a:srgbClr val="333333"/>
+                </a:solidFill>
+              </a:defRPr>
+            </a:pPr>
+            <a:r>
+              <a:rPr>
+                <a:latin typeface="微软雅黑" panose="020B0503020204020204" charset="-122"/>
+                <a:ea typeface="微软雅黑" panose="020B0503020204020204" charset="-122"/>
+                <a:cs typeface="微软雅黑" panose="020B0503020204020204" charset="-122"/>
+              </a:rPr>
+              <a:t>  </a:t>
+            </a:r>
+            <a:r>
+              <a:rPr lang="zh-CN" altLang="en-US">
+                <a:latin typeface="微软雅黑" panose="020B0503020204020204" charset="-122"/>
+                <a:ea typeface="微软雅黑" panose="020B0503020204020204" charset="-122"/>
+                <a:cs typeface="微软雅黑" panose="020B0503020204020204" charset="-122"/>
+              </a:rPr>
+              <a:t>从</a:t>
+            </a:r>
+            <a:r>
+              <a:rPr lang="en-US" altLang="zh-CN">
+                <a:latin typeface="微软雅黑" panose="020B0503020204020204" charset="-122"/>
+                <a:ea typeface="微软雅黑" panose="020B0503020204020204" charset="-122"/>
+                <a:cs typeface="微软雅黑" panose="020B0503020204020204" charset="-122"/>
+              </a:rPr>
+              <a:t> </a:t>
+            </a:r>
+            <a:r>
+              <a:rPr lang="en-US" altLang="zh-CN">
+                <a:latin typeface="微软雅黑" panose="020B0503020204020204" charset="-122"/>
+                <a:ea typeface="微软雅黑" panose="020B0503020204020204" charset="-122"/>
+                <a:cs typeface="微软雅黑" panose="020B0503020204020204" charset="-122"/>
+                <a:sym typeface="+mn-ea"/>
+              </a:rPr>
+              <a:t>ResNet34</a:t>
+            </a:r>
+            <a:r>
+              <a:rPr lang="zh-CN" altLang="en-US">
+                <a:latin typeface="微软雅黑" panose="020B0503020204020204" charset="-122"/>
+                <a:ea typeface="微软雅黑" panose="020B0503020204020204" charset="-122"/>
+                <a:cs typeface="微软雅黑" panose="020B0503020204020204" charset="-122"/>
+              </a:rPr>
+              <a:t>拆出各层</a:t>
+            </a:r>
+            <a:endParaRPr lang="zh-CN" altLang="en-US">
+              <a:latin typeface="微软雅黑" panose="020B0503020204020204" charset="-122"/>
+              <a:ea typeface="微软雅黑" panose="020B0503020204020204" charset="-122"/>
+              <a:cs typeface="微软雅黑" panose="020B0503020204020204" charset="-122"/>
+            </a:endParaRPr>
+          </a:p>
+          <a:p>
+            <a:pPr>
+              <a:spcAft>
+                <a:spcPts val="600"/>
+              </a:spcAft>
+              <a:defRPr sz="1600">
+                <a:solidFill>
+                  <a:srgbClr val="333333"/>
+                </a:solidFill>
+              </a:defRPr>
+            </a:pPr>
+            <a:endParaRPr lang="zh-CN" altLang="en-US">
+              <a:latin typeface="微软雅黑" panose="020B0503020204020204" charset="-122"/>
+              <a:ea typeface="微软雅黑" panose="020B0503020204020204" charset="-122"/>
+              <a:cs typeface="微软雅黑" panose="020B0503020204020204" charset="-122"/>
+            </a:endParaRPr>
+          </a:p>
+          <a:p>
+            <a:pPr marL="285750" indent="-285750">
+              <a:spcAft>
+                <a:spcPts val="600"/>
+              </a:spcAft>
+              <a:buFont typeface="Arial" panose="020B0604020202020204" pitchFamily="34" charset="0"/>
+              <a:buChar char="•"/>
+              <a:defRPr sz="1600">
+                <a:solidFill>
+                  <a:srgbClr val="333333"/>
+                </a:solidFill>
+              </a:defRPr>
+            </a:pPr>
+            <a:r>
+              <a:rPr>
+                <a:latin typeface="微软雅黑" panose="020B0503020204020204" charset="-122"/>
+                <a:ea typeface="微软雅黑" panose="020B0503020204020204" charset="-122"/>
+                <a:cs typeface="微软雅黑" panose="020B0503020204020204" charset="-122"/>
+              </a:rPr>
+              <a:t>瓶颈层 (Bottleneck)</a:t>
+            </a:r>
+            <a:endParaRPr>
+              <a:latin typeface="微软雅黑" panose="020B0503020204020204" charset="-122"/>
+              <a:ea typeface="微软雅黑" panose="020B0503020204020204" charset="-122"/>
+              <a:cs typeface="微软雅黑" panose="020B0503020204020204" charset="-122"/>
+            </a:endParaRPr>
+          </a:p>
+          <a:p>
+            <a:pPr>
+              <a:spcAft>
+                <a:spcPts val="600"/>
+              </a:spcAft>
+              <a:defRPr sz="1600">
+                <a:solidFill>
+                  <a:srgbClr val="333333"/>
+                </a:solidFill>
+              </a:defRPr>
+            </a:pPr>
+            <a:r>
+              <a:rPr>
+                <a:latin typeface="微软雅黑" panose="020B0503020204020204" charset="-122"/>
+                <a:ea typeface="微软雅黑" panose="020B0503020204020204" charset="-122"/>
+                <a:cs typeface="微软雅黑" panose="020B0503020204020204" charset="-122"/>
+              </a:rPr>
+              <a:t>  Conv(512→1024)</a:t>
+            </a:r>
+            <a:endParaRPr>
+              <a:latin typeface="微软雅黑" panose="020B0503020204020204" charset="-122"/>
+              <a:ea typeface="微软雅黑" panose="020B0503020204020204" charset="-122"/>
+              <a:cs typeface="微软雅黑" panose="020B0503020204020204" charset="-122"/>
+            </a:endParaRPr>
+          </a:p>
+          <a:p>
+            <a:pPr>
+              <a:spcAft>
+                <a:spcPts val="600"/>
+              </a:spcAft>
+              <a:defRPr sz="1600">
+                <a:solidFill>
+                  <a:srgbClr val="333333"/>
+                </a:solidFill>
+              </a:defRPr>
+            </a:pPr>
+            <a:endParaRPr>
+              <a:latin typeface="微软雅黑" panose="020B0503020204020204" charset="-122"/>
+              <a:ea typeface="微软雅黑" panose="020B0503020204020204" charset="-122"/>
+              <a:cs typeface="微软雅黑" panose="020B0503020204020204" charset="-122"/>
+            </a:endParaRPr>
+          </a:p>
+          <a:p>
+            <a:pPr marL="285750" indent="-285750">
+              <a:spcAft>
+                <a:spcPts val="600"/>
+              </a:spcAft>
+              <a:buFont typeface="Arial" panose="020B0604020202020204" pitchFamily="34" charset="0"/>
+              <a:buChar char="•"/>
+              <a:defRPr sz="1600">
+                <a:solidFill>
+                  <a:srgbClr val="333333"/>
+                </a:solidFill>
+              </a:defRPr>
+            </a:pPr>
+            <a:r>
+              <a:rPr>
+                <a:latin typeface="微软雅黑" panose="020B0503020204020204" charset="-122"/>
+                <a:ea typeface="微软雅黑" panose="020B0503020204020204" charset="-122"/>
+                <a:cs typeface="微软雅黑" panose="020B0503020204020204" charset="-122"/>
+              </a:rPr>
+              <a:t>解码器 (Decoder)</a:t>
+            </a:r>
+            <a:endParaRPr>
+              <a:latin typeface="微软雅黑" panose="020B0503020204020204" charset="-122"/>
+              <a:ea typeface="微软雅黑" panose="020B0503020204020204" charset="-122"/>
+              <a:cs typeface="微软雅黑" panose="020B0503020204020204" charset="-122"/>
+            </a:endParaRPr>
+          </a:p>
+          <a:p>
+            <a:pPr>
+              <a:spcAft>
+                <a:spcPts val="600"/>
+              </a:spcAft>
+              <a:defRPr sz="1600">
+                <a:solidFill>
+                  <a:srgbClr val="333333"/>
+                </a:solidFill>
+              </a:defRPr>
+            </a:pPr>
+            <a:r>
+              <a:rPr>
+                <a:latin typeface="微软雅黑" panose="020B0503020204020204" charset="-122"/>
+                <a:ea typeface="微软雅黑" panose="020B0503020204020204" charset="-122"/>
+                <a:cs typeface="微软雅黑" panose="020B0503020204020204" charset="-122"/>
+              </a:rPr>
+              <a:t>  </a:t>
+            </a:r>
+            <a:r>
+              <a:rPr lang="zh-CN" altLang="en-US">
+                <a:latin typeface="微软雅黑" panose="020B0503020204020204" charset="-122"/>
+                <a:ea typeface="微软雅黑" panose="020B0503020204020204" charset="-122"/>
+                <a:cs typeface="微软雅黑" panose="020B0503020204020204" charset="-122"/>
+              </a:rPr>
+              <a:t>上采样</a:t>
+            </a:r>
+            <a:r>
+              <a:rPr lang="en-US" altLang="zh-CN">
+                <a:latin typeface="微软雅黑" panose="020B0503020204020204" charset="-122"/>
+                <a:ea typeface="微软雅黑" panose="020B0503020204020204" charset="-122"/>
+                <a:cs typeface="微软雅黑" panose="020B0503020204020204" charset="-122"/>
+              </a:rPr>
+              <a:t> </a:t>
+            </a:r>
+            <a:r>
+              <a:rPr lang="en-US" altLang="en-US">
+                <a:latin typeface="微软雅黑" panose="020B0503020204020204" charset="-122"/>
+                <a:ea typeface="微软雅黑" panose="020B0503020204020204" charset="-122"/>
+                <a:cs typeface="微软雅黑" panose="020B0503020204020204" charset="-122"/>
+              </a:rPr>
+              <a:t>→</a:t>
+            </a:r>
+            <a:r>
+              <a:rPr lang="en-US" altLang="zh-CN">
+                <a:latin typeface="微软雅黑" panose="020B0503020204020204" charset="-122"/>
+                <a:ea typeface="微软雅黑" panose="020B0503020204020204" charset="-122"/>
+                <a:cs typeface="微软雅黑" panose="020B0503020204020204" charset="-122"/>
+              </a:rPr>
+              <a:t> </a:t>
+            </a:r>
+            <a:r>
+              <a:rPr lang="zh-CN" altLang="en-US">
+                <a:latin typeface="微软雅黑" panose="020B0503020204020204" charset="-122"/>
+                <a:ea typeface="微软雅黑" panose="020B0503020204020204" charset="-122"/>
+                <a:cs typeface="微软雅黑" panose="020B0503020204020204" charset="-122"/>
+              </a:rPr>
+              <a:t>与</a:t>
+            </a:r>
+            <a:r>
+              <a:rPr lang="en-US" altLang="zh-CN">
+                <a:latin typeface="微软雅黑" panose="020B0503020204020204" charset="-122"/>
+                <a:ea typeface="微软雅黑" panose="020B0503020204020204" charset="-122"/>
+                <a:cs typeface="微软雅黑" panose="020B0503020204020204" charset="-122"/>
+              </a:rPr>
+              <a:t> skip </a:t>
+            </a:r>
+            <a:r>
+              <a:rPr lang="zh-CN" altLang="en-US">
+                <a:latin typeface="微软雅黑" panose="020B0503020204020204" charset="-122"/>
+                <a:ea typeface="微软雅黑" panose="020B0503020204020204" charset="-122"/>
+                <a:cs typeface="微软雅黑" panose="020B0503020204020204" charset="-122"/>
+              </a:rPr>
+              <a:t>拼接</a:t>
+            </a:r>
+            <a:r>
+              <a:rPr lang="en-US" altLang="zh-CN">
+                <a:latin typeface="微软雅黑" panose="020B0503020204020204" charset="-122"/>
+                <a:ea typeface="微软雅黑" panose="020B0503020204020204" charset="-122"/>
+                <a:cs typeface="微软雅黑" panose="020B0503020204020204" charset="-122"/>
+              </a:rPr>
+              <a:t> </a:t>
+            </a:r>
+            <a:r>
+              <a:rPr lang="en-US" altLang="en-US">
+                <a:latin typeface="微软雅黑" panose="020B0503020204020204" charset="-122"/>
+                <a:ea typeface="微软雅黑" panose="020B0503020204020204" charset="-122"/>
+                <a:cs typeface="微软雅黑" panose="020B0503020204020204" charset="-122"/>
+              </a:rPr>
+              <a:t>→</a:t>
+            </a:r>
+            <a:r>
+              <a:rPr lang="en-US" altLang="zh-CN">
+                <a:latin typeface="微软雅黑" panose="020B0503020204020204" charset="-122"/>
+                <a:ea typeface="微软雅黑" panose="020B0503020204020204" charset="-122"/>
+                <a:cs typeface="微软雅黑" panose="020B0503020204020204" charset="-122"/>
+              </a:rPr>
+              <a:t> </a:t>
+            </a:r>
+            <a:r>
+              <a:rPr lang="zh-CN" altLang="en-US">
+                <a:latin typeface="微软雅黑" panose="020B0503020204020204" charset="-122"/>
+                <a:ea typeface="微软雅黑" panose="020B0503020204020204" charset="-122"/>
+                <a:cs typeface="微软雅黑" panose="020B0503020204020204" charset="-122"/>
+              </a:rPr>
+              <a:t>双卷积。</a:t>
+            </a:r>
+            <a:endParaRPr lang="zh-CN" altLang="en-US">
+              <a:latin typeface="微软雅黑" panose="020B0503020204020204" charset="-122"/>
+              <a:ea typeface="微软雅黑" panose="020B0503020204020204" charset="-122"/>
+              <a:cs typeface="微软雅黑" panose="020B0503020204020204" charset="-122"/>
+            </a:endParaRPr>
           </a:p>
         </p:txBody>
       </p:sp>
@@ -4564,8 +6055,8 @@
         </p:nvSpPr>
         <p:spPr>
           <a:xfrm>
-            <a:off x="6400800" y="1828800"/>
-            <a:ext cx="5029200" cy="4572000"/>
+            <a:off x="1031875" y="5882640"/>
+            <a:ext cx="10127615" cy="337185"/>
           </a:xfrm>
           <a:prstGeom prst="rect">
             <a:avLst/>
@@ -4582,189 +6073,685 @@
               <a:spcAft>
                 <a:spcPts val="600"/>
               </a:spcAft>
-              <a:defRPr sz="1800">
-                <a:solidFill>
-                  <a:srgbClr val="333333"/>
-                </a:solidFill>
-              </a:defRPr>
-            </a:pPr>
-            <a:r>
-              <a:t>💻 训练环境</a:t>
-            </a:r>
-          </a:p>
-          <a:p>
-            <a:pPr>
-              <a:spcAft>
-                <a:spcPts val="600"/>
-              </a:spcAft>
-              <a:defRPr sz="1800">
-                <a:solidFill>
-                  <a:srgbClr val="333333"/>
-                </a:solidFill>
-              </a:defRPr>
-            </a:pPr>
-          </a:p>
-          <a:p>
-            <a:pPr>
-              <a:spcAft>
-                <a:spcPts val="600"/>
-              </a:spcAft>
-              <a:defRPr sz="1800">
-                <a:solidFill>
-                  <a:srgbClr val="333333"/>
-                </a:solidFill>
-              </a:defRPr>
-            </a:pPr>
-            <a:r>
-              <a:t>• GPU: NVIDIA RTX 3050 Laptop (4GB)</a:t>
-            </a:r>
-          </a:p>
-          <a:p>
-            <a:pPr>
-              <a:spcAft>
-                <a:spcPts val="600"/>
-              </a:spcAft>
-              <a:defRPr sz="1800">
-                <a:solidFill>
-                  <a:srgbClr val="333333"/>
-                </a:solidFill>
-              </a:defRPr>
-            </a:pPr>
-            <a:r>
-              <a:t>• 框架: PyTorch 2.6.0 + CUDA 12.4</a:t>
-            </a:r>
-          </a:p>
-          <a:p>
-            <a:pPr>
-              <a:spcAft>
-                <a:spcPts val="600"/>
-              </a:spcAft>
-              <a:defRPr sz="1800">
-                <a:solidFill>
-                  <a:srgbClr val="333333"/>
-                </a:solidFill>
-              </a:defRPr>
-            </a:pPr>
-            <a:r>
-              <a:t>• 训练时间: ~6.7 小时 (50 epochs)</a:t>
-            </a:r>
-          </a:p>
-          <a:p>
-            <a:pPr>
-              <a:spcAft>
-                <a:spcPts val="600"/>
-              </a:spcAft>
-              <a:defRPr sz="1800">
-                <a:solidFill>
-                  <a:srgbClr val="333333"/>
-                </a:solidFill>
-              </a:defRPr>
-            </a:pPr>
-          </a:p>
-          <a:p>
-            <a:pPr>
-              <a:spcAft>
-                <a:spcPts val="600"/>
-              </a:spcAft>
-              <a:defRPr sz="1800">
-                <a:solidFill>
-                  <a:srgbClr val="333333"/>
-                </a:solidFill>
-              </a:defRPr>
-            </a:pPr>
-            <a:r>
-              <a:t>📊 训练数据</a:t>
-            </a:r>
-          </a:p>
-          <a:p>
-            <a:pPr>
-              <a:spcAft>
-                <a:spcPts val="600"/>
-              </a:spcAft>
-              <a:defRPr sz="1800">
-                <a:solidFill>
-                  <a:srgbClr val="333333"/>
-                </a:solidFill>
-              </a:defRPr>
-            </a:pPr>
-            <a:r>
-              <a:t>• 训练样本: 2,335 (原2,594, 90/10切分)</a:t>
-            </a:r>
-          </a:p>
-          <a:p>
-            <a:pPr>
-              <a:spcAft>
-                <a:spcPts val="600"/>
-              </a:spcAft>
-              <a:defRPr sz="1800">
-                <a:solidFill>
-                  <a:srgbClr val="333333"/>
-                </a:solidFill>
-              </a:defRPr>
-            </a:pPr>
-            <a:r>
-              <a:t>• 验证样本: 259 (使用真实验证集替换后)</a:t>
-            </a:r>
-          </a:p>
-          <a:p>
-            <a:pPr>
-              <a:spcAft>
-                <a:spcPts val="600"/>
-              </a:spcAft>
-              <a:defRPr sz="1800">
-                <a:solidFill>
-                  <a:srgbClr val="333333"/>
-                </a:solidFill>
-              </a:defRPr>
-            </a:pPr>
-          </a:p>
-          <a:p>
-            <a:pPr>
-              <a:spcAft>
-                <a:spcPts val="600"/>
-              </a:spcAft>
-              <a:defRPr sz="1800">
-                <a:solidFill>
-                  <a:srgbClr val="333333"/>
-                </a:solidFill>
-              </a:defRPr>
-            </a:pPr>
-            <a:r>
-              <a:t>🛡️ 正则化</a:t>
-            </a:r>
-          </a:p>
-          <a:p>
-            <a:pPr>
-              <a:spcAft>
-                <a:spcPts val="600"/>
-              </a:spcAft>
-              <a:defRPr sz="1800">
-                <a:solidFill>
-                  <a:srgbClr val="333333"/>
-                </a:solidFill>
-              </a:defRPr>
-            </a:pPr>
-            <a:r>
-              <a:t>• L2 权重衰减 (1e-4)</a:t>
-            </a:r>
-          </a:p>
-          <a:p>
-            <a:pPr>
-              <a:spcAft>
-                <a:spcPts val="600"/>
-              </a:spcAft>
-              <a:defRPr sz="1800">
-                <a:solidFill>
-                  <a:srgbClr val="333333"/>
-                </a:solidFill>
-              </a:defRPr>
-            </a:pPr>
-            <a:r>
-              <a:t>• 数据增强 (翻转/旋转/颜色抖动)</a:t>
-            </a:r>
+              <a:defRPr sz="1600">
+                <a:solidFill>
+                  <a:srgbClr val="333333"/>
+                </a:solidFill>
+              </a:defRPr>
+            </a:pPr>
+            <a:r>
+              <a:rPr lang="zh-CN" altLang="en-US">
+                <a:latin typeface="微软雅黑" panose="020B0503020204020204" charset="-122"/>
+                <a:ea typeface="微软雅黑" panose="020B0503020204020204" charset="-122"/>
+                <a:cs typeface="微软雅黑" panose="020B0503020204020204" charset="-122"/>
+              </a:rPr>
+              <a:t>特殊处理：</a:t>
+            </a:r>
+            <a:r>
+              <a:rPr lang="en-US" altLang="zh-CN">
+                <a:latin typeface="微软雅黑" panose="020B0503020204020204" charset="-122"/>
+                <a:ea typeface="微软雅黑" panose="020B0503020204020204" charset="-122"/>
+                <a:cs typeface="微软雅黑" panose="020B0503020204020204" charset="-122"/>
+              </a:rPr>
+              <a:t>ResNet </a:t>
+            </a:r>
+            <a:r>
+              <a:rPr lang="zh-CN" altLang="en-US">
+                <a:latin typeface="微软雅黑" panose="020B0503020204020204" charset="-122"/>
+                <a:ea typeface="微软雅黑" panose="020B0503020204020204" charset="-122"/>
+                <a:cs typeface="微软雅黑" panose="020B0503020204020204" charset="-122"/>
+              </a:rPr>
+              <a:t>第一层</a:t>
+            </a:r>
+            <a:r>
+              <a:rPr lang="en-US" altLang="zh-CN">
+                <a:latin typeface="微软雅黑" panose="020B0503020204020204" charset="-122"/>
+                <a:ea typeface="微软雅黑" panose="020B0503020204020204" charset="-122"/>
+                <a:cs typeface="微软雅黑" panose="020B0503020204020204" charset="-122"/>
+              </a:rPr>
+              <a:t> stride=2</a:t>
+            </a:r>
+            <a:r>
+              <a:rPr lang="zh-CN" altLang="en-US">
+                <a:latin typeface="微软雅黑" panose="020B0503020204020204" charset="-122"/>
+                <a:ea typeface="微软雅黑" panose="020B0503020204020204" charset="-122"/>
+                <a:cs typeface="微软雅黑" panose="020B0503020204020204" charset="-122"/>
+              </a:rPr>
+              <a:t>，最终只到</a:t>
+            </a:r>
+            <a:r>
+              <a:rPr lang="en-US" altLang="zh-CN">
+                <a:latin typeface="微软雅黑" panose="020B0503020204020204" charset="-122"/>
+                <a:ea typeface="微软雅黑" panose="020B0503020204020204" charset="-122"/>
+                <a:cs typeface="微软雅黑" panose="020B0503020204020204" charset="-122"/>
+              </a:rPr>
+              <a:t> 128</a:t>
+            </a:r>
+            <a:r>
+              <a:rPr lang="en-US" altLang="en-US">
+                <a:latin typeface="微软雅黑" panose="020B0503020204020204" charset="-122"/>
+                <a:ea typeface="微软雅黑" panose="020B0503020204020204" charset="-122"/>
+                <a:cs typeface="微软雅黑" panose="020B0503020204020204" charset="-122"/>
+              </a:rPr>
+              <a:t>×</a:t>
+            </a:r>
+            <a:r>
+              <a:rPr lang="en-US" altLang="zh-CN">
+                <a:latin typeface="微软雅黑" panose="020B0503020204020204" charset="-122"/>
+                <a:ea typeface="微软雅黑" panose="020B0503020204020204" charset="-122"/>
+                <a:cs typeface="微软雅黑" panose="020B0503020204020204" charset="-122"/>
+              </a:rPr>
+              <a:t>128</a:t>
+            </a:r>
+            <a:r>
+              <a:rPr lang="zh-CN" altLang="en-US">
+                <a:latin typeface="微软雅黑" panose="020B0503020204020204" charset="-122"/>
+                <a:ea typeface="微软雅黑" panose="020B0503020204020204" charset="-122"/>
+                <a:cs typeface="微软雅黑" panose="020B0503020204020204" charset="-122"/>
+              </a:rPr>
+              <a:t>，所以加了</a:t>
+            </a:r>
+            <a:r>
+              <a:rPr lang="en-US" altLang="zh-CN">
+                <a:latin typeface="微软雅黑" panose="020B0503020204020204" charset="-122"/>
+                <a:ea typeface="微软雅黑" panose="020B0503020204020204" charset="-122"/>
+                <a:cs typeface="微软雅黑" panose="020B0503020204020204" charset="-122"/>
+              </a:rPr>
+              <a:t> final_up </a:t>
+            </a:r>
+            <a:r>
+              <a:rPr lang="zh-CN" altLang="en-US">
+                <a:latin typeface="微软雅黑" panose="020B0503020204020204" charset="-122"/>
+                <a:ea typeface="微软雅黑" panose="020B0503020204020204" charset="-122"/>
+                <a:cs typeface="微软雅黑" panose="020B0503020204020204" charset="-122"/>
+              </a:rPr>
+              <a:t>再放大到</a:t>
+            </a:r>
+            <a:r>
+              <a:rPr lang="en-US" altLang="zh-CN">
+                <a:latin typeface="微软雅黑" panose="020B0503020204020204" charset="-122"/>
+                <a:ea typeface="微软雅黑" panose="020B0503020204020204" charset="-122"/>
+                <a:cs typeface="微软雅黑" panose="020B0503020204020204" charset="-122"/>
+              </a:rPr>
+              <a:t> 256</a:t>
+            </a:r>
+            <a:r>
+              <a:rPr lang="en-US" altLang="en-US">
+                <a:latin typeface="微软雅黑" panose="020B0503020204020204" charset="-122"/>
+                <a:ea typeface="微软雅黑" panose="020B0503020204020204" charset="-122"/>
+                <a:cs typeface="微软雅黑" panose="020B0503020204020204" charset="-122"/>
+              </a:rPr>
+              <a:t>×</a:t>
+            </a:r>
+            <a:r>
+              <a:rPr lang="en-US" altLang="zh-CN">
+                <a:latin typeface="微软雅黑" panose="020B0503020204020204" charset="-122"/>
+                <a:ea typeface="微软雅黑" panose="020B0503020204020204" charset="-122"/>
+                <a:cs typeface="微软雅黑" panose="020B0503020204020204" charset="-122"/>
+              </a:rPr>
+              <a:t>256</a:t>
+            </a:r>
+            <a:endParaRPr lang="en-US" altLang="zh-CN">
+              <a:latin typeface="微软雅黑" panose="020B0503020204020204" charset="-122"/>
+              <a:ea typeface="微软雅黑" panose="020B0503020204020204" charset="-122"/>
+              <a:cs typeface="微软雅黑" panose="020B0503020204020204" charset="-122"/>
+            </a:endParaRPr>
           </a:p>
         </p:txBody>
       </p:sp>
+      <p:graphicFrame>
+        <p:nvGraphicFramePr>
+          <p:cNvPr id="6" name="表格 5"/>
+          <p:cNvGraphicFramePr/>
+          <p:nvPr>
+            <p:custDataLst>
+              <p:tags r:id="rId1"/>
+            </p:custDataLst>
+          </p:nvPr>
+        </p:nvGraphicFramePr>
+        <p:xfrm>
+          <a:off x="6537325" y="2183130"/>
+          <a:ext cx="5373370" cy="3393440"/>
+        </p:xfrm>
+        <a:graphic>
+          <a:graphicData uri="http://schemas.openxmlformats.org/drawingml/2006/table">
+            <a:tbl>
+              <a:tblPr firstRow="1" bandRow="1">
+                <a:tableStyleId>{5C22544A-7EE6-4342-B048-85BDC9FD1C3A}</a:tableStyleId>
+              </a:tblPr>
+              <a:tblGrid>
+                <a:gridCol w="1955165"/>
+                <a:gridCol w="2597150"/>
+                <a:gridCol w="821055"/>
+              </a:tblGrid>
+              <a:tr h="751840">
+                <a:tc>
+                  <a:txBody>
+                    <a:bodyPr/>
+                    <a:p>
+                      <a:pPr algn="ctr">
+                        <a:buNone/>
+                      </a:pPr>
+                      <a:r>
+                        <a:rPr lang="zh-CN" altLang="en-US">
+                          <a:latin typeface="微软雅黑" panose="020B0503020204020204" charset="-122"/>
+                          <a:ea typeface="微软雅黑" panose="020B0503020204020204" charset="-122"/>
+                        </a:rPr>
+                        <a:t>层</a:t>
+                      </a:r>
+                      <a:endParaRPr lang="zh-CN" altLang="en-US">
+                        <a:latin typeface="微软雅黑" panose="020B0503020204020204" charset="-122"/>
+                        <a:ea typeface="微软雅黑" panose="020B0503020204020204" charset="-122"/>
+                      </a:endParaRPr>
+                    </a:p>
+                  </a:txBody>
+                  <a:tcPr anchor="ctr" anchorCtr="0"/>
+                </a:tc>
+                <a:tc>
+                  <a:txBody>
+                    <a:bodyPr/>
+                    <a:p>
+                      <a:pPr algn="ctr">
+                        <a:buNone/>
+                      </a:pPr>
+                      <a:r>
+                        <a:rPr lang="zh-CN" altLang="en-US">
+                          <a:latin typeface="微软雅黑" panose="020B0503020204020204" charset="-122"/>
+                          <a:ea typeface="微软雅黑" panose="020B0503020204020204" charset="-122"/>
+                          <a:cs typeface="微软雅黑" panose="020B0503020204020204" charset="-122"/>
+                        </a:rPr>
+                        <a:t>输出尺寸</a:t>
+                      </a:r>
+                      <a:r>
+                        <a:rPr lang="en-US" altLang="zh-CN">
+                          <a:latin typeface="微软雅黑" panose="020B0503020204020204" charset="-122"/>
+                          <a:ea typeface="微软雅黑" panose="020B0503020204020204" charset="-122"/>
+                          <a:cs typeface="微软雅黑" panose="020B0503020204020204" charset="-122"/>
+                        </a:rPr>
+                        <a:t> (256 </a:t>
+                      </a:r>
+                      <a:r>
+                        <a:rPr lang="zh-CN" altLang="en-US">
+                          <a:latin typeface="微软雅黑" panose="020B0503020204020204" charset="-122"/>
+                          <a:ea typeface="微软雅黑" panose="020B0503020204020204" charset="-122"/>
+                          <a:cs typeface="微软雅黑" panose="020B0503020204020204" charset="-122"/>
+                        </a:rPr>
+                        <a:t>输入</a:t>
+                      </a:r>
+                      <a:r>
+                        <a:rPr lang="en-US" altLang="zh-CN">
+                          <a:latin typeface="微软雅黑" panose="020B0503020204020204" charset="-122"/>
+                          <a:ea typeface="微软雅黑" panose="020B0503020204020204" charset="-122"/>
+                          <a:cs typeface="微软雅黑" panose="020B0503020204020204" charset="-122"/>
+                        </a:rPr>
+                        <a:t>)</a:t>
+                      </a:r>
+                      <a:endParaRPr lang="en-US" altLang="zh-CN">
+                        <a:latin typeface="微软雅黑" panose="020B0503020204020204" charset="-122"/>
+                        <a:ea typeface="微软雅黑" panose="020B0503020204020204" charset="-122"/>
+                        <a:cs typeface="微软雅黑" panose="020B0503020204020204" charset="-122"/>
+                      </a:endParaRPr>
+                    </a:p>
+                  </a:txBody>
+                  <a:tcPr anchor="ctr" anchorCtr="0"/>
+                </a:tc>
+                <a:tc>
+                  <a:txBody>
+                    <a:bodyPr/>
+                    <a:p>
+                      <a:pPr algn="ctr">
+                        <a:buNone/>
+                      </a:pPr>
+                      <a:r>
+                        <a:rPr lang="zh-CN" altLang="en-US">
+                          <a:latin typeface="微软雅黑" panose="020B0503020204020204" charset="-122"/>
+                          <a:ea typeface="微软雅黑" panose="020B0503020204020204" charset="-122"/>
+                        </a:rPr>
+                        <a:t>通道</a:t>
+                      </a:r>
+                      <a:endParaRPr lang="zh-CN" altLang="en-US">
+                        <a:latin typeface="微软雅黑" panose="020B0503020204020204" charset="-122"/>
+                        <a:ea typeface="微软雅黑" panose="020B0503020204020204" charset="-122"/>
+                      </a:endParaRPr>
+                    </a:p>
+                  </a:txBody>
+                  <a:tcPr anchor="ctr" anchorCtr="0"/>
+                </a:tc>
+              </a:tr>
+              <a:tr h="922655">
+                <a:tc>
+                  <a:txBody>
+                    <a:bodyPr/>
+                    <a:p>
+                      <a:pPr algn="l">
+                        <a:buNone/>
+                      </a:pPr>
+                      <a:r>
+                        <a:rPr lang="en-US" altLang="zh-CN">
+                          <a:latin typeface="微软雅黑" panose="020B0503020204020204" charset="-122"/>
+                          <a:ea typeface="微软雅黑" panose="020B0503020204020204" charset="-122"/>
+                        </a:rPr>
+                        <a:t>enc0 (conv1+bn+relu)</a:t>
+                      </a:r>
+                      <a:endParaRPr lang="en-US" altLang="zh-CN">
+                        <a:latin typeface="微软雅黑" panose="020B0503020204020204" charset="-122"/>
+                        <a:ea typeface="微软雅黑" panose="020B0503020204020204" charset="-122"/>
+                      </a:endParaRPr>
+                    </a:p>
+                  </a:txBody>
+                  <a:tcPr anchor="ctr" anchorCtr="0"/>
+                </a:tc>
+                <a:tc>
+                  <a:txBody>
+                    <a:bodyPr/>
+                    <a:p>
+                      <a:pPr algn="l">
+                        <a:buNone/>
+                      </a:pPr>
+                      <a:r>
+                        <a:rPr lang="en-US" altLang="zh-CN">
+                          <a:latin typeface="微软雅黑" panose="020B0503020204020204" charset="-122"/>
+                          <a:ea typeface="微软雅黑" panose="020B0503020204020204" charset="-122"/>
+                          <a:cs typeface="微软雅黑" panose="020B0503020204020204" charset="-122"/>
+                        </a:rPr>
+                        <a:t>128</a:t>
+                      </a:r>
+                      <a:r>
+                        <a:rPr lang="en-US" altLang="en-US">
+                          <a:latin typeface="微软雅黑" panose="020B0503020204020204" charset="-122"/>
+                          <a:ea typeface="微软雅黑" panose="020B0503020204020204" charset="-122"/>
+                          <a:cs typeface="微软雅黑" panose="020B0503020204020204" charset="-122"/>
+                        </a:rPr>
+                        <a:t>×</a:t>
+                      </a:r>
+                      <a:r>
+                        <a:rPr lang="en-US" altLang="zh-CN">
+                          <a:latin typeface="微软雅黑" panose="020B0503020204020204" charset="-122"/>
+                          <a:ea typeface="微软雅黑" panose="020B0503020204020204" charset="-122"/>
+                          <a:cs typeface="微软雅黑" panose="020B0503020204020204" charset="-122"/>
+                        </a:rPr>
+                        <a:t>128</a:t>
+                      </a:r>
+                      <a:endParaRPr lang="en-US" altLang="zh-CN">
+                        <a:latin typeface="微软雅黑" panose="020B0503020204020204" charset="-122"/>
+                        <a:ea typeface="微软雅黑" panose="020B0503020204020204" charset="-122"/>
+                        <a:cs typeface="微软雅黑" panose="020B0503020204020204" charset="-122"/>
+                      </a:endParaRPr>
+                    </a:p>
+                  </a:txBody>
+                  <a:tcPr anchor="ctr" anchorCtr="0"/>
+                </a:tc>
+                <a:tc>
+                  <a:txBody>
+                    <a:bodyPr/>
+                    <a:p>
+                      <a:pPr algn="l">
+                        <a:buNone/>
+                      </a:pPr>
+                      <a:r>
+                        <a:rPr lang="en-US" altLang="zh-CN">
+                          <a:latin typeface="微软雅黑" panose="020B0503020204020204" charset="-122"/>
+                          <a:ea typeface="微软雅黑" panose="020B0503020204020204" charset="-122"/>
+                        </a:rPr>
+                        <a:t>64</a:t>
+                      </a:r>
+                      <a:endParaRPr lang="en-US" altLang="zh-CN">
+                        <a:latin typeface="微软雅黑" panose="020B0503020204020204" charset="-122"/>
+                        <a:ea typeface="微软雅黑" panose="020B0503020204020204" charset="-122"/>
+                      </a:endParaRPr>
+                    </a:p>
+                  </a:txBody>
+                  <a:tcPr anchor="ctr" anchorCtr="0"/>
+                </a:tc>
+              </a:tr>
+              <a:tr h="430530">
+                <a:tc>
+                  <a:txBody>
+                    <a:bodyPr/>
+                    <a:p>
+                      <a:pPr algn="l">
+                        <a:buNone/>
+                      </a:pPr>
+                      <a:r>
+                        <a:rPr lang="en-US" altLang="zh-CN">
+                          <a:latin typeface="微软雅黑" panose="020B0503020204020204" charset="-122"/>
+                          <a:ea typeface="微软雅黑" panose="020B0503020204020204" charset="-122"/>
+                        </a:rPr>
+                        <a:t>pool0 + layer1</a:t>
+                      </a:r>
+                      <a:endParaRPr lang="en-US" altLang="zh-CN">
+                        <a:latin typeface="微软雅黑" panose="020B0503020204020204" charset="-122"/>
+                        <a:ea typeface="微软雅黑" panose="020B0503020204020204" charset="-122"/>
+                      </a:endParaRPr>
+                    </a:p>
+                  </a:txBody>
+                  <a:tcPr anchor="ctr" anchorCtr="0"/>
+                </a:tc>
+                <a:tc>
+                  <a:txBody>
+                    <a:bodyPr/>
+                    <a:p>
+                      <a:pPr algn="l">
+                        <a:buNone/>
+                      </a:pPr>
+                      <a:r>
+                        <a:rPr lang="en-US" altLang="zh-CN">
+                          <a:latin typeface="微软雅黑" panose="020B0503020204020204" charset="-122"/>
+                          <a:ea typeface="微软雅黑" panose="020B0503020204020204" charset="-122"/>
+                          <a:cs typeface="微软雅黑" panose="020B0503020204020204" charset="-122"/>
+                        </a:rPr>
+                        <a:t>64</a:t>
+                      </a:r>
+                      <a:r>
+                        <a:rPr lang="en-US" altLang="en-US">
+                          <a:latin typeface="微软雅黑" panose="020B0503020204020204" charset="-122"/>
+                          <a:ea typeface="微软雅黑" panose="020B0503020204020204" charset="-122"/>
+                          <a:cs typeface="微软雅黑" panose="020B0503020204020204" charset="-122"/>
+                        </a:rPr>
+                        <a:t>×</a:t>
+                      </a:r>
+                      <a:r>
+                        <a:rPr lang="en-US" altLang="zh-CN">
+                          <a:latin typeface="微软雅黑" panose="020B0503020204020204" charset="-122"/>
+                          <a:ea typeface="微软雅黑" panose="020B0503020204020204" charset="-122"/>
+                          <a:cs typeface="微软雅黑" panose="020B0503020204020204" charset="-122"/>
+                        </a:rPr>
+                        <a:t>64</a:t>
+                      </a:r>
+                      <a:endParaRPr lang="en-US" altLang="zh-CN">
+                        <a:latin typeface="微软雅黑" panose="020B0503020204020204" charset="-122"/>
+                        <a:ea typeface="微软雅黑" panose="020B0503020204020204" charset="-122"/>
+                        <a:cs typeface="微软雅黑" panose="020B0503020204020204" charset="-122"/>
+                      </a:endParaRPr>
+                    </a:p>
+                  </a:txBody>
+                  <a:tcPr anchor="ctr" anchorCtr="0"/>
+                </a:tc>
+                <a:tc>
+                  <a:txBody>
+                    <a:bodyPr/>
+                    <a:p>
+                      <a:pPr algn="l">
+                        <a:buNone/>
+                      </a:pPr>
+                      <a:r>
+                        <a:rPr lang="en-US" altLang="zh-CN">
+                          <a:latin typeface="微软雅黑" panose="020B0503020204020204" charset="-122"/>
+                          <a:ea typeface="微软雅黑" panose="020B0503020204020204" charset="-122"/>
+                        </a:rPr>
+                        <a:t>64</a:t>
+                      </a:r>
+                      <a:endParaRPr lang="en-US" altLang="zh-CN">
+                        <a:latin typeface="微软雅黑" panose="020B0503020204020204" charset="-122"/>
+                        <a:ea typeface="微软雅黑" panose="020B0503020204020204" charset="-122"/>
+                      </a:endParaRPr>
+                    </a:p>
+                  </a:txBody>
+                  <a:tcPr anchor="ctr" anchorCtr="0"/>
+                </a:tc>
+              </a:tr>
+              <a:tr h="429260">
+                <a:tc>
+                  <a:txBody>
+                    <a:bodyPr/>
+                    <a:p>
+                      <a:pPr algn="l">
+                        <a:buNone/>
+                      </a:pPr>
+                      <a:r>
+                        <a:rPr lang="en-US" altLang="zh-CN">
+                          <a:latin typeface="微软雅黑" panose="020B0503020204020204" charset="-122"/>
+                          <a:ea typeface="微软雅黑" panose="020B0503020204020204" charset="-122"/>
+                        </a:rPr>
+                        <a:t>layer2</a:t>
+                      </a:r>
+                      <a:endParaRPr lang="en-US" altLang="zh-CN">
+                        <a:latin typeface="微软雅黑" panose="020B0503020204020204" charset="-122"/>
+                        <a:ea typeface="微软雅黑" panose="020B0503020204020204" charset="-122"/>
+                      </a:endParaRPr>
+                    </a:p>
+                  </a:txBody>
+                  <a:tcPr anchor="ctr" anchorCtr="0"/>
+                </a:tc>
+                <a:tc>
+                  <a:txBody>
+                    <a:bodyPr/>
+                    <a:p>
+                      <a:pPr algn="l">
+                        <a:buNone/>
+                      </a:pPr>
+                      <a:r>
+                        <a:rPr lang="en-US" altLang="zh-CN">
+                          <a:latin typeface="微软雅黑" panose="020B0503020204020204" charset="-122"/>
+                          <a:ea typeface="微软雅黑" panose="020B0503020204020204" charset="-122"/>
+                          <a:cs typeface="微软雅黑" panose="020B0503020204020204" charset="-122"/>
+                        </a:rPr>
+                        <a:t>32</a:t>
+                      </a:r>
+                      <a:r>
+                        <a:rPr lang="en-US" altLang="en-US">
+                          <a:latin typeface="微软雅黑" panose="020B0503020204020204" charset="-122"/>
+                          <a:ea typeface="微软雅黑" panose="020B0503020204020204" charset="-122"/>
+                          <a:cs typeface="微软雅黑" panose="020B0503020204020204" charset="-122"/>
+                        </a:rPr>
+                        <a:t>×</a:t>
+                      </a:r>
+                      <a:r>
+                        <a:rPr lang="en-US" altLang="zh-CN">
+                          <a:latin typeface="微软雅黑" panose="020B0503020204020204" charset="-122"/>
+                          <a:ea typeface="微软雅黑" panose="020B0503020204020204" charset="-122"/>
+                          <a:cs typeface="微软雅黑" panose="020B0503020204020204" charset="-122"/>
+                        </a:rPr>
+                        <a:t>32</a:t>
+                      </a:r>
+                      <a:endParaRPr lang="en-US" altLang="zh-CN">
+                        <a:latin typeface="微软雅黑" panose="020B0503020204020204" charset="-122"/>
+                        <a:ea typeface="微软雅黑" panose="020B0503020204020204" charset="-122"/>
+                        <a:cs typeface="微软雅黑" panose="020B0503020204020204" charset="-122"/>
+                      </a:endParaRPr>
+                    </a:p>
+                  </a:txBody>
+                  <a:tcPr anchor="ctr" anchorCtr="0"/>
+                </a:tc>
+                <a:tc>
+                  <a:txBody>
+                    <a:bodyPr/>
+                    <a:p>
+                      <a:pPr algn="l">
+                        <a:buNone/>
+                      </a:pPr>
+                      <a:r>
+                        <a:rPr lang="en-US" altLang="zh-CN">
+                          <a:latin typeface="微软雅黑" panose="020B0503020204020204" charset="-122"/>
+                          <a:ea typeface="微软雅黑" panose="020B0503020204020204" charset="-122"/>
+                        </a:rPr>
+                        <a:t>128</a:t>
+                      </a:r>
+                      <a:endParaRPr lang="en-US" altLang="zh-CN">
+                        <a:latin typeface="微软雅黑" panose="020B0503020204020204" charset="-122"/>
+                        <a:ea typeface="微软雅黑" panose="020B0503020204020204" charset="-122"/>
+                      </a:endParaRPr>
+                    </a:p>
+                  </a:txBody>
+                  <a:tcPr anchor="ctr" anchorCtr="0"/>
+                </a:tc>
+              </a:tr>
+              <a:tr h="429260">
+                <a:tc>
+                  <a:txBody>
+                    <a:bodyPr/>
+                    <a:p>
+                      <a:pPr algn="l">
+                        <a:buNone/>
+                      </a:pPr>
+                      <a:r>
+                        <a:rPr lang="en-US" altLang="zh-CN">
+                          <a:latin typeface="微软雅黑" panose="020B0503020204020204" charset="-122"/>
+                          <a:ea typeface="微软雅黑" panose="020B0503020204020204" charset="-122"/>
+                        </a:rPr>
+                        <a:t>layer3</a:t>
+                      </a:r>
+                      <a:endParaRPr lang="en-US" altLang="zh-CN">
+                        <a:latin typeface="微软雅黑" panose="020B0503020204020204" charset="-122"/>
+                        <a:ea typeface="微软雅黑" panose="020B0503020204020204" charset="-122"/>
+                      </a:endParaRPr>
+                    </a:p>
+                  </a:txBody>
+                  <a:tcPr anchor="ctr" anchorCtr="0"/>
+                </a:tc>
+                <a:tc>
+                  <a:txBody>
+                    <a:bodyPr/>
+                    <a:p>
+                      <a:pPr algn="l">
+                        <a:buNone/>
+                      </a:pPr>
+                      <a:r>
+                        <a:rPr lang="en-US" altLang="zh-CN">
+                          <a:latin typeface="微软雅黑" panose="020B0503020204020204" charset="-122"/>
+                          <a:ea typeface="微软雅黑" panose="020B0503020204020204" charset="-122"/>
+                          <a:cs typeface="微软雅黑" panose="020B0503020204020204" charset="-122"/>
+                        </a:rPr>
+                        <a:t>16</a:t>
+                      </a:r>
+                      <a:r>
+                        <a:rPr lang="en-US" altLang="en-US">
+                          <a:latin typeface="微软雅黑" panose="020B0503020204020204" charset="-122"/>
+                          <a:ea typeface="微软雅黑" panose="020B0503020204020204" charset="-122"/>
+                          <a:cs typeface="微软雅黑" panose="020B0503020204020204" charset="-122"/>
+                        </a:rPr>
+                        <a:t>×</a:t>
+                      </a:r>
+                      <a:r>
+                        <a:rPr lang="en-US" altLang="zh-CN">
+                          <a:latin typeface="微软雅黑" panose="020B0503020204020204" charset="-122"/>
+                          <a:ea typeface="微软雅黑" panose="020B0503020204020204" charset="-122"/>
+                          <a:cs typeface="微软雅黑" panose="020B0503020204020204" charset="-122"/>
+                        </a:rPr>
+                        <a:t>16</a:t>
+                      </a:r>
+                      <a:endParaRPr lang="en-US" altLang="zh-CN">
+                        <a:latin typeface="微软雅黑" panose="020B0503020204020204" charset="-122"/>
+                        <a:ea typeface="微软雅黑" panose="020B0503020204020204" charset="-122"/>
+                        <a:cs typeface="微软雅黑" panose="020B0503020204020204" charset="-122"/>
+                      </a:endParaRPr>
+                    </a:p>
+                  </a:txBody>
+                  <a:tcPr anchor="ctr" anchorCtr="0"/>
+                </a:tc>
+                <a:tc>
+                  <a:txBody>
+                    <a:bodyPr/>
+                    <a:p>
+                      <a:pPr algn="l">
+                        <a:buNone/>
+                      </a:pPr>
+                      <a:r>
+                        <a:rPr lang="en-US" altLang="zh-CN">
+                          <a:latin typeface="微软雅黑" panose="020B0503020204020204" charset="-122"/>
+                          <a:ea typeface="微软雅黑" panose="020B0503020204020204" charset="-122"/>
+                        </a:rPr>
+                        <a:t>256</a:t>
+                      </a:r>
+                      <a:endParaRPr lang="en-US" altLang="zh-CN">
+                        <a:latin typeface="微软雅黑" panose="020B0503020204020204" charset="-122"/>
+                        <a:ea typeface="微软雅黑" panose="020B0503020204020204" charset="-122"/>
+                      </a:endParaRPr>
+                    </a:p>
+                  </a:txBody>
+                  <a:tcPr anchor="ctr" anchorCtr="0"/>
+                </a:tc>
+              </a:tr>
+              <a:tr h="429895">
+                <a:tc>
+                  <a:txBody>
+                    <a:bodyPr/>
+                    <a:p>
+                      <a:pPr algn="l">
+                        <a:buNone/>
+                      </a:pPr>
+                      <a:r>
+                        <a:rPr lang="en-US" altLang="zh-CN">
+                          <a:latin typeface="微软雅黑" panose="020B0503020204020204" charset="-122"/>
+                          <a:ea typeface="微软雅黑" panose="020B0503020204020204" charset="-122"/>
+                        </a:rPr>
+                        <a:t>layer4</a:t>
+                      </a:r>
+                      <a:endParaRPr lang="en-US" altLang="zh-CN">
+                        <a:latin typeface="微软雅黑" panose="020B0503020204020204" charset="-122"/>
+                        <a:ea typeface="微软雅黑" panose="020B0503020204020204" charset="-122"/>
+                      </a:endParaRPr>
+                    </a:p>
+                  </a:txBody>
+                  <a:tcPr anchor="ctr" anchorCtr="0"/>
+                </a:tc>
+                <a:tc>
+                  <a:txBody>
+                    <a:bodyPr/>
+                    <a:p>
+                      <a:pPr algn="l">
+                        <a:buNone/>
+                      </a:pPr>
+                      <a:r>
+                        <a:rPr lang="en-US" altLang="zh-CN">
+                          <a:latin typeface="微软雅黑" panose="020B0503020204020204" charset="-122"/>
+                          <a:ea typeface="微软雅黑" panose="020B0503020204020204" charset="-122"/>
+                          <a:cs typeface="微软雅黑" panose="020B0503020204020204" charset="-122"/>
+                        </a:rPr>
+                        <a:t>8</a:t>
+                      </a:r>
+                      <a:r>
+                        <a:rPr lang="en-US" altLang="en-US">
+                          <a:latin typeface="微软雅黑" panose="020B0503020204020204" charset="-122"/>
+                          <a:ea typeface="微软雅黑" panose="020B0503020204020204" charset="-122"/>
+                          <a:cs typeface="微软雅黑" panose="020B0503020204020204" charset="-122"/>
+                        </a:rPr>
+                        <a:t>×</a:t>
+                      </a:r>
+                      <a:r>
+                        <a:rPr lang="en-US" altLang="zh-CN">
+                          <a:latin typeface="微软雅黑" panose="020B0503020204020204" charset="-122"/>
+                          <a:ea typeface="微软雅黑" panose="020B0503020204020204" charset="-122"/>
+                          <a:cs typeface="微软雅黑" panose="020B0503020204020204" charset="-122"/>
+                        </a:rPr>
+                        <a:t>8</a:t>
+                      </a:r>
+                      <a:endParaRPr lang="en-US" altLang="zh-CN">
+                        <a:latin typeface="微软雅黑" panose="020B0503020204020204" charset="-122"/>
+                        <a:ea typeface="微软雅黑" panose="020B0503020204020204" charset="-122"/>
+                        <a:cs typeface="微软雅黑" panose="020B0503020204020204" charset="-122"/>
+                      </a:endParaRPr>
+                    </a:p>
+                  </a:txBody>
+                  <a:tcPr anchor="ctr" anchorCtr="0"/>
+                </a:tc>
+                <a:tc>
+                  <a:txBody>
+                    <a:bodyPr/>
+                    <a:p>
+                      <a:pPr algn="l">
+                        <a:buNone/>
+                      </a:pPr>
+                      <a:r>
+                        <a:rPr lang="en-US" altLang="zh-CN">
+                          <a:latin typeface="微软雅黑" panose="020B0503020204020204" charset="-122"/>
+                          <a:ea typeface="微软雅黑" panose="020B0503020204020204" charset="-122"/>
+                        </a:rPr>
+                        <a:t>512</a:t>
+                      </a:r>
+                      <a:endParaRPr lang="en-US" altLang="zh-CN">
+                        <a:latin typeface="微软雅黑" panose="020B0503020204020204" charset="-122"/>
+                        <a:ea typeface="微软雅黑" panose="020B0503020204020204" charset="-122"/>
+                      </a:endParaRPr>
+                    </a:p>
+                  </a:txBody>
+                  <a:tcPr anchor="ctr" anchorCtr="0"/>
+                </a:tc>
+              </a:tr>
+            </a:tbl>
+          </a:graphicData>
+        </a:graphic>
+      </p:graphicFrame>
     </p:spTree>
   </p:cSld>
   <p:clrMapOvr>
@@ -4773,8 +6760,8 @@
 </p:sld>
 </file>
 
-<file path=ppt/slides/slide5.xml><?xml version="1.0" encoding="utf-8"?>
-<p:sld xmlns:a="http://schemas.openxmlformats.org/drawingml/2006/main" xmlns:p="http://schemas.openxmlformats.org/presentationml/2006/main" xmlns:r="http://schemas.openxmlformats.org/officeDocument/2006/relationships">
+<file path=ppt/slides/slide6.xml><?xml version="1.0" encoding="utf-8"?>
+<p:sld xmlns:a="http://schemas.openxmlformats.org/drawingml/2006/main" xmlns:r="http://schemas.openxmlformats.org/officeDocument/2006/relationships" xmlns:p="http://schemas.openxmlformats.org/presentationml/2006/main">
   <p:cSld>
     <p:bg>
       <p:bgPr>
@@ -4827,7 +6814,7 @@
           </a:fontRef>
         </p:style>
         <p:txBody>
-          <a:bodyPr rtlCol="0" anchor="ctr" wrap="square" lIns="731520" tIns="137160"/>
+          <a:bodyPr wrap="square" lIns="731520" tIns="137160" rtlCol="0" anchor="ctr"/>
           <a:lstStyle/>
           <a:p>
             <a:pPr algn="l">
@@ -4838,8 +6825,16 @@
               </a:defRPr>
             </a:pPr>
             <a:r>
-              <a:t>实验结果</a:t>
-            </a:r>
+              <a:rPr>
+                <a:latin typeface="微软雅黑" panose="020B0503020204020204" charset="-122"/>
+                <a:ea typeface="微软雅黑" panose="020B0503020204020204" charset="-122"/>
+              </a:rPr>
+              <a:t>训练配置</a:t>
+            </a:r>
+            <a:endParaRPr>
+              <a:latin typeface="微软雅黑" panose="020B0503020204020204" charset="-122"/>
+              <a:ea typeface="微软雅黑" panose="020B0503020204020204" charset="-122"/>
+            </a:endParaRPr>
           </a:p>
         </p:txBody>
       </p:sp>
@@ -4879,7 +6874,7 @@
           </a:fontRef>
         </p:style>
         <p:txBody>
-          <a:bodyPr rtlCol="0" anchor="ctr" lIns="731520"/>
+          <a:bodyPr lIns="731520" rtlCol="0" anchor="ctr"/>
           <a:lstStyle/>
           <a:p>
             <a:pPr algn="l">
@@ -4890,277 +6885,29 @@
               </a:defRPr>
             </a:pPr>
             <a:r>
-              <a:t>Experimental Results</a:t>
-            </a:r>
+              <a:rPr>
+                <a:latin typeface="微软雅黑" panose="020B0503020204020204" charset="-122"/>
+                <a:ea typeface="微软雅黑" panose="020B0503020204020204" charset="-122"/>
+              </a:rPr>
+              <a:t>Training Configuration</a:t>
+            </a:r>
+            <a:endParaRPr>
+              <a:latin typeface="微软雅黑" panose="020B0503020204020204" charset="-122"/>
+              <a:ea typeface="微软雅黑" panose="020B0503020204020204" charset="-122"/>
+            </a:endParaRPr>
           </a:p>
         </p:txBody>
       </p:sp>
       <p:sp>
         <p:nvSpPr>
-          <p:cNvPr id="4" name="Rounded Rectangle 3"/>
-          <p:cNvSpPr/>
-          <p:nvPr/>
-        </p:nvSpPr>
-        <p:spPr>
-          <a:xfrm>
-            <a:off x="731520" y="1828800"/>
-            <a:ext cx="2286000" cy="1371600"/>
-          </a:xfrm>
-          <a:prstGeom prst="roundRect">
-            <a:avLst/>
-          </a:prstGeom>
-          <a:solidFill>
-            <a:srgbClr val="2E86AB"/>
-          </a:solidFill>
-          <a:ln>
-            <a:noFill/>
-          </a:ln>
-        </p:spPr>
-        <p:style>
-          <a:lnRef idx="1">
-            <a:schemeClr val="accent1"/>
-          </a:lnRef>
-          <a:fillRef idx="3">
-            <a:schemeClr val="accent1"/>
-          </a:fillRef>
-          <a:effectRef idx="2">
-            <a:schemeClr val="accent1"/>
-          </a:effectRef>
-          <a:fontRef idx="minor">
-            <a:schemeClr val="lt1"/>
-          </a:fontRef>
-        </p:style>
-        <p:txBody>
-          <a:bodyPr rtlCol="0" anchor="ctr" wrap="square"/>
-          <a:lstStyle/>
-          <a:p>
-            <a:pPr algn="ctr">
-              <a:defRPr sz="3600" b="1">
-                <a:solidFill>
-                  <a:srgbClr val="FFFFFF"/>
-                </a:solidFill>
-              </a:defRPr>
-            </a:pPr>
-            <a:r>
-              <a:t>0.8760</a:t>
-            </a:r>
-          </a:p>
-          <a:p>
-            <a:pPr algn="ctr">
-              <a:defRPr sz="1400">
-                <a:solidFill>
-                  <a:srgbClr val="FFFFFF"/>
-                </a:solidFill>
-              </a:defRPr>
-            </a:pPr>
-            <a:r>
-              <a:t>Dice Coefficient</a:t>
-            </a:r>
-          </a:p>
-        </p:txBody>
-      </p:sp>
-      <p:sp>
-        <p:nvSpPr>
-          <p:cNvPr id="5" name="Rounded Rectangle 4"/>
-          <p:cNvSpPr/>
-          <p:nvPr/>
-        </p:nvSpPr>
-        <p:spPr>
-          <a:xfrm>
-            <a:off x="3474720" y="1828800"/>
-            <a:ext cx="2286000" cy="1371600"/>
-          </a:xfrm>
-          <a:prstGeom prst="roundRect">
-            <a:avLst/>
-          </a:prstGeom>
-          <a:solidFill>
-            <a:srgbClr val="2E86AB"/>
-          </a:solidFill>
-          <a:ln>
-            <a:noFill/>
-          </a:ln>
-        </p:spPr>
-        <p:style>
-          <a:lnRef idx="1">
-            <a:schemeClr val="accent1"/>
-          </a:lnRef>
-          <a:fillRef idx="3">
-            <a:schemeClr val="accent1"/>
-          </a:fillRef>
-          <a:effectRef idx="2">
-            <a:schemeClr val="accent1"/>
-          </a:effectRef>
-          <a:fontRef idx="minor">
-            <a:schemeClr val="lt1"/>
-          </a:fontRef>
-        </p:style>
-        <p:txBody>
-          <a:bodyPr rtlCol="0" anchor="ctr" wrap="square"/>
-          <a:lstStyle/>
-          <a:p>
-            <a:pPr algn="ctr">
-              <a:defRPr sz="3600" b="1">
-                <a:solidFill>
-                  <a:srgbClr val="FFFFFF"/>
-                </a:solidFill>
-              </a:defRPr>
-            </a:pPr>
-            <a:r>
-              <a:t>0.8006</a:t>
-            </a:r>
-          </a:p>
-          <a:p>
-            <a:pPr algn="ctr">
-              <a:defRPr sz="1400">
-                <a:solidFill>
-                  <a:srgbClr val="FFFFFF"/>
-                </a:solidFill>
-              </a:defRPr>
-            </a:pPr>
-            <a:r>
-              <a:t>IoU Score</a:t>
-            </a:r>
-          </a:p>
-        </p:txBody>
-      </p:sp>
-      <p:sp>
-        <p:nvSpPr>
-          <p:cNvPr id="6" name="Rounded Rectangle 5"/>
-          <p:cNvSpPr/>
-          <p:nvPr/>
-        </p:nvSpPr>
-        <p:spPr>
-          <a:xfrm>
-            <a:off x="6217920" y="1828800"/>
-            <a:ext cx="2286000" cy="1371600"/>
-          </a:xfrm>
-          <a:prstGeom prst="roundRect">
-            <a:avLst/>
-          </a:prstGeom>
-          <a:solidFill>
-            <a:srgbClr val="2E86AB"/>
-          </a:solidFill>
-          <a:ln>
-            <a:noFill/>
-          </a:ln>
-        </p:spPr>
-        <p:style>
-          <a:lnRef idx="1">
-            <a:schemeClr val="accent1"/>
-          </a:lnRef>
-          <a:fillRef idx="3">
-            <a:schemeClr val="accent1"/>
-          </a:fillRef>
-          <a:effectRef idx="2">
-            <a:schemeClr val="accent1"/>
-          </a:effectRef>
-          <a:fontRef idx="minor">
-            <a:schemeClr val="lt1"/>
-          </a:fontRef>
-        </p:style>
-        <p:txBody>
-          <a:bodyPr rtlCol="0" anchor="ctr" wrap="square"/>
-          <a:lstStyle/>
-          <a:p>
-            <a:pPr algn="ctr">
-              <a:defRPr sz="3600" b="1">
-                <a:solidFill>
-                  <a:srgbClr val="FFFFFF"/>
-                </a:solidFill>
-              </a:defRPr>
-            </a:pPr>
-            <a:r>
-              <a:t>0.9298</a:t>
-            </a:r>
-          </a:p>
-          <a:p>
-            <a:pPr algn="ctr">
-              <a:defRPr sz="1400">
-                <a:solidFill>
-                  <a:srgbClr val="FFFFFF"/>
-                </a:solidFill>
-              </a:defRPr>
-            </a:pPr>
-            <a:r>
-              <a:t>Pixel Accuracy</a:t>
-            </a:r>
-          </a:p>
-        </p:txBody>
-      </p:sp>
-      <p:sp>
-        <p:nvSpPr>
-          <p:cNvPr id="7" name="Rounded Rectangle 6"/>
-          <p:cNvSpPr/>
-          <p:nvPr/>
-        </p:nvSpPr>
-        <p:spPr>
-          <a:xfrm>
-            <a:off x="8961120" y="1828800"/>
-            <a:ext cx="2286000" cy="1371600"/>
-          </a:xfrm>
-          <a:prstGeom prst="roundRect">
-            <a:avLst/>
-          </a:prstGeom>
-          <a:solidFill>
-            <a:srgbClr val="2E86AB"/>
-          </a:solidFill>
-          <a:ln>
-            <a:noFill/>
-          </a:ln>
-        </p:spPr>
-        <p:style>
-          <a:lnRef idx="1">
-            <a:schemeClr val="accent1"/>
-          </a:lnRef>
-          <a:fillRef idx="3">
-            <a:schemeClr val="accent1"/>
-          </a:fillRef>
-          <a:effectRef idx="2">
-            <a:schemeClr val="accent1"/>
-          </a:effectRef>
-          <a:fontRef idx="minor">
-            <a:schemeClr val="lt1"/>
-          </a:fontRef>
-        </p:style>
-        <p:txBody>
-          <a:bodyPr rtlCol="0" anchor="ctr" wrap="square"/>
-          <a:lstStyle/>
-          <a:p>
-            <a:pPr algn="ctr">
-              <a:defRPr sz="3600" b="1">
-                <a:solidFill>
-                  <a:srgbClr val="FFFFFF"/>
-                </a:solidFill>
-              </a:defRPr>
-            </a:pPr>
-            <a:r>
-              <a:t>0.8858</a:t>
-            </a:r>
-          </a:p>
-          <a:p>
-            <a:pPr algn="ctr">
-              <a:defRPr sz="1400">
-                <a:solidFill>
-                  <a:srgbClr val="FFFFFF"/>
-                </a:solidFill>
-              </a:defRPr>
-            </a:pPr>
-            <a:r>
-              <a:t>Best Val Dice</a:t>
-            </a:r>
-          </a:p>
-        </p:txBody>
-      </p:sp>
-      <p:sp>
-        <p:nvSpPr>
-          <p:cNvPr id="8" name="TextBox 7"/>
+          <p:cNvPr id="4" name="TextBox 3"/>
           <p:cNvSpPr txBox="1"/>
           <p:nvPr/>
         </p:nvSpPr>
         <p:spPr>
           <a:xfrm>
-            <a:off x="731520" y="3657600"/>
-            <a:ext cx="10515600" cy="2743200"/>
+            <a:off x="731520" y="1922780"/>
+            <a:ext cx="5592445" cy="4261485"/>
           </a:xfrm>
           <a:prstGeom prst="rect">
             <a:avLst/>
@@ -5184,8 +6931,18 @@
               </a:defRPr>
             </a:pPr>
             <a:r>
-              <a:t>📈 训练过程指标变化</a:t>
-            </a:r>
+              <a:rPr>
+                <a:latin typeface="微软雅黑" panose="020B0503020204020204" charset="-122"/>
+                <a:ea typeface="微软雅黑" panose="020B0503020204020204" charset="-122"/>
+                <a:cs typeface="微软雅黑" panose="020B0503020204020204" charset="-122"/>
+              </a:rPr>
+              <a:t>⚙️ 超参数设置</a:t>
+            </a:r>
+            <a:endParaRPr>
+              <a:latin typeface="微软雅黑" panose="020B0503020204020204" charset="-122"/>
+              <a:ea typeface="微软雅黑" panose="020B0503020204020204" charset="-122"/>
+              <a:cs typeface="微软雅黑" panose="020B0503020204020204" charset="-122"/>
+            </a:endParaRPr>
           </a:p>
           <a:p>
             <a:pPr>
@@ -5198,6 +6955,11 @@
                 </a:solidFill>
               </a:defRPr>
             </a:pPr>
+            <a:endParaRPr>
+              <a:latin typeface="微软雅黑" panose="020B0503020204020204" charset="-122"/>
+              <a:ea typeface="微软雅黑" panose="020B0503020204020204" charset="-122"/>
+              <a:cs typeface="微软雅黑" panose="020B0503020204020204" charset="-122"/>
+            </a:endParaRPr>
           </a:p>
           <a:p>
             <a:pPr>
@@ -5211,8 +6973,18 @@
               </a:defRPr>
             </a:pPr>
             <a:r>
-              <a:t>  训练初期 (Epoch 1-10):  Loss 快速下降, Dice 从 0.6 提升至 0.85+</a:t>
-            </a:r>
+              <a:rPr>
+                <a:latin typeface="微软雅黑" panose="020B0503020204020204" charset="-122"/>
+                <a:ea typeface="微软雅黑" panose="020B0503020204020204" charset="-122"/>
+                <a:cs typeface="微软雅黑" panose="020B0503020204020204" charset="-122"/>
+              </a:rPr>
+              <a:t>• 优化器: Adam (lr=1e-4, weight_decay=1e-4)</a:t>
+            </a:r>
+            <a:endParaRPr>
+              <a:latin typeface="微软雅黑" panose="020B0503020204020204" charset="-122"/>
+              <a:ea typeface="微软雅黑" panose="020B0503020204020204" charset="-122"/>
+              <a:cs typeface="微软雅黑" panose="020B0503020204020204" charset="-122"/>
+            </a:endParaRPr>
           </a:p>
           <a:p>
             <a:pPr>
@@ -5226,8 +6998,18 @@
               </a:defRPr>
             </a:pPr>
             <a:r>
-              <a:t>  训练中期 (Epoch 11-37):  Loss 稳定下降, Dice 缓慢提升至最高 0.8858 (Epoch 37)</a:t>
-            </a:r>
+              <a:rPr>
+                <a:latin typeface="微软雅黑" panose="020B0503020204020204" charset="-122"/>
+                <a:ea typeface="微软雅黑" panose="020B0503020204020204" charset="-122"/>
+                <a:cs typeface="微软雅黑" panose="020B0503020204020204" charset="-122"/>
+              </a:rPr>
+              <a:t>• 损失函数: Dice Loss + BCE Loss (组合)</a:t>
+            </a:r>
+            <a:endParaRPr>
+              <a:latin typeface="微软雅黑" panose="020B0503020204020204" charset="-122"/>
+              <a:ea typeface="微软雅黑" panose="020B0503020204020204" charset="-122"/>
+              <a:cs typeface="微软雅黑" panose="020B0503020204020204" charset="-122"/>
+            </a:endParaRPr>
           </a:p>
           <a:p>
             <a:pPr>
@@ -5241,8 +7023,18 @@
               </a:defRPr>
             </a:pPr>
             <a:r>
-              <a:t>  训练后期 (Epoch 38-50):  Dice 在 0.877-0.880 波动, 学习率降至 6e-6, 模型收敛</a:t>
-            </a:r>
+              <a:rPr>
+                <a:latin typeface="微软雅黑" panose="020B0503020204020204" charset="-122"/>
+                <a:ea typeface="微软雅黑" panose="020B0503020204020204" charset="-122"/>
+                <a:cs typeface="微软雅黑" panose="020B0503020204020204" charset="-122"/>
+              </a:rPr>
+              <a:t>• Batch Size: 8</a:t>
+            </a:r>
+            <a:endParaRPr>
+              <a:latin typeface="微软雅黑" panose="020B0503020204020204" charset="-122"/>
+              <a:ea typeface="微软雅黑" panose="020B0503020204020204" charset="-122"/>
+              <a:cs typeface="微软雅黑" panose="020B0503020204020204" charset="-122"/>
+            </a:endParaRPr>
           </a:p>
           <a:p>
             <a:pPr>
@@ -5255,6 +7047,19 @@
                 </a:solidFill>
               </a:defRPr>
             </a:pPr>
+            <a:r>
+              <a:rPr>
+                <a:latin typeface="微软雅黑" panose="020B0503020204020204" charset="-122"/>
+                <a:ea typeface="微软雅黑" panose="020B0503020204020204" charset="-122"/>
+                <a:cs typeface="微软雅黑" panose="020B0503020204020204" charset="-122"/>
+              </a:rPr>
+              <a:t>• Epochs: 50</a:t>
+            </a:r>
+            <a:endParaRPr>
+              <a:latin typeface="微软雅黑" panose="020B0503020204020204" charset="-122"/>
+              <a:ea typeface="微软雅黑" panose="020B0503020204020204" charset="-122"/>
+              <a:cs typeface="微软雅黑" panose="020B0503020204020204" charset="-122"/>
+            </a:endParaRPr>
           </a:p>
           <a:p>
             <a:pPr>
@@ -5268,8 +7073,467 @@
               </a:defRPr>
             </a:pPr>
             <a:r>
-              <a:t>✅ 测试集 Dice (0.8760) 与最佳验证 Dice (0.8858) 差距 &lt; 0.01, 泛化能力良好</a:t>
-            </a:r>
+              <a:rPr>
+                <a:latin typeface="微软雅黑" panose="020B0503020204020204" charset="-122"/>
+                <a:ea typeface="微软雅黑" panose="020B0503020204020204" charset="-122"/>
+                <a:cs typeface="微软雅黑" panose="020B0503020204020204" charset="-122"/>
+              </a:rPr>
+              <a:t>• 输入尺寸: 256×256</a:t>
+            </a:r>
+            <a:endParaRPr>
+              <a:latin typeface="微软雅黑" panose="020B0503020204020204" charset="-122"/>
+              <a:ea typeface="微软雅黑" panose="020B0503020204020204" charset="-122"/>
+              <a:cs typeface="微软雅黑" panose="020B0503020204020204" charset="-122"/>
+            </a:endParaRPr>
+          </a:p>
+          <a:p>
+            <a:pPr>
+              <a:spcAft>
+                <a:spcPts val="600"/>
+              </a:spcAft>
+              <a:defRPr sz="1800">
+                <a:solidFill>
+                  <a:srgbClr val="333333"/>
+                </a:solidFill>
+              </a:defRPr>
+            </a:pPr>
+            <a:endParaRPr>
+              <a:latin typeface="微软雅黑" panose="020B0503020204020204" charset="-122"/>
+              <a:ea typeface="微软雅黑" panose="020B0503020204020204" charset="-122"/>
+              <a:cs typeface="微软雅黑" panose="020B0503020204020204" charset="-122"/>
+            </a:endParaRPr>
+          </a:p>
+          <a:p>
+            <a:pPr>
+              <a:spcAft>
+                <a:spcPts val="600"/>
+              </a:spcAft>
+              <a:defRPr sz="1800">
+                <a:solidFill>
+                  <a:srgbClr val="333333"/>
+                </a:solidFill>
+              </a:defRPr>
+            </a:pPr>
+            <a:r>
+              <a:rPr>
+                <a:latin typeface="微软雅黑" panose="020B0503020204020204" charset="-122"/>
+                <a:ea typeface="微软雅黑" panose="020B0503020204020204" charset="-122"/>
+                <a:cs typeface="微软雅黑" panose="020B0503020204020204" charset="-122"/>
+              </a:rPr>
+              <a:t>📉 学习率调度</a:t>
+            </a:r>
+            <a:endParaRPr>
+              <a:latin typeface="微软雅黑" panose="020B0503020204020204" charset="-122"/>
+              <a:ea typeface="微软雅黑" panose="020B0503020204020204" charset="-122"/>
+              <a:cs typeface="微软雅黑" panose="020B0503020204020204" charset="-122"/>
+            </a:endParaRPr>
+          </a:p>
+          <a:p>
+            <a:pPr>
+              <a:spcAft>
+                <a:spcPts val="600"/>
+              </a:spcAft>
+              <a:defRPr sz="1800">
+                <a:solidFill>
+                  <a:srgbClr val="333333"/>
+                </a:solidFill>
+              </a:defRPr>
+            </a:pPr>
+            <a:r>
+              <a:rPr>
+                <a:latin typeface="微软雅黑" panose="020B0503020204020204" charset="-122"/>
+                <a:ea typeface="微软雅黑" panose="020B0503020204020204" charset="-122"/>
+                <a:cs typeface="微软雅黑" panose="020B0503020204020204" charset="-122"/>
+              </a:rPr>
+              <a:t>• ReduceLROnPlateau</a:t>
+            </a:r>
+            <a:endParaRPr>
+              <a:latin typeface="微软雅黑" panose="020B0503020204020204" charset="-122"/>
+              <a:ea typeface="微软雅黑" panose="020B0503020204020204" charset="-122"/>
+              <a:cs typeface="微软雅黑" panose="020B0503020204020204" charset="-122"/>
+            </a:endParaRPr>
+          </a:p>
+          <a:p>
+            <a:pPr>
+              <a:spcAft>
+                <a:spcPts val="600"/>
+              </a:spcAft>
+              <a:defRPr sz="1800">
+                <a:solidFill>
+                  <a:srgbClr val="333333"/>
+                </a:solidFill>
+              </a:defRPr>
+            </a:pPr>
+            <a:r>
+              <a:rPr>
+                <a:latin typeface="微软雅黑" panose="020B0503020204020204" charset="-122"/>
+                <a:ea typeface="微软雅黑" panose="020B0503020204020204" charset="-122"/>
+                <a:cs typeface="微软雅黑" panose="020B0503020204020204" charset="-122"/>
+              </a:rPr>
+              <a:t>• patience=5, factor=0.5</a:t>
+            </a:r>
+            <a:endParaRPr>
+              <a:latin typeface="微软雅黑" panose="020B0503020204020204" charset="-122"/>
+              <a:ea typeface="微软雅黑" panose="020B0503020204020204" charset="-122"/>
+              <a:cs typeface="微软雅黑" panose="020B0503020204020204" charset="-122"/>
+            </a:endParaRPr>
+          </a:p>
+          <a:p>
+            <a:pPr>
+              <a:spcAft>
+                <a:spcPts val="600"/>
+              </a:spcAft>
+              <a:defRPr sz="1800">
+                <a:solidFill>
+                  <a:srgbClr val="333333"/>
+                </a:solidFill>
+              </a:defRPr>
+            </a:pPr>
+            <a:r>
+              <a:rPr>
+                <a:latin typeface="微软雅黑" panose="020B0503020204020204" charset="-122"/>
+                <a:ea typeface="微软雅黑" panose="020B0503020204020204" charset="-122"/>
+                <a:cs typeface="微软雅黑" panose="020B0503020204020204" charset="-122"/>
+              </a:rPr>
+              <a:t>• 初始 1e-4 → 最低 6e-6</a:t>
+            </a:r>
+            <a:endParaRPr>
+              <a:latin typeface="微软雅黑" panose="020B0503020204020204" charset="-122"/>
+              <a:ea typeface="微软雅黑" panose="020B0503020204020204" charset="-122"/>
+              <a:cs typeface="微软雅黑" panose="020B0503020204020204" charset="-122"/>
+            </a:endParaRPr>
+          </a:p>
+        </p:txBody>
+      </p:sp>
+      <p:sp>
+        <p:nvSpPr>
+          <p:cNvPr id="5" name="TextBox 4"/>
+          <p:cNvSpPr txBox="1"/>
+          <p:nvPr/>
+        </p:nvSpPr>
+        <p:spPr>
+          <a:xfrm>
+            <a:off x="6400800" y="1828800"/>
+            <a:ext cx="5029200" cy="4615815"/>
+          </a:xfrm>
+          <a:prstGeom prst="rect">
+            <a:avLst/>
+          </a:prstGeom>
+          <a:noFill/>
+        </p:spPr>
+        <p:txBody>
+          <a:bodyPr wrap="square">
+            <a:spAutoFit/>
+          </a:bodyPr>
+          <a:lstStyle/>
+          <a:p>
+            <a:pPr>
+              <a:spcAft>
+                <a:spcPts val="600"/>
+              </a:spcAft>
+              <a:defRPr sz="1800">
+                <a:solidFill>
+                  <a:srgbClr val="333333"/>
+                </a:solidFill>
+              </a:defRPr>
+            </a:pPr>
+            <a:r>
+              <a:rPr>
+                <a:latin typeface="微软雅黑" panose="020B0503020204020204" charset="-122"/>
+                <a:ea typeface="微软雅黑" panose="020B0503020204020204" charset="-122"/>
+                <a:cs typeface="微软雅黑" panose="020B0503020204020204" charset="-122"/>
+              </a:rPr>
+              <a:t>💻 训练环境</a:t>
+            </a:r>
+            <a:endParaRPr>
+              <a:latin typeface="微软雅黑" panose="020B0503020204020204" charset="-122"/>
+              <a:ea typeface="微软雅黑" panose="020B0503020204020204" charset="-122"/>
+              <a:cs typeface="微软雅黑" panose="020B0503020204020204" charset="-122"/>
+            </a:endParaRPr>
+          </a:p>
+          <a:p>
+            <a:pPr>
+              <a:spcAft>
+                <a:spcPts val="600"/>
+              </a:spcAft>
+              <a:defRPr sz="1800">
+                <a:solidFill>
+                  <a:srgbClr val="333333"/>
+                </a:solidFill>
+              </a:defRPr>
+            </a:pPr>
+            <a:endParaRPr>
+              <a:latin typeface="微软雅黑" panose="020B0503020204020204" charset="-122"/>
+              <a:ea typeface="微软雅黑" panose="020B0503020204020204" charset="-122"/>
+              <a:cs typeface="微软雅黑" panose="020B0503020204020204" charset="-122"/>
+            </a:endParaRPr>
+          </a:p>
+          <a:p>
+            <a:pPr>
+              <a:spcAft>
+                <a:spcPts val="600"/>
+              </a:spcAft>
+              <a:defRPr sz="1800">
+                <a:solidFill>
+                  <a:srgbClr val="333333"/>
+                </a:solidFill>
+              </a:defRPr>
+            </a:pPr>
+            <a:r>
+              <a:rPr>
+                <a:latin typeface="微软雅黑" panose="020B0503020204020204" charset="-122"/>
+                <a:ea typeface="微软雅黑" panose="020B0503020204020204" charset="-122"/>
+                <a:cs typeface="微软雅黑" panose="020B0503020204020204" charset="-122"/>
+              </a:rPr>
+              <a:t>• GPU: NVIDIA RTX 3050 Laptop (4GB)</a:t>
+            </a:r>
+            <a:endParaRPr>
+              <a:latin typeface="微软雅黑" panose="020B0503020204020204" charset="-122"/>
+              <a:ea typeface="微软雅黑" panose="020B0503020204020204" charset="-122"/>
+              <a:cs typeface="微软雅黑" panose="020B0503020204020204" charset="-122"/>
+            </a:endParaRPr>
+          </a:p>
+          <a:p>
+            <a:pPr>
+              <a:spcAft>
+                <a:spcPts val="600"/>
+              </a:spcAft>
+              <a:defRPr sz="1800">
+                <a:solidFill>
+                  <a:srgbClr val="333333"/>
+                </a:solidFill>
+              </a:defRPr>
+            </a:pPr>
+            <a:r>
+              <a:rPr>
+                <a:latin typeface="微软雅黑" panose="020B0503020204020204" charset="-122"/>
+                <a:ea typeface="微软雅黑" panose="020B0503020204020204" charset="-122"/>
+                <a:cs typeface="微软雅黑" panose="020B0503020204020204" charset="-122"/>
+              </a:rPr>
+              <a:t>• 框架: PyTorch 2.6.0 + CUDA 12.4</a:t>
+            </a:r>
+            <a:endParaRPr>
+              <a:latin typeface="微软雅黑" panose="020B0503020204020204" charset="-122"/>
+              <a:ea typeface="微软雅黑" panose="020B0503020204020204" charset="-122"/>
+              <a:cs typeface="微软雅黑" panose="020B0503020204020204" charset="-122"/>
+            </a:endParaRPr>
+          </a:p>
+          <a:p>
+            <a:pPr>
+              <a:spcAft>
+                <a:spcPts val="600"/>
+              </a:spcAft>
+              <a:defRPr sz="1800">
+                <a:solidFill>
+                  <a:srgbClr val="333333"/>
+                </a:solidFill>
+              </a:defRPr>
+            </a:pPr>
+            <a:r>
+              <a:rPr>
+                <a:latin typeface="微软雅黑" panose="020B0503020204020204" charset="-122"/>
+                <a:ea typeface="微软雅黑" panose="020B0503020204020204" charset="-122"/>
+                <a:cs typeface="微软雅黑" panose="020B0503020204020204" charset="-122"/>
+              </a:rPr>
+              <a:t>• 训练时间: ~6.7 小时 (50 </a:t>
+            </a:r>
+            <a:r>
+              <a:rPr>
+                <a:latin typeface="微软雅黑" panose="020B0503020204020204" charset="-122"/>
+                <a:ea typeface="微软雅黑" panose="020B0503020204020204" charset="-122"/>
+                <a:cs typeface="微软雅黑" panose="020B0503020204020204" charset="-122"/>
+              </a:rPr>
+              <a:t>epochs)</a:t>
+            </a:r>
+            <a:endParaRPr>
+              <a:latin typeface="微软雅黑" panose="020B0503020204020204" charset="-122"/>
+              <a:ea typeface="微软雅黑" panose="020B0503020204020204" charset="-122"/>
+              <a:cs typeface="微软雅黑" panose="020B0503020204020204" charset="-122"/>
+            </a:endParaRPr>
+          </a:p>
+          <a:p>
+            <a:pPr>
+              <a:spcAft>
+                <a:spcPts val="600"/>
+              </a:spcAft>
+              <a:defRPr sz="1800">
+                <a:solidFill>
+                  <a:srgbClr val="333333"/>
+                </a:solidFill>
+              </a:defRPr>
+            </a:pPr>
+            <a:endParaRPr>
+              <a:latin typeface="微软雅黑" panose="020B0503020204020204" charset="-122"/>
+              <a:ea typeface="微软雅黑" panose="020B0503020204020204" charset="-122"/>
+              <a:cs typeface="微软雅黑" panose="020B0503020204020204" charset="-122"/>
+            </a:endParaRPr>
+          </a:p>
+          <a:p>
+            <a:pPr>
+              <a:spcAft>
+                <a:spcPts val="600"/>
+              </a:spcAft>
+              <a:defRPr sz="1800">
+                <a:solidFill>
+                  <a:srgbClr val="333333"/>
+                </a:solidFill>
+              </a:defRPr>
+            </a:pPr>
+            <a:r>
+              <a:rPr>
+                <a:latin typeface="微软雅黑" panose="020B0503020204020204" charset="-122"/>
+                <a:ea typeface="微软雅黑" panose="020B0503020204020204" charset="-122"/>
+                <a:cs typeface="微软雅黑" panose="020B0503020204020204" charset="-122"/>
+              </a:rPr>
+              <a:t>📊 训练数据</a:t>
+            </a:r>
+            <a:endParaRPr>
+              <a:latin typeface="微软雅黑" panose="020B0503020204020204" charset="-122"/>
+              <a:ea typeface="微软雅黑" panose="020B0503020204020204" charset="-122"/>
+              <a:cs typeface="微软雅黑" panose="020B0503020204020204" charset="-122"/>
+            </a:endParaRPr>
+          </a:p>
+          <a:p>
+            <a:pPr>
+              <a:spcAft>
+                <a:spcPts val="600"/>
+              </a:spcAft>
+              <a:defRPr sz="1800">
+                <a:solidFill>
+                  <a:srgbClr val="333333"/>
+                </a:solidFill>
+              </a:defRPr>
+            </a:pPr>
+            <a:r>
+              <a:rPr>
+                <a:latin typeface="微软雅黑" panose="020B0503020204020204" charset="-122"/>
+                <a:ea typeface="微软雅黑" panose="020B0503020204020204" charset="-122"/>
+                <a:cs typeface="微软雅黑" panose="020B0503020204020204" charset="-122"/>
+              </a:rPr>
+              <a:t>• 训练样本: 2,335 (原2,594, 90/10切分)</a:t>
+            </a:r>
+            <a:endParaRPr>
+              <a:latin typeface="微软雅黑" panose="020B0503020204020204" charset="-122"/>
+              <a:ea typeface="微软雅黑" panose="020B0503020204020204" charset="-122"/>
+              <a:cs typeface="微软雅黑" panose="020B0503020204020204" charset="-122"/>
+            </a:endParaRPr>
+          </a:p>
+          <a:p>
+            <a:pPr>
+              <a:spcAft>
+                <a:spcPts val="600"/>
+              </a:spcAft>
+              <a:defRPr sz="1800">
+                <a:solidFill>
+                  <a:srgbClr val="333333"/>
+                </a:solidFill>
+              </a:defRPr>
+            </a:pPr>
+            <a:r>
+              <a:rPr>
+                <a:latin typeface="微软雅黑" panose="020B0503020204020204" charset="-122"/>
+                <a:ea typeface="微软雅黑" panose="020B0503020204020204" charset="-122"/>
+                <a:cs typeface="微软雅黑" panose="020B0503020204020204" charset="-122"/>
+              </a:rPr>
+              <a:t>• 验证样本: 259 (使用真实验证集替换后)</a:t>
+            </a:r>
+            <a:endParaRPr>
+              <a:latin typeface="微软雅黑" panose="020B0503020204020204" charset="-122"/>
+              <a:ea typeface="微软雅黑" panose="020B0503020204020204" charset="-122"/>
+              <a:cs typeface="微软雅黑" panose="020B0503020204020204" charset="-122"/>
+            </a:endParaRPr>
+          </a:p>
+          <a:p>
+            <a:pPr>
+              <a:spcAft>
+                <a:spcPts val="600"/>
+              </a:spcAft>
+              <a:defRPr sz="1800">
+                <a:solidFill>
+                  <a:srgbClr val="333333"/>
+                </a:solidFill>
+              </a:defRPr>
+            </a:pPr>
+            <a:endParaRPr>
+              <a:latin typeface="微软雅黑" panose="020B0503020204020204" charset="-122"/>
+              <a:ea typeface="微软雅黑" panose="020B0503020204020204" charset="-122"/>
+              <a:cs typeface="微软雅黑" panose="020B0503020204020204" charset="-122"/>
+            </a:endParaRPr>
+          </a:p>
+          <a:p>
+            <a:pPr>
+              <a:spcAft>
+                <a:spcPts val="600"/>
+              </a:spcAft>
+              <a:defRPr sz="1800">
+                <a:solidFill>
+                  <a:srgbClr val="333333"/>
+                </a:solidFill>
+              </a:defRPr>
+            </a:pPr>
+            <a:r>
+              <a:rPr>
+                <a:latin typeface="微软雅黑" panose="020B0503020204020204" charset="-122"/>
+                <a:ea typeface="微软雅黑" panose="020B0503020204020204" charset="-122"/>
+                <a:cs typeface="微软雅黑" panose="020B0503020204020204" charset="-122"/>
+              </a:rPr>
+              <a:t>🛡️ 正则化</a:t>
+            </a:r>
+            <a:endParaRPr>
+              <a:latin typeface="微软雅黑" panose="020B0503020204020204" charset="-122"/>
+              <a:ea typeface="微软雅黑" panose="020B0503020204020204" charset="-122"/>
+              <a:cs typeface="微软雅黑" panose="020B0503020204020204" charset="-122"/>
+            </a:endParaRPr>
+          </a:p>
+          <a:p>
+            <a:pPr>
+              <a:spcAft>
+                <a:spcPts val="600"/>
+              </a:spcAft>
+              <a:defRPr sz="1800">
+                <a:solidFill>
+                  <a:srgbClr val="333333"/>
+                </a:solidFill>
+              </a:defRPr>
+            </a:pPr>
+            <a:r>
+              <a:rPr>
+                <a:latin typeface="微软雅黑" panose="020B0503020204020204" charset="-122"/>
+                <a:ea typeface="微软雅黑" panose="020B0503020204020204" charset="-122"/>
+                <a:cs typeface="微软雅黑" panose="020B0503020204020204" charset="-122"/>
+              </a:rPr>
+              <a:t>• L2 权重衰减 (1e-4)</a:t>
+            </a:r>
+            <a:endParaRPr>
+              <a:latin typeface="微软雅黑" panose="020B0503020204020204" charset="-122"/>
+              <a:ea typeface="微软雅黑" panose="020B0503020204020204" charset="-122"/>
+              <a:cs typeface="微软雅黑" panose="020B0503020204020204" charset="-122"/>
+            </a:endParaRPr>
+          </a:p>
+          <a:p>
+            <a:pPr>
+              <a:spcAft>
+                <a:spcPts val="600"/>
+              </a:spcAft>
+              <a:defRPr sz="1800">
+                <a:solidFill>
+                  <a:srgbClr val="333333"/>
+                </a:solidFill>
+              </a:defRPr>
+            </a:pPr>
+            <a:r>
+              <a:rPr>
+                <a:latin typeface="微软雅黑" panose="020B0503020204020204" charset="-122"/>
+                <a:ea typeface="微软雅黑" panose="020B0503020204020204" charset="-122"/>
+                <a:cs typeface="微软雅黑" panose="020B0503020204020204" charset="-122"/>
+              </a:rPr>
+              <a:t>• 数据增强 (翻转/旋转/颜色抖动)</a:t>
+            </a:r>
+            <a:endParaRPr>
+              <a:latin typeface="微软雅黑" panose="020B0503020204020204" charset="-122"/>
+              <a:ea typeface="微软雅黑" panose="020B0503020204020204" charset="-122"/>
+              <a:cs typeface="微软雅黑" panose="020B0503020204020204" charset="-122"/>
+            </a:endParaRPr>
           </a:p>
         </p:txBody>
       </p:sp>
@@ -5281,8 +7545,8 @@
 </p:sld>
 </file>
 
-<file path=ppt/slides/slide6.xml><?xml version="1.0" encoding="utf-8"?>
-<p:sld xmlns:a="http://schemas.openxmlformats.org/drawingml/2006/main" xmlns:p="http://schemas.openxmlformats.org/presentationml/2006/main" xmlns:r="http://schemas.openxmlformats.org/officeDocument/2006/relationships">
+<file path=ppt/slides/slide7.xml><?xml version="1.0" encoding="utf-8"?>
+<p:sld xmlns:a="http://schemas.openxmlformats.org/drawingml/2006/main" xmlns:r="http://schemas.openxmlformats.org/officeDocument/2006/relationships" xmlns:p="http://schemas.openxmlformats.org/presentationml/2006/main">
   <p:cSld>
     <p:bg>
       <p:bgPr>
@@ -5335,7 +7599,7 @@
           </a:fontRef>
         </p:style>
         <p:txBody>
-          <a:bodyPr rtlCol="0" anchor="ctr" wrap="square" lIns="731520" tIns="137160"/>
+          <a:bodyPr wrap="square" lIns="731520" tIns="137160" rtlCol="0" anchor="ctr"/>
           <a:lstStyle/>
           <a:p>
             <a:pPr algn="l">
@@ -5346,8 +7610,37 @@
               </a:defRPr>
             </a:pPr>
             <a:r>
-              <a:t>分析与结论</a:t>
-            </a:r>
+              <a:rPr>
+                <a:latin typeface="微软雅黑" panose="020B0503020204020204" charset="-122"/>
+                <a:ea typeface="微软雅黑" panose="020B0503020204020204" charset="-122"/>
+              </a:rPr>
+              <a:t>实验结果</a:t>
+            </a:r>
+            <a:r>
+              <a:rPr lang="en-US">
+                <a:latin typeface="微软雅黑" panose="020B0503020204020204" charset="-122"/>
+                <a:ea typeface="微软雅黑" panose="020B0503020204020204" charset="-122"/>
+              </a:rPr>
+              <a:t>——</a:t>
+            </a:r>
+            <a:r>
+              <a:rPr lang="zh-CN" altLang="en-US">
+                <a:latin typeface="微软雅黑" panose="020B0503020204020204" charset="-122"/>
+                <a:ea typeface="微软雅黑" panose="020B0503020204020204" charset="-122"/>
+              </a:rPr>
+              <a:t>基础</a:t>
+            </a:r>
+            <a:r>
+              <a:rPr lang="en-US" altLang="zh-CN">
+                <a:latin typeface="微软雅黑" panose="020B0503020204020204" charset="-122"/>
+                <a:ea typeface="微软雅黑" panose="020B0503020204020204" charset="-122"/>
+              </a:rPr>
+              <a:t> U-Net</a:t>
+            </a:r>
+            <a:endParaRPr lang="en-US" altLang="zh-CN">
+              <a:latin typeface="微软雅黑" panose="020B0503020204020204" charset="-122"/>
+              <a:ea typeface="微软雅黑" panose="020B0503020204020204" charset="-122"/>
+            </a:endParaRPr>
           </a:p>
         </p:txBody>
       </p:sp>
@@ -5387,7 +7680,7 @@
           </a:fontRef>
         </p:style>
         <p:txBody>
-          <a:bodyPr rtlCol="0" anchor="ctr" lIns="731520"/>
+          <a:bodyPr lIns="731520" rtlCol="0" anchor="ctr"/>
           <a:lstStyle/>
           <a:p>
             <a:pPr algn="l">
@@ -5398,21 +7691,349 @@
               </a:defRPr>
             </a:pPr>
             <a:r>
-              <a:t>Analysis &amp; Conclusion</a:t>
-            </a:r>
+              <a:rPr>
+                <a:latin typeface="微软雅黑" panose="020B0503020204020204" charset="-122"/>
+                <a:ea typeface="微软雅黑" panose="020B0503020204020204" charset="-122"/>
+              </a:rPr>
+              <a:t>Experimental Results</a:t>
+            </a:r>
+            <a:endParaRPr>
+              <a:latin typeface="微软雅黑" panose="020B0503020204020204" charset="-122"/>
+              <a:ea typeface="微软雅黑" panose="020B0503020204020204" charset="-122"/>
+            </a:endParaRPr>
           </a:p>
         </p:txBody>
       </p:sp>
       <p:sp>
         <p:nvSpPr>
-          <p:cNvPr id="4" name="TextBox 3"/>
+          <p:cNvPr id="4" name="Rounded Rectangle 3"/>
+          <p:cNvSpPr/>
+          <p:nvPr/>
+        </p:nvSpPr>
+        <p:spPr>
+          <a:xfrm>
+            <a:off x="731520" y="1828800"/>
+            <a:ext cx="2286000" cy="1371600"/>
+          </a:xfrm>
+          <a:prstGeom prst="roundRect">
+            <a:avLst/>
+          </a:prstGeom>
+          <a:solidFill>
+            <a:srgbClr val="2E86AB"/>
+          </a:solidFill>
+          <a:ln>
+            <a:noFill/>
+          </a:ln>
+        </p:spPr>
+        <p:style>
+          <a:lnRef idx="1">
+            <a:schemeClr val="accent1"/>
+          </a:lnRef>
+          <a:fillRef idx="3">
+            <a:schemeClr val="accent1"/>
+          </a:fillRef>
+          <a:effectRef idx="2">
+            <a:schemeClr val="accent1"/>
+          </a:effectRef>
+          <a:fontRef idx="minor">
+            <a:schemeClr val="lt1"/>
+          </a:fontRef>
+        </p:style>
+        <p:txBody>
+          <a:bodyPr wrap="square" rtlCol="0" anchor="ctr"/>
+          <a:lstStyle/>
+          <a:p>
+            <a:pPr algn="ctr">
+              <a:defRPr sz="3600" b="1">
+                <a:solidFill>
+                  <a:srgbClr val="FFFFFF"/>
+                </a:solidFill>
+              </a:defRPr>
+            </a:pPr>
+            <a:r>
+              <a:rPr>
+                <a:latin typeface="微软雅黑" panose="020B0503020204020204" charset="-122"/>
+                <a:ea typeface="微软雅黑" panose="020B0503020204020204" charset="-122"/>
+              </a:rPr>
+              <a:t>0.8760</a:t>
+            </a:r>
+            <a:endParaRPr>
+              <a:latin typeface="微软雅黑" panose="020B0503020204020204" charset="-122"/>
+              <a:ea typeface="微软雅黑" panose="020B0503020204020204" charset="-122"/>
+            </a:endParaRPr>
+          </a:p>
+          <a:p>
+            <a:pPr algn="ctr">
+              <a:defRPr sz="1400">
+                <a:solidFill>
+                  <a:srgbClr val="FFFFFF"/>
+                </a:solidFill>
+              </a:defRPr>
+            </a:pPr>
+            <a:r>
+              <a:rPr>
+                <a:latin typeface="微软雅黑" panose="020B0503020204020204" charset="-122"/>
+                <a:ea typeface="微软雅黑" panose="020B0503020204020204" charset="-122"/>
+              </a:rPr>
+              <a:t>Dice Coefficient</a:t>
+            </a:r>
+            <a:endParaRPr>
+              <a:latin typeface="微软雅黑" panose="020B0503020204020204" charset="-122"/>
+              <a:ea typeface="微软雅黑" panose="020B0503020204020204" charset="-122"/>
+            </a:endParaRPr>
+          </a:p>
+        </p:txBody>
+      </p:sp>
+      <p:sp>
+        <p:nvSpPr>
+          <p:cNvPr id="5" name="Rounded Rectangle 4"/>
+          <p:cNvSpPr/>
+          <p:nvPr/>
+        </p:nvSpPr>
+        <p:spPr>
+          <a:xfrm>
+            <a:off x="3474720" y="1828800"/>
+            <a:ext cx="2286000" cy="1371600"/>
+          </a:xfrm>
+          <a:prstGeom prst="roundRect">
+            <a:avLst/>
+          </a:prstGeom>
+          <a:solidFill>
+            <a:srgbClr val="2E86AB"/>
+          </a:solidFill>
+          <a:ln>
+            <a:noFill/>
+          </a:ln>
+        </p:spPr>
+        <p:style>
+          <a:lnRef idx="1">
+            <a:schemeClr val="accent1"/>
+          </a:lnRef>
+          <a:fillRef idx="3">
+            <a:schemeClr val="accent1"/>
+          </a:fillRef>
+          <a:effectRef idx="2">
+            <a:schemeClr val="accent1"/>
+          </a:effectRef>
+          <a:fontRef idx="minor">
+            <a:schemeClr val="lt1"/>
+          </a:fontRef>
+        </p:style>
+        <p:txBody>
+          <a:bodyPr wrap="square" rtlCol="0" anchor="ctr"/>
+          <a:lstStyle/>
+          <a:p>
+            <a:pPr algn="ctr">
+              <a:defRPr sz="3600" b="1">
+                <a:solidFill>
+                  <a:srgbClr val="FFFFFF"/>
+                </a:solidFill>
+              </a:defRPr>
+            </a:pPr>
+            <a:r>
+              <a:rPr>
+                <a:latin typeface="微软雅黑" panose="020B0503020204020204" charset="-122"/>
+                <a:ea typeface="微软雅黑" panose="020B0503020204020204" charset="-122"/>
+              </a:rPr>
+              <a:t>0.8006</a:t>
+            </a:r>
+            <a:endParaRPr>
+              <a:latin typeface="微软雅黑" panose="020B0503020204020204" charset="-122"/>
+              <a:ea typeface="微软雅黑" panose="020B0503020204020204" charset="-122"/>
+            </a:endParaRPr>
+          </a:p>
+          <a:p>
+            <a:pPr algn="ctr">
+              <a:defRPr sz="1400">
+                <a:solidFill>
+                  <a:srgbClr val="FFFFFF"/>
+                </a:solidFill>
+              </a:defRPr>
+            </a:pPr>
+            <a:r>
+              <a:rPr>
+                <a:latin typeface="微软雅黑" panose="020B0503020204020204" charset="-122"/>
+                <a:ea typeface="微软雅黑" panose="020B0503020204020204" charset="-122"/>
+              </a:rPr>
+              <a:t>IoU Score</a:t>
+            </a:r>
+            <a:endParaRPr>
+              <a:latin typeface="微软雅黑" panose="020B0503020204020204" charset="-122"/>
+              <a:ea typeface="微软雅黑" panose="020B0503020204020204" charset="-122"/>
+            </a:endParaRPr>
+          </a:p>
+        </p:txBody>
+      </p:sp>
+      <p:sp>
+        <p:nvSpPr>
+          <p:cNvPr id="6" name="Rounded Rectangle 5"/>
+          <p:cNvSpPr/>
+          <p:nvPr/>
+        </p:nvSpPr>
+        <p:spPr>
+          <a:xfrm>
+            <a:off x="6217920" y="1828800"/>
+            <a:ext cx="2286000" cy="1371600"/>
+          </a:xfrm>
+          <a:prstGeom prst="roundRect">
+            <a:avLst/>
+          </a:prstGeom>
+          <a:solidFill>
+            <a:srgbClr val="2E86AB"/>
+          </a:solidFill>
+          <a:ln>
+            <a:noFill/>
+          </a:ln>
+        </p:spPr>
+        <p:style>
+          <a:lnRef idx="1">
+            <a:schemeClr val="accent1"/>
+          </a:lnRef>
+          <a:fillRef idx="3">
+            <a:schemeClr val="accent1"/>
+          </a:fillRef>
+          <a:effectRef idx="2">
+            <a:schemeClr val="accent1"/>
+          </a:effectRef>
+          <a:fontRef idx="minor">
+            <a:schemeClr val="lt1"/>
+          </a:fontRef>
+        </p:style>
+        <p:txBody>
+          <a:bodyPr wrap="square" rtlCol="0" anchor="ctr"/>
+          <a:lstStyle/>
+          <a:p>
+            <a:pPr algn="ctr">
+              <a:defRPr sz="3600" b="1">
+                <a:solidFill>
+                  <a:srgbClr val="FFFFFF"/>
+                </a:solidFill>
+              </a:defRPr>
+            </a:pPr>
+            <a:r>
+              <a:rPr>
+                <a:latin typeface="微软雅黑" panose="020B0503020204020204" charset="-122"/>
+                <a:ea typeface="微软雅黑" panose="020B0503020204020204" charset="-122"/>
+              </a:rPr>
+              <a:t>0.9298</a:t>
+            </a:r>
+            <a:endParaRPr>
+              <a:latin typeface="微软雅黑" panose="020B0503020204020204" charset="-122"/>
+              <a:ea typeface="微软雅黑" panose="020B0503020204020204" charset="-122"/>
+            </a:endParaRPr>
+          </a:p>
+          <a:p>
+            <a:pPr algn="ctr">
+              <a:defRPr sz="1400">
+                <a:solidFill>
+                  <a:srgbClr val="FFFFFF"/>
+                </a:solidFill>
+              </a:defRPr>
+            </a:pPr>
+            <a:r>
+              <a:rPr>
+                <a:latin typeface="微软雅黑" panose="020B0503020204020204" charset="-122"/>
+                <a:ea typeface="微软雅黑" panose="020B0503020204020204" charset="-122"/>
+              </a:rPr>
+              <a:t>Pixel Accuracy</a:t>
+            </a:r>
+            <a:endParaRPr>
+              <a:latin typeface="微软雅黑" panose="020B0503020204020204" charset="-122"/>
+              <a:ea typeface="微软雅黑" panose="020B0503020204020204" charset="-122"/>
+            </a:endParaRPr>
+          </a:p>
+        </p:txBody>
+      </p:sp>
+      <p:sp>
+        <p:nvSpPr>
+          <p:cNvPr id="7" name="Rounded Rectangle 6"/>
+          <p:cNvSpPr/>
+          <p:nvPr/>
+        </p:nvSpPr>
+        <p:spPr>
+          <a:xfrm>
+            <a:off x="8961120" y="1828800"/>
+            <a:ext cx="2286000" cy="1371600"/>
+          </a:xfrm>
+          <a:prstGeom prst="roundRect">
+            <a:avLst/>
+          </a:prstGeom>
+          <a:solidFill>
+            <a:srgbClr val="2E86AB"/>
+          </a:solidFill>
+          <a:ln>
+            <a:noFill/>
+          </a:ln>
+        </p:spPr>
+        <p:style>
+          <a:lnRef idx="1">
+            <a:schemeClr val="accent1"/>
+          </a:lnRef>
+          <a:fillRef idx="3">
+            <a:schemeClr val="accent1"/>
+          </a:fillRef>
+          <a:effectRef idx="2">
+            <a:schemeClr val="accent1"/>
+          </a:effectRef>
+          <a:fontRef idx="minor">
+            <a:schemeClr val="lt1"/>
+          </a:fontRef>
+        </p:style>
+        <p:txBody>
+          <a:bodyPr wrap="square" rtlCol="0" anchor="ctr"/>
+          <a:lstStyle/>
+          <a:p>
+            <a:pPr algn="ctr">
+              <a:defRPr sz="3600" b="1">
+                <a:solidFill>
+                  <a:srgbClr val="FFFFFF"/>
+                </a:solidFill>
+              </a:defRPr>
+            </a:pPr>
+            <a:r>
+              <a:rPr>
+                <a:latin typeface="微软雅黑" panose="020B0503020204020204" charset="-122"/>
+                <a:ea typeface="微软雅黑" panose="020B0503020204020204" charset="-122"/>
+              </a:rPr>
+              <a:t>0.8858</a:t>
+            </a:r>
+            <a:endParaRPr>
+              <a:latin typeface="微软雅黑" panose="020B0503020204020204" charset="-122"/>
+              <a:ea typeface="微软雅黑" panose="020B0503020204020204" charset="-122"/>
+            </a:endParaRPr>
+          </a:p>
+          <a:p>
+            <a:pPr algn="ctr">
+              <a:defRPr sz="1400">
+                <a:solidFill>
+                  <a:srgbClr val="FFFFFF"/>
+                </a:solidFill>
+              </a:defRPr>
+            </a:pPr>
+            <a:r>
+              <a:rPr>
+                <a:latin typeface="微软雅黑" panose="020B0503020204020204" charset="-122"/>
+                <a:ea typeface="微软雅黑" panose="020B0503020204020204" charset="-122"/>
+              </a:rPr>
+              <a:t>Best Val Dice</a:t>
+            </a:r>
+            <a:endParaRPr>
+              <a:latin typeface="微软雅黑" panose="020B0503020204020204" charset="-122"/>
+              <a:ea typeface="微软雅黑" panose="020B0503020204020204" charset="-122"/>
+            </a:endParaRPr>
+          </a:p>
+        </p:txBody>
+      </p:sp>
+      <p:sp>
+        <p:nvSpPr>
+          <p:cNvPr id="8" name="TextBox 7"/>
           <p:cNvSpPr txBox="1"/>
           <p:nvPr/>
         </p:nvSpPr>
         <p:spPr>
           <a:xfrm>
-            <a:off x="731520" y="1828800"/>
-            <a:ext cx="5303520" cy="4572000"/>
+            <a:off x="731520" y="3657600"/>
+            <a:ext cx="10515600" cy="2491740"/>
           </a:xfrm>
           <a:prstGeom prst="rect">
             <a:avLst/>
@@ -5429,395 +8050,159 @@
               <a:spcAft>
                 <a:spcPts val="600"/>
               </a:spcAft>
-              <a:defRPr sz="1600">
-                <a:solidFill>
-                  <a:srgbClr val="333333"/>
-                </a:solidFill>
-              </a:defRPr>
-            </a:pPr>
-            <a:r>
-              <a:t>💡 关键发现</a:t>
-            </a:r>
-          </a:p>
-          <a:p>
-            <a:pPr>
-              <a:spcAft>
-                <a:spcPts val="600"/>
-              </a:spcAft>
-              <a:defRPr sz="1600">
-                <a:solidFill>
-                  <a:srgbClr val="333333"/>
-                </a:solidFill>
-              </a:defRPr>
-            </a:pPr>
-          </a:p>
-          <a:p>
-            <a:pPr>
-              <a:spcAft>
-                <a:spcPts val="600"/>
-              </a:spcAft>
-              <a:defRPr sz="1600">
-                <a:solidFill>
-                  <a:srgbClr val="333333"/>
-                </a:solidFill>
-              </a:defRPr>
-            </a:pPr>
-            <a:r>
-              <a:t>1. 组合损失函数优势</a:t>
-            </a:r>
-          </a:p>
-          <a:p>
-            <a:pPr>
-              <a:spcAft>
-                <a:spcPts val="600"/>
-              </a:spcAft>
-              <a:defRPr sz="1600">
-                <a:solidFill>
-                  <a:srgbClr val="333333"/>
-                </a:solidFill>
-              </a:defRPr>
-            </a:pPr>
-            <a:r>
-              <a:t>   Dice+BCE 比单独 BCE 更适合类别不平衡的分割任务</a:t>
-            </a:r>
-          </a:p>
-          <a:p>
-            <a:pPr>
-              <a:spcAft>
-                <a:spcPts val="600"/>
-              </a:spcAft>
-              <a:defRPr sz="1600">
-                <a:solidFill>
-                  <a:srgbClr val="333333"/>
-                </a:solidFill>
-              </a:defRPr>
-            </a:pPr>
-          </a:p>
-          <a:p>
-            <a:pPr>
-              <a:spcAft>
-                <a:spcPts val="600"/>
-              </a:spcAft>
-              <a:defRPr sz="1600">
-                <a:solidFill>
-                  <a:srgbClr val="333333"/>
-                </a:solidFill>
-              </a:defRPr>
-            </a:pPr>
-            <a:r>
-              <a:t>2. 数据增强效果显著</a:t>
-            </a:r>
-          </a:p>
-          <a:p>
-            <a:pPr>
-              <a:spcAft>
-                <a:spcPts val="600"/>
-              </a:spcAft>
-              <a:defRPr sz="1600">
-                <a:solidFill>
-                  <a:srgbClr val="333333"/>
-                </a:solidFill>
-              </a:defRPr>
-            </a:pPr>
-            <a:r>
-              <a:t>   翻转/旋转/颜色抖动提升泛化能力 3-5% Dice</a:t>
-            </a:r>
-          </a:p>
-          <a:p>
-            <a:pPr>
-              <a:spcAft>
-                <a:spcPts val="600"/>
-              </a:spcAft>
-              <a:defRPr sz="1600">
-                <a:solidFill>
-                  <a:srgbClr val="333333"/>
-                </a:solidFill>
-              </a:defRPr>
-            </a:pPr>
-          </a:p>
-          <a:p>
-            <a:pPr>
-              <a:spcAft>
-                <a:spcPts val="600"/>
-              </a:spcAft>
-              <a:defRPr sz="1600">
-                <a:solidFill>
-                  <a:srgbClr val="333333"/>
-                </a:solidFill>
-              </a:defRPr>
-            </a:pPr>
-            <a:r>
-              <a:t>3. GPU 加速比约 6.7x</a:t>
-            </a:r>
-          </a:p>
-          <a:p>
-            <a:pPr>
-              <a:spcAft>
-                <a:spcPts val="600"/>
-              </a:spcAft>
-              <a:defRPr sz="1600">
-                <a:solidFill>
-                  <a:srgbClr val="333333"/>
-                </a:solidFill>
-              </a:defRPr>
-            </a:pPr>
-            <a:r>
-              <a:t>   CPU: ~45h → GPU: ~6.7h (50 epochs)</a:t>
-            </a:r>
-          </a:p>
-          <a:p>
-            <a:pPr>
-              <a:spcAft>
-                <a:spcPts val="600"/>
-              </a:spcAft>
-              <a:defRPr sz="1600">
-                <a:solidFill>
-                  <a:srgbClr val="333333"/>
-                </a:solidFill>
-              </a:defRPr>
-            </a:pPr>
-          </a:p>
-          <a:p>
-            <a:pPr>
-              <a:spcAft>
-                <a:spcPts val="600"/>
-              </a:spcAft>
-              <a:defRPr sz="1600">
-                <a:solidFill>
-                  <a:srgbClr val="333333"/>
-                </a:solidFill>
-              </a:defRPr>
-            </a:pPr>
-            <a:r>
-              <a:t>4. 跳跃连接保留细节</a:t>
-            </a:r>
-          </a:p>
-          <a:p>
-            <a:pPr>
-              <a:spcAft>
-                <a:spcPts val="600"/>
-              </a:spcAft>
-              <a:defRPr sz="1600">
-                <a:solidFill>
-                  <a:srgbClr val="333333"/>
-                </a:solidFill>
-              </a:defRPr>
-            </a:pPr>
-            <a:r>
-              <a:t>   有效缓解分割边缘模糊问题</a:t>
-            </a:r>
-          </a:p>
-        </p:txBody>
-      </p:sp>
-      <p:sp>
-        <p:nvSpPr>
-          <p:cNvPr id="5" name="TextBox 4"/>
-          <p:cNvSpPr txBox="1"/>
-          <p:nvPr/>
-        </p:nvSpPr>
-        <p:spPr>
-          <a:xfrm>
-            <a:off x="6675120" y="1828800"/>
-            <a:ext cx="4846320" cy="4572000"/>
-          </a:xfrm>
-          <a:prstGeom prst="rect">
-            <a:avLst/>
-          </a:prstGeom>
-          <a:noFill/>
-        </p:spPr>
-        <p:txBody>
-          <a:bodyPr wrap="square">
-            <a:spAutoFit/>
-          </a:bodyPr>
-          <a:lstStyle/>
-          <a:p>
-            <a:pPr>
-              <a:spcAft>
-                <a:spcPts val="600"/>
-              </a:spcAft>
-              <a:defRPr sz="1600">
-                <a:solidFill>
-                  <a:srgbClr val="333333"/>
-                </a:solidFill>
-              </a:defRPr>
-            </a:pPr>
-            <a:r>
-              <a:t>⚠️ 待改进方向</a:t>
-            </a:r>
-          </a:p>
-          <a:p>
-            <a:pPr>
-              <a:spcAft>
-                <a:spcPts val="600"/>
-              </a:spcAft>
-              <a:defRPr sz="1600">
-                <a:solidFill>
-                  <a:srgbClr val="333333"/>
-                </a:solidFill>
-              </a:defRPr>
-            </a:pPr>
-          </a:p>
-          <a:p>
-            <a:pPr>
-              <a:spcAft>
-                <a:spcPts val="600"/>
-              </a:spcAft>
-              <a:defRPr sz="1600">
-                <a:solidFill>
-                  <a:srgbClr val="333333"/>
-                </a:solidFill>
-              </a:defRPr>
-            </a:pPr>
-            <a:r>
-              <a:t>• 尝试更深层 backbone (ResNet, EfficientNet)</a:t>
-            </a:r>
-          </a:p>
-          <a:p>
-            <a:pPr>
-              <a:spcAft>
-                <a:spcPts val="600"/>
-              </a:spcAft>
-              <a:defRPr sz="1600">
-                <a:solidFill>
-                  <a:srgbClr val="333333"/>
-                </a:solidFill>
-              </a:defRPr>
-            </a:pPr>
-            <a:r>
-              <a:t>• 引入注意力机制 (Attention U-Net)</a:t>
-            </a:r>
-          </a:p>
-          <a:p>
-            <a:pPr>
-              <a:spcAft>
-                <a:spcPts val="600"/>
-              </a:spcAft>
-              <a:defRPr sz="1600">
-                <a:solidFill>
-                  <a:srgbClr val="333333"/>
-                </a:solidFill>
-              </a:defRPr>
-            </a:pPr>
-            <a:r>
-              <a:t>• 使用预训练权重加速收敛</a:t>
-            </a:r>
-          </a:p>
-          <a:p>
-            <a:pPr>
-              <a:spcAft>
-                <a:spcPts val="600"/>
-              </a:spcAft>
-              <a:defRPr sz="1600">
-                <a:solidFill>
-                  <a:srgbClr val="333333"/>
-                </a:solidFill>
-              </a:defRPr>
-            </a:pPr>
-            <a:r>
-              <a:t>• 混合精度训练 (AMP) 进一步加速</a:t>
-            </a:r>
-          </a:p>
-          <a:p>
-            <a:pPr>
-              <a:spcAft>
-                <a:spcPts val="600"/>
-              </a:spcAft>
-              <a:defRPr sz="1600">
-                <a:solidFill>
-                  <a:srgbClr val="333333"/>
-                </a:solidFill>
-              </a:defRPr>
-            </a:pPr>
-            <a:r>
-              <a:t>• 模型剪枝/量化适配边缘部署</a:t>
-            </a:r>
-          </a:p>
-          <a:p>
-            <a:pPr>
-              <a:spcAft>
-                <a:spcPts val="600"/>
-              </a:spcAft>
-              <a:defRPr sz="1600">
-                <a:solidFill>
-                  <a:srgbClr val="333333"/>
-                </a:solidFill>
-              </a:defRPr>
-            </a:pPr>
-          </a:p>
-          <a:p>
-            <a:pPr>
-              <a:spcAft>
-                <a:spcPts val="600"/>
-              </a:spcAft>
-              <a:defRPr sz="1600">
-                <a:solidFill>
-                  <a:srgbClr val="333333"/>
-                </a:solidFill>
-              </a:defRPr>
-            </a:pPr>
-            <a:r>
-              <a:t>🎯 结论</a:t>
-            </a:r>
-          </a:p>
-          <a:p>
-            <a:pPr>
-              <a:spcAft>
-                <a:spcPts val="600"/>
-              </a:spcAft>
-              <a:defRPr sz="1600">
-                <a:solidFill>
-                  <a:srgbClr val="333333"/>
-                </a:solidFill>
-              </a:defRPr>
-            </a:pPr>
-            <a:r>
-              <a:t>U-Net 能有效完成皮肤病变分割,</a:t>
-            </a:r>
-          </a:p>
-          <a:p>
-            <a:pPr>
-              <a:spcAft>
-                <a:spcPts val="600"/>
-              </a:spcAft>
-              <a:defRPr sz="1600">
-                <a:solidFill>
-                  <a:srgbClr val="333333"/>
-                </a:solidFill>
-              </a:defRPr>
-            </a:pPr>
-            <a:r>
-              <a:t>测试集 Dice=0.8760, 模型泛化能力良好,</a:t>
-            </a:r>
-          </a:p>
-          <a:p>
-            <a:pPr>
-              <a:spcAft>
-                <a:spcPts val="600"/>
-              </a:spcAft>
-              <a:defRPr sz="1600">
-                <a:solidFill>
-                  <a:srgbClr val="333333"/>
-                </a:solidFill>
-              </a:defRPr>
-            </a:pPr>
-            <a:r>
-              <a:t>为 AIoT 场景下的皮肤病辅助诊断</a:t>
-            </a:r>
-          </a:p>
-          <a:p>
-            <a:pPr>
-              <a:spcAft>
-                <a:spcPts val="600"/>
-              </a:spcAft>
-              <a:defRPr sz="1600">
-                <a:solidFill>
-                  <a:srgbClr val="333333"/>
-                </a:solidFill>
-              </a:defRPr>
-            </a:pPr>
-            <a:r>
-              <a:t>提供了可行的技术方案。</a:t>
-            </a:r>
+              <a:defRPr sz="1800">
+                <a:solidFill>
+                  <a:srgbClr val="333333"/>
+                </a:solidFill>
+              </a:defRPr>
+            </a:pPr>
+            <a:r>
+              <a:rPr>
+                <a:latin typeface="微软雅黑" panose="020B0503020204020204" charset="-122"/>
+                <a:ea typeface="微软雅黑" panose="020B0503020204020204" charset="-122"/>
+                <a:cs typeface="微软雅黑" panose="020B0503020204020204" charset="-122"/>
+              </a:rPr>
+              <a:t>📈 训练过程指标变化</a:t>
+            </a:r>
+            <a:endParaRPr>
+              <a:latin typeface="微软雅黑" panose="020B0503020204020204" charset="-122"/>
+              <a:ea typeface="微软雅黑" panose="020B0503020204020204" charset="-122"/>
+              <a:cs typeface="微软雅黑" panose="020B0503020204020204" charset="-122"/>
+            </a:endParaRPr>
+          </a:p>
+          <a:p>
+            <a:pPr>
+              <a:spcAft>
+                <a:spcPts val="600"/>
+              </a:spcAft>
+              <a:defRPr sz="1800">
+                <a:solidFill>
+                  <a:srgbClr val="333333"/>
+                </a:solidFill>
+              </a:defRPr>
+            </a:pPr>
+            <a:endParaRPr>
+              <a:latin typeface="微软雅黑" panose="020B0503020204020204" charset="-122"/>
+              <a:ea typeface="微软雅黑" panose="020B0503020204020204" charset="-122"/>
+              <a:cs typeface="微软雅黑" panose="020B0503020204020204" charset="-122"/>
+            </a:endParaRPr>
+          </a:p>
+          <a:p>
+            <a:pPr>
+              <a:spcAft>
+                <a:spcPts val="600"/>
+              </a:spcAft>
+              <a:defRPr sz="1800">
+                <a:solidFill>
+                  <a:srgbClr val="333333"/>
+                </a:solidFill>
+              </a:defRPr>
+            </a:pPr>
+            <a:r>
+              <a:rPr>
+                <a:latin typeface="微软雅黑" panose="020B0503020204020204" charset="-122"/>
+                <a:ea typeface="微软雅黑" panose="020B0503020204020204" charset="-122"/>
+                <a:cs typeface="微软雅黑" panose="020B0503020204020204" charset="-122"/>
+              </a:rPr>
+              <a:t>  训练初期 (Epoch 1-10):  Loss 快速下降, Dice 从 0.6 提升至 0.85+</a:t>
+            </a:r>
+            <a:endParaRPr>
+              <a:latin typeface="微软雅黑" panose="020B0503020204020204" charset="-122"/>
+              <a:ea typeface="微软雅黑" panose="020B0503020204020204" charset="-122"/>
+              <a:cs typeface="微软雅黑" panose="020B0503020204020204" charset="-122"/>
+            </a:endParaRPr>
+          </a:p>
+          <a:p>
+            <a:pPr>
+              <a:spcAft>
+                <a:spcPts val="600"/>
+              </a:spcAft>
+              <a:defRPr sz="1800">
+                <a:solidFill>
+                  <a:srgbClr val="333333"/>
+                </a:solidFill>
+              </a:defRPr>
+            </a:pPr>
+            <a:r>
+              <a:rPr>
+                <a:latin typeface="微软雅黑" panose="020B0503020204020204" charset="-122"/>
+                <a:ea typeface="微软雅黑" panose="020B0503020204020204" charset="-122"/>
+                <a:cs typeface="微软雅黑" panose="020B0503020204020204" charset="-122"/>
+              </a:rPr>
+              <a:t>  训练中期 (Epoch 11-37):  Loss 稳定下降, Dice 缓慢提升至最高 0.8858 (Epoch 37)</a:t>
+            </a:r>
+            <a:endParaRPr>
+              <a:latin typeface="微软雅黑" panose="020B0503020204020204" charset="-122"/>
+              <a:ea typeface="微软雅黑" panose="020B0503020204020204" charset="-122"/>
+              <a:cs typeface="微软雅黑" panose="020B0503020204020204" charset="-122"/>
+            </a:endParaRPr>
+          </a:p>
+          <a:p>
+            <a:pPr>
+              <a:spcAft>
+                <a:spcPts val="600"/>
+              </a:spcAft>
+              <a:defRPr sz="1800">
+                <a:solidFill>
+                  <a:srgbClr val="333333"/>
+                </a:solidFill>
+              </a:defRPr>
+            </a:pPr>
+            <a:r>
+              <a:rPr>
+                <a:latin typeface="微软雅黑" panose="020B0503020204020204" charset="-122"/>
+                <a:ea typeface="微软雅黑" panose="020B0503020204020204" charset="-122"/>
+                <a:cs typeface="微软雅黑" panose="020B0503020204020204" charset="-122"/>
+              </a:rPr>
+              <a:t>  训练后期 (Epoch 38-50):  Dice 在 0.877-0.880 波动, 学习率降至 6e-6, 模型收敛</a:t>
+            </a:r>
+            <a:endParaRPr>
+              <a:latin typeface="微软雅黑" panose="020B0503020204020204" charset="-122"/>
+              <a:ea typeface="微软雅黑" panose="020B0503020204020204" charset="-122"/>
+              <a:cs typeface="微软雅黑" panose="020B0503020204020204" charset="-122"/>
+            </a:endParaRPr>
+          </a:p>
+          <a:p>
+            <a:pPr>
+              <a:spcAft>
+                <a:spcPts val="600"/>
+              </a:spcAft>
+              <a:defRPr sz="1800">
+                <a:solidFill>
+                  <a:srgbClr val="333333"/>
+                </a:solidFill>
+              </a:defRPr>
+            </a:pPr>
+            <a:endParaRPr>
+              <a:latin typeface="微软雅黑" panose="020B0503020204020204" charset="-122"/>
+              <a:ea typeface="微软雅黑" panose="020B0503020204020204" charset="-122"/>
+              <a:cs typeface="微软雅黑" panose="020B0503020204020204" charset="-122"/>
+            </a:endParaRPr>
+          </a:p>
+          <a:p>
+            <a:pPr>
+              <a:spcAft>
+                <a:spcPts val="600"/>
+              </a:spcAft>
+              <a:defRPr sz="1800">
+                <a:solidFill>
+                  <a:srgbClr val="333333"/>
+                </a:solidFill>
+              </a:defRPr>
+            </a:pPr>
+            <a:r>
+              <a:rPr>
+                <a:latin typeface="微软雅黑" panose="020B0503020204020204" charset="-122"/>
+                <a:ea typeface="微软雅黑" panose="020B0503020204020204" charset="-122"/>
+                <a:cs typeface="微软雅黑" panose="020B0503020204020204" charset="-122"/>
+              </a:rPr>
+              <a:t>✅ 测试集 Dice (0.8760) 与最佳验证 Dice (0.8858) 差距 &lt; 0.01, 泛化能力良好</a:t>
+            </a:r>
+            <a:endParaRPr>
+              <a:latin typeface="微软雅黑" panose="020B0503020204020204" charset="-122"/>
+              <a:ea typeface="微软雅黑" panose="020B0503020204020204" charset="-122"/>
+              <a:cs typeface="微软雅黑" panose="020B0503020204020204" charset="-122"/>
+            </a:endParaRPr>
           </a:p>
         </p:txBody>
       </p:sp>
@@ -5829,8 +8214,8 @@
 </p:sld>
 </file>
 
-<file path=ppt/slides/slide7.xml><?xml version="1.0" encoding="utf-8"?>
-<p:sld xmlns:a="http://schemas.openxmlformats.org/drawingml/2006/main" xmlns:p="http://schemas.openxmlformats.org/presentationml/2006/main" xmlns:r="http://schemas.openxmlformats.org/officeDocument/2006/relationships">
+<file path=ppt/slides/slide8.xml><?xml version="1.0" encoding="utf-8"?>
+<p:sld xmlns:a="http://schemas.openxmlformats.org/drawingml/2006/main" xmlns:r="http://schemas.openxmlformats.org/officeDocument/2006/relationships" xmlns:p="http://schemas.openxmlformats.org/presentationml/2006/main">
   <p:cSld>
     <p:bg>
       <p:bgPr>
@@ -5883,7 +8268,7 @@
           </a:fontRef>
         </p:style>
         <p:txBody>
-          <a:bodyPr rtlCol="0" anchor="ctr" wrap="square" lIns="731520" tIns="137160"/>
+          <a:bodyPr wrap="square" lIns="731520" tIns="137160" rtlCol="0" anchor="ctr"/>
           <a:lstStyle/>
           <a:p>
             <a:pPr algn="l">
@@ -5894,8 +8279,44 @@
               </a:defRPr>
             </a:pPr>
             <a:r>
-              <a:t>分工与参考</a:t>
-            </a:r>
+              <a:rPr>
+                <a:latin typeface="微软雅黑" panose="020B0503020204020204" charset="-122"/>
+                <a:ea typeface="微软雅黑" panose="020B0503020204020204" charset="-122"/>
+              </a:rPr>
+              <a:t>实验结果</a:t>
+            </a:r>
+            <a:r>
+              <a:rPr lang="en-US">
+                <a:latin typeface="微软雅黑" panose="020B0503020204020204" charset="-122"/>
+                <a:ea typeface="微软雅黑" panose="020B0503020204020204" charset="-122"/>
+              </a:rPr>
+              <a:t>——</a:t>
+            </a:r>
+            <a:r>
+              <a:rPr lang="zh-CN" altLang="en-US">
+                <a:latin typeface="微软雅黑" panose="020B0503020204020204" charset="-122"/>
+                <a:ea typeface="微软雅黑" panose="020B0503020204020204" charset="-122"/>
+              </a:rPr>
+              <a:t>模型</a:t>
+            </a:r>
+            <a:r>
+              <a:rPr lang="zh-CN" altLang="en-US">
+                <a:latin typeface="微软雅黑" panose="020B0503020204020204" charset="-122"/>
+                <a:ea typeface="微软雅黑" panose="020B0503020204020204" charset="-122"/>
+              </a:rPr>
+              <a:t>优化</a:t>
+            </a:r>
+            <a:r>
+              <a:rPr lang="zh-CN" altLang="en-US">
+                <a:latin typeface="微软雅黑" panose="020B0503020204020204" charset="-122"/>
+                <a:ea typeface="微软雅黑" panose="020B0503020204020204" charset="-122"/>
+              </a:rPr>
+              <a:t>对比</a:t>
+            </a:r>
+            <a:endParaRPr lang="zh-CN" altLang="en-US">
+              <a:latin typeface="微软雅黑" panose="020B0503020204020204" charset="-122"/>
+              <a:ea typeface="微软雅黑" panose="020B0503020204020204" charset="-122"/>
+            </a:endParaRPr>
           </a:p>
         </p:txBody>
       </p:sp>
@@ -5935,7 +8356,7 @@
           </a:fontRef>
         </p:style>
         <p:txBody>
-          <a:bodyPr rtlCol="0" anchor="ctr" lIns="731520"/>
+          <a:bodyPr lIns="731520" rtlCol="0" anchor="ctr"/>
           <a:lstStyle/>
           <a:p>
             <a:pPr algn="l">
@@ -5946,8 +8367,1327 @@
               </a:defRPr>
             </a:pPr>
             <a:r>
-              <a:t>Team Contributions &amp; References</a:t>
-            </a:r>
+              <a:rPr>
+                <a:latin typeface="微软雅黑" panose="020B0503020204020204" charset="-122"/>
+                <a:ea typeface="微软雅黑" panose="020B0503020204020204" charset="-122"/>
+              </a:rPr>
+              <a:t>Experimental Results</a:t>
+            </a:r>
+            <a:endParaRPr>
+              <a:latin typeface="微软雅黑" panose="020B0503020204020204" charset="-122"/>
+              <a:ea typeface="微软雅黑" panose="020B0503020204020204" charset="-122"/>
+            </a:endParaRPr>
+          </a:p>
+        </p:txBody>
+      </p:sp>
+      <p:graphicFrame>
+        <p:nvGraphicFramePr>
+          <p:cNvPr id="9" name="表格 8"/>
+          <p:cNvGraphicFramePr/>
+          <p:nvPr>
+            <p:custDataLst>
+              <p:tags r:id="rId1"/>
+            </p:custDataLst>
+          </p:nvPr>
+        </p:nvGraphicFramePr>
+        <p:xfrm>
+          <a:off x="1307465" y="1787525"/>
+          <a:ext cx="9885680" cy="4449445"/>
+        </p:xfrm>
+        <a:graphic>
+          <a:graphicData uri="http://schemas.openxmlformats.org/drawingml/2006/table">
+            <a:tbl>
+              <a:tblPr firstRow="1" bandRow="1">
+                <a:tableStyleId>{5C22544A-7EE6-4342-B048-85BDC9FD1C3A}</a:tableStyleId>
+              </a:tblPr>
+              <a:tblGrid>
+                <a:gridCol w="2471420"/>
+                <a:gridCol w="2471420"/>
+                <a:gridCol w="2471420"/>
+                <a:gridCol w="2471420"/>
+              </a:tblGrid>
+              <a:tr h="635635">
+                <a:tc>
+                  <a:txBody>
+                    <a:bodyPr/>
+                    <a:p>
+                      <a:pPr marL="0" indent="0" algn="ctr">
+                        <a:lnSpc>
+                          <a:spcPct val="100000"/>
+                        </a:lnSpc>
+                        <a:spcBef>
+                          <a:spcPct val="0"/>
+                        </a:spcBef>
+                        <a:spcAft>
+                          <a:spcPct val="0"/>
+                        </a:spcAft>
+                      </a:pPr>
+                      <a:r>
+                        <a:rPr lang="zh-CN" altLang="en-US" sz="1600" b="1" i="0">
+                          <a:solidFill>
+                            <a:schemeClr val="bg1"/>
+                          </a:solidFill>
+                          <a:latin typeface="微软雅黑" panose="020B0503020204020204" charset="-122"/>
+                          <a:ea typeface="微软雅黑" panose="020B0503020204020204" charset="-122"/>
+                        </a:rPr>
+                        <a:t>指标</a:t>
+                      </a:r>
+                      <a:endParaRPr lang="zh-CN" altLang="en-US" sz="1600" b="1" i="0">
+                        <a:solidFill>
+                          <a:schemeClr val="bg1"/>
+                        </a:solidFill>
+                        <a:latin typeface="微软雅黑" panose="020B0503020204020204" charset="-122"/>
+                        <a:ea typeface="微软雅黑" panose="020B0503020204020204" charset="-122"/>
+                      </a:endParaRPr>
+                    </a:p>
+                  </a:txBody>
+                  <a:tcPr marL="82867" marR="82867" marT="38417" marB="38417" anchor="ctr" anchorCtr="0"/>
+                </a:tc>
+                <a:tc>
+                  <a:txBody>
+                    <a:bodyPr/>
+                    <a:p>
+                      <a:pPr marL="0" indent="0" algn="ctr">
+                        <a:lnSpc>
+                          <a:spcPct val="100000"/>
+                        </a:lnSpc>
+                        <a:spcBef>
+                          <a:spcPct val="0"/>
+                        </a:spcBef>
+                        <a:spcAft>
+                          <a:spcPct val="0"/>
+                        </a:spcAft>
+                      </a:pPr>
+                      <a:r>
+                        <a:rPr lang="zh-CN" altLang="en-US" sz="1600" b="1" i="0">
+                          <a:solidFill>
+                            <a:schemeClr val="bg1"/>
+                          </a:solidFill>
+                          <a:latin typeface="微软雅黑" panose="020B0503020204020204" charset="-122"/>
+                          <a:ea typeface="微软雅黑" panose="020B0503020204020204" charset="-122"/>
+                          <a:cs typeface="微软雅黑" panose="020B0503020204020204" charset="-122"/>
+                        </a:rPr>
+                        <a:t>基础 </a:t>
+                      </a:r>
+                      <a:r>
+                        <a:rPr lang="en-US" altLang="zh-CN" sz="1600" b="1" i="0">
+                          <a:solidFill>
+                            <a:schemeClr val="bg1"/>
+                          </a:solidFill>
+                          <a:latin typeface="微软雅黑" panose="020B0503020204020204" charset="-122"/>
+                          <a:ea typeface="微软雅黑" panose="020B0503020204020204" charset="-122"/>
+                          <a:cs typeface="微软雅黑" panose="020B0503020204020204" charset="-122"/>
+                        </a:rPr>
+                        <a:t>U-Net</a:t>
+                      </a:r>
+                      <a:endParaRPr lang="en-US" altLang="zh-CN" sz="1600" b="1" i="0">
+                        <a:solidFill>
+                          <a:schemeClr val="bg1"/>
+                        </a:solidFill>
+                        <a:latin typeface="微软雅黑" panose="020B0503020204020204" charset="-122"/>
+                        <a:ea typeface="微软雅黑" panose="020B0503020204020204" charset="-122"/>
+                        <a:cs typeface="微软雅黑" panose="020B0503020204020204" charset="-122"/>
+                      </a:endParaRPr>
+                    </a:p>
+                  </a:txBody>
+                  <a:tcPr marL="82867" marR="82867" marT="38417" marB="38417" anchor="ctr" anchorCtr="0"/>
+                </a:tc>
+                <a:tc>
+                  <a:txBody>
+                    <a:bodyPr/>
+                    <a:p>
+                      <a:pPr marL="0" indent="0" algn="ctr">
+                        <a:lnSpc>
+                          <a:spcPct val="100000"/>
+                        </a:lnSpc>
+                        <a:spcBef>
+                          <a:spcPct val="0"/>
+                        </a:spcBef>
+                        <a:spcAft>
+                          <a:spcPct val="0"/>
+                        </a:spcAft>
+                      </a:pPr>
+                      <a:r>
+                        <a:rPr lang="en-US" altLang="zh-CN" sz="1600" b="1" i="0">
+                          <a:solidFill>
+                            <a:schemeClr val="bg1"/>
+                          </a:solidFill>
+                          <a:latin typeface="微软雅黑" panose="020B0503020204020204" charset="-122"/>
+                          <a:ea typeface="微软雅黑" panose="020B0503020204020204" charset="-122"/>
+                          <a:cs typeface="微软雅黑" panose="020B0503020204020204" charset="-122"/>
+                        </a:rPr>
+                        <a:t>ResNet34-UNet (</a:t>
+                      </a:r>
+                      <a:r>
+                        <a:rPr lang="zh-CN" altLang="en-US" sz="1600" b="1" i="0">
+                          <a:solidFill>
+                            <a:schemeClr val="bg1"/>
+                          </a:solidFill>
+                          <a:latin typeface="微软雅黑" panose="020B0503020204020204" charset="-122"/>
+                          <a:ea typeface="微软雅黑" panose="020B0503020204020204" charset="-122"/>
+                          <a:cs typeface="微软雅黑" panose="020B0503020204020204" charset="-122"/>
+                        </a:rPr>
+                        <a:t>优化</a:t>
+                      </a:r>
+                      <a:r>
+                        <a:rPr lang="en-US" altLang="zh-CN" sz="1600" b="1" i="0">
+                          <a:solidFill>
+                            <a:schemeClr val="bg1"/>
+                          </a:solidFill>
+                          <a:latin typeface="微软雅黑" panose="020B0503020204020204" charset="-122"/>
+                          <a:ea typeface="微软雅黑" panose="020B0503020204020204" charset="-122"/>
+                          <a:cs typeface="微软雅黑" panose="020B0503020204020204" charset="-122"/>
+                        </a:rPr>
+                        <a:t>)</a:t>
+                      </a:r>
+                      <a:endParaRPr lang="en-US" altLang="zh-CN" sz="1600" b="1" i="0">
+                        <a:solidFill>
+                          <a:schemeClr val="bg1"/>
+                        </a:solidFill>
+                        <a:latin typeface="微软雅黑" panose="020B0503020204020204" charset="-122"/>
+                        <a:ea typeface="微软雅黑" panose="020B0503020204020204" charset="-122"/>
+                        <a:cs typeface="微软雅黑" panose="020B0503020204020204" charset="-122"/>
+                      </a:endParaRPr>
+                    </a:p>
+                  </a:txBody>
+                  <a:tcPr marL="82867" marR="82867" marT="38417" marB="38417" anchor="ctr" anchorCtr="0"/>
+                </a:tc>
+                <a:tc>
+                  <a:txBody>
+                    <a:bodyPr/>
+                    <a:p>
+                      <a:pPr marL="0" indent="0" algn="ctr">
+                        <a:lnSpc>
+                          <a:spcPct val="100000"/>
+                        </a:lnSpc>
+                        <a:spcBef>
+                          <a:spcPct val="0"/>
+                        </a:spcBef>
+                        <a:spcAft>
+                          <a:spcPct val="0"/>
+                        </a:spcAft>
+                      </a:pPr>
+                      <a:r>
+                        <a:rPr lang="zh-CN" altLang="en-US" sz="1600" b="1" i="0">
+                          <a:solidFill>
+                            <a:schemeClr val="bg1"/>
+                          </a:solidFill>
+                          <a:latin typeface="微软雅黑" panose="020B0503020204020204" charset="-122"/>
+                          <a:ea typeface="微软雅黑" panose="020B0503020204020204" charset="-122"/>
+                        </a:rPr>
+                        <a:t>提升</a:t>
+                      </a:r>
+                      <a:endParaRPr lang="zh-CN" altLang="en-US" sz="1600" b="1" i="0">
+                        <a:solidFill>
+                          <a:schemeClr val="bg1"/>
+                        </a:solidFill>
+                        <a:latin typeface="微软雅黑" panose="020B0503020204020204" charset="-122"/>
+                        <a:ea typeface="微软雅黑" panose="020B0503020204020204" charset="-122"/>
+                      </a:endParaRPr>
+                    </a:p>
+                  </a:txBody>
+                  <a:tcPr marL="82867" marR="82867" marT="38417" marB="38417" anchor="ctr" anchorCtr="0"/>
+                </a:tc>
+              </a:tr>
+              <a:tr h="635635">
+                <a:tc>
+                  <a:txBody>
+                    <a:bodyPr/>
+                    <a:p>
+                      <a:pPr marL="0" indent="0" algn="l">
+                        <a:lnSpc>
+                          <a:spcPct val="100000"/>
+                        </a:lnSpc>
+                        <a:spcBef>
+                          <a:spcPct val="0"/>
+                        </a:spcBef>
+                        <a:spcAft>
+                          <a:spcPct val="0"/>
+                        </a:spcAft>
+                      </a:pPr>
+                      <a:r>
+                        <a:rPr lang="zh-CN" altLang="en-US" sz="1600" b="0" i="0">
+                          <a:solidFill>
+                            <a:srgbClr val="000000"/>
+                          </a:solidFill>
+                          <a:latin typeface="微软雅黑" panose="020B0503020204020204" charset="-122"/>
+                          <a:ea typeface="微软雅黑" panose="020B0503020204020204" charset="-122"/>
+                          <a:cs typeface="微软雅黑" panose="020B0503020204020204" charset="-122"/>
+                        </a:rPr>
+                        <a:t>验证集最佳 </a:t>
+                      </a:r>
+                      <a:r>
+                        <a:rPr lang="en-US" altLang="zh-CN" sz="1600" b="0" i="0">
+                          <a:solidFill>
+                            <a:srgbClr val="000000"/>
+                          </a:solidFill>
+                          <a:latin typeface="微软雅黑" panose="020B0503020204020204" charset="-122"/>
+                          <a:ea typeface="微软雅黑" panose="020B0503020204020204" charset="-122"/>
+                          <a:cs typeface="微软雅黑" panose="020B0503020204020204" charset="-122"/>
+                        </a:rPr>
+                        <a:t>Dice</a:t>
+                      </a:r>
+                      <a:endParaRPr lang="en-US" altLang="zh-CN" sz="1600" b="0" i="0">
+                        <a:solidFill>
+                          <a:srgbClr val="000000"/>
+                        </a:solidFill>
+                        <a:latin typeface="微软雅黑" panose="020B0503020204020204" charset="-122"/>
+                        <a:ea typeface="微软雅黑" panose="020B0503020204020204" charset="-122"/>
+                        <a:cs typeface="微软雅黑" panose="020B0503020204020204" charset="-122"/>
+                      </a:endParaRPr>
+                    </a:p>
+                  </a:txBody>
+                  <a:tcPr marL="82867" marR="82867" marT="38417" marB="38417" anchor="ctr" anchorCtr="0"/>
+                </a:tc>
+                <a:tc>
+                  <a:txBody>
+                    <a:bodyPr/>
+                    <a:p>
+                      <a:pPr marL="0" indent="0" algn="l">
+                        <a:lnSpc>
+                          <a:spcPct val="100000"/>
+                        </a:lnSpc>
+                        <a:spcBef>
+                          <a:spcPct val="0"/>
+                        </a:spcBef>
+                        <a:spcAft>
+                          <a:spcPct val="0"/>
+                        </a:spcAft>
+                      </a:pPr>
+                      <a:r>
+                        <a:rPr lang="en-US" altLang="zh-CN" sz="1600" b="0" i="0">
+                          <a:solidFill>
+                            <a:srgbClr val="000000"/>
+                          </a:solidFill>
+                          <a:latin typeface="微软雅黑" panose="020B0503020204020204" charset="-122"/>
+                          <a:ea typeface="微软雅黑" panose="020B0503020204020204" charset="-122"/>
+                        </a:rPr>
+                        <a:t>0.8858</a:t>
+                      </a:r>
+                      <a:endParaRPr lang="en-US" altLang="zh-CN" sz="1600" b="0" i="0">
+                        <a:solidFill>
+                          <a:srgbClr val="000000"/>
+                        </a:solidFill>
+                        <a:latin typeface="微软雅黑" panose="020B0503020204020204" charset="-122"/>
+                        <a:ea typeface="微软雅黑" panose="020B0503020204020204" charset="-122"/>
+                      </a:endParaRPr>
+                    </a:p>
+                  </a:txBody>
+                  <a:tcPr marL="82867" marR="82867" marT="38417" marB="38417" anchor="ctr" anchorCtr="0"/>
+                </a:tc>
+                <a:tc>
+                  <a:txBody>
+                    <a:bodyPr/>
+                    <a:p>
+                      <a:pPr marL="0" indent="0" algn="l">
+                        <a:lnSpc>
+                          <a:spcPct val="100000"/>
+                        </a:lnSpc>
+                        <a:spcBef>
+                          <a:spcPct val="0"/>
+                        </a:spcBef>
+                        <a:spcAft>
+                          <a:spcPct val="0"/>
+                        </a:spcAft>
+                      </a:pPr>
+                      <a:r>
+                        <a:rPr lang="en-US" altLang="zh-CN" sz="1600" b="0" i="0">
+                          <a:solidFill>
+                            <a:srgbClr val="000000"/>
+                          </a:solidFill>
+                          <a:latin typeface="微软雅黑" panose="020B0503020204020204" charset="-122"/>
+                          <a:ea typeface="微软雅黑" panose="020B0503020204020204" charset="-122"/>
+                        </a:rPr>
+                        <a:t>0.9148</a:t>
+                      </a:r>
+                      <a:endParaRPr lang="en-US" altLang="zh-CN" sz="1600" b="0" i="0">
+                        <a:solidFill>
+                          <a:srgbClr val="000000"/>
+                        </a:solidFill>
+                        <a:latin typeface="微软雅黑" panose="020B0503020204020204" charset="-122"/>
+                        <a:ea typeface="微软雅黑" panose="020B0503020204020204" charset="-122"/>
+                      </a:endParaRPr>
+                    </a:p>
+                  </a:txBody>
+                  <a:tcPr marL="82867" marR="82867" marT="38417" marB="38417" anchor="ctr" anchorCtr="0"/>
+                </a:tc>
+                <a:tc>
+                  <a:txBody>
+                    <a:bodyPr/>
+                    <a:p>
+                      <a:pPr marL="0" indent="0" algn="l">
+                        <a:lnSpc>
+                          <a:spcPct val="100000"/>
+                        </a:lnSpc>
+                        <a:spcBef>
+                          <a:spcPct val="0"/>
+                        </a:spcBef>
+                        <a:spcAft>
+                          <a:spcPct val="0"/>
+                        </a:spcAft>
+                      </a:pPr>
+                      <a:r>
+                        <a:rPr lang="en-US" altLang="zh-CN" sz="1600" b="0" i="0">
+                          <a:solidFill>
+                            <a:srgbClr val="000000"/>
+                          </a:solidFill>
+                          <a:latin typeface="微软雅黑" panose="020B0503020204020204" charset="-122"/>
+                          <a:ea typeface="微软雅黑" panose="020B0503020204020204" charset="-122"/>
+                        </a:rPr>
+                        <a:t>+2.90%</a:t>
+                      </a:r>
+                      <a:endParaRPr lang="en-US" altLang="zh-CN" sz="1600" b="0" i="0">
+                        <a:solidFill>
+                          <a:srgbClr val="000000"/>
+                        </a:solidFill>
+                        <a:latin typeface="微软雅黑" panose="020B0503020204020204" charset="-122"/>
+                        <a:ea typeface="微软雅黑" panose="020B0503020204020204" charset="-122"/>
+                      </a:endParaRPr>
+                    </a:p>
+                  </a:txBody>
+                  <a:tcPr marL="82867" marR="82867" marT="38417" marB="38417" anchor="ctr" anchorCtr="0"/>
+                </a:tc>
+              </a:tr>
+              <a:tr h="635635">
+                <a:tc>
+                  <a:txBody>
+                    <a:bodyPr/>
+                    <a:p>
+                      <a:pPr marL="0" indent="0" algn="l">
+                        <a:lnSpc>
+                          <a:spcPct val="100000"/>
+                        </a:lnSpc>
+                        <a:spcBef>
+                          <a:spcPct val="0"/>
+                        </a:spcBef>
+                        <a:spcAft>
+                          <a:spcPct val="0"/>
+                        </a:spcAft>
+                      </a:pPr>
+                      <a:r>
+                        <a:rPr lang="zh-CN" altLang="en-US" sz="1600" b="0" i="0">
+                          <a:solidFill>
+                            <a:srgbClr val="000000"/>
+                          </a:solidFill>
+                          <a:latin typeface="微软雅黑" panose="020B0503020204020204" charset="-122"/>
+                          <a:ea typeface="微软雅黑" panose="020B0503020204020204" charset="-122"/>
+                          <a:cs typeface="微软雅黑" panose="020B0503020204020204" charset="-122"/>
+                        </a:rPr>
+                        <a:t>测试集 </a:t>
+                      </a:r>
+                      <a:r>
+                        <a:rPr lang="en-US" altLang="zh-CN" sz="1600" b="0" i="0">
+                          <a:solidFill>
+                            <a:srgbClr val="000000"/>
+                          </a:solidFill>
+                          <a:latin typeface="微软雅黑" panose="020B0503020204020204" charset="-122"/>
+                          <a:ea typeface="微软雅黑" panose="020B0503020204020204" charset="-122"/>
+                          <a:cs typeface="微软雅黑" panose="020B0503020204020204" charset="-122"/>
+                        </a:rPr>
+                        <a:t>Dice</a:t>
+                      </a:r>
+                      <a:endParaRPr lang="en-US" altLang="zh-CN" sz="1600" b="0" i="0">
+                        <a:solidFill>
+                          <a:srgbClr val="000000"/>
+                        </a:solidFill>
+                        <a:latin typeface="微软雅黑" panose="020B0503020204020204" charset="-122"/>
+                        <a:ea typeface="微软雅黑" panose="020B0503020204020204" charset="-122"/>
+                        <a:cs typeface="微软雅黑" panose="020B0503020204020204" charset="-122"/>
+                      </a:endParaRPr>
+                    </a:p>
+                  </a:txBody>
+                  <a:tcPr marL="82867" marR="82867" marT="38417" marB="38417" anchor="ctr" anchorCtr="0"/>
+                </a:tc>
+                <a:tc>
+                  <a:txBody>
+                    <a:bodyPr/>
+                    <a:p>
+                      <a:pPr marL="0" indent="0" algn="l">
+                        <a:lnSpc>
+                          <a:spcPct val="100000"/>
+                        </a:lnSpc>
+                        <a:spcBef>
+                          <a:spcPct val="0"/>
+                        </a:spcBef>
+                        <a:spcAft>
+                          <a:spcPct val="0"/>
+                        </a:spcAft>
+                      </a:pPr>
+                      <a:r>
+                        <a:rPr lang="en-US" altLang="zh-CN" sz="1600" b="0" i="0">
+                          <a:solidFill>
+                            <a:srgbClr val="000000"/>
+                          </a:solidFill>
+                          <a:latin typeface="微软雅黑" panose="020B0503020204020204" charset="-122"/>
+                          <a:ea typeface="微软雅黑" panose="020B0503020204020204" charset="-122"/>
+                        </a:rPr>
+                        <a:t>0.8760</a:t>
+                      </a:r>
+                      <a:endParaRPr lang="en-US" altLang="zh-CN" sz="1600" b="0" i="0">
+                        <a:solidFill>
+                          <a:srgbClr val="000000"/>
+                        </a:solidFill>
+                        <a:latin typeface="微软雅黑" panose="020B0503020204020204" charset="-122"/>
+                        <a:ea typeface="微软雅黑" panose="020B0503020204020204" charset="-122"/>
+                      </a:endParaRPr>
+                    </a:p>
+                  </a:txBody>
+                  <a:tcPr marL="82867" marR="82867" marT="38417" marB="38417" anchor="ctr" anchorCtr="0"/>
+                </a:tc>
+                <a:tc>
+                  <a:txBody>
+                    <a:bodyPr/>
+                    <a:p>
+                      <a:pPr marL="0" indent="0" algn="l">
+                        <a:lnSpc>
+                          <a:spcPct val="100000"/>
+                        </a:lnSpc>
+                        <a:spcBef>
+                          <a:spcPct val="0"/>
+                        </a:spcBef>
+                        <a:spcAft>
+                          <a:spcPct val="0"/>
+                        </a:spcAft>
+                      </a:pPr>
+                      <a:r>
+                        <a:rPr lang="en-US" altLang="zh-CN" sz="1600" b="0" i="0">
+                          <a:solidFill>
+                            <a:srgbClr val="000000"/>
+                          </a:solidFill>
+                          <a:latin typeface="微软雅黑" panose="020B0503020204020204" charset="-122"/>
+                          <a:ea typeface="微软雅黑" panose="020B0503020204020204" charset="-122"/>
+                        </a:rPr>
+                        <a:t>0.8896</a:t>
+                      </a:r>
+                      <a:endParaRPr lang="en-US" altLang="zh-CN" sz="1600" b="0" i="0">
+                        <a:solidFill>
+                          <a:srgbClr val="000000"/>
+                        </a:solidFill>
+                        <a:latin typeface="微软雅黑" panose="020B0503020204020204" charset="-122"/>
+                        <a:ea typeface="微软雅黑" panose="020B0503020204020204" charset="-122"/>
+                      </a:endParaRPr>
+                    </a:p>
+                  </a:txBody>
+                  <a:tcPr marL="82867" marR="82867" marT="38417" marB="38417" anchor="ctr" anchorCtr="0"/>
+                </a:tc>
+                <a:tc>
+                  <a:txBody>
+                    <a:bodyPr/>
+                    <a:p>
+                      <a:pPr marL="0" indent="0" algn="l">
+                        <a:lnSpc>
+                          <a:spcPct val="100000"/>
+                        </a:lnSpc>
+                        <a:spcBef>
+                          <a:spcPct val="0"/>
+                        </a:spcBef>
+                        <a:spcAft>
+                          <a:spcPct val="0"/>
+                        </a:spcAft>
+                      </a:pPr>
+                      <a:r>
+                        <a:rPr lang="en-US" altLang="zh-CN" sz="1600" b="0" i="0">
+                          <a:solidFill>
+                            <a:srgbClr val="000000"/>
+                          </a:solidFill>
+                          <a:latin typeface="微软雅黑" panose="020B0503020204020204" charset="-122"/>
+                          <a:ea typeface="微软雅黑" panose="020B0503020204020204" charset="-122"/>
+                        </a:rPr>
+                        <a:t>+1.36%</a:t>
+                      </a:r>
+                      <a:endParaRPr lang="en-US" altLang="zh-CN" sz="1600" b="0" i="0">
+                        <a:solidFill>
+                          <a:srgbClr val="000000"/>
+                        </a:solidFill>
+                        <a:latin typeface="微软雅黑" panose="020B0503020204020204" charset="-122"/>
+                        <a:ea typeface="微软雅黑" panose="020B0503020204020204" charset="-122"/>
+                      </a:endParaRPr>
+                    </a:p>
+                  </a:txBody>
+                  <a:tcPr marL="82867" marR="82867" marT="38417" marB="38417" anchor="ctr" anchorCtr="0"/>
+                </a:tc>
+              </a:tr>
+              <a:tr h="635635">
+                <a:tc>
+                  <a:txBody>
+                    <a:bodyPr/>
+                    <a:p>
+                      <a:pPr marL="0" indent="0" algn="l">
+                        <a:lnSpc>
+                          <a:spcPct val="100000"/>
+                        </a:lnSpc>
+                        <a:spcBef>
+                          <a:spcPct val="0"/>
+                        </a:spcBef>
+                        <a:spcAft>
+                          <a:spcPct val="0"/>
+                        </a:spcAft>
+                      </a:pPr>
+                      <a:r>
+                        <a:rPr lang="zh-CN" altLang="en-US" sz="1600" b="0" i="0">
+                          <a:solidFill>
+                            <a:srgbClr val="000000"/>
+                          </a:solidFill>
+                          <a:latin typeface="微软雅黑" panose="020B0503020204020204" charset="-122"/>
+                          <a:ea typeface="微软雅黑" panose="020B0503020204020204" charset="-122"/>
+                          <a:cs typeface="微软雅黑" panose="020B0503020204020204" charset="-122"/>
+                        </a:rPr>
+                        <a:t>测试集 </a:t>
+                      </a:r>
+                      <a:r>
+                        <a:rPr lang="en-US" altLang="zh-CN" sz="1600" b="0" i="0">
+                          <a:solidFill>
+                            <a:srgbClr val="000000"/>
+                          </a:solidFill>
+                          <a:latin typeface="微软雅黑" panose="020B0503020204020204" charset="-122"/>
+                          <a:ea typeface="微软雅黑" panose="020B0503020204020204" charset="-122"/>
+                          <a:cs typeface="微软雅黑" panose="020B0503020204020204" charset="-122"/>
+                        </a:rPr>
+                        <a:t>IoU</a:t>
+                      </a:r>
+                      <a:endParaRPr lang="en-US" altLang="zh-CN" sz="1600" b="0" i="0">
+                        <a:solidFill>
+                          <a:srgbClr val="000000"/>
+                        </a:solidFill>
+                        <a:latin typeface="微软雅黑" panose="020B0503020204020204" charset="-122"/>
+                        <a:ea typeface="微软雅黑" panose="020B0503020204020204" charset="-122"/>
+                        <a:cs typeface="微软雅黑" panose="020B0503020204020204" charset="-122"/>
+                      </a:endParaRPr>
+                    </a:p>
+                  </a:txBody>
+                  <a:tcPr marL="82867" marR="82867" marT="38417" marB="38417" anchor="ctr" anchorCtr="0"/>
+                </a:tc>
+                <a:tc>
+                  <a:txBody>
+                    <a:bodyPr/>
+                    <a:p>
+                      <a:pPr marL="0" indent="0" algn="l">
+                        <a:lnSpc>
+                          <a:spcPct val="100000"/>
+                        </a:lnSpc>
+                        <a:spcBef>
+                          <a:spcPct val="0"/>
+                        </a:spcBef>
+                        <a:spcAft>
+                          <a:spcPct val="0"/>
+                        </a:spcAft>
+                      </a:pPr>
+                      <a:r>
+                        <a:rPr lang="en-US" altLang="zh-CN" sz="1600" b="0" i="0">
+                          <a:solidFill>
+                            <a:srgbClr val="000000"/>
+                          </a:solidFill>
+                          <a:latin typeface="微软雅黑" panose="020B0503020204020204" charset="-122"/>
+                          <a:ea typeface="微软雅黑" panose="020B0503020204020204" charset="-122"/>
+                        </a:rPr>
+                        <a:t>0.8006</a:t>
+                      </a:r>
+                      <a:endParaRPr lang="en-US" altLang="zh-CN" sz="1600" b="0" i="0">
+                        <a:solidFill>
+                          <a:srgbClr val="000000"/>
+                        </a:solidFill>
+                        <a:latin typeface="微软雅黑" panose="020B0503020204020204" charset="-122"/>
+                        <a:ea typeface="微软雅黑" panose="020B0503020204020204" charset="-122"/>
+                      </a:endParaRPr>
+                    </a:p>
+                  </a:txBody>
+                  <a:tcPr marL="82867" marR="82867" marT="38417" marB="38417" anchor="ctr" anchorCtr="0"/>
+                </a:tc>
+                <a:tc>
+                  <a:txBody>
+                    <a:bodyPr/>
+                    <a:p>
+                      <a:pPr marL="0" indent="0" algn="l">
+                        <a:lnSpc>
+                          <a:spcPct val="100000"/>
+                        </a:lnSpc>
+                        <a:spcBef>
+                          <a:spcPct val="0"/>
+                        </a:spcBef>
+                        <a:spcAft>
+                          <a:spcPct val="0"/>
+                        </a:spcAft>
+                      </a:pPr>
+                      <a:r>
+                        <a:rPr lang="en-US" altLang="zh-CN" sz="1600" b="0" i="0">
+                          <a:solidFill>
+                            <a:srgbClr val="000000"/>
+                          </a:solidFill>
+                          <a:latin typeface="微软雅黑" panose="020B0503020204020204" charset="-122"/>
+                          <a:ea typeface="微软雅黑" panose="020B0503020204020204" charset="-122"/>
+                        </a:rPr>
+                        <a:t>0.8172</a:t>
+                      </a:r>
+                      <a:endParaRPr lang="en-US" altLang="zh-CN" sz="1600" b="0" i="0">
+                        <a:solidFill>
+                          <a:srgbClr val="000000"/>
+                        </a:solidFill>
+                        <a:latin typeface="微软雅黑" panose="020B0503020204020204" charset="-122"/>
+                        <a:ea typeface="微软雅黑" panose="020B0503020204020204" charset="-122"/>
+                      </a:endParaRPr>
+                    </a:p>
+                  </a:txBody>
+                  <a:tcPr marL="82867" marR="82867" marT="38417" marB="38417" anchor="ctr" anchorCtr="0"/>
+                </a:tc>
+                <a:tc>
+                  <a:txBody>
+                    <a:bodyPr/>
+                    <a:p>
+                      <a:pPr marL="0" indent="0" algn="l">
+                        <a:lnSpc>
+                          <a:spcPct val="100000"/>
+                        </a:lnSpc>
+                        <a:spcBef>
+                          <a:spcPct val="0"/>
+                        </a:spcBef>
+                        <a:spcAft>
+                          <a:spcPct val="0"/>
+                        </a:spcAft>
+                      </a:pPr>
+                      <a:r>
+                        <a:rPr lang="en-US" altLang="zh-CN" sz="1600" b="0" i="0">
+                          <a:solidFill>
+                            <a:srgbClr val="000000"/>
+                          </a:solidFill>
+                          <a:latin typeface="微软雅黑" panose="020B0503020204020204" charset="-122"/>
+                          <a:ea typeface="微软雅黑" panose="020B0503020204020204" charset="-122"/>
+                        </a:rPr>
+                        <a:t>+1.66%</a:t>
+                      </a:r>
+                      <a:endParaRPr lang="en-US" altLang="zh-CN" sz="1600" b="0" i="0">
+                        <a:solidFill>
+                          <a:srgbClr val="000000"/>
+                        </a:solidFill>
+                        <a:latin typeface="微软雅黑" panose="020B0503020204020204" charset="-122"/>
+                        <a:ea typeface="微软雅黑" panose="020B0503020204020204" charset="-122"/>
+                      </a:endParaRPr>
+                    </a:p>
+                  </a:txBody>
+                  <a:tcPr marL="82867" marR="82867" marT="38417" marB="38417" anchor="ctr" anchorCtr="0"/>
+                </a:tc>
+              </a:tr>
+              <a:tr h="635635">
+                <a:tc>
+                  <a:txBody>
+                    <a:bodyPr/>
+                    <a:p>
+                      <a:pPr marL="0" indent="0" algn="l">
+                        <a:lnSpc>
+                          <a:spcPct val="100000"/>
+                        </a:lnSpc>
+                        <a:spcBef>
+                          <a:spcPct val="0"/>
+                        </a:spcBef>
+                        <a:spcAft>
+                          <a:spcPct val="0"/>
+                        </a:spcAft>
+                      </a:pPr>
+                      <a:r>
+                        <a:rPr lang="zh-CN" altLang="en-US" sz="1600" b="0" i="0">
+                          <a:solidFill>
+                            <a:srgbClr val="000000"/>
+                          </a:solidFill>
+                          <a:latin typeface="微软雅黑" panose="020B0503020204020204" charset="-122"/>
+                          <a:ea typeface="微软雅黑" panose="020B0503020204020204" charset="-122"/>
+                          <a:cs typeface="微软雅黑" panose="020B0503020204020204" charset="-122"/>
+                        </a:rPr>
+                        <a:t>测试集 </a:t>
+                      </a:r>
+                      <a:r>
+                        <a:rPr lang="en-US" altLang="zh-CN" sz="1600" b="0" i="0">
+                          <a:solidFill>
+                            <a:srgbClr val="000000"/>
+                          </a:solidFill>
+                          <a:latin typeface="微软雅黑" panose="020B0503020204020204" charset="-122"/>
+                          <a:ea typeface="微软雅黑" panose="020B0503020204020204" charset="-122"/>
+                          <a:cs typeface="微软雅黑" panose="020B0503020204020204" charset="-122"/>
+                        </a:rPr>
+                        <a:t>Pixel Accuracy</a:t>
+                      </a:r>
+                      <a:endParaRPr lang="en-US" altLang="zh-CN" sz="1600" b="0" i="0">
+                        <a:solidFill>
+                          <a:srgbClr val="000000"/>
+                        </a:solidFill>
+                        <a:latin typeface="微软雅黑" panose="020B0503020204020204" charset="-122"/>
+                        <a:ea typeface="微软雅黑" panose="020B0503020204020204" charset="-122"/>
+                        <a:cs typeface="微软雅黑" panose="020B0503020204020204" charset="-122"/>
+                      </a:endParaRPr>
+                    </a:p>
+                  </a:txBody>
+                  <a:tcPr marL="82867" marR="82867" marT="38417" marB="38417" anchor="ctr" anchorCtr="0"/>
+                </a:tc>
+                <a:tc>
+                  <a:txBody>
+                    <a:bodyPr/>
+                    <a:p>
+                      <a:pPr marL="0" indent="0" algn="l">
+                        <a:lnSpc>
+                          <a:spcPct val="100000"/>
+                        </a:lnSpc>
+                        <a:spcBef>
+                          <a:spcPct val="0"/>
+                        </a:spcBef>
+                        <a:spcAft>
+                          <a:spcPct val="0"/>
+                        </a:spcAft>
+                      </a:pPr>
+                      <a:r>
+                        <a:rPr lang="en-US" altLang="zh-CN" sz="1600" b="0" i="0">
+                          <a:solidFill>
+                            <a:srgbClr val="000000"/>
+                          </a:solidFill>
+                          <a:latin typeface="微软雅黑" panose="020B0503020204020204" charset="-122"/>
+                          <a:ea typeface="微软雅黑" panose="020B0503020204020204" charset="-122"/>
+                        </a:rPr>
+                        <a:t>0.9298</a:t>
+                      </a:r>
+                      <a:endParaRPr lang="en-US" altLang="zh-CN" sz="1600" b="0" i="0">
+                        <a:solidFill>
+                          <a:srgbClr val="000000"/>
+                        </a:solidFill>
+                        <a:latin typeface="微软雅黑" panose="020B0503020204020204" charset="-122"/>
+                        <a:ea typeface="微软雅黑" panose="020B0503020204020204" charset="-122"/>
+                      </a:endParaRPr>
+                    </a:p>
+                  </a:txBody>
+                  <a:tcPr marL="82867" marR="82867" marT="38417" marB="38417" anchor="ctr" anchorCtr="0"/>
+                </a:tc>
+                <a:tc>
+                  <a:txBody>
+                    <a:bodyPr/>
+                    <a:p>
+                      <a:pPr marL="0" indent="0" algn="l">
+                        <a:lnSpc>
+                          <a:spcPct val="100000"/>
+                        </a:lnSpc>
+                        <a:spcBef>
+                          <a:spcPct val="0"/>
+                        </a:spcBef>
+                        <a:spcAft>
+                          <a:spcPct val="0"/>
+                        </a:spcAft>
+                      </a:pPr>
+                      <a:r>
+                        <a:rPr lang="en-US" altLang="zh-CN" sz="1600" b="0" i="0">
+                          <a:solidFill>
+                            <a:srgbClr val="000000"/>
+                          </a:solidFill>
+                          <a:latin typeface="微软雅黑" panose="020B0503020204020204" charset="-122"/>
+                          <a:ea typeface="微软雅黑" panose="020B0503020204020204" charset="-122"/>
+                        </a:rPr>
+                        <a:t>0.9378</a:t>
+                      </a:r>
+                      <a:endParaRPr lang="en-US" altLang="zh-CN" sz="1600" b="0" i="0">
+                        <a:solidFill>
+                          <a:srgbClr val="000000"/>
+                        </a:solidFill>
+                        <a:latin typeface="微软雅黑" panose="020B0503020204020204" charset="-122"/>
+                        <a:ea typeface="微软雅黑" panose="020B0503020204020204" charset="-122"/>
+                      </a:endParaRPr>
+                    </a:p>
+                  </a:txBody>
+                  <a:tcPr marL="82867" marR="82867" marT="38417" marB="38417" anchor="ctr" anchorCtr="0"/>
+                </a:tc>
+                <a:tc>
+                  <a:txBody>
+                    <a:bodyPr/>
+                    <a:p>
+                      <a:pPr marL="0" indent="0" algn="l">
+                        <a:lnSpc>
+                          <a:spcPct val="100000"/>
+                        </a:lnSpc>
+                        <a:spcBef>
+                          <a:spcPct val="0"/>
+                        </a:spcBef>
+                        <a:spcAft>
+                          <a:spcPct val="0"/>
+                        </a:spcAft>
+                      </a:pPr>
+                      <a:r>
+                        <a:rPr lang="en-US" altLang="zh-CN" sz="1600" b="0" i="0">
+                          <a:solidFill>
+                            <a:srgbClr val="000000"/>
+                          </a:solidFill>
+                          <a:latin typeface="微软雅黑" panose="020B0503020204020204" charset="-122"/>
+                          <a:ea typeface="微软雅黑" panose="020B0503020204020204" charset="-122"/>
+                        </a:rPr>
+                        <a:t>+0.80%</a:t>
+                      </a:r>
+                      <a:endParaRPr lang="en-US" altLang="zh-CN" sz="1600" b="0" i="0">
+                        <a:solidFill>
+                          <a:srgbClr val="000000"/>
+                        </a:solidFill>
+                        <a:latin typeface="微软雅黑" panose="020B0503020204020204" charset="-122"/>
+                        <a:ea typeface="微软雅黑" panose="020B0503020204020204" charset="-122"/>
+                      </a:endParaRPr>
+                    </a:p>
+                  </a:txBody>
+                  <a:tcPr marL="82867" marR="82867" marT="38417" marB="38417" anchor="ctr" anchorCtr="0"/>
+                </a:tc>
+              </a:tr>
+              <a:tr h="635635">
+                <a:tc>
+                  <a:txBody>
+                    <a:bodyPr/>
+                    <a:p>
+                      <a:pPr marL="0" indent="0" algn="l">
+                        <a:lnSpc>
+                          <a:spcPct val="100000"/>
+                        </a:lnSpc>
+                        <a:spcBef>
+                          <a:spcPct val="0"/>
+                        </a:spcBef>
+                        <a:spcAft>
+                          <a:spcPct val="0"/>
+                        </a:spcAft>
+                      </a:pPr>
+                      <a:r>
+                        <a:rPr lang="zh-CN" altLang="en-US" sz="1600" b="0" i="0">
+                          <a:solidFill>
+                            <a:srgbClr val="000000"/>
+                          </a:solidFill>
+                          <a:latin typeface="微软雅黑" panose="020B0503020204020204" charset="-122"/>
+                          <a:ea typeface="微软雅黑" panose="020B0503020204020204" charset="-122"/>
+                        </a:rPr>
+                        <a:t>模型参数量</a:t>
+                      </a:r>
+                      <a:endParaRPr lang="zh-CN" altLang="en-US" sz="1600" b="0" i="0">
+                        <a:solidFill>
+                          <a:srgbClr val="000000"/>
+                        </a:solidFill>
+                        <a:latin typeface="微软雅黑" panose="020B0503020204020204" charset="-122"/>
+                        <a:ea typeface="微软雅黑" panose="020B0503020204020204" charset="-122"/>
+                      </a:endParaRPr>
+                    </a:p>
+                  </a:txBody>
+                  <a:tcPr marL="82867" marR="82867" marT="38417" marB="38417" anchor="ctr" anchorCtr="0"/>
+                </a:tc>
+                <a:tc>
+                  <a:txBody>
+                    <a:bodyPr/>
+                    <a:p>
+                      <a:pPr marL="0" indent="0" algn="l">
+                        <a:lnSpc>
+                          <a:spcPct val="100000"/>
+                        </a:lnSpc>
+                        <a:spcBef>
+                          <a:spcPct val="0"/>
+                        </a:spcBef>
+                        <a:spcAft>
+                          <a:spcPct val="0"/>
+                        </a:spcAft>
+                      </a:pPr>
+                      <a:r>
+                        <a:rPr lang="en-US" altLang="zh-CN" sz="1600" b="0" i="0">
+                          <a:solidFill>
+                            <a:srgbClr val="000000"/>
+                          </a:solidFill>
+                          <a:latin typeface="微软雅黑" panose="020B0503020204020204" charset="-122"/>
+                          <a:ea typeface="微软雅黑" panose="020B0503020204020204" charset="-122"/>
+                        </a:rPr>
+                        <a:t>31.0M</a:t>
+                      </a:r>
+                      <a:endParaRPr lang="en-US" altLang="zh-CN" sz="1600" b="0" i="0">
+                        <a:solidFill>
+                          <a:srgbClr val="000000"/>
+                        </a:solidFill>
+                        <a:latin typeface="微软雅黑" panose="020B0503020204020204" charset="-122"/>
+                        <a:ea typeface="微软雅黑" panose="020B0503020204020204" charset="-122"/>
+                      </a:endParaRPr>
+                    </a:p>
+                  </a:txBody>
+                  <a:tcPr marL="82867" marR="82867" marT="38417" marB="38417" anchor="ctr" anchorCtr="0"/>
+                </a:tc>
+                <a:tc>
+                  <a:txBody>
+                    <a:bodyPr/>
+                    <a:p>
+                      <a:pPr marL="0" indent="0" algn="l">
+                        <a:lnSpc>
+                          <a:spcPct val="100000"/>
+                        </a:lnSpc>
+                        <a:spcBef>
+                          <a:spcPct val="0"/>
+                        </a:spcBef>
+                        <a:spcAft>
+                          <a:spcPct val="0"/>
+                        </a:spcAft>
+                      </a:pPr>
+                      <a:r>
+                        <a:rPr lang="en-US" altLang="zh-CN" sz="1600" b="0" i="0">
+                          <a:solidFill>
+                            <a:srgbClr val="000000"/>
+                          </a:solidFill>
+                          <a:latin typeface="微软雅黑" panose="020B0503020204020204" charset="-122"/>
+                          <a:ea typeface="微软雅黑" panose="020B0503020204020204" charset="-122"/>
+                        </a:rPr>
+                        <a:t>29.2M</a:t>
+                      </a:r>
+                      <a:endParaRPr lang="en-US" altLang="zh-CN" sz="1600" b="0" i="0">
+                        <a:solidFill>
+                          <a:srgbClr val="000000"/>
+                        </a:solidFill>
+                        <a:latin typeface="微软雅黑" panose="020B0503020204020204" charset="-122"/>
+                        <a:ea typeface="微软雅黑" panose="020B0503020204020204" charset="-122"/>
+                      </a:endParaRPr>
+                    </a:p>
+                  </a:txBody>
+                  <a:tcPr marL="82867" marR="82867" marT="38417" marB="38417" anchor="ctr" anchorCtr="0"/>
+                </a:tc>
+                <a:tc>
+                  <a:txBody>
+                    <a:bodyPr/>
+                    <a:p>
+                      <a:pPr marL="0" indent="0" algn="l">
+                        <a:lnSpc>
+                          <a:spcPct val="100000"/>
+                        </a:lnSpc>
+                        <a:spcBef>
+                          <a:spcPct val="0"/>
+                        </a:spcBef>
+                        <a:spcAft>
+                          <a:spcPct val="0"/>
+                        </a:spcAft>
+                      </a:pPr>
+                      <a:r>
+                        <a:rPr lang="en-US" altLang="zh-CN" sz="1600" b="0" i="0">
+                          <a:solidFill>
+                            <a:srgbClr val="000000"/>
+                          </a:solidFill>
+                          <a:latin typeface="微软雅黑" panose="020B0503020204020204" charset="-122"/>
+                          <a:ea typeface="微软雅黑" panose="020B0503020204020204" charset="-122"/>
+                        </a:rPr>
+                        <a:t>-5.8%</a:t>
+                      </a:r>
+                      <a:endParaRPr lang="en-US" altLang="zh-CN" sz="1600" b="0" i="0">
+                        <a:solidFill>
+                          <a:srgbClr val="000000"/>
+                        </a:solidFill>
+                        <a:latin typeface="微软雅黑" panose="020B0503020204020204" charset="-122"/>
+                        <a:ea typeface="微软雅黑" panose="020B0503020204020204" charset="-122"/>
+                      </a:endParaRPr>
+                    </a:p>
+                  </a:txBody>
+                  <a:tcPr marL="82867" marR="82867" marT="38417" marB="38417" anchor="ctr" anchorCtr="0"/>
+                </a:tc>
+              </a:tr>
+              <a:tr h="635635">
+                <a:tc>
+                  <a:txBody>
+                    <a:bodyPr/>
+                    <a:p>
+                      <a:pPr marL="0" indent="0" algn="l">
+                        <a:lnSpc>
+                          <a:spcPct val="100000"/>
+                        </a:lnSpc>
+                        <a:spcBef>
+                          <a:spcPct val="0"/>
+                        </a:spcBef>
+                        <a:spcAft>
+                          <a:spcPct val="0"/>
+                        </a:spcAft>
+                      </a:pPr>
+                      <a:r>
+                        <a:rPr lang="zh-CN" altLang="en-US" sz="1600" b="0" i="0">
+                          <a:solidFill>
+                            <a:srgbClr val="000000"/>
+                          </a:solidFill>
+                          <a:latin typeface="微软雅黑" panose="020B0503020204020204" charset="-122"/>
+                          <a:ea typeface="微软雅黑" panose="020B0503020204020204" charset="-122"/>
+                        </a:rPr>
+                        <a:t>训练时间</a:t>
+                      </a:r>
+                      <a:endParaRPr lang="zh-CN" altLang="en-US" sz="1600" b="0" i="0">
+                        <a:solidFill>
+                          <a:srgbClr val="000000"/>
+                        </a:solidFill>
+                        <a:latin typeface="微软雅黑" panose="020B0503020204020204" charset="-122"/>
+                        <a:ea typeface="微软雅黑" panose="020B0503020204020204" charset="-122"/>
+                      </a:endParaRPr>
+                    </a:p>
+                  </a:txBody>
+                  <a:tcPr marL="82867" marR="82867" marT="38417" marB="38417" anchor="ctr" anchorCtr="0"/>
+                </a:tc>
+                <a:tc>
+                  <a:txBody>
+                    <a:bodyPr/>
+                    <a:p>
+                      <a:pPr marL="0" indent="0" algn="l">
+                        <a:lnSpc>
+                          <a:spcPct val="100000"/>
+                        </a:lnSpc>
+                        <a:spcBef>
+                          <a:spcPct val="0"/>
+                        </a:spcBef>
+                        <a:spcAft>
+                          <a:spcPct val="0"/>
+                        </a:spcAft>
+                      </a:pPr>
+                      <a:r>
+                        <a:rPr lang="en-US" altLang="zh-CN" sz="1600" b="0" i="0">
+                          <a:solidFill>
+                            <a:srgbClr val="000000"/>
+                          </a:solidFill>
+                          <a:latin typeface="微软雅黑" panose="020B0503020204020204" charset="-122"/>
+                          <a:ea typeface="微软雅黑" panose="020B0503020204020204" charset="-122"/>
+                        </a:rPr>
+                        <a:t>~6.7h</a:t>
+                      </a:r>
+                      <a:endParaRPr lang="en-US" altLang="zh-CN" sz="1600" b="0" i="0">
+                        <a:solidFill>
+                          <a:srgbClr val="000000"/>
+                        </a:solidFill>
+                        <a:latin typeface="微软雅黑" panose="020B0503020204020204" charset="-122"/>
+                        <a:ea typeface="微软雅黑" panose="020B0503020204020204" charset="-122"/>
+                      </a:endParaRPr>
+                    </a:p>
+                  </a:txBody>
+                  <a:tcPr marL="82867" marR="82867" marT="38417" marB="38417" anchor="ctr" anchorCtr="0"/>
+                </a:tc>
+                <a:tc>
+                  <a:txBody>
+                    <a:bodyPr/>
+                    <a:p>
+                      <a:pPr marL="0" indent="0" algn="l">
+                        <a:lnSpc>
+                          <a:spcPct val="100000"/>
+                        </a:lnSpc>
+                        <a:spcBef>
+                          <a:spcPct val="0"/>
+                        </a:spcBef>
+                        <a:spcAft>
+                          <a:spcPct val="0"/>
+                        </a:spcAft>
+                      </a:pPr>
+                      <a:r>
+                        <a:rPr lang="en-US" altLang="zh-CN" sz="1600" b="0" i="0">
+                          <a:solidFill>
+                            <a:srgbClr val="000000"/>
+                          </a:solidFill>
+                          <a:latin typeface="微软雅黑" panose="020B0503020204020204" charset="-122"/>
+                          <a:ea typeface="微软雅黑" panose="020B0503020204020204" charset="-122"/>
+                        </a:rPr>
+                        <a:t>~5.8h</a:t>
+                      </a:r>
+                      <a:endParaRPr lang="en-US" altLang="zh-CN" sz="1600" b="0" i="0">
+                        <a:solidFill>
+                          <a:srgbClr val="000000"/>
+                        </a:solidFill>
+                        <a:latin typeface="微软雅黑" panose="020B0503020204020204" charset="-122"/>
+                        <a:ea typeface="微软雅黑" panose="020B0503020204020204" charset="-122"/>
+                      </a:endParaRPr>
+                    </a:p>
+                  </a:txBody>
+                  <a:tcPr marL="82867" marR="82867" marT="38417" marB="38417" anchor="ctr" anchorCtr="0"/>
+                </a:tc>
+                <a:tc>
+                  <a:txBody>
+                    <a:bodyPr/>
+                    <a:p>
+                      <a:pPr marL="0" indent="0" algn="l">
+                        <a:lnSpc>
+                          <a:spcPct val="100000"/>
+                        </a:lnSpc>
+                        <a:spcBef>
+                          <a:spcPct val="0"/>
+                        </a:spcBef>
+                        <a:spcAft>
+                          <a:spcPct val="0"/>
+                        </a:spcAft>
+                      </a:pPr>
+                      <a:r>
+                        <a:rPr lang="en-US" altLang="zh-CN" sz="1600" b="0" i="0">
+                          <a:solidFill>
+                            <a:srgbClr val="000000"/>
+                          </a:solidFill>
+                          <a:latin typeface="微软雅黑" panose="020B0503020204020204" charset="-122"/>
+                          <a:ea typeface="微软雅黑" panose="020B0503020204020204" charset="-122"/>
+                          <a:cs typeface="微软雅黑" panose="020B0503020204020204" charset="-122"/>
+                        </a:rPr>
+                        <a:t>-13% (AMP</a:t>
+                      </a:r>
+                      <a:r>
+                        <a:rPr lang="zh-CN" altLang="en-US" sz="1600" b="0" i="0">
+                          <a:solidFill>
+                            <a:srgbClr val="000000"/>
+                          </a:solidFill>
+                          <a:latin typeface="微软雅黑" panose="020B0503020204020204" charset="-122"/>
+                          <a:ea typeface="微软雅黑" panose="020B0503020204020204" charset="-122"/>
+                          <a:cs typeface="微软雅黑" panose="020B0503020204020204" charset="-122"/>
+                        </a:rPr>
+                        <a:t>加速</a:t>
+                      </a:r>
+                      <a:r>
+                        <a:rPr lang="en-US" altLang="zh-CN" sz="1600" b="0" i="0">
+                          <a:solidFill>
+                            <a:srgbClr val="000000"/>
+                          </a:solidFill>
+                          <a:latin typeface="微软雅黑" panose="020B0503020204020204" charset="-122"/>
+                          <a:ea typeface="微软雅黑" panose="020B0503020204020204" charset="-122"/>
+                          <a:cs typeface="微软雅黑" panose="020B0503020204020204" charset="-122"/>
+                        </a:rPr>
+                        <a:t>)</a:t>
+                      </a:r>
+                      <a:endParaRPr lang="en-US" altLang="zh-CN" sz="1600" b="0" i="0">
+                        <a:solidFill>
+                          <a:srgbClr val="000000"/>
+                        </a:solidFill>
+                        <a:latin typeface="微软雅黑" panose="020B0503020204020204" charset="-122"/>
+                        <a:ea typeface="微软雅黑" panose="020B0503020204020204" charset="-122"/>
+                        <a:cs typeface="微软雅黑" panose="020B0503020204020204" charset="-122"/>
+                      </a:endParaRPr>
+                    </a:p>
+                  </a:txBody>
+                  <a:tcPr marL="82867" marR="82867" marT="38417" marB="38417" anchor="ctr" anchorCtr="0"/>
+                </a:tc>
+              </a:tr>
+            </a:tbl>
+          </a:graphicData>
+        </a:graphic>
+      </p:graphicFrame>
+    </p:spTree>
+  </p:cSld>
+  <p:clrMapOvr>
+    <a:masterClrMapping/>
+  </p:clrMapOvr>
+</p:sld>
+</file>
+
+<file path=ppt/slides/slide9.xml><?xml version="1.0" encoding="utf-8"?>
+<p:sld xmlns:a="http://schemas.openxmlformats.org/drawingml/2006/main" xmlns:r="http://schemas.openxmlformats.org/officeDocument/2006/relationships" xmlns:p="http://schemas.openxmlformats.org/presentationml/2006/main">
+  <p:cSld>
+    <p:bg>
+      <p:bgPr>
+        <a:solidFill>
+          <a:srgbClr val="F0F4F8"/>
+        </a:solidFill>
+        <a:effectLst/>
+      </p:bgPr>
+    </p:bg>
+    <p:spTree>
+      <p:nvGrpSpPr>
+        <p:cNvPr id="1" name=""/>
+        <p:cNvGrpSpPr/>
+        <p:nvPr/>
+      </p:nvGrpSpPr>
+      <p:grpSpPr/>
+      <p:sp>
+        <p:nvSpPr>
+          <p:cNvPr id="2" name="Rectangle 1"/>
+          <p:cNvSpPr/>
+          <p:nvPr/>
+        </p:nvSpPr>
+        <p:spPr>
+          <a:xfrm>
+            <a:off x="0" y="0"/>
+            <a:ext cx="12191695" cy="1097280"/>
+          </a:xfrm>
+          <a:prstGeom prst="rect">
+            <a:avLst/>
+          </a:prstGeom>
+          <a:solidFill>
+            <a:srgbClr val="1A478A"/>
+          </a:solidFill>
+          <a:ln>
+            <a:noFill/>
+          </a:ln>
+        </p:spPr>
+        <p:style>
+          <a:lnRef idx="1">
+            <a:schemeClr val="accent1"/>
+          </a:lnRef>
+          <a:fillRef idx="3">
+            <a:schemeClr val="accent1"/>
+          </a:fillRef>
+          <a:effectRef idx="2">
+            <a:schemeClr val="accent1"/>
+          </a:effectRef>
+          <a:fontRef idx="minor">
+            <a:schemeClr val="lt1"/>
+          </a:fontRef>
+        </p:style>
+        <p:txBody>
+          <a:bodyPr wrap="square" lIns="731520" tIns="137160" rtlCol="0" anchor="ctr"/>
+          <a:lstStyle/>
+          <a:p>
+            <a:pPr algn="l">
+              <a:defRPr sz="3600" b="1">
+                <a:solidFill>
+                  <a:srgbClr val="FFFFFF"/>
+                </a:solidFill>
+              </a:defRPr>
+            </a:pPr>
+            <a:r>
+              <a:rPr>
+                <a:latin typeface="微软雅黑" panose="020B0503020204020204" charset="-122"/>
+                <a:ea typeface="微软雅黑" panose="020B0503020204020204" charset="-122"/>
+              </a:rPr>
+              <a:t>分析与结论</a:t>
+            </a:r>
+            <a:endParaRPr>
+              <a:latin typeface="微软雅黑" panose="020B0503020204020204" charset="-122"/>
+              <a:ea typeface="微软雅黑" panose="020B0503020204020204" charset="-122"/>
+            </a:endParaRPr>
+          </a:p>
+        </p:txBody>
+      </p:sp>
+      <p:sp>
+        <p:nvSpPr>
+          <p:cNvPr id="3" name="Rectangle 2"/>
+          <p:cNvSpPr/>
+          <p:nvPr/>
+        </p:nvSpPr>
+        <p:spPr>
+          <a:xfrm>
+            <a:off x="0" y="1097280"/>
+            <a:ext cx="12191695" cy="365760"/>
+          </a:xfrm>
+          <a:prstGeom prst="rect">
+            <a:avLst/>
+          </a:prstGeom>
+          <a:solidFill>
+            <a:srgbClr val="2E86AB"/>
+          </a:solidFill>
+          <a:ln>
+            <a:noFill/>
+          </a:ln>
+        </p:spPr>
+        <p:style>
+          <a:lnRef idx="1">
+            <a:schemeClr val="accent1"/>
+          </a:lnRef>
+          <a:fillRef idx="3">
+            <a:schemeClr val="accent1"/>
+          </a:fillRef>
+          <a:effectRef idx="2">
+            <a:schemeClr val="accent1"/>
+          </a:effectRef>
+          <a:fontRef idx="minor">
+            <a:schemeClr val="lt1"/>
+          </a:fontRef>
+        </p:style>
+        <p:txBody>
+          <a:bodyPr lIns="731520" rtlCol="0" anchor="ctr"/>
+          <a:lstStyle/>
+          <a:p>
+            <a:pPr algn="l">
+              <a:defRPr sz="1800">
+                <a:solidFill>
+                  <a:srgbClr val="FFFFFF"/>
+                </a:solidFill>
+              </a:defRPr>
+            </a:pPr>
+            <a:r>
+              <a:rPr>
+                <a:latin typeface="微软雅黑" panose="020B0503020204020204" charset="-122"/>
+                <a:ea typeface="微软雅黑" panose="020B0503020204020204" charset="-122"/>
+              </a:rPr>
+              <a:t>Analysis &amp; Conclusion</a:t>
+            </a:r>
+            <a:endParaRPr>
+              <a:latin typeface="微软雅黑" panose="020B0503020204020204" charset="-122"/>
+              <a:ea typeface="微软雅黑" panose="020B0503020204020204" charset="-122"/>
+            </a:endParaRPr>
           </a:p>
         </p:txBody>
       </p:sp>
@@ -5960,7 +9700,7 @@
         <p:spPr>
           <a:xfrm>
             <a:off x="731520" y="1828800"/>
-            <a:ext cx="5303520" cy="4114800"/>
+            <a:ext cx="5303520" cy="4215765"/>
           </a:xfrm>
           <a:prstGeom prst="rect">
             <a:avLst/>
@@ -5977,186 +9717,293 @@
               <a:spcAft>
                 <a:spcPts val="600"/>
               </a:spcAft>
-              <a:defRPr sz="1700">
-                <a:solidFill>
-                  <a:srgbClr val="333333"/>
-                </a:solidFill>
-              </a:defRPr>
-            </a:pPr>
-            <a:r>
-              <a:t>👥 小组成员分工</a:t>
-            </a:r>
-          </a:p>
-          <a:p>
-            <a:pPr>
-              <a:spcAft>
-                <a:spcPts val="600"/>
-              </a:spcAft>
-              <a:defRPr sz="1700">
-                <a:solidFill>
-                  <a:srgbClr val="333333"/>
-                </a:solidFill>
-              </a:defRPr>
-            </a:pPr>
-          </a:p>
-          <a:p>
-            <a:pPr>
-              <a:spcAft>
-                <a:spcPts val="600"/>
-              </a:spcAft>
-              <a:defRPr sz="1700">
-                <a:solidFill>
-                  <a:srgbClr val="333333"/>
-                </a:solidFill>
-              </a:defRPr>
-            </a:pPr>
-            <a:r>
-              <a:t>成员A (40%)</a:t>
-            </a:r>
-          </a:p>
-          <a:p>
-            <a:pPr>
-              <a:spcAft>
-                <a:spcPts val="600"/>
-              </a:spcAft>
-              <a:defRPr sz="1700">
-                <a:solidFill>
-                  <a:srgbClr val="333333"/>
-                </a:solidFill>
-              </a:defRPr>
-            </a:pPr>
-            <a:r>
-              <a:t>  • U-Net 模型架构设计与实现</a:t>
-            </a:r>
-          </a:p>
-          <a:p>
-            <a:pPr>
-              <a:spcAft>
-                <a:spcPts val="600"/>
-              </a:spcAft>
-              <a:defRPr sz="1700">
-                <a:solidFill>
-                  <a:srgbClr val="333333"/>
-                </a:solidFill>
-              </a:defRPr>
-            </a:pPr>
-            <a:r>
-              <a:t>  • 训练流程代码编写与 GPU 优化</a:t>
-            </a:r>
-          </a:p>
-          <a:p>
-            <a:pPr>
-              <a:spcAft>
-                <a:spcPts val="600"/>
-              </a:spcAft>
-              <a:defRPr sz="1700">
-                <a:solidFill>
-                  <a:srgbClr val="333333"/>
-                </a:solidFill>
-              </a:defRPr>
-            </a:pPr>
-          </a:p>
-          <a:p>
-            <a:pPr>
-              <a:spcAft>
-                <a:spcPts val="600"/>
-              </a:spcAft>
-              <a:defRPr sz="1700">
-                <a:solidFill>
-                  <a:srgbClr val="333333"/>
-                </a:solidFill>
-              </a:defRPr>
-            </a:pPr>
-            <a:r>
-              <a:t>成员B (30%)</a:t>
-            </a:r>
-          </a:p>
-          <a:p>
-            <a:pPr>
-              <a:spcAft>
-                <a:spcPts val="600"/>
-              </a:spcAft>
-              <a:defRPr sz="1700">
-                <a:solidFill>
-                  <a:srgbClr val="333333"/>
-                </a:solidFill>
-              </a:defRPr>
-            </a:pPr>
-            <a:r>
-              <a:t>  • 数据集预处理与数据增强方案</a:t>
-            </a:r>
-          </a:p>
-          <a:p>
-            <a:pPr>
-              <a:spcAft>
-                <a:spcPts val="600"/>
-              </a:spcAft>
-              <a:defRPr sz="1700">
-                <a:solidFill>
-                  <a:srgbClr val="333333"/>
-                </a:solidFill>
-              </a:defRPr>
-            </a:pPr>
-            <a:r>
-              <a:t>  • 超参数调优实验</a:t>
-            </a:r>
-          </a:p>
-          <a:p>
-            <a:pPr>
-              <a:spcAft>
-                <a:spcPts val="600"/>
-              </a:spcAft>
-              <a:defRPr sz="1700">
-                <a:solidFill>
-                  <a:srgbClr val="333333"/>
-                </a:solidFill>
-              </a:defRPr>
-            </a:pPr>
-          </a:p>
-          <a:p>
-            <a:pPr>
-              <a:spcAft>
-                <a:spcPts val="600"/>
-              </a:spcAft>
-              <a:defRPr sz="1700">
-                <a:solidFill>
-                  <a:srgbClr val="333333"/>
-                </a:solidFill>
-              </a:defRPr>
-            </a:pPr>
-            <a:r>
-              <a:t>成员C (30%)</a:t>
-            </a:r>
-          </a:p>
-          <a:p>
-            <a:pPr>
-              <a:spcAft>
-                <a:spcPts val="600"/>
-              </a:spcAft>
-              <a:defRPr sz="1700">
-                <a:solidFill>
-                  <a:srgbClr val="333333"/>
-                </a:solidFill>
-              </a:defRPr>
-            </a:pPr>
-            <a:r>
-              <a:t>  • 实验报告撰写与结果分析</a:t>
-            </a:r>
-          </a:p>
-          <a:p>
-            <a:pPr>
-              <a:spcAft>
-                <a:spcPts val="600"/>
-              </a:spcAft>
-              <a:defRPr sz="1700">
-                <a:solidFill>
-                  <a:srgbClr val="333333"/>
-                </a:solidFill>
-              </a:defRPr>
-            </a:pPr>
-            <a:r>
-              <a:t>  • PPT 制作与可视化</a:t>
-            </a:r>
+              <a:defRPr sz="1600">
+                <a:solidFill>
+                  <a:srgbClr val="333333"/>
+                </a:solidFill>
+              </a:defRPr>
+            </a:pPr>
+            <a:r>
+              <a:rPr>
+                <a:latin typeface="微软雅黑" panose="020B0503020204020204" charset="-122"/>
+                <a:ea typeface="微软雅黑" panose="020B0503020204020204" charset="-122"/>
+                <a:cs typeface="微软雅黑" panose="020B0503020204020204" charset="-122"/>
+              </a:rPr>
+              <a:t>💡 关键发现</a:t>
+            </a:r>
+            <a:endParaRPr>
+              <a:latin typeface="微软雅黑" panose="020B0503020204020204" charset="-122"/>
+              <a:ea typeface="微软雅黑" panose="020B0503020204020204" charset="-122"/>
+              <a:cs typeface="微软雅黑" panose="020B0503020204020204" charset="-122"/>
+            </a:endParaRPr>
+          </a:p>
+          <a:p>
+            <a:pPr>
+              <a:spcAft>
+                <a:spcPts val="600"/>
+              </a:spcAft>
+              <a:defRPr sz="1600">
+                <a:solidFill>
+                  <a:srgbClr val="333333"/>
+                </a:solidFill>
+              </a:defRPr>
+            </a:pPr>
+            <a:endParaRPr>
+              <a:latin typeface="微软雅黑" panose="020B0503020204020204" charset="-122"/>
+              <a:ea typeface="微软雅黑" panose="020B0503020204020204" charset="-122"/>
+              <a:cs typeface="微软雅黑" panose="020B0503020204020204" charset="-122"/>
+            </a:endParaRPr>
+          </a:p>
+          <a:p>
+            <a:pPr>
+              <a:spcAft>
+                <a:spcPts val="600"/>
+              </a:spcAft>
+              <a:defRPr sz="1600">
+                <a:solidFill>
+                  <a:srgbClr val="333333"/>
+                </a:solidFill>
+              </a:defRPr>
+            </a:pPr>
+            <a:r>
+              <a:rPr>
+                <a:latin typeface="微软雅黑" panose="020B0503020204020204" charset="-122"/>
+                <a:ea typeface="微软雅黑" panose="020B0503020204020204" charset="-122"/>
+                <a:cs typeface="微软雅黑" panose="020B0503020204020204" charset="-122"/>
+              </a:rPr>
+              <a:t>1. 组合损失函数优势</a:t>
+            </a:r>
+            <a:endParaRPr>
+              <a:latin typeface="微软雅黑" panose="020B0503020204020204" charset="-122"/>
+              <a:ea typeface="微软雅黑" panose="020B0503020204020204" charset="-122"/>
+              <a:cs typeface="微软雅黑" panose="020B0503020204020204" charset="-122"/>
+            </a:endParaRPr>
+          </a:p>
+          <a:p>
+            <a:pPr>
+              <a:spcAft>
+                <a:spcPts val="600"/>
+              </a:spcAft>
+              <a:defRPr sz="1600">
+                <a:solidFill>
+                  <a:srgbClr val="333333"/>
+                </a:solidFill>
+              </a:defRPr>
+            </a:pPr>
+            <a:r>
+              <a:rPr>
+                <a:latin typeface="微软雅黑" panose="020B0503020204020204" charset="-122"/>
+                <a:ea typeface="微软雅黑" panose="020B0503020204020204" charset="-122"/>
+                <a:cs typeface="微软雅黑" panose="020B0503020204020204" charset="-122"/>
+              </a:rPr>
+              <a:t>   Dice+BCE 比单独 BCE 更适合类别不平衡的分割任务</a:t>
+            </a:r>
+            <a:endParaRPr>
+              <a:latin typeface="微软雅黑" panose="020B0503020204020204" charset="-122"/>
+              <a:ea typeface="微软雅黑" panose="020B0503020204020204" charset="-122"/>
+              <a:cs typeface="微软雅黑" panose="020B0503020204020204" charset="-122"/>
+            </a:endParaRPr>
+          </a:p>
+          <a:p>
+            <a:pPr>
+              <a:spcAft>
+                <a:spcPts val="600"/>
+              </a:spcAft>
+              <a:defRPr sz="1600">
+                <a:solidFill>
+                  <a:srgbClr val="333333"/>
+                </a:solidFill>
+              </a:defRPr>
+            </a:pPr>
+            <a:endParaRPr>
+              <a:latin typeface="微软雅黑" panose="020B0503020204020204" charset="-122"/>
+              <a:ea typeface="微软雅黑" panose="020B0503020204020204" charset="-122"/>
+              <a:cs typeface="微软雅黑" panose="020B0503020204020204" charset="-122"/>
+            </a:endParaRPr>
+          </a:p>
+          <a:p>
+            <a:pPr>
+              <a:spcAft>
+                <a:spcPts val="600"/>
+              </a:spcAft>
+              <a:defRPr sz="1600">
+                <a:solidFill>
+                  <a:srgbClr val="333333"/>
+                </a:solidFill>
+              </a:defRPr>
+            </a:pPr>
+            <a:r>
+              <a:rPr>
+                <a:latin typeface="微软雅黑" panose="020B0503020204020204" charset="-122"/>
+                <a:ea typeface="微软雅黑" panose="020B0503020204020204" charset="-122"/>
+                <a:cs typeface="微软雅黑" panose="020B0503020204020204" charset="-122"/>
+              </a:rPr>
+              <a:t>2. 数据增强效果显著</a:t>
+            </a:r>
+            <a:endParaRPr>
+              <a:latin typeface="微软雅黑" panose="020B0503020204020204" charset="-122"/>
+              <a:ea typeface="微软雅黑" panose="020B0503020204020204" charset="-122"/>
+              <a:cs typeface="微软雅黑" panose="020B0503020204020204" charset="-122"/>
+            </a:endParaRPr>
+          </a:p>
+          <a:p>
+            <a:pPr>
+              <a:spcAft>
+                <a:spcPts val="600"/>
+              </a:spcAft>
+              <a:defRPr sz="1600">
+                <a:solidFill>
+                  <a:srgbClr val="333333"/>
+                </a:solidFill>
+              </a:defRPr>
+            </a:pPr>
+            <a:r>
+              <a:rPr>
+                <a:latin typeface="微软雅黑" panose="020B0503020204020204" charset="-122"/>
+                <a:ea typeface="微软雅黑" panose="020B0503020204020204" charset="-122"/>
+                <a:cs typeface="微软雅黑" panose="020B0503020204020204" charset="-122"/>
+              </a:rPr>
+              <a:t>   翻转/旋转/颜色抖动提升泛化能力 3-5% Dice</a:t>
+            </a:r>
+            <a:endParaRPr>
+              <a:latin typeface="微软雅黑" panose="020B0503020204020204" charset="-122"/>
+              <a:ea typeface="微软雅黑" panose="020B0503020204020204" charset="-122"/>
+              <a:cs typeface="微软雅黑" panose="020B0503020204020204" charset="-122"/>
+            </a:endParaRPr>
+          </a:p>
+          <a:p>
+            <a:pPr>
+              <a:spcAft>
+                <a:spcPts val="600"/>
+              </a:spcAft>
+              <a:defRPr sz="1600">
+                <a:solidFill>
+                  <a:srgbClr val="333333"/>
+                </a:solidFill>
+              </a:defRPr>
+            </a:pPr>
+            <a:endParaRPr>
+              <a:latin typeface="微软雅黑" panose="020B0503020204020204" charset="-122"/>
+              <a:ea typeface="微软雅黑" panose="020B0503020204020204" charset="-122"/>
+              <a:cs typeface="微软雅黑" panose="020B0503020204020204" charset="-122"/>
+            </a:endParaRPr>
+          </a:p>
+          <a:p>
+            <a:pPr>
+              <a:spcAft>
+                <a:spcPts val="600"/>
+              </a:spcAft>
+              <a:defRPr sz="1600">
+                <a:solidFill>
+                  <a:srgbClr val="333333"/>
+                </a:solidFill>
+              </a:defRPr>
+            </a:pPr>
+            <a:r>
+              <a:rPr>
+                <a:latin typeface="微软雅黑" panose="020B0503020204020204" charset="-122"/>
+                <a:ea typeface="微软雅黑" panose="020B0503020204020204" charset="-122"/>
+                <a:cs typeface="微软雅黑" panose="020B0503020204020204" charset="-122"/>
+              </a:rPr>
+              <a:t>3. GPU 加速比约 6.7x</a:t>
+            </a:r>
+            <a:endParaRPr>
+              <a:latin typeface="微软雅黑" panose="020B0503020204020204" charset="-122"/>
+              <a:ea typeface="微软雅黑" panose="020B0503020204020204" charset="-122"/>
+              <a:cs typeface="微软雅黑" panose="020B0503020204020204" charset="-122"/>
+            </a:endParaRPr>
+          </a:p>
+          <a:p>
+            <a:pPr>
+              <a:spcAft>
+                <a:spcPts val="600"/>
+              </a:spcAft>
+              <a:defRPr sz="1600">
+                <a:solidFill>
+                  <a:srgbClr val="333333"/>
+                </a:solidFill>
+              </a:defRPr>
+            </a:pPr>
+            <a:r>
+              <a:rPr>
+                <a:latin typeface="微软雅黑" panose="020B0503020204020204" charset="-122"/>
+                <a:ea typeface="微软雅黑" panose="020B0503020204020204" charset="-122"/>
+                <a:cs typeface="微软雅黑" panose="020B0503020204020204" charset="-122"/>
+              </a:rPr>
+              <a:t>   CPU: ~45h → GPU: ~6.7h (50 epochs)</a:t>
+            </a:r>
+            <a:endParaRPr>
+              <a:latin typeface="微软雅黑" panose="020B0503020204020204" charset="-122"/>
+              <a:ea typeface="微软雅黑" panose="020B0503020204020204" charset="-122"/>
+              <a:cs typeface="微软雅黑" panose="020B0503020204020204" charset="-122"/>
+            </a:endParaRPr>
+          </a:p>
+          <a:p>
+            <a:pPr>
+              <a:spcAft>
+                <a:spcPts val="600"/>
+              </a:spcAft>
+              <a:defRPr sz="1600">
+                <a:solidFill>
+                  <a:srgbClr val="333333"/>
+                </a:solidFill>
+              </a:defRPr>
+            </a:pPr>
+            <a:endParaRPr>
+              <a:latin typeface="微软雅黑" panose="020B0503020204020204" charset="-122"/>
+              <a:ea typeface="微软雅黑" panose="020B0503020204020204" charset="-122"/>
+              <a:cs typeface="微软雅黑" panose="020B0503020204020204" charset="-122"/>
+            </a:endParaRPr>
+          </a:p>
+          <a:p>
+            <a:pPr>
+              <a:spcAft>
+                <a:spcPts val="600"/>
+              </a:spcAft>
+              <a:defRPr sz="1600">
+                <a:solidFill>
+                  <a:srgbClr val="333333"/>
+                </a:solidFill>
+              </a:defRPr>
+            </a:pPr>
+            <a:r>
+              <a:rPr>
+                <a:latin typeface="微软雅黑" panose="020B0503020204020204" charset="-122"/>
+                <a:ea typeface="微软雅黑" panose="020B0503020204020204" charset="-122"/>
+                <a:cs typeface="微软雅黑" panose="020B0503020204020204" charset="-122"/>
+              </a:rPr>
+              <a:t>4. 跳跃连接保留细节</a:t>
+            </a:r>
+            <a:endParaRPr>
+              <a:latin typeface="微软雅黑" panose="020B0503020204020204" charset="-122"/>
+              <a:ea typeface="微软雅黑" panose="020B0503020204020204" charset="-122"/>
+              <a:cs typeface="微软雅黑" panose="020B0503020204020204" charset="-122"/>
+            </a:endParaRPr>
+          </a:p>
+          <a:p>
+            <a:pPr>
+              <a:spcAft>
+                <a:spcPts val="600"/>
+              </a:spcAft>
+              <a:defRPr sz="1600">
+                <a:solidFill>
+                  <a:srgbClr val="333333"/>
+                </a:solidFill>
+              </a:defRPr>
+            </a:pPr>
+            <a:r>
+              <a:rPr>
+                <a:latin typeface="微软雅黑" panose="020B0503020204020204" charset="-122"/>
+                <a:ea typeface="微软雅黑" panose="020B0503020204020204" charset="-122"/>
+                <a:cs typeface="微软雅黑" panose="020B0503020204020204" charset="-122"/>
+              </a:rPr>
+              <a:t>   有效缓解分割边缘模糊问题</a:t>
+            </a:r>
+            <a:endParaRPr>
+              <a:latin typeface="微软雅黑" panose="020B0503020204020204" charset="-122"/>
+              <a:ea typeface="微软雅黑" panose="020B0503020204020204" charset="-122"/>
+              <a:cs typeface="微软雅黑" panose="020B0503020204020204" charset="-122"/>
+            </a:endParaRPr>
           </a:p>
         </p:txBody>
       </p:sp>
@@ -6169,7 +10016,7 @@
         <p:spPr>
           <a:xfrm>
             <a:off x="6675120" y="1828800"/>
-            <a:ext cx="4846320" cy="4114800"/>
+            <a:ext cx="4846320" cy="4215765"/>
           </a:xfrm>
           <a:prstGeom prst="rect">
             <a:avLst/>
@@ -6186,186 +10033,309 @@
               <a:spcAft>
                 <a:spcPts val="600"/>
               </a:spcAft>
-              <a:defRPr sz="1400">
-                <a:solidFill>
-                  <a:srgbClr val="333333"/>
-                </a:solidFill>
-              </a:defRPr>
-            </a:pPr>
-            <a:r>
-              <a:t>📚 参考文献</a:t>
-            </a:r>
-          </a:p>
-          <a:p>
-            <a:pPr>
-              <a:spcAft>
-                <a:spcPts val="600"/>
-              </a:spcAft>
-              <a:defRPr sz="1400">
-                <a:solidFill>
-                  <a:srgbClr val="333333"/>
-                </a:solidFill>
-              </a:defRPr>
-            </a:pPr>
-          </a:p>
-          <a:p>
-            <a:pPr>
-              <a:spcAft>
-                <a:spcPts val="600"/>
-              </a:spcAft>
-              <a:defRPr sz="1400">
-                <a:solidFill>
-                  <a:srgbClr val="333333"/>
-                </a:solidFill>
-              </a:defRPr>
-            </a:pPr>
-            <a:r>
-              <a:t>[1] Ronneberger O, Fischer P, Brox T.</a:t>
-            </a:r>
-          </a:p>
-          <a:p>
-            <a:pPr>
-              <a:spcAft>
-                <a:spcPts val="600"/>
-              </a:spcAft>
-              <a:defRPr sz="1400">
-                <a:solidFill>
-                  <a:srgbClr val="333333"/>
-                </a:solidFill>
-              </a:defRPr>
-            </a:pPr>
-            <a:r>
-              <a:t>    U-Net: Convolutional Networks for</a:t>
-            </a:r>
-          </a:p>
-          <a:p>
-            <a:pPr>
-              <a:spcAft>
-                <a:spcPts val="600"/>
-              </a:spcAft>
-              <a:defRPr sz="1400">
-                <a:solidFill>
-                  <a:srgbClr val="333333"/>
-                </a:solidFill>
-              </a:defRPr>
-            </a:pPr>
-            <a:r>
-              <a:t>    Biomedical Image Segmentation.</a:t>
-            </a:r>
-          </a:p>
-          <a:p>
-            <a:pPr>
-              <a:spcAft>
-                <a:spcPts val="600"/>
-              </a:spcAft>
-              <a:defRPr sz="1400">
-                <a:solidFill>
-                  <a:srgbClr val="333333"/>
-                </a:solidFill>
-              </a:defRPr>
-            </a:pPr>
-            <a:r>
-              <a:t>    MICCAI 2015.</a:t>
-            </a:r>
-          </a:p>
-          <a:p>
-            <a:pPr>
-              <a:spcAft>
-                <a:spcPts val="600"/>
-              </a:spcAft>
-              <a:defRPr sz="1400">
-                <a:solidFill>
-                  <a:srgbClr val="333333"/>
-                </a:solidFill>
-              </a:defRPr>
-            </a:pPr>
-          </a:p>
-          <a:p>
-            <a:pPr>
-              <a:spcAft>
-                <a:spcPts val="600"/>
-              </a:spcAft>
-              <a:defRPr sz="1400">
-                <a:solidFill>
-                  <a:srgbClr val="333333"/>
-                </a:solidFill>
-              </a:defRPr>
-            </a:pPr>
-            <a:r>
-              <a:t>[2] Codella N, et al. Skin Lesion</a:t>
-            </a:r>
-          </a:p>
-          <a:p>
-            <a:pPr>
-              <a:spcAft>
-                <a:spcPts val="600"/>
-              </a:spcAft>
-              <a:defRPr sz="1400">
-                <a:solidFill>
-                  <a:srgbClr val="333333"/>
-                </a:solidFill>
-              </a:defRPr>
-            </a:pPr>
-            <a:r>
-              <a:t>    Analysis Toward Melanoma Detection.</a:t>
-            </a:r>
-          </a:p>
-          <a:p>
-            <a:pPr>
-              <a:spcAft>
-                <a:spcPts val="600"/>
-              </a:spcAft>
-              <a:defRPr sz="1400">
-                <a:solidFill>
-                  <a:srgbClr val="333333"/>
-                </a:solidFill>
-              </a:defRPr>
-            </a:pPr>
-            <a:r>
-              <a:t>    ISIC 2017. arXiv:1710.05006.</a:t>
-            </a:r>
-          </a:p>
-          <a:p>
-            <a:pPr>
-              <a:spcAft>
-                <a:spcPts val="600"/>
-              </a:spcAft>
-              <a:defRPr sz="1400">
-                <a:solidFill>
-                  <a:srgbClr val="333333"/>
-                </a:solidFill>
-              </a:defRPr>
-            </a:pPr>
-          </a:p>
-          <a:p>
-            <a:pPr>
-              <a:spcAft>
-                <a:spcPts val="600"/>
-              </a:spcAft>
-              <a:defRPr sz="1400">
-                <a:solidFill>
-                  <a:srgbClr val="333333"/>
-                </a:solidFill>
-              </a:defRPr>
-            </a:pPr>
-            <a:r>
-              <a:t>[3] Tschandl P, et al. The HAM10000</a:t>
-            </a:r>
-          </a:p>
-          <a:p>
-            <a:pPr>
-              <a:spcAft>
-                <a:spcPts val="600"/>
-              </a:spcAft>
-              <a:defRPr sz="1400">
-                <a:solidFill>
-                  <a:srgbClr val="333333"/>
-                </a:solidFill>
-              </a:defRPr>
-            </a:pPr>
-            <a:r>
-              <a:t>    Dataset. Scientific Data, 2018.</a:t>
-            </a:r>
+              <a:defRPr sz="1600">
+                <a:solidFill>
+                  <a:srgbClr val="333333"/>
+                </a:solidFill>
+              </a:defRPr>
+            </a:pPr>
+            <a:r>
+              <a:rPr>
+                <a:latin typeface="微软雅黑" panose="020B0503020204020204" charset="-122"/>
+                <a:ea typeface="微软雅黑" panose="020B0503020204020204" charset="-122"/>
+                <a:cs typeface="微软雅黑" panose="020B0503020204020204" charset="-122"/>
+              </a:rPr>
+              <a:t>⚠️ 待改进方向</a:t>
+            </a:r>
+            <a:endParaRPr>
+              <a:latin typeface="微软雅黑" panose="020B0503020204020204" charset="-122"/>
+              <a:ea typeface="微软雅黑" panose="020B0503020204020204" charset="-122"/>
+              <a:cs typeface="微软雅黑" panose="020B0503020204020204" charset="-122"/>
+            </a:endParaRPr>
+          </a:p>
+          <a:p>
+            <a:pPr>
+              <a:spcAft>
+                <a:spcPts val="600"/>
+              </a:spcAft>
+              <a:defRPr sz="1600">
+                <a:solidFill>
+                  <a:srgbClr val="333333"/>
+                </a:solidFill>
+              </a:defRPr>
+            </a:pPr>
+            <a:endParaRPr>
+              <a:latin typeface="微软雅黑" panose="020B0503020204020204" charset="-122"/>
+              <a:ea typeface="微软雅黑" panose="020B0503020204020204" charset="-122"/>
+              <a:cs typeface="微软雅黑" panose="020B0503020204020204" charset="-122"/>
+            </a:endParaRPr>
+          </a:p>
+          <a:p>
+            <a:pPr>
+              <a:spcAft>
+                <a:spcPts val="600"/>
+              </a:spcAft>
+              <a:defRPr sz="1600">
+                <a:solidFill>
+                  <a:srgbClr val="333333"/>
+                </a:solidFill>
+              </a:defRPr>
+            </a:pPr>
+            <a:r>
+              <a:rPr>
+                <a:latin typeface="微软雅黑" panose="020B0503020204020204" charset="-122"/>
+                <a:ea typeface="微软雅黑" panose="020B0503020204020204" charset="-122"/>
+                <a:cs typeface="微软雅黑" panose="020B0503020204020204" charset="-122"/>
+              </a:rPr>
+              <a:t>• 尝试更深层 backbone (ResNet, EfficientNet)</a:t>
+            </a:r>
+            <a:endParaRPr>
+              <a:latin typeface="微软雅黑" panose="020B0503020204020204" charset="-122"/>
+              <a:ea typeface="微软雅黑" panose="020B0503020204020204" charset="-122"/>
+              <a:cs typeface="微软雅黑" panose="020B0503020204020204" charset="-122"/>
+            </a:endParaRPr>
+          </a:p>
+          <a:p>
+            <a:pPr>
+              <a:spcAft>
+                <a:spcPts val="600"/>
+              </a:spcAft>
+              <a:defRPr sz="1600">
+                <a:solidFill>
+                  <a:srgbClr val="333333"/>
+                </a:solidFill>
+              </a:defRPr>
+            </a:pPr>
+            <a:r>
+              <a:rPr>
+                <a:latin typeface="微软雅黑" panose="020B0503020204020204" charset="-122"/>
+                <a:ea typeface="微软雅黑" panose="020B0503020204020204" charset="-122"/>
+                <a:cs typeface="微软雅黑" panose="020B0503020204020204" charset="-122"/>
+              </a:rPr>
+              <a:t>• 引入注意力机制 (Attention U-Net)</a:t>
+            </a:r>
+            <a:endParaRPr>
+              <a:latin typeface="微软雅黑" panose="020B0503020204020204" charset="-122"/>
+              <a:ea typeface="微软雅黑" panose="020B0503020204020204" charset="-122"/>
+              <a:cs typeface="微软雅黑" panose="020B0503020204020204" charset="-122"/>
+            </a:endParaRPr>
+          </a:p>
+          <a:p>
+            <a:pPr>
+              <a:spcAft>
+                <a:spcPts val="600"/>
+              </a:spcAft>
+              <a:defRPr sz="1600">
+                <a:solidFill>
+                  <a:srgbClr val="333333"/>
+                </a:solidFill>
+              </a:defRPr>
+            </a:pPr>
+            <a:r>
+              <a:rPr>
+                <a:latin typeface="微软雅黑" panose="020B0503020204020204" charset="-122"/>
+                <a:ea typeface="微软雅黑" panose="020B0503020204020204" charset="-122"/>
+                <a:cs typeface="微软雅黑" panose="020B0503020204020204" charset="-122"/>
+              </a:rPr>
+              <a:t>• 使用预训练权重加速收敛</a:t>
+            </a:r>
+            <a:endParaRPr>
+              <a:latin typeface="微软雅黑" panose="020B0503020204020204" charset="-122"/>
+              <a:ea typeface="微软雅黑" panose="020B0503020204020204" charset="-122"/>
+              <a:cs typeface="微软雅黑" panose="020B0503020204020204" charset="-122"/>
+            </a:endParaRPr>
+          </a:p>
+          <a:p>
+            <a:pPr>
+              <a:spcAft>
+                <a:spcPts val="600"/>
+              </a:spcAft>
+              <a:defRPr sz="1600">
+                <a:solidFill>
+                  <a:srgbClr val="333333"/>
+                </a:solidFill>
+              </a:defRPr>
+            </a:pPr>
+            <a:r>
+              <a:rPr>
+                <a:latin typeface="微软雅黑" panose="020B0503020204020204" charset="-122"/>
+                <a:ea typeface="微软雅黑" panose="020B0503020204020204" charset="-122"/>
+                <a:cs typeface="微软雅黑" panose="020B0503020204020204" charset="-122"/>
+              </a:rPr>
+              <a:t>• 混合精度训练 (AMP) 进一步加速</a:t>
+            </a:r>
+            <a:endParaRPr>
+              <a:latin typeface="微软雅黑" panose="020B0503020204020204" charset="-122"/>
+              <a:ea typeface="微软雅黑" panose="020B0503020204020204" charset="-122"/>
+              <a:cs typeface="微软雅黑" panose="020B0503020204020204" charset="-122"/>
+            </a:endParaRPr>
+          </a:p>
+          <a:p>
+            <a:pPr>
+              <a:spcAft>
+                <a:spcPts val="600"/>
+              </a:spcAft>
+              <a:defRPr sz="1600">
+                <a:solidFill>
+                  <a:srgbClr val="333333"/>
+                </a:solidFill>
+              </a:defRPr>
+            </a:pPr>
+            <a:r>
+              <a:rPr>
+                <a:latin typeface="微软雅黑" panose="020B0503020204020204" charset="-122"/>
+                <a:ea typeface="微软雅黑" panose="020B0503020204020204" charset="-122"/>
+                <a:cs typeface="微软雅黑" panose="020B0503020204020204" charset="-122"/>
+              </a:rPr>
+              <a:t>• 模型剪枝/量化适配边缘部署</a:t>
+            </a:r>
+            <a:endParaRPr>
+              <a:latin typeface="微软雅黑" panose="020B0503020204020204" charset="-122"/>
+              <a:ea typeface="微软雅黑" panose="020B0503020204020204" charset="-122"/>
+              <a:cs typeface="微软雅黑" panose="020B0503020204020204" charset="-122"/>
+            </a:endParaRPr>
+          </a:p>
+          <a:p>
+            <a:pPr>
+              <a:spcAft>
+                <a:spcPts val="600"/>
+              </a:spcAft>
+              <a:defRPr sz="1600">
+                <a:solidFill>
+                  <a:srgbClr val="333333"/>
+                </a:solidFill>
+              </a:defRPr>
+            </a:pPr>
+            <a:endParaRPr>
+              <a:latin typeface="微软雅黑" panose="020B0503020204020204" charset="-122"/>
+              <a:ea typeface="微软雅黑" panose="020B0503020204020204" charset="-122"/>
+              <a:cs typeface="微软雅黑" panose="020B0503020204020204" charset="-122"/>
+            </a:endParaRPr>
+          </a:p>
+          <a:p>
+            <a:pPr>
+              <a:spcAft>
+                <a:spcPts val="600"/>
+              </a:spcAft>
+              <a:defRPr sz="1600">
+                <a:solidFill>
+                  <a:srgbClr val="333333"/>
+                </a:solidFill>
+              </a:defRPr>
+            </a:pPr>
+            <a:r>
+              <a:rPr>
+                <a:latin typeface="微软雅黑" panose="020B0503020204020204" charset="-122"/>
+                <a:ea typeface="微软雅黑" panose="020B0503020204020204" charset="-122"/>
+                <a:cs typeface="微软雅黑" panose="020B0503020204020204" charset="-122"/>
+              </a:rPr>
+              <a:t>🎯 结论</a:t>
+            </a:r>
+            <a:endParaRPr>
+              <a:latin typeface="微软雅黑" panose="020B0503020204020204" charset="-122"/>
+              <a:ea typeface="微软雅黑" panose="020B0503020204020204" charset="-122"/>
+              <a:cs typeface="微软雅黑" panose="020B0503020204020204" charset="-122"/>
+            </a:endParaRPr>
+          </a:p>
+          <a:p>
+            <a:pPr>
+              <a:spcAft>
+                <a:spcPts val="600"/>
+              </a:spcAft>
+              <a:defRPr sz="1600">
+                <a:solidFill>
+                  <a:srgbClr val="333333"/>
+                </a:solidFill>
+              </a:defRPr>
+            </a:pPr>
+            <a:r>
+              <a:rPr>
+                <a:latin typeface="微软雅黑" panose="020B0503020204020204" charset="-122"/>
+                <a:ea typeface="微软雅黑" panose="020B0503020204020204" charset="-122"/>
+                <a:cs typeface="微软雅黑" panose="020B0503020204020204" charset="-122"/>
+              </a:rPr>
+              <a:t>U-Net 能有效完成皮肤病变分割,</a:t>
+            </a:r>
+            <a:endParaRPr>
+              <a:latin typeface="微软雅黑" panose="020B0503020204020204" charset="-122"/>
+              <a:ea typeface="微软雅黑" panose="020B0503020204020204" charset="-122"/>
+              <a:cs typeface="微软雅黑" panose="020B0503020204020204" charset="-122"/>
+            </a:endParaRPr>
+          </a:p>
+          <a:p>
+            <a:pPr>
+              <a:spcAft>
+                <a:spcPts val="600"/>
+              </a:spcAft>
+              <a:defRPr sz="1600">
+                <a:solidFill>
+                  <a:srgbClr val="333333"/>
+                </a:solidFill>
+              </a:defRPr>
+            </a:pPr>
+            <a:r>
+              <a:rPr>
+                <a:latin typeface="微软雅黑" panose="020B0503020204020204" charset="-122"/>
+                <a:ea typeface="微软雅黑" panose="020B0503020204020204" charset="-122"/>
+                <a:cs typeface="微软雅黑" panose="020B0503020204020204" charset="-122"/>
+              </a:rPr>
+              <a:t>测试集 Dice=0.8760, 模型泛化能力良好,</a:t>
+            </a:r>
+            <a:endParaRPr>
+              <a:latin typeface="微软雅黑" panose="020B0503020204020204" charset="-122"/>
+              <a:ea typeface="微软雅黑" panose="020B0503020204020204" charset="-122"/>
+              <a:cs typeface="微软雅黑" panose="020B0503020204020204" charset="-122"/>
+            </a:endParaRPr>
+          </a:p>
+          <a:p>
+            <a:pPr>
+              <a:spcAft>
+                <a:spcPts val="600"/>
+              </a:spcAft>
+              <a:defRPr sz="1600">
+                <a:solidFill>
+                  <a:srgbClr val="333333"/>
+                </a:solidFill>
+              </a:defRPr>
+            </a:pPr>
+            <a:r>
+              <a:rPr>
+                <a:latin typeface="微软雅黑" panose="020B0503020204020204" charset="-122"/>
+                <a:ea typeface="微软雅黑" panose="020B0503020204020204" charset="-122"/>
+                <a:cs typeface="微软雅黑" panose="020B0503020204020204" charset="-122"/>
+              </a:rPr>
+              <a:t>为 AIoT 场景下的皮肤病辅助诊断</a:t>
+            </a:r>
+            <a:endParaRPr>
+              <a:latin typeface="微软雅黑" panose="020B0503020204020204" charset="-122"/>
+              <a:ea typeface="微软雅黑" panose="020B0503020204020204" charset="-122"/>
+              <a:cs typeface="微软雅黑" panose="020B0503020204020204" charset="-122"/>
+            </a:endParaRPr>
+          </a:p>
+          <a:p>
+            <a:pPr>
+              <a:spcAft>
+                <a:spcPts val="600"/>
+              </a:spcAft>
+              <a:defRPr sz="1600">
+                <a:solidFill>
+                  <a:srgbClr val="333333"/>
+                </a:solidFill>
+              </a:defRPr>
+            </a:pPr>
+            <a:r>
+              <a:rPr>
+                <a:latin typeface="微软雅黑" panose="020B0503020204020204" charset="-122"/>
+                <a:ea typeface="微软雅黑" panose="020B0503020204020204" charset="-122"/>
+                <a:cs typeface="微软雅黑" panose="020B0503020204020204" charset="-122"/>
+              </a:rPr>
+              <a:t>提供了可行的技术方案。</a:t>
+            </a:r>
+            <a:endParaRPr>
+              <a:latin typeface="微软雅黑" panose="020B0503020204020204" charset="-122"/>
+              <a:ea typeface="微软雅黑" panose="020B0503020204020204" charset="-122"/>
+              <a:cs typeface="微软雅黑" panose="020B0503020204020204" charset="-122"/>
+            </a:endParaRPr>
           </a:p>
         </p:txBody>
       </p:sp>
@@ -6375,6 +10345,27 @@
     <a:masterClrMapping/>
   </p:clrMapOvr>
 </p:sld>
+</file>
+
+<file path=ppt/tags/tag1.xml><?xml version="1.0" encoding="utf-8"?>
+<p:tagLst xmlns:p="http://schemas.openxmlformats.org/presentationml/2006/main">
+  <p:tag name="TABLE_ENDDRAG_ORIGIN_RECT" val="398*123"/>
+  <p:tag name="TABLE_ENDDRAG_RECT" val="417*211*398*123"/>
+</p:tagLst>
+</file>
+
+<file path=ppt/tags/tag2.xml><?xml version="1.0" encoding="utf-8"?>
+<p:tagLst xmlns:p="http://schemas.openxmlformats.org/presentationml/2006/main">
+  <p:tag name="TABLE_ENDDRAG_ORIGIN_RECT" val="423*283"/>
+  <p:tag name="TABLE_ENDDRAG_RECT" val="491*171*423*283"/>
+</p:tagLst>
+</file>
+
+<file path=ppt/tags/tag3.xml><?xml version="1.0" encoding="utf-8"?>
+<p:tagLst xmlns:p="http://schemas.openxmlformats.org/presentationml/2006/main">
+  <p:tag name="TABLE_ENDDRAG_ORIGIN_RECT" val="778*350"/>
+  <p:tag name="TABLE_ENDDRAG_RECT" val="144*165*778*350"/>
+</p:tagLst>
 </file>
 
 <file path=ppt/theme/theme1.xml><?xml version="1.0" encoding="utf-8"?>
@@ -6693,6 +10684,10 @@
       </a:style>
     </a:lnDef>
   </a:objectDefaults>
-  <a:extraClrSchemeLst/>
+  <a:extLst>
+    <a:ext uri="{05A4C25C-085E-4340-85A3-A5531E510DB2}">
+      <thm15:themeFamily xmlns:thm15="http://schemas.microsoft.com/office/thememl/2012/main" name="Office Theme" id="{62F939B6-93AF-4DB8-9C6B-D6C7DFDC589F}" vid="{4A3C46E8-61CC-4603-A589-7422A47A8E4A}"/>
+    </a:ext>
+  </a:extLst>
 </a:theme>
 </file>
--- a/实验总结.pptx
+++ b/实验总结.pptx
@@ -13,7 +13,8 @@
     <p:sldId id="259" r:id="rId8"/>
     <p:sldId id="260" r:id="rId9"/>
     <p:sldId id="266" r:id="rId10"/>
-    <p:sldId id="261" r:id="rId11"/>
+    <p:sldId id="268" r:id="rId11"/>
+    <p:sldId id="261" r:id="rId12"/>
   </p:sldIdLst>
   <p:sldSz cx="12191365" cy="6858000" type="screen4x3"/>
   <p:notesSz cx="6858000" cy="9144000"/>
@@ -3186,12 +3187,7 @@
               </a:defRPr>
             </a:pPr>
             <a:r>
-              <a:rPr>
-                <a:latin typeface="微软雅黑" panose="020B0503020204020204" charset="-122"/>
-                <a:ea typeface="微软雅黑" panose="020B0503020204020204" charset="-122"/>
-                <a:cs typeface="微软雅黑" panose="020B0503020204020204" charset="-122"/>
-              </a:rPr>
-              <a:t>基于 U-Net 的深度学习语义分割方法</a:t>
+              <a:t>基于 U-Net / ResNet34-UNet 的深度学习语义分割</a:t>
             </a:r>
             <a:endParaRPr>
               <a:latin typeface="微软雅黑" panose="020B0503020204020204" charset="-122"/>
@@ -3344,6 +3340,324 @@
               <a:ea typeface="微软雅黑" panose="020B0503020204020204" charset="-122"/>
               <a:cs typeface="微软雅黑" panose="020B0503020204020204" charset="-122"/>
             </a:endParaRPr>
+          </a:p>
+        </p:txBody>
+      </p:sp>
+    </p:spTree>
+  </p:cSld>
+  <p:clrMapOvr>
+    <a:masterClrMapping/>
+  </p:clrMapOvr>
+</p:sld>
+</file>
+
+<file path=ppt/slides/slide10.xml><?xml version="1.0" encoding="utf-8"?>
+<p:sld xmlns:a="http://schemas.openxmlformats.org/drawingml/2006/main" xmlns:r="http://schemas.openxmlformats.org/officeDocument/2006/relationships" xmlns:p="http://schemas.openxmlformats.org/presentationml/2006/main">
+  <p:cSld>
+    <p:bg>
+      <p:bgPr>
+        <a:solidFill>
+          <a:srgbClr val="F0F4F8"/>
+        </a:solidFill>
+        <a:effectLst/>
+      </p:bgPr>
+    </p:bg>
+    <p:spTree>
+      <p:nvGrpSpPr>
+        <p:cNvPr id="1" name=""/>
+        <p:cNvGrpSpPr/>
+        <p:nvPr/>
+      </p:nvGrpSpPr>
+      <p:grpSpPr/>
+      <p:sp>
+        <p:nvSpPr>
+          <p:cNvPr id="2" name="Rectangle 1"/>
+          <p:cNvSpPr/>
+          <p:nvPr/>
+        </p:nvSpPr>
+        <p:spPr>
+          <a:xfrm>
+            <a:off x="0" y="0"/>
+            <a:ext cx="12191695" cy="1097280"/>
+          </a:xfrm>
+          <a:prstGeom prst="rect">
+            <a:avLst/>
+          </a:prstGeom>
+          <a:solidFill>
+            <a:srgbClr val="1A478A"/>
+          </a:solidFill>
+          <a:ln>
+            <a:noFill/>
+          </a:ln>
+        </p:spPr>
+        <p:style>
+          <a:lnRef idx="1">
+            <a:schemeClr val="accent1"/>
+          </a:lnRef>
+          <a:fillRef idx="3">
+            <a:schemeClr val="accent1"/>
+          </a:fillRef>
+          <a:effectRef idx="2">
+            <a:schemeClr val="accent1"/>
+          </a:effectRef>
+          <a:fontRef idx="minor">
+            <a:schemeClr val="lt1"/>
+          </a:fontRef>
+        </p:style>
+        <p:txBody>
+          <a:bodyPr wrap="square" lIns="731520" tIns="137160" rtlCol="0" anchor="ctr"/>
+          <a:lstStyle/>
+          <a:p>
+            <a:pPr algn="l">
+              <a:defRPr sz="3600" b="1">
+                <a:solidFill>
+                  <a:srgbClr val="FFFFFF"/>
+                </a:solidFill>
+              </a:defRPr>
+            </a:pPr>
+            <a:r>
+              <a:rPr>
+                <a:latin typeface="微软雅黑" panose="020B0503020204020204" charset="-122"/>
+                <a:ea typeface="微软雅黑" panose="020B0503020204020204" charset="-122"/>
+              </a:rPr>
+              <a:t>分析与结论</a:t>
+            </a:r>
+            <a:endParaRPr>
+              <a:latin typeface="微软雅黑" panose="020B0503020204020204" charset="-122"/>
+              <a:ea typeface="微软雅黑" panose="020B0503020204020204" charset="-122"/>
+            </a:endParaRPr>
+          </a:p>
+        </p:txBody>
+      </p:sp>
+      <p:sp>
+        <p:nvSpPr>
+          <p:cNvPr id="3" name="Rectangle 2"/>
+          <p:cNvSpPr/>
+          <p:nvPr/>
+        </p:nvSpPr>
+        <p:spPr>
+          <a:xfrm>
+            <a:off x="0" y="1097280"/>
+            <a:ext cx="12191695" cy="365760"/>
+          </a:xfrm>
+          <a:prstGeom prst="rect">
+            <a:avLst/>
+          </a:prstGeom>
+          <a:solidFill>
+            <a:srgbClr val="2E86AB"/>
+          </a:solidFill>
+          <a:ln>
+            <a:noFill/>
+          </a:ln>
+        </p:spPr>
+        <p:style>
+          <a:lnRef idx="1">
+            <a:schemeClr val="accent1"/>
+          </a:lnRef>
+          <a:fillRef idx="3">
+            <a:schemeClr val="accent1"/>
+          </a:fillRef>
+          <a:effectRef idx="2">
+            <a:schemeClr val="accent1"/>
+          </a:effectRef>
+          <a:fontRef idx="minor">
+            <a:schemeClr val="lt1"/>
+          </a:fontRef>
+        </p:style>
+        <p:txBody>
+          <a:bodyPr lIns="731520" rtlCol="0" anchor="ctr"/>
+          <a:lstStyle/>
+          <a:p>
+            <a:pPr algn="l">
+              <a:defRPr sz="1800">
+                <a:solidFill>
+                  <a:srgbClr val="FFFFFF"/>
+                </a:solidFill>
+              </a:defRPr>
+            </a:pPr>
+            <a:r>
+              <a:rPr>
+                <a:latin typeface="微软雅黑" panose="020B0503020204020204" charset="-122"/>
+                <a:ea typeface="微软雅黑" panose="020B0503020204020204" charset="-122"/>
+              </a:rPr>
+              <a:t>Analysis &amp; Conclusion</a:t>
+            </a:r>
+            <a:endParaRPr>
+              <a:latin typeface="微软雅黑" panose="020B0503020204020204" charset="-122"/>
+              <a:ea typeface="微软雅黑" panose="020B0503020204020204" charset="-122"/>
+            </a:endParaRPr>
+          </a:p>
+        </p:txBody>
+      </p:sp>
+      <p:sp>
+        <p:nvSpPr>
+          <p:cNvPr id="4" name="TextBox 3"/>
+          <p:cNvSpPr txBox="1"/>
+          <p:nvPr/>
+        </p:nvSpPr>
+        <p:spPr>
+          <a:xfrm>
+            <a:off x="731520" y="1828800"/>
+            <a:ext cx="5303520" cy="4215765"/>
+          </a:xfrm>
+          <a:prstGeom prst="rect">
+            <a:avLst/>
+          </a:prstGeom>
+          <a:noFill/>
+        </p:spPr>
+        <p:txBody>
+          <a:bodyPr wrap="square">
+            <a:spAutoFit/>
+          </a:bodyPr>
+          <a:lstStyle/>
+          <a:p>
+            <a:pPr>
+              <a:spcAft>
+                <a:spcPts val="600"/>
+              </a:spcAft>
+              <a:defRPr sz="1600">
+                <a:solidFill>
+                  <a:srgbClr val="333333"/>
+                </a:solidFill>
+              </a:defRPr>
+            </a:pPr>
+            <a:r>
+              <a:t>💡 关键发现</a:t>
+            </a:r>
+            <a:endParaRPr>
+              <a:latin typeface="微软雅黑" panose="020B0503020204020204" charset="-122"/>
+              <a:ea typeface="微软雅黑" panose="020B0503020204020204" charset="-122"/>
+              <a:cs typeface="微软雅黑" panose="020B0503020204020204" charset="-122"/>
+            </a:endParaRPr>
+          </a:p>
+          <a:p/>
+          <a:p>
+            <a:r>
+              <a:t>1. 组合损失函数优势</a:t>
+            </a:r>
+          </a:p>
+          <a:p>
+            <a:r>
+              <a:t>   Dice+BCE 比单独 BCE 更适合类别不平衡的分割任务</a:t>
+            </a:r>
+          </a:p>
+          <a:p/>
+          <a:p>
+            <a:r>
+              <a:t>2. 预训练编码器效果显著</a:t>
+            </a:r>
+          </a:p>
+          <a:p>
+            <a:r>
+              <a:t>   ResNet34-UNet 第 1 epoch Val Dice 即达 0.8352，接近 U-Net 训满 50 轮水平</a:t>
+            </a:r>
+          </a:p>
+          <a:p/>
+          <a:p>
+            <a:r>
+              <a:t>3. 数据增强效果显著</a:t>
+            </a:r>
+          </a:p>
+          <a:p>
+            <a:r>
+              <a:t>   翻转/旋转/颜色抖动提升模型泛化能力</a:t>
+            </a:r>
+          </a:p>
+          <a:p/>
+          <a:p>
+            <a:r>
+              <a:t>4. AMP 混合精度加速</a:t>
+            </a:r>
+          </a:p>
+          <a:p>
+            <a:r>
+              <a:t>   在 GPU 上显著缩短训练时间</a:t>
+            </a:r>
+          </a:p>
+        </p:txBody>
+      </p:sp>
+      <p:sp>
+        <p:nvSpPr>
+          <p:cNvPr id="5" name="TextBox 4"/>
+          <p:cNvSpPr txBox="1"/>
+          <p:nvPr/>
+        </p:nvSpPr>
+        <p:spPr>
+          <a:xfrm>
+            <a:off x="6675120" y="1828800"/>
+            <a:ext cx="4846320" cy="4215765"/>
+          </a:xfrm>
+          <a:prstGeom prst="rect">
+            <a:avLst/>
+          </a:prstGeom>
+          <a:noFill/>
+        </p:spPr>
+        <p:txBody>
+          <a:bodyPr wrap="square">
+            <a:spAutoFit/>
+          </a:bodyPr>
+          <a:lstStyle/>
+          <a:p>
+            <a:pPr>
+              <a:spcAft>
+                <a:spcPts val="600"/>
+              </a:spcAft>
+              <a:defRPr sz="1600">
+                <a:solidFill>
+                  <a:srgbClr val="333333"/>
+                </a:solidFill>
+              </a:defRPr>
+            </a:pPr>
+            <a:r>
+              <a:t>⚠️ 待改进方向</a:t>
+            </a:r>
+            <a:endParaRPr>
+              <a:latin typeface="微软雅黑" panose="020B0503020204020204" charset="-122"/>
+              <a:ea typeface="微软雅黑" panose="020B0503020204020204" charset="-122"/>
+              <a:cs typeface="微软雅黑" panose="020B0503020204020204" charset="-122"/>
+            </a:endParaRPr>
+          </a:p>
+          <a:p/>
+          <a:p>
+            <a:r>
+              <a:t>• 引入注意力机制 (Attention U-Net)</a:t>
+            </a:r>
+          </a:p>
+          <a:p>
+            <a:r>
+              <a:t>• 尝试更深或更轻量 backbone</a:t>
+            </a:r>
+          </a:p>
+          <a:p>
+            <a:r>
+              <a:t>• 模型剪枝/量化适配边缘部署</a:t>
+            </a:r>
+          </a:p>
+          <a:p>
+            <a:r>
+              <a:t>• TTA 测试时增强进一步提升精度</a:t>
+            </a:r>
+          </a:p>
+          <a:p/>
+          <a:p>
+            <a:r>
+              <a:t>🎯 结论</a:t>
+            </a:r>
+          </a:p>
+          <a:p>
+            <a:r>
+              <a:t>U-Net 测试集 Dice=0.8757，ResNet34-UNet 提升至 0.8903。</a:t>
+            </a:r>
+          </a:p>
+          <a:p>
+            <a:r>
+              <a:t>两模型验证集与测试集 Dice 差距约 1.0%～1.4%，泛化能力良好，</a:t>
+            </a:r>
+          </a:p>
+          <a:p>
+            <a:r>
+              <a:t>为 AIoT 场景下的皮肤病辅助诊断提供了可行的技术方案。</a:t>
+            </a:r>
           </a:p>
         </p:txBody>
       </p:sp>
@@ -7238,11 +7552,6 @@
               </a:defRPr>
             </a:pPr>
             <a:r>
-              <a:rPr>
-                <a:latin typeface="微软雅黑" panose="020B0503020204020204" charset="-122"/>
-                <a:ea typeface="微软雅黑" panose="020B0503020204020204" charset="-122"/>
-                <a:cs typeface="微软雅黑" panose="020B0503020204020204" charset="-122"/>
-              </a:rPr>
               <a:t>💻 训练环境</a:t>
             </a:r>
             <a:endParaRPr>
@@ -7251,289 +7560,58 @@
               <a:cs typeface="微软雅黑" panose="020B0503020204020204" charset="-122"/>
             </a:endParaRPr>
           </a:p>
-          <a:p>
-            <a:pPr>
-              <a:spcAft>
-                <a:spcPts val="600"/>
-              </a:spcAft>
-              <a:defRPr sz="1800">
-                <a:solidFill>
-                  <a:srgbClr val="333333"/>
-                </a:solidFill>
-              </a:defRPr>
-            </a:pPr>
-            <a:endParaRPr>
-              <a:latin typeface="微软雅黑" panose="020B0503020204020204" charset="-122"/>
-              <a:ea typeface="微软雅黑" panose="020B0503020204020204" charset="-122"/>
-              <a:cs typeface="微软雅黑" panose="020B0503020204020204" charset="-122"/>
-            </a:endParaRPr>
-          </a:p>
-          <a:p>
-            <a:pPr>
-              <a:spcAft>
-                <a:spcPts val="600"/>
-              </a:spcAft>
-              <a:defRPr sz="1800">
-                <a:solidFill>
-                  <a:srgbClr val="333333"/>
-                </a:solidFill>
-              </a:defRPr>
-            </a:pPr>
-            <a:r>
-              <a:rPr>
-                <a:latin typeface="微软雅黑" panose="020B0503020204020204" charset="-122"/>
-                <a:ea typeface="微软雅黑" panose="020B0503020204020204" charset="-122"/>
-                <a:cs typeface="微软雅黑" panose="020B0503020204020204" charset="-122"/>
-              </a:rPr>
-              <a:t>• GPU: NVIDIA RTX 3050 Laptop (4GB)</a:t>
-            </a:r>
-            <a:endParaRPr>
-              <a:latin typeface="微软雅黑" panose="020B0503020204020204" charset="-122"/>
-              <a:ea typeface="微软雅黑" panose="020B0503020204020204" charset="-122"/>
-              <a:cs typeface="微软雅黑" panose="020B0503020204020204" charset="-122"/>
-            </a:endParaRPr>
-          </a:p>
-          <a:p>
-            <a:pPr>
-              <a:spcAft>
-                <a:spcPts val="600"/>
-              </a:spcAft>
-              <a:defRPr sz="1800">
-                <a:solidFill>
-                  <a:srgbClr val="333333"/>
-                </a:solidFill>
-              </a:defRPr>
-            </a:pPr>
-            <a:r>
-              <a:rPr>
-                <a:latin typeface="微软雅黑" panose="020B0503020204020204" charset="-122"/>
-                <a:ea typeface="微软雅黑" panose="020B0503020204020204" charset="-122"/>
-                <a:cs typeface="微软雅黑" panose="020B0503020204020204" charset="-122"/>
-              </a:rPr>
-              <a:t>• 框架: PyTorch 2.6.0 + CUDA 12.4</a:t>
-            </a:r>
-            <a:endParaRPr>
-              <a:latin typeface="微软雅黑" panose="020B0503020204020204" charset="-122"/>
-              <a:ea typeface="微软雅黑" panose="020B0503020204020204" charset="-122"/>
-              <a:cs typeface="微软雅黑" panose="020B0503020204020204" charset="-122"/>
-            </a:endParaRPr>
-          </a:p>
-          <a:p>
-            <a:pPr>
-              <a:spcAft>
-                <a:spcPts val="600"/>
-              </a:spcAft>
-              <a:defRPr sz="1800">
-                <a:solidFill>
-                  <a:srgbClr val="333333"/>
-                </a:solidFill>
-              </a:defRPr>
-            </a:pPr>
-            <a:r>
-              <a:rPr>
-                <a:latin typeface="微软雅黑" panose="020B0503020204020204" charset="-122"/>
-                <a:ea typeface="微软雅黑" panose="020B0503020204020204" charset="-122"/>
-                <a:cs typeface="微软雅黑" panose="020B0503020204020204" charset="-122"/>
-              </a:rPr>
-              <a:t>• 训练时间: ~6.7 小时 (50 </a:t>
-            </a:r>
-            <a:r>
-              <a:rPr>
-                <a:latin typeface="微软雅黑" panose="020B0503020204020204" charset="-122"/>
-                <a:ea typeface="微软雅黑" panose="020B0503020204020204" charset="-122"/>
-                <a:cs typeface="微软雅黑" panose="020B0503020204020204" charset="-122"/>
-              </a:rPr>
-              <a:t>epochs)</a:t>
-            </a:r>
-            <a:endParaRPr>
-              <a:latin typeface="微软雅黑" panose="020B0503020204020204" charset="-122"/>
-              <a:ea typeface="微软雅黑" panose="020B0503020204020204" charset="-122"/>
-              <a:cs typeface="微软雅黑" panose="020B0503020204020204" charset="-122"/>
-            </a:endParaRPr>
-          </a:p>
-          <a:p>
-            <a:pPr>
-              <a:spcAft>
-                <a:spcPts val="600"/>
-              </a:spcAft>
-              <a:defRPr sz="1800">
-                <a:solidFill>
-                  <a:srgbClr val="333333"/>
-                </a:solidFill>
-              </a:defRPr>
-            </a:pPr>
-            <a:endParaRPr>
-              <a:latin typeface="微软雅黑" panose="020B0503020204020204" charset="-122"/>
-              <a:ea typeface="微软雅黑" panose="020B0503020204020204" charset="-122"/>
-              <a:cs typeface="微软雅黑" panose="020B0503020204020204" charset="-122"/>
-            </a:endParaRPr>
-          </a:p>
-          <a:p>
-            <a:pPr>
-              <a:spcAft>
-                <a:spcPts val="600"/>
-              </a:spcAft>
-              <a:defRPr sz="1800">
-                <a:solidFill>
-                  <a:srgbClr val="333333"/>
-                </a:solidFill>
-              </a:defRPr>
-            </a:pPr>
-            <a:r>
-              <a:rPr>
-                <a:latin typeface="微软雅黑" panose="020B0503020204020204" charset="-122"/>
-                <a:ea typeface="微软雅黑" panose="020B0503020204020204" charset="-122"/>
-                <a:cs typeface="微软雅黑" panose="020B0503020204020204" charset="-122"/>
-              </a:rPr>
+          <a:p/>
+          <a:p>
+            <a:r>
+              <a:t>• GPU 训练 + AMP 混合精度加速</a:t>
+            </a:r>
+          </a:p>
+          <a:p>
+            <a:r>
+              <a:t>• 框架: PyTorch + CUDA</a:t>
+            </a:r>
+          </a:p>
+          <a:p>
+            <a:r>
+              <a:t>• 训练时间: 约 3.1～3.2 小时 / 模型 (50 epochs)</a:t>
+            </a:r>
+          </a:p>
+          <a:p/>
+          <a:p>
+            <a:r>
               <a:t>📊 训练数据</a:t>
             </a:r>
-            <a:endParaRPr>
-              <a:latin typeface="微软雅黑" panose="020B0503020204020204" charset="-122"/>
-              <a:ea typeface="微软雅黑" panose="020B0503020204020204" charset="-122"/>
-              <a:cs typeface="微软雅黑" panose="020B0503020204020204" charset="-122"/>
-            </a:endParaRPr>
-          </a:p>
-          <a:p>
-            <a:pPr>
-              <a:spcAft>
-                <a:spcPts val="600"/>
-              </a:spcAft>
-              <a:defRPr sz="1800">
-                <a:solidFill>
-                  <a:srgbClr val="333333"/>
-                </a:solidFill>
-              </a:defRPr>
-            </a:pPr>
-            <a:r>
-              <a:rPr>
-                <a:latin typeface="微软雅黑" panose="020B0503020204020204" charset="-122"/>
-                <a:ea typeface="微软雅黑" panose="020B0503020204020204" charset="-122"/>
-                <a:cs typeface="微软雅黑" panose="020B0503020204020204" charset="-122"/>
-              </a:rPr>
-              <a:t>• 训练样本: 2,335 (原2,594, 90/10切分)</a:t>
-            </a:r>
-            <a:endParaRPr>
-              <a:latin typeface="微软雅黑" panose="020B0503020204020204" charset="-122"/>
-              <a:ea typeface="微软雅黑" panose="020B0503020204020204" charset="-122"/>
-              <a:cs typeface="微软雅黑" panose="020B0503020204020204" charset="-122"/>
-            </a:endParaRPr>
-          </a:p>
-          <a:p>
-            <a:pPr>
-              <a:spcAft>
-                <a:spcPts val="600"/>
-              </a:spcAft>
-              <a:defRPr sz="1800">
-                <a:solidFill>
-                  <a:srgbClr val="333333"/>
-                </a:solidFill>
-              </a:defRPr>
-            </a:pPr>
-            <a:r>
-              <a:rPr>
-                <a:latin typeface="微软雅黑" panose="020B0503020204020204" charset="-122"/>
-                <a:ea typeface="微软雅黑" panose="020B0503020204020204" charset="-122"/>
-                <a:cs typeface="微软雅黑" panose="020B0503020204020204" charset="-122"/>
-              </a:rPr>
-              <a:t>• 验证样本: 259 (使用真实验证集替换后)</a:t>
-            </a:r>
-            <a:endParaRPr>
-              <a:latin typeface="微软雅黑" panose="020B0503020204020204" charset="-122"/>
-              <a:ea typeface="微软雅黑" panose="020B0503020204020204" charset="-122"/>
-              <a:cs typeface="微软雅黑" panose="020B0503020204020204" charset="-122"/>
-            </a:endParaRPr>
-          </a:p>
-          <a:p>
-            <a:pPr>
-              <a:spcAft>
-                <a:spcPts val="600"/>
-              </a:spcAft>
-              <a:defRPr sz="1800">
-                <a:solidFill>
-                  <a:srgbClr val="333333"/>
-                </a:solidFill>
-              </a:defRPr>
-            </a:pPr>
-            <a:endParaRPr>
-              <a:latin typeface="微软雅黑" panose="020B0503020204020204" charset="-122"/>
-              <a:ea typeface="微软雅黑" panose="020B0503020204020204" charset="-122"/>
-              <a:cs typeface="微软雅黑" panose="020B0503020204020204" charset="-122"/>
-            </a:endParaRPr>
-          </a:p>
-          <a:p>
-            <a:pPr>
-              <a:spcAft>
-                <a:spcPts val="600"/>
-              </a:spcAft>
-              <a:defRPr sz="1800">
-                <a:solidFill>
-                  <a:srgbClr val="333333"/>
-                </a:solidFill>
-              </a:defRPr>
-            </a:pPr>
-            <a:r>
-              <a:rPr>
-                <a:latin typeface="微软雅黑" panose="020B0503020204020204" charset="-122"/>
-                <a:ea typeface="微软雅黑" panose="020B0503020204020204" charset="-122"/>
-                <a:cs typeface="微软雅黑" panose="020B0503020204020204" charset="-122"/>
-              </a:rPr>
+          </a:p>
+          <a:p>
+            <a:r>
+              <a:t>• 训练样本: 2,594 张</a:t>
+            </a:r>
+          </a:p>
+          <a:p>
+            <a:r>
+              <a:t>• 验证样本: 100 张（官方验证集）</a:t>
+            </a:r>
+          </a:p>
+          <a:p>
+            <a:r>
+              <a:t>• 测试样本: 1,000 张</a:t>
+            </a:r>
+          </a:p>
+          <a:p/>
+          <a:p>
+            <a:r>
               <a:t>🛡️ 正则化</a:t>
             </a:r>
-            <a:endParaRPr>
-              <a:latin typeface="微软雅黑" panose="020B0503020204020204" charset="-122"/>
-              <a:ea typeface="微软雅黑" panose="020B0503020204020204" charset="-122"/>
-              <a:cs typeface="微软雅黑" panose="020B0503020204020204" charset="-122"/>
-            </a:endParaRPr>
-          </a:p>
-          <a:p>
-            <a:pPr>
-              <a:spcAft>
-                <a:spcPts val="600"/>
-              </a:spcAft>
-              <a:defRPr sz="1800">
-                <a:solidFill>
-                  <a:srgbClr val="333333"/>
-                </a:solidFill>
-              </a:defRPr>
-            </a:pPr>
-            <a:r>
-              <a:rPr>
-                <a:latin typeface="微软雅黑" panose="020B0503020204020204" charset="-122"/>
-                <a:ea typeface="微软雅黑" panose="020B0503020204020204" charset="-122"/>
-                <a:cs typeface="微软雅黑" panose="020B0503020204020204" charset="-122"/>
-              </a:rPr>
+          </a:p>
+          <a:p>
+            <a:r>
               <a:t>• L2 权重衰减 (1e-4)</a:t>
             </a:r>
-            <a:endParaRPr>
-              <a:latin typeface="微软雅黑" panose="020B0503020204020204" charset="-122"/>
-              <a:ea typeface="微软雅黑" panose="020B0503020204020204" charset="-122"/>
-              <a:cs typeface="微软雅黑" panose="020B0503020204020204" charset="-122"/>
-            </a:endParaRPr>
-          </a:p>
-          <a:p>
-            <a:pPr>
-              <a:spcAft>
-                <a:spcPts val="600"/>
-              </a:spcAft>
-              <a:defRPr sz="1800">
-                <a:solidFill>
-                  <a:srgbClr val="333333"/>
-                </a:solidFill>
-              </a:defRPr>
-            </a:pPr>
-            <a:r>
-              <a:rPr>
-                <a:latin typeface="微软雅黑" panose="020B0503020204020204" charset="-122"/>
-                <a:ea typeface="微软雅黑" panose="020B0503020204020204" charset="-122"/>
-                <a:cs typeface="微软雅黑" panose="020B0503020204020204" charset="-122"/>
-              </a:rPr>
+          </a:p>
+          <a:p>
+            <a:r>
               <a:t>• 数据增强 (翻转/旋转/颜色抖动)</a:t>
             </a:r>
-            <a:endParaRPr>
-              <a:latin typeface="微软雅黑" panose="020B0503020204020204" charset="-122"/>
-              <a:ea typeface="微软雅黑" panose="020B0503020204020204" charset="-122"/>
-              <a:cs typeface="微软雅黑" panose="020B0503020204020204" charset="-122"/>
-            </a:endParaRPr>
           </a:p>
         </p:txBody>
       </p:sp>
@@ -7751,11 +7829,7 @@
               </a:defRPr>
             </a:pPr>
             <a:r>
-              <a:rPr>
-                <a:latin typeface="微软雅黑" panose="020B0503020204020204" charset="-122"/>
-                <a:ea typeface="微软雅黑" panose="020B0503020204020204" charset="-122"/>
-              </a:rPr>
-              <a:t>0.8760</a:t>
+              <a:t>0.8757</a:t>
             </a:r>
             <a:endParaRPr>
               <a:latin typeface="微软雅黑" panose="020B0503020204020204" charset="-122"/>
@@ -7831,11 +7905,7 @@
               </a:defRPr>
             </a:pPr>
             <a:r>
-              <a:rPr>
-                <a:latin typeface="微软雅黑" panose="020B0503020204020204" charset="-122"/>
-                <a:ea typeface="微软雅黑" panose="020B0503020204020204" charset="-122"/>
-              </a:rPr>
-              <a:t>0.8006</a:t>
+              <a:t>0.7994</a:t>
             </a:r>
             <a:endParaRPr>
               <a:latin typeface="微软雅黑" panose="020B0503020204020204" charset="-122"/>
@@ -7911,11 +7981,7 @@
               </a:defRPr>
             </a:pPr>
             <a:r>
-              <a:rPr>
-                <a:latin typeface="微软雅黑" panose="020B0503020204020204" charset="-122"/>
-                <a:ea typeface="微软雅黑" panose="020B0503020204020204" charset="-122"/>
-              </a:rPr>
-              <a:t>0.9298</a:t>
+              <a:t>0.9304</a:t>
             </a:r>
             <a:endParaRPr>
               <a:latin typeface="微软雅黑" panose="020B0503020204020204" charset="-122"/>
@@ -7991,11 +8057,7 @@
               </a:defRPr>
             </a:pPr>
             <a:r>
-              <a:rPr>
-                <a:latin typeface="微软雅黑" panose="020B0503020204020204" charset="-122"/>
-                <a:ea typeface="微软雅黑" panose="020B0503020204020204" charset="-122"/>
-              </a:rPr>
-              <a:t>0.8858</a:t>
+              <a:t>0.8859</a:t>
             </a:r>
             <a:endParaRPr>
               <a:latin typeface="微软雅黑" panose="020B0503020204020204" charset="-122"/>
@@ -8011,11 +8073,7 @@
               </a:defRPr>
             </a:pPr>
             <a:r>
-              <a:rPr>
-                <a:latin typeface="微软雅黑" panose="020B0503020204020204" charset="-122"/>
-                <a:ea typeface="微软雅黑" panose="020B0503020204020204" charset="-122"/>
-              </a:rPr>
-              <a:t>Best Val Dice</a:t>
+              <a:t>Best Val Dice (Ep.44)</a:t>
             </a:r>
             <a:endParaRPr>
               <a:latin typeface="微软雅黑" panose="020B0503020204020204" charset="-122"/>
@@ -8057,11 +8115,6 @@
               </a:defRPr>
             </a:pPr>
             <a:r>
-              <a:rPr>
-                <a:latin typeface="微软雅黑" panose="020B0503020204020204" charset="-122"/>
-                <a:ea typeface="微软雅黑" panose="020B0503020204020204" charset="-122"/>
-                <a:cs typeface="微软雅黑" panose="020B0503020204020204" charset="-122"/>
-              </a:rPr>
               <a:t>📈 训练过程指标变化</a:t>
             </a:r>
             <a:endParaRPr>
@@ -8070,139 +8123,27 @@
               <a:cs typeface="微软雅黑" panose="020B0503020204020204" charset="-122"/>
             </a:endParaRPr>
           </a:p>
-          <a:p>
-            <a:pPr>
-              <a:spcAft>
-                <a:spcPts val="600"/>
-              </a:spcAft>
-              <a:defRPr sz="1800">
-                <a:solidFill>
-                  <a:srgbClr val="333333"/>
-                </a:solidFill>
-              </a:defRPr>
-            </a:pPr>
-            <a:endParaRPr>
-              <a:latin typeface="微软雅黑" panose="020B0503020204020204" charset="-122"/>
-              <a:ea typeface="微软雅黑" panose="020B0503020204020204" charset="-122"/>
-              <a:cs typeface="微软雅黑" panose="020B0503020204020204" charset="-122"/>
-            </a:endParaRPr>
-          </a:p>
-          <a:p>
-            <a:pPr>
-              <a:spcAft>
-                <a:spcPts val="600"/>
-              </a:spcAft>
-              <a:defRPr sz="1800">
-                <a:solidFill>
-                  <a:srgbClr val="333333"/>
-                </a:solidFill>
-              </a:defRPr>
-            </a:pPr>
-            <a:r>
-              <a:rPr>
-                <a:latin typeface="微软雅黑" panose="020B0503020204020204" charset="-122"/>
-                <a:ea typeface="微软雅黑" panose="020B0503020204020204" charset="-122"/>
-                <a:cs typeface="微软雅黑" panose="020B0503020204020204" charset="-122"/>
-              </a:rPr>
-              <a:t>  训练初期 (Epoch 1-10):  Loss 快速下降, Dice 从 0.6 提升至 0.85+</a:t>
-            </a:r>
-            <a:endParaRPr>
-              <a:latin typeface="微软雅黑" panose="020B0503020204020204" charset="-122"/>
-              <a:ea typeface="微软雅黑" panose="020B0503020204020204" charset="-122"/>
-              <a:cs typeface="微软雅黑" panose="020B0503020204020204" charset="-122"/>
-            </a:endParaRPr>
-          </a:p>
-          <a:p>
-            <a:pPr>
-              <a:spcAft>
-                <a:spcPts val="600"/>
-              </a:spcAft>
-              <a:defRPr sz="1800">
-                <a:solidFill>
-                  <a:srgbClr val="333333"/>
-                </a:solidFill>
-              </a:defRPr>
-            </a:pPr>
-            <a:r>
-              <a:rPr>
-                <a:latin typeface="微软雅黑" panose="020B0503020204020204" charset="-122"/>
-                <a:ea typeface="微软雅黑" panose="020B0503020204020204" charset="-122"/>
-                <a:cs typeface="微软雅黑" panose="020B0503020204020204" charset="-122"/>
-              </a:rPr>
-              <a:t>  训练中期 (Epoch 11-37):  Loss 稳定下降, Dice 缓慢提升至最高 0.8858 (Epoch 37)</a:t>
-            </a:r>
-            <a:endParaRPr>
-              <a:latin typeface="微软雅黑" panose="020B0503020204020204" charset="-122"/>
-              <a:ea typeface="微软雅黑" panose="020B0503020204020204" charset="-122"/>
-              <a:cs typeface="微软雅黑" panose="020B0503020204020204" charset="-122"/>
-            </a:endParaRPr>
-          </a:p>
-          <a:p>
-            <a:pPr>
-              <a:spcAft>
-                <a:spcPts val="600"/>
-              </a:spcAft>
-              <a:defRPr sz="1800">
-                <a:solidFill>
-                  <a:srgbClr val="333333"/>
-                </a:solidFill>
-              </a:defRPr>
-            </a:pPr>
-            <a:r>
-              <a:rPr>
-                <a:latin typeface="微软雅黑" panose="020B0503020204020204" charset="-122"/>
-                <a:ea typeface="微软雅黑" panose="020B0503020204020204" charset="-122"/>
-                <a:cs typeface="微软雅黑" panose="020B0503020204020204" charset="-122"/>
-              </a:rPr>
-              <a:t>  训练后期 (Epoch 38-50):  Dice 在 0.877-0.880 波动, 学习率降至 6e-6, 模型收敛</a:t>
-            </a:r>
-            <a:endParaRPr>
-              <a:latin typeface="微软雅黑" panose="020B0503020204020204" charset="-122"/>
-              <a:ea typeface="微软雅黑" panose="020B0503020204020204" charset="-122"/>
-              <a:cs typeface="微软雅黑" panose="020B0503020204020204" charset="-122"/>
-            </a:endParaRPr>
-          </a:p>
-          <a:p>
-            <a:pPr>
-              <a:spcAft>
-                <a:spcPts val="600"/>
-              </a:spcAft>
-              <a:defRPr sz="1800">
-                <a:solidFill>
-                  <a:srgbClr val="333333"/>
-                </a:solidFill>
-              </a:defRPr>
-            </a:pPr>
-            <a:endParaRPr>
-              <a:latin typeface="微软雅黑" panose="020B0503020204020204" charset="-122"/>
-              <a:ea typeface="微软雅黑" panose="020B0503020204020204" charset="-122"/>
-              <a:cs typeface="微软雅黑" panose="020B0503020204020204" charset="-122"/>
-            </a:endParaRPr>
-          </a:p>
-          <a:p>
-            <a:pPr>
-              <a:spcAft>
-                <a:spcPts val="600"/>
-              </a:spcAft>
-              <a:defRPr sz="1800">
-                <a:solidFill>
-                  <a:srgbClr val="333333"/>
-                </a:solidFill>
-              </a:defRPr>
-            </a:pPr>
-            <a:r>
-              <a:rPr>
-                <a:latin typeface="微软雅黑" panose="020B0503020204020204" charset="-122"/>
-                <a:ea typeface="微软雅黑" panose="020B0503020204020204" charset="-122"/>
-                <a:cs typeface="微软雅黑" panose="020B0503020204020204" charset="-122"/>
-              </a:rPr>
-              <a:t>✅ 测试集 Dice (0.8760) 与最佳验证 Dice (0.8858) 差距 &lt; 0.01, 泛化能力良好</a:t>
-            </a:r>
-            <a:endParaRPr>
-              <a:latin typeface="微软雅黑" panose="020B0503020204020204" charset="-122"/>
-              <a:ea typeface="微软雅黑" panose="020B0503020204020204" charset="-122"/>
-              <a:cs typeface="微软雅黑" panose="020B0503020204020204" charset="-122"/>
-            </a:endParaRPr>
+          <a:p/>
+          <a:p>
+            <a:r>
+              <a:t>  训练初期 (Epoch 1-10):  Loss 快速下降, Val Dice 从 0.77 提升至 0.87+</a:t>
+            </a:r>
+          </a:p>
+          <a:p>
+            <a:r>
+              <a:t>  训练中期 (Epoch 11-44): Loss 稳定下降, Val Dice 提升至最高 0.8859 (Epoch 44)</a:t>
+            </a:r>
+          </a:p>
+          <a:p>
+            <a:r>
+              <a:t>  训练后期 (Epoch 45-50): Val Dice 在 0.87-0.88 波动, 学习率降至 6e-6, 模型收敛</a:t>
+            </a:r>
+          </a:p>
+          <a:p/>
+          <a:p>
+            <a:r>
+              <a:t>✅ 测试集 Dice (0.8757) 与最佳验证 Dice (0.8859) 差距约 0.01, 泛化能力良好</a:t>
+            </a:r>
           </a:p>
         </p:txBody>
       </p:sp>
@@ -8411,34 +8352,9 @@
                   <a:txBody>
                     <a:bodyPr/>
                     <a:p>
-                      <a:pPr marL="0" indent="0" algn="ctr">
-                        <a:lnSpc>
-                          <a:spcPct val="100000"/>
-                        </a:lnSpc>
-                        <a:spcBef>
-                          <a:spcPct val="0"/>
-                        </a:spcBef>
-                        <a:spcAft>
-                          <a:spcPct val="0"/>
-                        </a:spcAft>
-                      </a:pPr>
                       <a:r>
-                        <a:rPr lang="zh-CN" altLang="en-US" sz="1600" b="1" i="0">
-                          <a:solidFill>
-                            <a:schemeClr val="bg1"/>
-                          </a:solidFill>
-                          <a:latin typeface="微软雅黑" panose="020B0503020204020204" charset="-122"/>
-                          <a:ea typeface="微软雅黑" panose="020B0503020204020204" charset="-122"/>
-                        </a:rPr>
                         <a:t>指标</a:t>
                       </a:r>
-                      <a:endParaRPr lang="zh-CN" altLang="en-US" sz="1600" b="1" i="0">
-                        <a:solidFill>
-                          <a:schemeClr val="bg1"/>
-                        </a:solidFill>
-                        <a:latin typeface="微软雅黑" panose="020B0503020204020204" charset="-122"/>
-                        <a:ea typeface="微软雅黑" panose="020B0503020204020204" charset="-122"/>
-                      </a:endParaRPr>
                     </a:p>
                   </a:txBody>
                   <a:tcPr marL="82867" marR="82867" marT="38417" marB="38417" anchor="ctr" anchorCtr="0"/>
@@ -8447,47 +8363,9 @@
                   <a:txBody>
                     <a:bodyPr/>
                     <a:p>
-                      <a:pPr marL="0" indent="0" algn="ctr">
-                        <a:lnSpc>
-                          <a:spcPct val="100000"/>
-                        </a:lnSpc>
-                        <a:spcBef>
-                          <a:spcPct val="0"/>
-                        </a:spcBef>
-                        <a:spcAft>
-                          <a:spcPct val="0"/>
-                        </a:spcAft>
-                      </a:pPr>
                       <a:r>
-                        <a:rPr lang="zh-CN" altLang="en-US" sz="1600" b="1" i="0">
-                          <a:solidFill>
-                            <a:schemeClr val="bg1"/>
-                          </a:solidFill>
-                          <a:latin typeface="微软雅黑" panose="020B0503020204020204" charset="-122"/>
-                          <a:ea typeface="微软雅黑" panose="020B0503020204020204" charset="-122"/>
-                          <a:cs typeface="微软雅黑" panose="020B0503020204020204" charset="-122"/>
-                        </a:rPr>
-                        <a:t>基础 </a:t>
+                        <a:t>基础 U-Net</a:t>
                       </a:r>
-                      <a:r>
-                        <a:rPr lang="en-US" altLang="zh-CN" sz="1600" b="1" i="0">
-                          <a:solidFill>
-                            <a:schemeClr val="bg1"/>
-                          </a:solidFill>
-                          <a:latin typeface="微软雅黑" panose="020B0503020204020204" charset="-122"/>
-                          <a:ea typeface="微软雅黑" panose="020B0503020204020204" charset="-122"/>
-                          <a:cs typeface="微软雅黑" panose="020B0503020204020204" charset="-122"/>
-                        </a:rPr>
-                        <a:t>U-Net</a:t>
-                      </a:r>
-                      <a:endParaRPr lang="en-US" altLang="zh-CN" sz="1600" b="1" i="0">
-                        <a:solidFill>
-                          <a:schemeClr val="bg1"/>
-                        </a:solidFill>
-                        <a:latin typeface="微软雅黑" panose="020B0503020204020204" charset="-122"/>
-                        <a:ea typeface="微软雅黑" panose="020B0503020204020204" charset="-122"/>
-                        <a:cs typeface="微软雅黑" panose="020B0503020204020204" charset="-122"/>
-                      </a:endParaRPr>
                     </a:p>
                   </a:txBody>
                   <a:tcPr marL="82867" marR="82867" marT="38417" marB="38417" anchor="ctr" anchorCtr="0"/>
@@ -8496,58 +8374,9 @@
                   <a:txBody>
                     <a:bodyPr/>
                     <a:p>
-                      <a:pPr marL="0" indent="0" algn="ctr">
-                        <a:lnSpc>
-                          <a:spcPct val="100000"/>
-                        </a:lnSpc>
-                        <a:spcBef>
-                          <a:spcPct val="0"/>
-                        </a:spcBef>
-                        <a:spcAft>
-                          <a:spcPct val="0"/>
-                        </a:spcAft>
-                      </a:pPr>
                       <a:r>
-                        <a:rPr lang="en-US" altLang="zh-CN" sz="1600" b="1" i="0">
-                          <a:solidFill>
-                            <a:schemeClr val="bg1"/>
-                          </a:solidFill>
-                          <a:latin typeface="微软雅黑" panose="020B0503020204020204" charset="-122"/>
-                          <a:ea typeface="微软雅黑" panose="020B0503020204020204" charset="-122"/>
-                          <a:cs typeface="微软雅黑" panose="020B0503020204020204" charset="-122"/>
-                        </a:rPr>
-                        <a:t>ResNet34-UNet (</a:t>
+                        <a:t>ResNet34-UNet (优化)</a:t>
                       </a:r>
-                      <a:r>
-                        <a:rPr lang="zh-CN" altLang="en-US" sz="1600" b="1" i="0">
-                          <a:solidFill>
-                            <a:schemeClr val="bg1"/>
-                          </a:solidFill>
-                          <a:latin typeface="微软雅黑" panose="020B0503020204020204" charset="-122"/>
-                          <a:ea typeface="微软雅黑" panose="020B0503020204020204" charset="-122"/>
-                          <a:cs typeface="微软雅黑" panose="020B0503020204020204" charset="-122"/>
-                        </a:rPr>
-                        <a:t>优化</a:t>
-                      </a:r>
-                      <a:r>
-                        <a:rPr lang="en-US" altLang="zh-CN" sz="1600" b="1" i="0">
-                          <a:solidFill>
-                            <a:schemeClr val="bg1"/>
-                          </a:solidFill>
-                          <a:latin typeface="微软雅黑" panose="020B0503020204020204" charset="-122"/>
-                          <a:ea typeface="微软雅黑" panose="020B0503020204020204" charset="-122"/>
-                          <a:cs typeface="微软雅黑" panose="020B0503020204020204" charset="-122"/>
-                        </a:rPr>
-                        <a:t>)</a:t>
-                      </a:r>
-                      <a:endParaRPr lang="en-US" altLang="zh-CN" sz="1600" b="1" i="0">
-                        <a:solidFill>
-                          <a:schemeClr val="bg1"/>
-                        </a:solidFill>
-                        <a:latin typeface="微软雅黑" panose="020B0503020204020204" charset="-122"/>
-                        <a:ea typeface="微软雅黑" panose="020B0503020204020204" charset="-122"/>
-                        <a:cs typeface="微软雅黑" panose="020B0503020204020204" charset="-122"/>
-                      </a:endParaRPr>
                     </a:p>
                   </a:txBody>
                   <a:tcPr marL="82867" marR="82867" marT="38417" marB="38417" anchor="ctr" anchorCtr="0"/>
@@ -8556,34 +8385,9 @@
                   <a:txBody>
                     <a:bodyPr/>
                     <a:p>
-                      <a:pPr marL="0" indent="0" algn="ctr">
-                        <a:lnSpc>
-                          <a:spcPct val="100000"/>
-                        </a:lnSpc>
-                        <a:spcBef>
-                          <a:spcPct val="0"/>
-                        </a:spcBef>
-                        <a:spcAft>
-                          <a:spcPct val="0"/>
-                        </a:spcAft>
-                      </a:pPr>
                       <a:r>
-                        <a:rPr lang="zh-CN" altLang="en-US" sz="1600" b="1" i="0">
-                          <a:solidFill>
-                            <a:schemeClr val="bg1"/>
-                          </a:solidFill>
-                          <a:latin typeface="微软雅黑" panose="020B0503020204020204" charset="-122"/>
-                          <a:ea typeface="微软雅黑" panose="020B0503020204020204" charset="-122"/>
-                        </a:rPr>
                         <a:t>提升</a:t>
                       </a:r>
-                      <a:endParaRPr lang="zh-CN" altLang="en-US" sz="1600" b="1" i="0">
-                        <a:solidFill>
-                          <a:schemeClr val="bg1"/>
-                        </a:solidFill>
-                        <a:latin typeface="微软雅黑" panose="020B0503020204020204" charset="-122"/>
-                        <a:ea typeface="微软雅黑" panose="020B0503020204020204" charset="-122"/>
-                      </a:endParaRPr>
                     </a:p>
                   </a:txBody>
                   <a:tcPr marL="82867" marR="82867" marT="38417" marB="38417" anchor="ctr" anchorCtr="0"/>
@@ -8594,47 +8398,9 @@
                   <a:txBody>
                     <a:bodyPr/>
                     <a:p>
-                      <a:pPr marL="0" indent="0" algn="l">
-                        <a:lnSpc>
-                          <a:spcPct val="100000"/>
-                        </a:lnSpc>
-                        <a:spcBef>
-                          <a:spcPct val="0"/>
-                        </a:spcBef>
-                        <a:spcAft>
-                          <a:spcPct val="0"/>
-                        </a:spcAft>
-                      </a:pPr>
                       <a:r>
-                        <a:rPr lang="zh-CN" altLang="en-US" sz="1600" b="0" i="0">
-                          <a:solidFill>
-                            <a:srgbClr val="000000"/>
-                          </a:solidFill>
-                          <a:latin typeface="微软雅黑" panose="020B0503020204020204" charset="-122"/>
-                          <a:ea typeface="微软雅黑" panose="020B0503020204020204" charset="-122"/>
-                          <a:cs typeface="微软雅黑" panose="020B0503020204020204" charset="-122"/>
-                        </a:rPr>
-                        <a:t>验证集最佳 </a:t>
+                        <a:t>验证集最佳 Dice</a:t>
                       </a:r>
-                      <a:r>
-                        <a:rPr lang="en-US" altLang="zh-CN" sz="1600" b="0" i="0">
-                          <a:solidFill>
-                            <a:srgbClr val="000000"/>
-                          </a:solidFill>
-                          <a:latin typeface="微软雅黑" panose="020B0503020204020204" charset="-122"/>
-                          <a:ea typeface="微软雅黑" panose="020B0503020204020204" charset="-122"/>
-                          <a:cs typeface="微软雅黑" panose="020B0503020204020204" charset="-122"/>
-                        </a:rPr>
-                        <a:t>Dice</a:t>
-                      </a:r>
-                      <a:endParaRPr lang="en-US" altLang="zh-CN" sz="1600" b="0" i="0">
-                        <a:solidFill>
-                          <a:srgbClr val="000000"/>
-                        </a:solidFill>
-                        <a:latin typeface="微软雅黑" panose="020B0503020204020204" charset="-122"/>
-                        <a:ea typeface="微软雅黑" panose="020B0503020204020204" charset="-122"/>
-                        <a:cs typeface="微软雅黑" panose="020B0503020204020204" charset="-122"/>
-                      </a:endParaRPr>
                     </a:p>
                   </a:txBody>
                   <a:tcPr marL="82867" marR="82867" marT="38417" marB="38417" anchor="ctr" anchorCtr="0"/>
@@ -8643,34 +8409,9 @@
                   <a:txBody>
                     <a:bodyPr/>
                     <a:p>
-                      <a:pPr marL="0" indent="0" algn="l">
-                        <a:lnSpc>
-                          <a:spcPct val="100000"/>
-                        </a:lnSpc>
-                        <a:spcBef>
-                          <a:spcPct val="0"/>
-                        </a:spcBef>
-                        <a:spcAft>
-                          <a:spcPct val="0"/>
-                        </a:spcAft>
-                      </a:pPr>
                       <a:r>
-                        <a:rPr lang="en-US" altLang="zh-CN" sz="1600" b="0" i="0">
-                          <a:solidFill>
-                            <a:srgbClr val="000000"/>
-                          </a:solidFill>
-                          <a:latin typeface="微软雅黑" panose="020B0503020204020204" charset="-122"/>
-                          <a:ea typeface="微软雅黑" panose="020B0503020204020204" charset="-122"/>
-                        </a:rPr>
-                        <a:t>0.8858</a:t>
+                        <a:t>0.8859 (Ep.44)</a:t>
                       </a:r>
-                      <a:endParaRPr lang="en-US" altLang="zh-CN" sz="1600" b="0" i="0">
-                        <a:solidFill>
-                          <a:srgbClr val="000000"/>
-                        </a:solidFill>
-                        <a:latin typeface="微软雅黑" panose="020B0503020204020204" charset="-122"/>
-                        <a:ea typeface="微软雅黑" panose="020B0503020204020204" charset="-122"/>
-                      </a:endParaRPr>
                     </a:p>
                   </a:txBody>
                   <a:tcPr marL="82867" marR="82867" marT="38417" marB="38417" anchor="ctr" anchorCtr="0"/>
@@ -8679,34 +8420,9 @@
                   <a:txBody>
                     <a:bodyPr/>
                     <a:p>
-                      <a:pPr marL="0" indent="0" algn="l">
-                        <a:lnSpc>
-                          <a:spcPct val="100000"/>
-                        </a:lnSpc>
-                        <a:spcBef>
-                          <a:spcPct val="0"/>
-                        </a:spcBef>
-                        <a:spcAft>
-                          <a:spcPct val="0"/>
-                        </a:spcAft>
-                      </a:pPr>
                       <a:r>
-                        <a:rPr lang="en-US" altLang="zh-CN" sz="1600" b="0" i="0">
-                          <a:solidFill>
-                            <a:srgbClr val="000000"/>
-                          </a:solidFill>
-                          <a:latin typeface="微软雅黑" panose="020B0503020204020204" charset="-122"/>
-                          <a:ea typeface="微软雅黑" panose="020B0503020204020204" charset="-122"/>
-                        </a:rPr>
-                        <a:t>0.9148</a:t>
+                        <a:t>0.9041 (Ep.36)</a:t>
                       </a:r>
-                      <a:endParaRPr lang="en-US" altLang="zh-CN" sz="1600" b="0" i="0">
-                        <a:solidFill>
-                          <a:srgbClr val="000000"/>
-                        </a:solidFill>
-                        <a:latin typeface="微软雅黑" panose="020B0503020204020204" charset="-122"/>
-                        <a:ea typeface="微软雅黑" panose="020B0503020204020204" charset="-122"/>
-                      </a:endParaRPr>
                     </a:p>
                   </a:txBody>
                   <a:tcPr marL="82867" marR="82867" marT="38417" marB="38417" anchor="ctr" anchorCtr="0"/>
@@ -8715,34 +8431,9 @@
                   <a:txBody>
                     <a:bodyPr/>
                     <a:p>
-                      <a:pPr marL="0" indent="0" algn="l">
-                        <a:lnSpc>
-                          <a:spcPct val="100000"/>
-                        </a:lnSpc>
-                        <a:spcBef>
-                          <a:spcPct val="0"/>
-                        </a:spcBef>
-                        <a:spcAft>
-                          <a:spcPct val="0"/>
-                        </a:spcAft>
-                      </a:pPr>
                       <a:r>
-                        <a:rPr lang="en-US" altLang="zh-CN" sz="1600" b="0" i="0">
-                          <a:solidFill>
-                            <a:srgbClr val="000000"/>
-                          </a:solidFill>
-                          <a:latin typeface="微软雅黑" panose="020B0503020204020204" charset="-122"/>
-                          <a:ea typeface="微软雅黑" panose="020B0503020204020204" charset="-122"/>
-                        </a:rPr>
-                        <a:t>+2.90%</a:t>
+                        <a:t>+2.05%</a:t>
                       </a:r>
-                      <a:endParaRPr lang="en-US" altLang="zh-CN" sz="1600" b="0" i="0">
-                        <a:solidFill>
-                          <a:srgbClr val="000000"/>
-                        </a:solidFill>
-                        <a:latin typeface="微软雅黑" panose="020B0503020204020204" charset="-122"/>
-                        <a:ea typeface="微软雅黑" panose="020B0503020204020204" charset="-122"/>
-                      </a:endParaRPr>
                     </a:p>
                   </a:txBody>
                   <a:tcPr marL="82867" marR="82867" marT="38417" marB="38417" anchor="ctr" anchorCtr="0"/>
@@ -8753,47 +8444,9 @@
                   <a:txBody>
                     <a:bodyPr/>
                     <a:p>
-                      <a:pPr marL="0" indent="0" algn="l">
-                        <a:lnSpc>
-                          <a:spcPct val="100000"/>
-                        </a:lnSpc>
-                        <a:spcBef>
-                          <a:spcPct val="0"/>
-                        </a:spcBef>
-                        <a:spcAft>
-                          <a:spcPct val="0"/>
-                        </a:spcAft>
-                      </a:pPr>
                       <a:r>
-                        <a:rPr lang="zh-CN" altLang="en-US" sz="1600" b="0" i="0">
-                          <a:solidFill>
-                            <a:srgbClr val="000000"/>
-                          </a:solidFill>
-                          <a:latin typeface="微软雅黑" panose="020B0503020204020204" charset="-122"/>
-                          <a:ea typeface="微软雅黑" panose="020B0503020204020204" charset="-122"/>
-                          <a:cs typeface="微软雅黑" panose="020B0503020204020204" charset="-122"/>
-                        </a:rPr>
-                        <a:t>测试集 </a:t>
+                        <a:t>测试集 Dice</a:t>
                       </a:r>
-                      <a:r>
-                        <a:rPr lang="en-US" altLang="zh-CN" sz="1600" b="0" i="0">
-                          <a:solidFill>
-                            <a:srgbClr val="000000"/>
-                          </a:solidFill>
-                          <a:latin typeface="微软雅黑" panose="020B0503020204020204" charset="-122"/>
-                          <a:ea typeface="微软雅黑" panose="020B0503020204020204" charset="-122"/>
-                          <a:cs typeface="微软雅黑" panose="020B0503020204020204" charset="-122"/>
-                        </a:rPr>
-                        <a:t>Dice</a:t>
-                      </a:r>
-                      <a:endParaRPr lang="en-US" altLang="zh-CN" sz="1600" b="0" i="0">
-                        <a:solidFill>
-                          <a:srgbClr val="000000"/>
-                        </a:solidFill>
-                        <a:latin typeface="微软雅黑" panose="020B0503020204020204" charset="-122"/>
-                        <a:ea typeface="微软雅黑" panose="020B0503020204020204" charset="-122"/>
-                        <a:cs typeface="微软雅黑" panose="020B0503020204020204" charset="-122"/>
-                      </a:endParaRPr>
                     </a:p>
                   </a:txBody>
                   <a:tcPr marL="82867" marR="82867" marT="38417" marB="38417" anchor="ctr" anchorCtr="0"/>
@@ -8802,34 +8455,9 @@
                   <a:txBody>
                     <a:bodyPr/>
                     <a:p>
-                      <a:pPr marL="0" indent="0" algn="l">
-                        <a:lnSpc>
-                          <a:spcPct val="100000"/>
-                        </a:lnSpc>
-                        <a:spcBef>
-                          <a:spcPct val="0"/>
-                        </a:spcBef>
-                        <a:spcAft>
-                          <a:spcPct val="0"/>
-                        </a:spcAft>
-                      </a:pPr>
                       <a:r>
-                        <a:rPr lang="en-US" altLang="zh-CN" sz="1600" b="0" i="0">
-                          <a:solidFill>
-                            <a:srgbClr val="000000"/>
-                          </a:solidFill>
-                          <a:latin typeface="微软雅黑" panose="020B0503020204020204" charset="-122"/>
-                          <a:ea typeface="微软雅黑" panose="020B0503020204020204" charset="-122"/>
-                        </a:rPr>
-                        <a:t>0.8760</a:t>
+                        <a:t>0.8757</a:t>
                       </a:r>
-                      <a:endParaRPr lang="en-US" altLang="zh-CN" sz="1600" b="0" i="0">
-                        <a:solidFill>
-                          <a:srgbClr val="000000"/>
-                        </a:solidFill>
-                        <a:latin typeface="微软雅黑" panose="020B0503020204020204" charset="-122"/>
-                        <a:ea typeface="微软雅黑" panose="020B0503020204020204" charset="-122"/>
-                      </a:endParaRPr>
                     </a:p>
                   </a:txBody>
                   <a:tcPr marL="82867" marR="82867" marT="38417" marB="38417" anchor="ctr" anchorCtr="0"/>
@@ -8838,34 +8466,9 @@
                   <a:txBody>
                     <a:bodyPr/>
                     <a:p>
-                      <a:pPr marL="0" indent="0" algn="l">
-                        <a:lnSpc>
-                          <a:spcPct val="100000"/>
-                        </a:lnSpc>
-                        <a:spcBef>
-                          <a:spcPct val="0"/>
-                        </a:spcBef>
-                        <a:spcAft>
-                          <a:spcPct val="0"/>
-                        </a:spcAft>
-                      </a:pPr>
                       <a:r>
-                        <a:rPr lang="en-US" altLang="zh-CN" sz="1600" b="0" i="0">
-                          <a:solidFill>
-                            <a:srgbClr val="000000"/>
-                          </a:solidFill>
-                          <a:latin typeface="微软雅黑" panose="020B0503020204020204" charset="-122"/>
-                          <a:ea typeface="微软雅黑" panose="020B0503020204020204" charset="-122"/>
-                        </a:rPr>
-                        <a:t>0.8896</a:t>
+                        <a:t>0.8903</a:t>
                       </a:r>
-                      <a:endParaRPr lang="en-US" altLang="zh-CN" sz="1600" b="0" i="0">
-                        <a:solidFill>
-                          <a:srgbClr val="000000"/>
-                        </a:solidFill>
-                        <a:latin typeface="微软雅黑" panose="020B0503020204020204" charset="-122"/>
-                        <a:ea typeface="微软雅黑" panose="020B0503020204020204" charset="-122"/>
-                      </a:endParaRPr>
                     </a:p>
                   </a:txBody>
                   <a:tcPr marL="82867" marR="82867" marT="38417" marB="38417" anchor="ctr" anchorCtr="0"/>
@@ -8874,34 +8477,9 @@
                   <a:txBody>
                     <a:bodyPr/>
                     <a:p>
-                      <a:pPr marL="0" indent="0" algn="l">
-                        <a:lnSpc>
-                          <a:spcPct val="100000"/>
-                        </a:lnSpc>
-                        <a:spcBef>
-                          <a:spcPct val="0"/>
-                        </a:spcBef>
-                        <a:spcAft>
-                          <a:spcPct val="0"/>
-                        </a:spcAft>
-                      </a:pPr>
                       <a:r>
-                        <a:rPr lang="en-US" altLang="zh-CN" sz="1600" b="0" i="0">
-                          <a:solidFill>
-                            <a:srgbClr val="000000"/>
-                          </a:solidFill>
-                          <a:latin typeface="微软雅黑" panose="020B0503020204020204" charset="-122"/>
-                          <a:ea typeface="微软雅黑" panose="020B0503020204020204" charset="-122"/>
-                        </a:rPr>
-                        <a:t>+1.36%</a:t>
+                        <a:t>+1.67%</a:t>
                       </a:r>
-                      <a:endParaRPr lang="en-US" altLang="zh-CN" sz="1600" b="0" i="0">
-                        <a:solidFill>
-                          <a:srgbClr val="000000"/>
-                        </a:solidFill>
-                        <a:latin typeface="微软雅黑" panose="020B0503020204020204" charset="-122"/>
-                        <a:ea typeface="微软雅黑" panose="020B0503020204020204" charset="-122"/>
-                      </a:endParaRPr>
                     </a:p>
                   </a:txBody>
                   <a:tcPr marL="82867" marR="82867" marT="38417" marB="38417" anchor="ctr" anchorCtr="0"/>
@@ -8912,47 +8490,9 @@
                   <a:txBody>
                     <a:bodyPr/>
                     <a:p>
-                      <a:pPr marL="0" indent="0" algn="l">
-                        <a:lnSpc>
-                          <a:spcPct val="100000"/>
-                        </a:lnSpc>
-                        <a:spcBef>
-                          <a:spcPct val="0"/>
-                        </a:spcBef>
-                        <a:spcAft>
-                          <a:spcPct val="0"/>
-                        </a:spcAft>
-                      </a:pPr>
                       <a:r>
-                        <a:rPr lang="zh-CN" altLang="en-US" sz="1600" b="0" i="0">
-                          <a:solidFill>
-                            <a:srgbClr val="000000"/>
-                          </a:solidFill>
-                          <a:latin typeface="微软雅黑" panose="020B0503020204020204" charset="-122"/>
-                          <a:ea typeface="微软雅黑" panose="020B0503020204020204" charset="-122"/>
-                          <a:cs typeface="微软雅黑" panose="020B0503020204020204" charset="-122"/>
-                        </a:rPr>
-                        <a:t>测试集 </a:t>
+                        <a:t>测试集 IoU</a:t>
                       </a:r>
-                      <a:r>
-                        <a:rPr lang="en-US" altLang="zh-CN" sz="1600" b="0" i="0">
-                          <a:solidFill>
-                            <a:srgbClr val="000000"/>
-                          </a:solidFill>
-                          <a:latin typeface="微软雅黑" panose="020B0503020204020204" charset="-122"/>
-                          <a:ea typeface="微软雅黑" panose="020B0503020204020204" charset="-122"/>
-                          <a:cs typeface="微软雅黑" panose="020B0503020204020204" charset="-122"/>
-                        </a:rPr>
-                        <a:t>IoU</a:t>
-                      </a:r>
-                      <a:endParaRPr lang="en-US" altLang="zh-CN" sz="1600" b="0" i="0">
-                        <a:solidFill>
-                          <a:srgbClr val="000000"/>
-                        </a:solidFill>
-                        <a:latin typeface="微软雅黑" panose="020B0503020204020204" charset="-122"/>
-                        <a:ea typeface="微软雅黑" panose="020B0503020204020204" charset="-122"/>
-                        <a:cs typeface="微软雅黑" panose="020B0503020204020204" charset="-122"/>
-                      </a:endParaRPr>
                     </a:p>
                   </a:txBody>
                   <a:tcPr marL="82867" marR="82867" marT="38417" marB="38417" anchor="ctr" anchorCtr="0"/>
@@ -8961,34 +8501,9 @@
                   <a:txBody>
                     <a:bodyPr/>
                     <a:p>
-                      <a:pPr marL="0" indent="0" algn="l">
-                        <a:lnSpc>
-                          <a:spcPct val="100000"/>
-                        </a:lnSpc>
-                        <a:spcBef>
-                          <a:spcPct val="0"/>
-                        </a:spcBef>
-                        <a:spcAft>
-                          <a:spcPct val="0"/>
-                        </a:spcAft>
-                      </a:pPr>
                       <a:r>
-                        <a:rPr lang="en-US" altLang="zh-CN" sz="1600" b="0" i="0">
-                          <a:solidFill>
-                            <a:srgbClr val="000000"/>
-                          </a:solidFill>
-                          <a:latin typeface="微软雅黑" panose="020B0503020204020204" charset="-122"/>
-                          <a:ea typeface="微软雅黑" panose="020B0503020204020204" charset="-122"/>
-                        </a:rPr>
-                        <a:t>0.8006</a:t>
+                        <a:t>0.7994</a:t>
                       </a:r>
-                      <a:endParaRPr lang="en-US" altLang="zh-CN" sz="1600" b="0" i="0">
-                        <a:solidFill>
-                          <a:srgbClr val="000000"/>
-                        </a:solidFill>
-                        <a:latin typeface="微软雅黑" panose="020B0503020204020204" charset="-122"/>
-                        <a:ea typeface="微软雅黑" panose="020B0503020204020204" charset="-122"/>
-                      </a:endParaRPr>
                     </a:p>
                   </a:txBody>
                   <a:tcPr marL="82867" marR="82867" marT="38417" marB="38417" anchor="ctr" anchorCtr="0"/>
@@ -8997,34 +8512,9 @@
                   <a:txBody>
                     <a:bodyPr/>
                     <a:p>
-                      <a:pPr marL="0" indent="0" algn="l">
-                        <a:lnSpc>
-                          <a:spcPct val="100000"/>
-                        </a:lnSpc>
-                        <a:spcBef>
-                          <a:spcPct val="0"/>
-                        </a:spcBef>
-                        <a:spcAft>
-                          <a:spcPct val="0"/>
-                        </a:spcAft>
-                      </a:pPr>
                       <a:r>
-                        <a:rPr lang="en-US" altLang="zh-CN" sz="1600" b="0" i="0">
-                          <a:solidFill>
-                            <a:srgbClr val="000000"/>
-                          </a:solidFill>
-                          <a:latin typeface="微软雅黑" panose="020B0503020204020204" charset="-122"/>
-                          <a:ea typeface="微软雅黑" panose="020B0503020204020204" charset="-122"/>
-                        </a:rPr>
-                        <a:t>0.8172</a:t>
+                        <a:t>0.8171</a:t>
                       </a:r>
-                      <a:endParaRPr lang="en-US" altLang="zh-CN" sz="1600" b="0" i="0">
-                        <a:solidFill>
-                          <a:srgbClr val="000000"/>
-                        </a:solidFill>
-                        <a:latin typeface="微软雅黑" panose="020B0503020204020204" charset="-122"/>
-                        <a:ea typeface="微软雅黑" panose="020B0503020204020204" charset="-122"/>
-                      </a:endParaRPr>
                     </a:p>
                   </a:txBody>
                   <a:tcPr marL="82867" marR="82867" marT="38417" marB="38417" anchor="ctr" anchorCtr="0"/>
@@ -9033,34 +8523,9 @@
                   <a:txBody>
                     <a:bodyPr/>
                     <a:p>
-                      <a:pPr marL="0" indent="0" algn="l">
-                        <a:lnSpc>
-                          <a:spcPct val="100000"/>
-                        </a:lnSpc>
-                        <a:spcBef>
-                          <a:spcPct val="0"/>
-                        </a:spcBef>
-                        <a:spcAft>
-                          <a:spcPct val="0"/>
-                        </a:spcAft>
-                      </a:pPr>
                       <a:r>
-                        <a:rPr lang="en-US" altLang="zh-CN" sz="1600" b="0" i="0">
-                          <a:solidFill>
-                            <a:srgbClr val="000000"/>
-                          </a:solidFill>
-                          <a:latin typeface="微软雅黑" panose="020B0503020204020204" charset="-122"/>
-                          <a:ea typeface="微软雅黑" panose="020B0503020204020204" charset="-122"/>
-                        </a:rPr>
-                        <a:t>+1.66%</a:t>
+                        <a:t>+2.21%</a:t>
                       </a:r>
-                      <a:endParaRPr lang="en-US" altLang="zh-CN" sz="1600" b="0" i="0">
-                        <a:solidFill>
-                          <a:srgbClr val="000000"/>
-                        </a:solidFill>
-                        <a:latin typeface="微软雅黑" panose="020B0503020204020204" charset="-122"/>
-                        <a:ea typeface="微软雅黑" panose="020B0503020204020204" charset="-122"/>
-                      </a:endParaRPr>
                     </a:p>
                   </a:txBody>
                   <a:tcPr marL="82867" marR="82867" marT="38417" marB="38417" anchor="ctr" anchorCtr="0"/>
@@ -9071,47 +8536,9 @@
                   <a:txBody>
                     <a:bodyPr/>
                     <a:p>
-                      <a:pPr marL="0" indent="0" algn="l">
-                        <a:lnSpc>
-                          <a:spcPct val="100000"/>
-                        </a:lnSpc>
-                        <a:spcBef>
-                          <a:spcPct val="0"/>
-                        </a:spcBef>
-                        <a:spcAft>
-                          <a:spcPct val="0"/>
-                        </a:spcAft>
-                      </a:pPr>
                       <a:r>
-                        <a:rPr lang="zh-CN" altLang="en-US" sz="1600" b="0" i="0">
-                          <a:solidFill>
-                            <a:srgbClr val="000000"/>
-                          </a:solidFill>
-                          <a:latin typeface="微软雅黑" panose="020B0503020204020204" charset="-122"/>
-                          <a:ea typeface="微软雅黑" panose="020B0503020204020204" charset="-122"/>
-                          <a:cs typeface="微软雅黑" panose="020B0503020204020204" charset="-122"/>
-                        </a:rPr>
-                        <a:t>测试集 </a:t>
+                        <a:t>测试集 Pixel Accuracy</a:t>
                       </a:r>
-                      <a:r>
-                        <a:rPr lang="en-US" altLang="zh-CN" sz="1600" b="0" i="0">
-                          <a:solidFill>
-                            <a:srgbClr val="000000"/>
-                          </a:solidFill>
-                          <a:latin typeface="微软雅黑" panose="020B0503020204020204" charset="-122"/>
-                          <a:ea typeface="微软雅黑" panose="020B0503020204020204" charset="-122"/>
-                          <a:cs typeface="微软雅黑" panose="020B0503020204020204" charset="-122"/>
-                        </a:rPr>
-                        <a:t>Pixel Accuracy</a:t>
-                      </a:r>
-                      <a:endParaRPr lang="en-US" altLang="zh-CN" sz="1600" b="0" i="0">
-                        <a:solidFill>
-                          <a:srgbClr val="000000"/>
-                        </a:solidFill>
-                        <a:latin typeface="微软雅黑" panose="020B0503020204020204" charset="-122"/>
-                        <a:ea typeface="微软雅黑" panose="020B0503020204020204" charset="-122"/>
-                        <a:cs typeface="微软雅黑" panose="020B0503020204020204" charset="-122"/>
-                      </a:endParaRPr>
                     </a:p>
                   </a:txBody>
                   <a:tcPr marL="82867" marR="82867" marT="38417" marB="38417" anchor="ctr" anchorCtr="0"/>
@@ -9120,34 +8547,9 @@
                   <a:txBody>
                     <a:bodyPr/>
                     <a:p>
-                      <a:pPr marL="0" indent="0" algn="l">
-                        <a:lnSpc>
-                          <a:spcPct val="100000"/>
-                        </a:lnSpc>
-                        <a:spcBef>
-                          <a:spcPct val="0"/>
-                        </a:spcBef>
-                        <a:spcAft>
-                          <a:spcPct val="0"/>
-                        </a:spcAft>
-                      </a:pPr>
                       <a:r>
-                        <a:rPr lang="en-US" altLang="zh-CN" sz="1600" b="0" i="0">
-                          <a:solidFill>
-                            <a:srgbClr val="000000"/>
-                          </a:solidFill>
-                          <a:latin typeface="微软雅黑" panose="020B0503020204020204" charset="-122"/>
-                          <a:ea typeface="微软雅黑" panose="020B0503020204020204" charset="-122"/>
-                        </a:rPr>
-                        <a:t>0.9298</a:t>
+                        <a:t>0.9304</a:t>
                       </a:r>
-                      <a:endParaRPr lang="en-US" altLang="zh-CN" sz="1600" b="0" i="0">
-                        <a:solidFill>
-                          <a:srgbClr val="000000"/>
-                        </a:solidFill>
-                        <a:latin typeface="微软雅黑" panose="020B0503020204020204" charset="-122"/>
-                        <a:ea typeface="微软雅黑" panose="020B0503020204020204" charset="-122"/>
-                      </a:endParaRPr>
                     </a:p>
                   </a:txBody>
                   <a:tcPr marL="82867" marR="82867" marT="38417" marB="38417" anchor="ctr" anchorCtr="0"/>
@@ -9156,34 +8558,9 @@
                   <a:txBody>
                     <a:bodyPr/>
                     <a:p>
-                      <a:pPr marL="0" indent="0" algn="l">
-                        <a:lnSpc>
-                          <a:spcPct val="100000"/>
-                        </a:lnSpc>
-                        <a:spcBef>
-                          <a:spcPct val="0"/>
-                        </a:spcBef>
-                        <a:spcAft>
-                          <a:spcPct val="0"/>
-                        </a:spcAft>
-                      </a:pPr>
                       <a:r>
-                        <a:rPr lang="en-US" altLang="zh-CN" sz="1600" b="0" i="0">
-                          <a:solidFill>
-                            <a:srgbClr val="000000"/>
-                          </a:solidFill>
-                          <a:latin typeface="微软雅黑" panose="020B0503020204020204" charset="-122"/>
-                          <a:ea typeface="微软雅黑" panose="020B0503020204020204" charset="-122"/>
-                        </a:rPr>
-                        <a:t>0.9378</a:t>
+                        <a:t>0.9385</a:t>
                       </a:r>
-                      <a:endParaRPr lang="en-US" altLang="zh-CN" sz="1600" b="0" i="0">
-                        <a:solidFill>
-                          <a:srgbClr val="000000"/>
-                        </a:solidFill>
-                        <a:latin typeface="微软雅黑" panose="020B0503020204020204" charset="-122"/>
-                        <a:ea typeface="微软雅黑" panose="020B0503020204020204" charset="-122"/>
-                      </a:endParaRPr>
                     </a:p>
                   </a:txBody>
                   <a:tcPr marL="82867" marR="82867" marT="38417" marB="38417" anchor="ctr" anchorCtr="0"/>
@@ -9192,34 +8569,9 @@
                   <a:txBody>
                     <a:bodyPr/>
                     <a:p>
-                      <a:pPr marL="0" indent="0" algn="l">
-                        <a:lnSpc>
-                          <a:spcPct val="100000"/>
-                        </a:lnSpc>
-                        <a:spcBef>
-                          <a:spcPct val="0"/>
-                        </a:spcBef>
-                        <a:spcAft>
-                          <a:spcPct val="0"/>
-                        </a:spcAft>
-                      </a:pPr>
                       <a:r>
-                        <a:rPr lang="en-US" altLang="zh-CN" sz="1600" b="0" i="0">
-                          <a:solidFill>
-                            <a:srgbClr val="000000"/>
-                          </a:solidFill>
-                          <a:latin typeface="微软雅黑" panose="020B0503020204020204" charset="-122"/>
-                          <a:ea typeface="微软雅黑" panose="020B0503020204020204" charset="-122"/>
-                        </a:rPr>
-                        <a:t>+0.80%</a:t>
+                        <a:t>+0.87%</a:t>
                       </a:r>
-                      <a:endParaRPr lang="en-US" altLang="zh-CN" sz="1600" b="0" i="0">
-                        <a:solidFill>
-                          <a:srgbClr val="000000"/>
-                        </a:solidFill>
-                        <a:latin typeface="微软雅黑" panose="020B0503020204020204" charset="-122"/>
-                        <a:ea typeface="微软雅黑" panose="020B0503020204020204" charset="-122"/>
-                      </a:endParaRPr>
                     </a:p>
                   </a:txBody>
                   <a:tcPr marL="82867" marR="82867" marT="38417" marB="38417" anchor="ctr" anchorCtr="0"/>
@@ -9230,34 +8582,9 @@
                   <a:txBody>
                     <a:bodyPr/>
                     <a:p>
-                      <a:pPr marL="0" indent="0" algn="l">
-                        <a:lnSpc>
-                          <a:spcPct val="100000"/>
-                        </a:lnSpc>
-                        <a:spcBef>
-                          <a:spcPct val="0"/>
-                        </a:spcBef>
-                        <a:spcAft>
-                          <a:spcPct val="0"/>
-                        </a:spcAft>
-                      </a:pPr>
                       <a:r>
-                        <a:rPr lang="zh-CN" altLang="en-US" sz="1600" b="0" i="0">
-                          <a:solidFill>
-                            <a:srgbClr val="000000"/>
-                          </a:solidFill>
-                          <a:latin typeface="微软雅黑" panose="020B0503020204020204" charset="-122"/>
-                          <a:ea typeface="微软雅黑" panose="020B0503020204020204" charset="-122"/>
-                        </a:rPr>
                         <a:t>模型参数量</a:t>
                       </a:r>
-                      <a:endParaRPr lang="zh-CN" altLang="en-US" sz="1600" b="0" i="0">
-                        <a:solidFill>
-                          <a:srgbClr val="000000"/>
-                        </a:solidFill>
-                        <a:latin typeface="微软雅黑" panose="020B0503020204020204" charset="-122"/>
-                        <a:ea typeface="微软雅黑" panose="020B0503020204020204" charset="-122"/>
-                      </a:endParaRPr>
                     </a:p>
                   </a:txBody>
                   <a:tcPr marL="82867" marR="82867" marT="38417" marB="38417" anchor="ctr" anchorCtr="0"/>
@@ -9266,34 +8593,9 @@
                   <a:txBody>
                     <a:bodyPr/>
                     <a:p>
-                      <a:pPr marL="0" indent="0" algn="l">
-                        <a:lnSpc>
-                          <a:spcPct val="100000"/>
-                        </a:lnSpc>
-                        <a:spcBef>
-                          <a:spcPct val="0"/>
-                        </a:spcBef>
-                        <a:spcAft>
-                          <a:spcPct val="0"/>
-                        </a:spcAft>
-                      </a:pPr>
                       <a:r>
-                        <a:rPr lang="en-US" altLang="zh-CN" sz="1600" b="0" i="0">
-                          <a:solidFill>
-                            <a:srgbClr val="000000"/>
-                          </a:solidFill>
-                          <a:latin typeface="微软雅黑" panose="020B0503020204020204" charset="-122"/>
-                          <a:ea typeface="微软雅黑" panose="020B0503020204020204" charset="-122"/>
-                        </a:rPr>
                         <a:t>31.0M</a:t>
                       </a:r>
-                      <a:endParaRPr lang="en-US" altLang="zh-CN" sz="1600" b="0" i="0">
-                        <a:solidFill>
-                          <a:srgbClr val="000000"/>
-                        </a:solidFill>
-                        <a:latin typeface="微软雅黑" panose="020B0503020204020204" charset="-122"/>
-                        <a:ea typeface="微软雅黑" panose="020B0503020204020204" charset="-122"/>
-                      </a:endParaRPr>
                     </a:p>
                   </a:txBody>
                   <a:tcPr marL="82867" marR="82867" marT="38417" marB="38417" anchor="ctr" anchorCtr="0"/>
@@ -9302,34 +8604,9 @@
                   <a:txBody>
                     <a:bodyPr/>
                     <a:p>
-                      <a:pPr marL="0" indent="0" algn="l">
-                        <a:lnSpc>
-                          <a:spcPct val="100000"/>
-                        </a:lnSpc>
-                        <a:spcBef>
-                          <a:spcPct val="0"/>
-                        </a:spcBef>
-                        <a:spcAft>
-                          <a:spcPct val="0"/>
-                        </a:spcAft>
-                      </a:pPr>
                       <a:r>
-                        <a:rPr lang="en-US" altLang="zh-CN" sz="1600" b="0" i="0">
-                          <a:solidFill>
-                            <a:srgbClr val="000000"/>
-                          </a:solidFill>
-                          <a:latin typeface="微软雅黑" panose="020B0503020204020204" charset="-122"/>
-                          <a:ea typeface="微软雅黑" panose="020B0503020204020204" charset="-122"/>
-                        </a:rPr>
                         <a:t>29.2M</a:t>
                       </a:r>
-                      <a:endParaRPr lang="en-US" altLang="zh-CN" sz="1600" b="0" i="0">
-                        <a:solidFill>
-                          <a:srgbClr val="000000"/>
-                        </a:solidFill>
-                        <a:latin typeface="微软雅黑" panose="020B0503020204020204" charset="-122"/>
-                        <a:ea typeface="微软雅黑" panose="020B0503020204020204" charset="-122"/>
-                      </a:endParaRPr>
                     </a:p>
                   </a:txBody>
                   <a:tcPr marL="82867" marR="82867" marT="38417" marB="38417" anchor="ctr" anchorCtr="0"/>
@@ -9338,34 +8615,9 @@
                   <a:txBody>
                     <a:bodyPr/>
                     <a:p>
-                      <a:pPr marL="0" indent="0" algn="l">
-                        <a:lnSpc>
-                          <a:spcPct val="100000"/>
-                        </a:lnSpc>
-                        <a:spcBef>
-                          <a:spcPct val="0"/>
-                        </a:spcBef>
-                        <a:spcAft>
-                          <a:spcPct val="0"/>
-                        </a:spcAft>
-                      </a:pPr>
                       <a:r>
-                        <a:rPr lang="en-US" altLang="zh-CN" sz="1600" b="0" i="0">
-                          <a:solidFill>
-                            <a:srgbClr val="000000"/>
-                          </a:solidFill>
-                          <a:latin typeface="微软雅黑" panose="020B0503020204020204" charset="-122"/>
-                          <a:ea typeface="微软雅黑" panose="020B0503020204020204" charset="-122"/>
-                        </a:rPr>
                         <a:t>-5.8%</a:t>
                       </a:r>
-                      <a:endParaRPr lang="en-US" altLang="zh-CN" sz="1600" b="0" i="0">
-                        <a:solidFill>
-                          <a:srgbClr val="000000"/>
-                        </a:solidFill>
-                        <a:latin typeface="微软雅黑" panose="020B0503020204020204" charset="-122"/>
-                        <a:ea typeface="微软雅黑" panose="020B0503020204020204" charset="-122"/>
-                      </a:endParaRPr>
                     </a:p>
                   </a:txBody>
                   <a:tcPr marL="82867" marR="82867" marT="38417" marB="38417" anchor="ctr" anchorCtr="0"/>
@@ -9376,34 +8628,9 @@
                   <a:txBody>
                     <a:bodyPr/>
                     <a:p>
-                      <a:pPr marL="0" indent="0" algn="l">
-                        <a:lnSpc>
-                          <a:spcPct val="100000"/>
-                        </a:lnSpc>
-                        <a:spcBef>
-                          <a:spcPct val="0"/>
-                        </a:spcBef>
-                        <a:spcAft>
-                          <a:spcPct val="0"/>
-                        </a:spcAft>
-                      </a:pPr>
                       <a:r>
-                        <a:rPr lang="zh-CN" altLang="en-US" sz="1600" b="0" i="0">
-                          <a:solidFill>
-                            <a:srgbClr val="000000"/>
-                          </a:solidFill>
-                          <a:latin typeface="微软雅黑" panose="020B0503020204020204" charset="-122"/>
-                          <a:ea typeface="微软雅黑" panose="020B0503020204020204" charset="-122"/>
-                        </a:rPr>
                         <a:t>训练时间</a:t>
                       </a:r>
-                      <a:endParaRPr lang="zh-CN" altLang="en-US" sz="1600" b="0" i="0">
-                        <a:solidFill>
-                          <a:srgbClr val="000000"/>
-                        </a:solidFill>
-                        <a:latin typeface="微软雅黑" panose="020B0503020204020204" charset="-122"/>
-                        <a:ea typeface="微软雅黑" panose="020B0503020204020204" charset="-122"/>
-                      </a:endParaRPr>
                     </a:p>
                   </a:txBody>
                   <a:tcPr marL="82867" marR="82867" marT="38417" marB="38417" anchor="ctr" anchorCtr="0"/>
@@ -9412,34 +8639,9 @@
                   <a:txBody>
                     <a:bodyPr/>
                     <a:p>
-                      <a:pPr marL="0" indent="0" algn="l">
-                        <a:lnSpc>
-                          <a:spcPct val="100000"/>
-                        </a:lnSpc>
-                        <a:spcBef>
-                          <a:spcPct val="0"/>
-                        </a:spcBef>
-                        <a:spcAft>
-                          <a:spcPct val="0"/>
-                        </a:spcAft>
-                      </a:pPr>
                       <a:r>
-                        <a:rPr lang="en-US" altLang="zh-CN" sz="1600" b="0" i="0">
-                          <a:solidFill>
-                            <a:srgbClr val="000000"/>
-                          </a:solidFill>
-                          <a:latin typeface="微软雅黑" panose="020B0503020204020204" charset="-122"/>
-                          <a:ea typeface="微软雅黑" panose="020B0503020204020204" charset="-122"/>
-                        </a:rPr>
-                        <a:t>~6.7h</a:t>
+                        <a:t>~3.2h</a:t>
                       </a:r>
-                      <a:endParaRPr lang="en-US" altLang="zh-CN" sz="1600" b="0" i="0">
-                        <a:solidFill>
-                          <a:srgbClr val="000000"/>
-                        </a:solidFill>
-                        <a:latin typeface="微软雅黑" panose="020B0503020204020204" charset="-122"/>
-                        <a:ea typeface="微软雅黑" panose="020B0503020204020204" charset="-122"/>
-                      </a:endParaRPr>
                     </a:p>
                   </a:txBody>
                   <a:tcPr marL="82867" marR="82867" marT="38417" marB="38417" anchor="ctr" anchorCtr="0"/>
@@ -9448,34 +8650,9 @@
                   <a:txBody>
                     <a:bodyPr/>
                     <a:p>
-                      <a:pPr marL="0" indent="0" algn="l">
-                        <a:lnSpc>
-                          <a:spcPct val="100000"/>
-                        </a:lnSpc>
-                        <a:spcBef>
-                          <a:spcPct val="0"/>
-                        </a:spcBef>
-                        <a:spcAft>
-                          <a:spcPct val="0"/>
-                        </a:spcAft>
-                      </a:pPr>
                       <a:r>
-                        <a:rPr lang="en-US" altLang="zh-CN" sz="1600" b="0" i="0">
-                          <a:solidFill>
-                            <a:srgbClr val="000000"/>
-                          </a:solidFill>
-                          <a:latin typeface="微软雅黑" panose="020B0503020204020204" charset="-122"/>
-                          <a:ea typeface="微软雅黑" panose="020B0503020204020204" charset="-122"/>
-                        </a:rPr>
-                        <a:t>~5.8h</a:t>
+                        <a:t>~3.1h</a:t>
                       </a:r>
-                      <a:endParaRPr lang="en-US" altLang="zh-CN" sz="1600" b="0" i="0">
-                        <a:solidFill>
-                          <a:srgbClr val="000000"/>
-                        </a:solidFill>
-                        <a:latin typeface="微软雅黑" panose="020B0503020204020204" charset="-122"/>
-                        <a:ea typeface="微软雅黑" panose="020B0503020204020204" charset="-122"/>
-                      </a:endParaRPr>
                     </a:p>
                   </a:txBody>
                   <a:tcPr marL="82867" marR="82867" marT="38417" marB="38417" anchor="ctr" anchorCtr="0"/>
@@ -9484,58 +8661,9 @@
                   <a:txBody>
                     <a:bodyPr/>
                     <a:p>
-                      <a:pPr marL="0" indent="0" algn="l">
-                        <a:lnSpc>
-                          <a:spcPct val="100000"/>
-                        </a:lnSpc>
-                        <a:spcBef>
-                          <a:spcPct val="0"/>
-                        </a:spcBef>
-                        <a:spcAft>
-                          <a:spcPct val="0"/>
-                        </a:spcAft>
-                      </a:pPr>
                       <a:r>
-                        <a:rPr lang="en-US" altLang="zh-CN" sz="1600" b="0" i="0">
-                          <a:solidFill>
-                            <a:srgbClr val="000000"/>
-                          </a:solidFill>
-                          <a:latin typeface="微软雅黑" panose="020B0503020204020204" charset="-122"/>
-                          <a:ea typeface="微软雅黑" panose="020B0503020204020204" charset="-122"/>
-                          <a:cs typeface="微软雅黑" panose="020B0503020204020204" charset="-122"/>
-                        </a:rPr>
-                        <a:t>-13% (AMP</a:t>
+                        <a:t>相近 (AMP)</a:t>
                       </a:r>
-                      <a:r>
-                        <a:rPr lang="zh-CN" altLang="en-US" sz="1600" b="0" i="0">
-                          <a:solidFill>
-                            <a:srgbClr val="000000"/>
-                          </a:solidFill>
-                          <a:latin typeface="微软雅黑" panose="020B0503020204020204" charset="-122"/>
-                          <a:ea typeface="微软雅黑" panose="020B0503020204020204" charset="-122"/>
-                          <a:cs typeface="微软雅黑" panose="020B0503020204020204" charset="-122"/>
-                        </a:rPr>
-                        <a:t>加速</a:t>
-                      </a:r>
-                      <a:r>
-                        <a:rPr lang="en-US" altLang="zh-CN" sz="1600" b="0" i="0">
-                          <a:solidFill>
-                            <a:srgbClr val="000000"/>
-                          </a:solidFill>
-                          <a:latin typeface="微软雅黑" panose="020B0503020204020204" charset="-122"/>
-                          <a:ea typeface="微软雅黑" panose="020B0503020204020204" charset="-122"/>
-                          <a:cs typeface="微软雅黑" panose="020B0503020204020204" charset="-122"/>
-                        </a:rPr>
-                        <a:t>)</a:t>
-                      </a:r>
-                      <a:endParaRPr lang="en-US" altLang="zh-CN" sz="1600" b="0" i="0">
-                        <a:solidFill>
-                          <a:srgbClr val="000000"/>
-                        </a:solidFill>
-                        <a:latin typeface="微软雅黑" panose="020B0503020204020204" charset="-122"/>
-                        <a:ea typeface="微软雅黑" panose="020B0503020204020204" charset="-122"/>
-                        <a:cs typeface="微软雅黑" panose="020B0503020204020204" charset="-122"/>
-                      </a:endParaRPr>
                     </a:p>
                   </a:txBody>
                   <a:tcPr marL="82867" marR="82867" marT="38417" marB="38417" anchor="ctr" anchorCtr="0"/>
@@ -9618,13 +8746,13 @@
               </a:defRPr>
             </a:pPr>
             <a:r>
-              <a:rPr>
-                <a:latin typeface="微软雅黑" panose="020B0503020204020204" charset="-122"/>
-                <a:ea typeface="微软雅黑" panose="020B0503020204020204" charset="-122"/>
-              </a:rPr>
-              <a:t>分析与结论</a:t>
-            </a:r>
-            <a:endParaRPr>
+              <a:rPr lang="zh-CN" altLang="en-US">
+                <a:latin typeface="微软雅黑" panose="020B0503020204020204" charset="-122"/>
+                <a:ea typeface="微软雅黑" panose="020B0503020204020204" charset="-122"/>
+              </a:rPr>
+              <a:t>训练曲线</a:t>
+            </a:r>
+            <a:endParaRPr lang="zh-CN" altLang="en-US">
               <a:latin typeface="微软雅黑" panose="020B0503020204020204" charset="-122"/>
               <a:ea typeface="微软雅黑" panose="020B0503020204020204" charset="-122"/>
             </a:endParaRPr>
@@ -9678,29 +8806,77 @@
               </a:defRPr>
             </a:pPr>
             <a:r>
-              <a:rPr>
-                <a:latin typeface="微软雅黑" panose="020B0503020204020204" charset="-122"/>
-                <a:ea typeface="微软雅黑" panose="020B0503020204020204" charset="-122"/>
-              </a:rPr>
-              <a:t>Analysis &amp; Conclusion</a:t>
-            </a:r>
-            <a:endParaRPr>
-              <a:latin typeface="微软雅黑" panose="020B0503020204020204" charset="-122"/>
-              <a:ea typeface="微软雅黑" panose="020B0503020204020204" charset="-122"/>
-            </a:endParaRPr>
-          </a:p>
-        </p:txBody>
-      </p:sp>
-      <p:sp>
-        <p:nvSpPr>
-          <p:cNvPr id="4" name="TextBox 3"/>
+              <a:rPr lang="en-US" altLang="zh-CN">
+                <a:latin typeface="微软雅黑" panose="020B0503020204020204" charset="-122"/>
+                <a:ea typeface="微软雅黑" panose="020B0503020204020204" charset="-122"/>
+              </a:rPr>
+              <a:t>ResNet34-UNet Training Curves</a:t>
+            </a:r>
+            <a:endParaRPr lang="en-US" altLang="zh-CN">
+              <a:latin typeface="微软雅黑" panose="020B0503020204020204" charset="-122"/>
+              <a:ea typeface="微软雅黑" panose="020B0503020204020204" charset="-122"/>
+            </a:endParaRPr>
+          </a:p>
+        </p:txBody>
+      </p:sp>
+      <p:pic>
+        <p:nvPicPr>
+          <p:cNvPr id="4" name="Picture 3" descr="Loss.png"/>
+          <p:cNvPicPr>
+            <a:picLocks noChangeAspect="1"/>
+          </p:cNvPicPr>
+          <p:nvPr/>
+        </p:nvPicPr>
+        <p:blipFill>
+          <a:blip r:embed="rId1"/>
+          <a:stretch>
+            <a:fillRect/>
+          </a:stretch>
+        </p:blipFill>
+        <p:spPr>
+          <a:xfrm>
+            <a:off x="845185" y="2265680"/>
+            <a:ext cx="4936490" cy="2810510"/>
+          </a:xfrm>
+          <a:prstGeom prst="rect">
+            <a:avLst/>
+          </a:prstGeom>
+        </p:spPr>
+      </p:pic>
+      <p:pic>
+        <p:nvPicPr>
+          <p:cNvPr id="5" name="Picture 4" descr="Dice.png"/>
+          <p:cNvPicPr>
+            <a:picLocks noChangeAspect="1"/>
+          </p:cNvPicPr>
+          <p:nvPr/>
+        </p:nvPicPr>
+        <p:blipFill>
+          <a:blip r:embed="rId2"/>
+          <a:stretch>
+            <a:fillRect/>
+          </a:stretch>
+        </p:blipFill>
+        <p:spPr>
+          <a:xfrm>
+            <a:off x="6318885" y="2257425"/>
+            <a:ext cx="4936490" cy="2810510"/>
+          </a:xfrm>
+          <a:prstGeom prst="rect">
+            <a:avLst/>
+          </a:prstGeom>
+        </p:spPr>
+      </p:pic>
+      <p:sp>
+        <p:nvSpPr>
+          <p:cNvPr id="6" name="文本框 5"/>
           <p:cNvSpPr txBox="1"/>
           <p:nvPr/>
         </p:nvSpPr>
         <p:spPr>
           <a:xfrm>
-            <a:off x="731520" y="1828800"/>
-            <a:ext cx="5303520" cy="4215765"/>
+            <a:off x="1153795" y="5879465"/>
+            <a:ext cx="7573010" cy="275590"/>
           </a:xfrm>
           <a:prstGeom prst="rect">
             <a:avLst/>
@@ -9708,633 +8884,21 @@
           <a:noFill/>
         </p:spPr>
         <p:txBody>
-          <a:bodyPr wrap="square">
+          <a:bodyPr wrap="square" rtlCol="0" anchor="t">
             <a:spAutoFit/>
           </a:bodyPr>
-          <a:lstStyle/>
           <a:p>
             <a:pPr>
-              <a:spcAft>
-                <a:spcPts val="600"/>
-              </a:spcAft>
-              <a:defRPr sz="1600">
-                <a:solidFill>
-                  <a:srgbClr val="333333"/>
-                </a:solidFill>
-              </a:defRPr>
+              <a:defRPr sz="1200"/>
             </a:pPr>
             <a:r>
               <a:rPr>
-                <a:latin typeface="微软雅黑" panose="020B0503020204020204" charset="-122"/>
-                <a:ea typeface="微软雅黑" panose="020B0503020204020204" charset="-122"/>
-                <a:cs typeface="微软雅黑" panose="020B0503020204020204" charset="-122"/>
-              </a:rPr>
-              <a:t>💡 关键发现</a:t>
-            </a:r>
-            <a:endParaRPr>
-              <a:latin typeface="微软雅黑" panose="020B0503020204020204" charset="-122"/>
-              <a:ea typeface="微软雅黑" panose="020B0503020204020204" charset="-122"/>
-              <a:cs typeface="微软雅黑" panose="020B0503020204020204" charset="-122"/>
-            </a:endParaRPr>
-          </a:p>
-          <a:p>
-            <a:pPr>
-              <a:spcAft>
-                <a:spcPts val="600"/>
-              </a:spcAft>
-              <a:defRPr sz="1600">
-                <a:solidFill>
-                  <a:srgbClr val="333333"/>
-                </a:solidFill>
-              </a:defRPr>
-            </a:pPr>
-            <a:endParaRPr>
-              <a:latin typeface="微软雅黑" panose="020B0503020204020204" charset="-122"/>
-              <a:ea typeface="微软雅黑" panose="020B0503020204020204" charset="-122"/>
-              <a:cs typeface="微软雅黑" panose="020B0503020204020204" charset="-122"/>
-            </a:endParaRPr>
-          </a:p>
-          <a:p>
-            <a:pPr>
-              <a:spcAft>
-                <a:spcPts val="600"/>
-              </a:spcAft>
-              <a:defRPr sz="1600">
-                <a:solidFill>
-                  <a:srgbClr val="333333"/>
-                </a:solidFill>
-              </a:defRPr>
-            </a:pPr>
-            <a:r>
-              <a:rPr>
-                <a:latin typeface="微软雅黑" panose="020B0503020204020204" charset="-122"/>
-                <a:ea typeface="微软雅黑" panose="020B0503020204020204" charset="-122"/>
-                <a:cs typeface="微软雅黑" panose="020B0503020204020204" charset="-122"/>
-              </a:rPr>
-              <a:t>1. 组合损失函数优势</a:t>
-            </a:r>
-            <a:endParaRPr>
-              <a:latin typeface="微软雅黑" panose="020B0503020204020204" charset="-122"/>
-              <a:ea typeface="微软雅黑" panose="020B0503020204020204" charset="-122"/>
-              <a:cs typeface="微软雅黑" panose="020B0503020204020204" charset="-122"/>
-            </a:endParaRPr>
-          </a:p>
-          <a:p>
-            <a:pPr>
-              <a:spcAft>
-                <a:spcPts val="600"/>
-              </a:spcAft>
-              <a:defRPr sz="1600">
-                <a:solidFill>
-                  <a:srgbClr val="333333"/>
-                </a:solidFill>
-              </a:defRPr>
-            </a:pPr>
-            <a:r>
-              <a:rPr>
-                <a:latin typeface="微软雅黑" panose="020B0503020204020204" charset="-122"/>
-                <a:ea typeface="微软雅黑" panose="020B0503020204020204" charset="-122"/>
-                <a:cs typeface="微软雅黑" panose="020B0503020204020204" charset="-122"/>
-              </a:rPr>
-              <a:t>   Dice+BCE 比单独 BCE 更适合类别不平衡的分割任务</a:t>
-            </a:r>
-            <a:endParaRPr>
-              <a:latin typeface="微软雅黑" panose="020B0503020204020204" charset="-122"/>
-              <a:ea typeface="微软雅黑" panose="020B0503020204020204" charset="-122"/>
-              <a:cs typeface="微软雅黑" panose="020B0503020204020204" charset="-122"/>
-            </a:endParaRPr>
-          </a:p>
-          <a:p>
-            <a:pPr>
-              <a:spcAft>
-                <a:spcPts val="600"/>
-              </a:spcAft>
-              <a:defRPr sz="1600">
-                <a:solidFill>
-                  <a:srgbClr val="333333"/>
-                </a:solidFill>
-              </a:defRPr>
-            </a:pPr>
-            <a:endParaRPr>
-              <a:latin typeface="微软雅黑" panose="020B0503020204020204" charset="-122"/>
-              <a:ea typeface="微软雅黑" panose="020B0503020204020204" charset="-122"/>
-              <a:cs typeface="微软雅黑" panose="020B0503020204020204" charset="-122"/>
-            </a:endParaRPr>
-          </a:p>
-          <a:p>
-            <a:pPr>
-              <a:spcAft>
-                <a:spcPts val="600"/>
-              </a:spcAft>
-              <a:defRPr sz="1600">
-                <a:solidFill>
-                  <a:srgbClr val="333333"/>
-                </a:solidFill>
-              </a:defRPr>
-            </a:pPr>
-            <a:r>
-              <a:rPr>
-                <a:latin typeface="微软雅黑" panose="020B0503020204020204" charset="-122"/>
-                <a:ea typeface="微软雅黑" panose="020B0503020204020204" charset="-122"/>
-                <a:cs typeface="微软雅黑" panose="020B0503020204020204" charset="-122"/>
-              </a:rPr>
-              <a:t>2. 数据增强效果显著</a:t>
-            </a:r>
-            <a:endParaRPr>
-              <a:latin typeface="微软雅黑" panose="020B0503020204020204" charset="-122"/>
-              <a:ea typeface="微软雅黑" panose="020B0503020204020204" charset="-122"/>
-              <a:cs typeface="微软雅黑" panose="020B0503020204020204" charset="-122"/>
-            </a:endParaRPr>
-          </a:p>
-          <a:p>
-            <a:pPr>
-              <a:spcAft>
-                <a:spcPts val="600"/>
-              </a:spcAft>
-              <a:defRPr sz="1600">
-                <a:solidFill>
-                  <a:srgbClr val="333333"/>
-                </a:solidFill>
-              </a:defRPr>
-            </a:pPr>
-            <a:r>
-              <a:rPr>
-                <a:latin typeface="微软雅黑" panose="020B0503020204020204" charset="-122"/>
-                <a:ea typeface="微软雅黑" panose="020B0503020204020204" charset="-122"/>
-                <a:cs typeface="微软雅黑" panose="020B0503020204020204" charset="-122"/>
-              </a:rPr>
-              <a:t>   翻转/旋转/颜色抖动提升泛化能力 3-5% Dice</a:t>
-            </a:r>
-            <a:endParaRPr>
-              <a:latin typeface="微软雅黑" panose="020B0503020204020204" charset="-122"/>
-              <a:ea typeface="微软雅黑" panose="020B0503020204020204" charset="-122"/>
-              <a:cs typeface="微软雅黑" panose="020B0503020204020204" charset="-122"/>
-            </a:endParaRPr>
-          </a:p>
-          <a:p>
-            <a:pPr>
-              <a:spcAft>
-                <a:spcPts val="600"/>
-              </a:spcAft>
-              <a:defRPr sz="1600">
-                <a:solidFill>
-                  <a:srgbClr val="333333"/>
-                </a:solidFill>
-              </a:defRPr>
-            </a:pPr>
-            <a:endParaRPr>
-              <a:latin typeface="微软雅黑" panose="020B0503020204020204" charset="-122"/>
-              <a:ea typeface="微软雅黑" panose="020B0503020204020204" charset="-122"/>
-              <a:cs typeface="微软雅黑" panose="020B0503020204020204" charset="-122"/>
-            </a:endParaRPr>
-          </a:p>
-          <a:p>
-            <a:pPr>
-              <a:spcAft>
-                <a:spcPts val="600"/>
-              </a:spcAft>
-              <a:defRPr sz="1600">
-                <a:solidFill>
-                  <a:srgbClr val="333333"/>
-                </a:solidFill>
-              </a:defRPr>
-            </a:pPr>
-            <a:r>
-              <a:rPr>
-                <a:latin typeface="微软雅黑" panose="020B0503020204020204" charset="-122"/>
-                <a:ea typeface="微软雅黑" panose="020B0503020204020204" charset="-122"/>
-                <a:cs typeface="微软雅黑" panose="020B0503020204020204" charset="-122"/>
-              </a:rPr>
-              <a:t>3. GPU 加速比约 6.7x</a:t>
-            </a:r>
-            <a:endParaRPr>
-              <a:latin typeface="微软雅黑" panose="020B0503020204020204" charset="-122"/>
-              <a:ea typeface="微软雅黑" panose="020B0503020204020204" charset="-122"/>
-              <a:cs typeface="微软雅黑" panose="020B0503020204020204" charset="-122"/>
-            </a:endParaRPr>
-          </a:p>
-          <a:p>
-            <a:pPr>
-              <a:spcAft>
-                <a:spcPts val="600"/>
-              </a:spcAft>
-              <a:defRPr sz="1600">
-                <a:solidFill>
-                  <a:srgbClr val="333333"/>
-                </a:solidFill>
-              </a:defRPr>
-            </a:pPr>
-            <a:r>
-              <a:rPr>
-                <a:latin typeface="微软雅黑" panose="020B0503020204020204" charset="-122"/>
-                <a:ea typeface="微软雅黑" panose="020B0503020204020204" charset="-122"/>
-                <a:cs typeface="微软雅黑" panose="020B0503020204020204" charset="-122"/>
-              </a:rPr>
-              <a:t>   CPU: ~45h → GPU: ~6.7h (50 epochs)</a:t>
-            </a:r>
-            <a:endParaRPr>
-              <a:latin typeface="微软雅黑" panose="020B0503020204020204" charset="-122"/>
-              <a:ea typeface="微软雅黑" panose="020B0503020204020204" charset="-122"/>
-              <a:cs typeface="微软雅黑" panose="020B0503020204020204" charset="-122"/>
-            </a:endParaRPr>
-          </a:p>
-          <a:p>
-            <a:pPr>
-              <a:spcAft>
-                <a:spcPts val="600"/>
-              </a:spcAft>
-              <a:defRPr sz="1600">
-                <a:solidFill>
-                  <a:srgbClr val="333333"/>
-                </a:solidFill>
-              </a:defRPr>
-            </a:pPr>
-            <a:endParaRPr>
-              <a:latin typeface="微软雅黑" panose="020B0503020204020204" charset="-122"/>
-              <a:ea typeface="微软雅黑" panose="020B0503020204020204" charset="-122"/>
-              <a:cs typeface="微软雅黑" panose="020B0503020204020204" charset="-122"/>
-            </a:endParaRPr>
-          </a:p>
-          <a:p>
-            <a:pPr>
-              <a:spcAft>
-                <a:spcPts val="600"/>
-              </a:spcAft>
-              <a:defRPr sz="1600">
-                <a:solidFill>
-                  <a:srgbClr val="333333"/>
-                </a:solidFill>
-              </a:defRPr>
-            </a:pPr>
-            <a:r>
-              <a:rPr>
-                <a:latin typeface="微软雅黑" panose="020B0503020204020204" charset="-122"/>
-                <a:ea typeface="微软雅黑" panose="020B0503020204020204" charset="-122"/>
-                <a:cs typeface="微软雅黑" panose="020B0503020204020204" charset="-122"/>
-              </a:rPr>
-              <a:t>4. 跳跃连接保留细节</a:t>
-            </a:r>
-            <a:endParaRPr>
-              <a:latin typeface="微软雅黑" panose="020B0503020204020204" charset="-122"/>
-              <a:ea typeface="微软雅黑" panose="020B0503020204020204" charset="-122"/>
-              <a:cs typeface="微软雅黑" panose="020B0503020204020204" charset="-122"/>
-            </a:endParaRPr>
-          </a:p>
-          <a:p>
-            <a:pPr>
-              <a:spcAft>
-                <a:spcPts val="600"/>
-              </a:spcAft>
-              <a:defRPr sz="1600">
-                <a:solidFill>
-                  <a:srgbClr val="333333"/>
-                </a:solidFill>
-              </a:defRPr>
-            </a:pPr>
-            <a:r>
-              <a:rPr>
-                <a:latin typeface="微软雅黑" panose="020B0503020204020204" charset="-122"/>
-                <a:ea typeface="微软雅黑" panose="020B0503020204020204" charset="-122"/>
-                <a:cs typeface="微软雅黑" panose="020B0503020204020204" charset="-122"/>
-              </a:rPr>
-              <a:t>   有效缓解分割边缘模糊问题</a:t>
-            </a:r>
-            <a:endParaRPr>
-              <a:latin typeface="微软雅黑" panose="020B0503020204020204" charset="-122"/>
-              <a:ea typeface="微软雅黑" panose="020B0503020204020204" charset="-122"/>
-              <a:cs typeface="微软雅黑" panose="020B0503020204020204" charset="-122"/>
-            </a:endParaRPr>
-          </a:p>
-        </p:txBody>
-      </p:sp>
-      <p:sp>
-        <p:nvSpPr>
-          <p:cNvPr id="5" name="TextBox 4"/>
-          <p:cNvSpPr txBox="1"/>
-          <p:nvPr/>
-        </p:nvSpPr>
-        <p:spPr>
-          <a:xfrm>
-            <a:off x="6675120" y="1828800"/>
-            <a:ext cx="4846320" cy="4215765"/>
-          </a:xfrm>
-          <a:prstGeom prst="rect">
-            <a:avLst/>
-          </a:prstGeom>
-          <a:noFill/>
-        </p:spPr>
-        <p:txBody>
-          <a:bodyPr wrap="square">
-            <a:spAutoFit/>
-          </a:bodyPr>
-          <a:lstStyle/>
-          <a:p>
-            <a:pPr>
-              <a:spcAft>
-                <a:spcPts val="600"/>
-              </a:spcAft>
-              <a:defRPr sz="1600">
-                <a:solidFill>
-                  <a:srgbClr val="333333"/>
-                </a:solidFill>
-              </a:defRPr>
-            </a:pPr>
-            <a:r>
-              <a:rPr>
-                <a:latin typeface="微软雅黑" panose="020B0503020204020204" charset="-122"/>
-                <a:ea typeface="微软雅黑" panose="020B0503020204020204" charset="-122"/>
-                <a:cs typeface="微软雅黑" panose="020B0503020204020204" charset="-122"/>
-              </a:rPr>
-              <a:t>⚠️ 待改进方向</a:t>
-            </a:r>
-            <a:endParaRPr>
-              <a:latin typeface="微软雅黑" panose="020B0503020204020204" charset="-122"/>
-              <a:ea typeface="微软雅黑" panose="020B0503020204020204" charset="-122"/>
-              <a:cs typeface="微软雅黑" panose="020B0503020204020204" charset="-122"/>
-            </a:endParaRPr>
-          </a:p>
-          <a:p>
-            <a:pPr>
-              <a:spcAft>
-                <a:spcPts val="600"/>
-              </a:spcAft>
-              <a:defRPr sz="1600">
-                <a:solidFill>
-                  <a:srgbClr val="333333"/>
-                </a:solidFill>
-              </a:defRPr>
-            </a:pPr>
-            <a:endParaRPr>
-              <a:latin typeface="微软雅黑" panose="020B0503020204020204" charset="-122"/>
-              <a:ea typeface="微软雅黑" panose="020B0503020204020204" charset="-122"/>
-              <a:cs typeface="微软雅黑" panose="020B0503020204020204" charset="-122"/>
-            </a:endParaRPr>
-          </a:p>
-          <a:p>
-            <a:pPr>
-              <a:spcAft>
-                <a:spcPts val="600"/>
-              </a:spcAft>
-              <a:defRPr sz="1600">
-                <a:solidFill>
-                  <a:srgbClr val="333333"/>
-                </a:solidFill>
-              </a:defRPr>
-            </a:pPr>
-            <a:r>
-              <a:rPr>
-                <a:latin typeface="微软雅黑" panose="020B0503020204020204" charset="-122"/>
-                <a:ea typeface="微软雅黑" panose="020B0503020204020204" charset="-122"/>
-                <a:cs typeface="微软雅黑" panose="020B0503020204020204" charset="-122"/>
-              </a:rPr>
-              <a:t>• 尝试更深层 backbone (ResNet, EfficientNet)</a:t>
-            </a:r>
-            <a:endParaRPr>
-              <a:latin typeface="微软雅黑" panose="020B0503020204020204" charset="-122"/>
-              <a:ea typeface="微软雅黑" panose="020B0503020204020204" charset="-122"/>
-              <a:cs typeface="微软雅黑" panose="020B0503020204020204" charset="-122"/>
-            </a:endParaRPr>
-          </a:p>
-          <a:p>
-            <a:pPr>
-              <a:spcAft>
-                <a:spcPts val="600"/>
-              </a:spcAft>
-              <a:defRPr sz="1600">
-                <a:solidFill>
-                  <a:srgbClr val="333333"/>
-                </a:solidFill>
-              </a:defRPr>
-            </a:pPr>
-            <a:r>
-              <a:rPr>
-                <a:latin typeface="微软雅黑" panose="020B0503020204020204" charset="-122"/>
-                <a:ea typeface="微软雅黑" panose="020B0503020204020204" charset="-122"/>
-                <a:cs typeface="微软雅黑" panose="020B0503020204020204" charset="-122"/>
-              </a:rPr>
-              <a:t>• 引入注意力机制 (Attention U-Net)</a:t>
-            </a:r>
-            <a:endParaRPr>
-              <a:latin typeface="微软雅黑" panose="020B0503020204020204" charset="-122"/>
-              <a:ea typeface="微软雅黑" panose="020B0503020204020204" charset="-122"/>
-              <a:cs typeface="微软雅黑" panose="020B0503020204020204" charset="-122"/>
-            </a:endParaRPr>
-          </a:p>
-          <a:p>
-            <a:pPr>
-              <a:spcAft>
-                <a:spcPts val="600"/>
-              </a:spcAft>
-              <a:defRPr sz="1600">
-                <a:solidFill>
-                  <a:srgbClr val="333333"/>
-                </a:solidFill>
-              </a:defRPr>
-            </a:pPr>
-            <a:r>
-              <a:rPr>
-                <a:latin typeface="微软雅黑" panose="020B0503020204020204" charset="-122"/>
-                <a:ea typeface="微软雅黑" panose="020B0503020204020204" charset="-122"/>
-                <a:cs typeface="微软雅黑" panose="020B0503020204020204" charset="-122"/>
-              </a:rPr>
-              <a:t>• 使用预训练权重加速收敛</a:t>
-            </a:r>
-            <a:endParaRPr>
-              <a:latin typeface="微软雅黑" panose="020B0503020204020204" charset="-122"/>
-              <a:ea typeface="微软雅黑" panose="020B0503020204020204" charset="-122"/>
-              <a:cs typeface="微软雅黑" panose="020B0503020204020204" charset="-122"/>
-            </a:endParaRPr>
-          </a:p>
-          <a:p>
-            <a:pPr>
-              <a:spcAft>
-                <a:spcPts val="600"/>
-              </a:spcAft>
-              <a:defRPr sz="1600">
-                <a:solidFill>
-                  <a:srgbClr val="333333"/>
-                </a:solidFill>
-              </a:defRPr>
-            </a:pPr>
-            <a:r>
-              <a:rPr>
-                <a:latin typeface="微软雅黑" panose="020B0503020204020204" charset="-122"/>
-                <a:ea typeface="微软雅黑" panose="020B0503020204020204" charset="-122"/>
-                <a:cs typeface="微软雅黑" panose="020B0503020204020204" charset="-122"/>
-              </a:rPr>
-              <a:t>• 混合精度训练 (AMP) 进一步加速</a:t>
-            </a:r>
-            <a:endParaRPr>
-              <a:latin typeface="微软雅黑" panose="020B0503020204020204" charset="-122"/>
-              <a:ea typeface="微软雅黑" panose="020B0503020204020204" charset="-122"/>
-              <a:cs typeface="微软雅黑" panose="020B0503020204020204" charset="-122"/>
-            </a:endParaRPr>
-          </a:p>
-          <a:p>
-            <a:pPr>
-              <a:spcAft>
-                <a:spcPts val="600"/>
-              </a:spcAft>
-              <a:defRPr sz="1600">
-                <a:solidFill>
-                  <a:srgbClr val="333333"/>
-                </a:solidFill>
-              </a:defRPr>
-            </a:pPr>
-            <a:r>
-              <a:rPr>
-                <a:latin typeface="微软雅黑" panose="020B0503020204020204" charset="-122"/>
-                <a:ea typeface="微软雅黑" panose="020B0503020204020204" charset="-122"/>
-                <a:cs typeface="微软雅黑" panose="020B0503020204020204" charset="-122"/>
-              </a:rPr>
-              <a:t>• 模型剪枝/量化适配边缘部署</a:t>
-            </a:r>
-            <a:endParaRPr>
-              <a:latin typeface="微软雅黑" panose="020B0503020204020204" charset="-122"/>
-              <a:ea typeface="微软雅黑" panose="020B0503020204020204" charset="-122"/>
-              <a:cs typeface="微软雅黑" panose="020B0503020204020204" charset="-122"/>
-            </a:endParaRPr>
-          </a:p>
-          <a:p>
-            <a:pPr>
-              <a:spcAft>
-                <a:spcPts val="600"/>
-              </a:spcAft>
-              <a:defRPr sz="1600">
-                <a:solidFill>
-                  <a:srgbClr val="333333"/>
-                </a:solidFill>
-              </a:defRPr>
-            </a:pPr>
-            <a:endParaRPr>
-              <a:latin typeface="微软雅黑" panose="020B0503020204020204" charset="-122"/>
-              <a:ea typeface="微软雅黑" panose="020B0503020204020204" charset="-122"/>
-              <a:cs typeface="微软雅黑" panose="020B0503020204020204" charset="-122"/>
-            </a:endParaRPr>
-          </a:p>
-          <a:p>
-            <a:pPr>
-              <a:spcAft>
-                <a:spcPts val="600"/>
-              </a:spcAft>
-              <a:defRPr sz="1600">
-                <a:solidFill>
-                  <a:srgbClr val="333333"/>
-                </a:solidFill>
-              </a:defRPr>
-            </a:pPr>
-            <a:r>
-              <a:rPr>
-                <a:latin typeface="微软雅黑" panose="020B0503020204020204" charset="-122"/>
-                <a:ea typeface="微软雅黑" panose="020B0503020204020204" charset="-122"/>
-                <a:cs typeface="微软雅黑" panose="020B0503020204020204" charset="-122"/>
-              </a:rPr>
-              <a:t>🎯 结论</a:t>
-            </a:r>
-            <a:endParaRPr>
-              <a:latin typeface="微软雅黑" panose="020B0503020204020204" charset="-122"/>
-              <a:ea typeface="微软雅黑" panose="020B0503020204020204" charset="-122"/>
-              <a:cs typeface="微软雅黑" panose="020B0503020204020204" charset="-122"/>
-            </a:endParaRPr>
-          </a:p>
-          <a:p>
-            <a:pPr>
-              <a:spcAft>
-                <a:spcPts val="600"/>
-              </a:spcAft>
-              <a:defRPr sz="1600">
-                <a:solidFill>
-                  <a:srgbClr val="333333"/>
-                </a:solidFill>
-              </a:defRPr>
-            </a:pPr>
-            <a:r>
-              <a:rPr>
-                <a:latin typeface="微软雅黑" panose="020B0503020204020204" charset="-122"/>
-                <a:ea typeface="微软雅黑" panose="020B0503020204020204" charset="-122"/>
-                <a:cs typeface="微软雅黑" panose="020B0503020204020204" charset="-122"/>
-              </a:rPr>
-              <a:t>U-Net 能有效完成皮肤病变分割,</a:t>
-            </a:r>
-            <a:endParaRPr>
-              <a:latin typeface="微软雅黑" panose="020B0503020204020204" charset="-122"/>
-              <a:ea typeface="微软雅黑" panose="020B0503020204020204" charset="-122"/>
-              <a:cs typeface="微软雅黑" panose="020B0503020204020204" charset="-122"/>
-            </a:endParaRPr>
-          </a:p>
-          <a:p>
-            <a:pPr>
-              <a:spcAft>
-                <a:spcPts val="600"/>
-              </a:spcAft>
-              <a:defRPr sz="1600">
-                <a:solidFill>
-                  <a:srgbClr val="333333"/>
-                </a:solidFill>
-              </a:defRPr>
-            </a:pPr>
-            <a:r>
-              <a:rPr>
-                <a:latin typeface="微软雅黑" panose="020B0503020204020204" charset="-122"/>
-                <a:ea typeface="微软雅黑" panose="020B0503020204020204" charset="-122"/>
-                <a:cs typeface="微软雅黑" panose="020B0503020204020204" charset="-122"/>
-              </a:rPr>
-              <a:t>测试集 Dice=0.8760, 模型泛化能力良好,</a:t>
-            </a:r>
-            <a:endParaRPr>
-              <a:latin typeface="微软雅黑" panose="020B0503020204020204" charset="-122"/>
-              <a:ea typeface="微软雅黑" panose="020B0503020204020204" charset="-122"/>
-              <a:cs typeface="微软雅黑" panose="020B0503020204020204" charset="-122"/>
-            </a:endParaRPr>
-          </a:p>
-          <a:p>
-            <a:pPr>
-              <a:spcAft>
-                <a:spcPts val="600"/>
-              </a:spcAft>
-              <a:defRPr sz="1600">
-                <a:solidFill>
-                  <a:srgbClr val="333333"/>
-                </a:solidFill>
-              </a:defRPr>
-            </a:pPr>
-            <a:r>
-              <a:rPr>
-                <a:latin typeface="微软雅黑" panose="020B0503020204020204" charset="-122"/>
-                <a:ea typeface="微软雅黑" panose="020B0503020204020204" charset="-122"/>
-                <a:cs typeface="微软雅黑" panose="020B0503020204020204" charset="-122"/>
-              </a:rPr>
-              <a:t>为 AIoT 场景下的皮肤病辅助诊断</a:t>
-            </a:r>
-            <a:endParaRPr>
-              <a:latin typeface="微软雅黑" panose="020B0503020204020204" charset="-122"/>
-              <a:ea typeface="微软雅黑" panose="020B0503020204020204" charset="-122"/>
-              <a:cs typeface="微软雅黑" panose="020B0503020204020204" charset="-122"/>
-            </a:endParaRPr>
-          </a:p>
-          <a:p>
-            <a:pPr>
-              <a:spcAft>
-                <a:spcPts val="600"/>
-              </a:spcAft>
-              <a:defRPr sz="1600">
-                <a:solidFill>
-                  <a:srgbClr val="333333"/>
-                </a:solidFill>
-              </a:defRPr>
-            </a:pPr>
-            <a:r>
-              <a:rPr>
-                <a:latin typeface="微软雅黑" panose="020B0503020204020204" charset="-122"/>
-                <a:ea typeface="微软雅黑" panose="020B0503020204020204" charset="-122"/>
-                <a:cs typeface="微软雅黑" panose="020B0503020204020204" charset="-122"/>
-              </a:rPr>
-              <a:t>提供了可行的技术方案。</a:t>
-            </a:r>
-            <a:endParaRPr>
-              <a:latin typeface="微软雅黑" panose="020B0503020204020204" charset="-122"/>
-              <a:ea typeface="微软雅黑" panose="020B0503020204020204" charset="-122"/>
-              <a:cs typeface="微软雅黑" panose="020B0503020204020204" charset="-122"/>
+                <a:sym typeface="+mn-ea"/>
+              </a:rPr>
+              <a:t>ResNet34-UNet：Epoch 1 Val Dice=0.8352，Epoch 36 最佳 Val Dice=0.9041，测试集 Dice=0.8903</a:t>
+            </a:r>
+            <a:endParaRPr lang="zh-CN" altLang="en-US">
+              <a:sym typeface="+mn-ea"/>
             </a:endParaRPr>
           </a:p>
         </p:txBody>
